--- a/docs/presentation/output/VGA_Presentation_Yossi.pptx
+++ b/docs/presentation/output/VGA_Presentation_Yossi.pptx
@@ -3096,47 +3096,113 @@
       <p:grpSpPr/>
       <p:sp>
         <p:nvSpPr>
-          <p:cNvPr id="2" name="Title 1"/>
-          <p:cNvSpPr>
-            <a:spLocks noGrp="1"/>
-          </p:cNvSpPr>
-          <p:nvPr>
-            <p:ph type="ctrTitle"/>
-          </p:nvPr>
-        </p:nvSpPr>
-        <p:spPr/>
-        <p:txBody>
-          <a:bodyPr/>
-          <a:lstStyle/>
-          <a:p>
-            <a:r>
-              <a:t>פיתוח מערכת מבוססת FPGA להתראת נפילה לחולי דמנציה</a:t>
-            </a:r>
-          </a:p>
-        </p:txBody>
-      </p:sp>
-      <p:sp>
-        <p:nvSpPr>
-          <p:cNvPr id="3" name="Subtitle 2"/>
-          <p:cNvSpPr>
-            <a:spLocks noGrp="1"/>
-          </p:cNvSpPr>
-          <p:nvPr>
-            <p:ph type="subTitle" idx="1"/>
-          </p:nvPr>
-        </p:nvSpPr>
-        <p:spPr/>
-        <p:txBody>
-          <a:bodyPr/>
-          <a:lstStyle/>
-          <a:p>
-            <a:r>
-              <a:t>קליטת תמונה בזמן אמת ממצלמת OV7670 והצגתה דרך כרטיס Artix-7.</a:t>
-            </a:r>
-          </a:p>
-          <a:p>
-            <a:r>
-              <a:t>מגיש: יוסי ברים | הנדסת חשמל שנה ד', המרכז האקדמי לב</a:t>
+          <p:cNvPr id="2" name="TextBox 1"/>
+          <p:cNvSpPr txBox="1"/>
+          <p:nvPr/>
+        </p:nvSpPr>
+        <p:spPr>
+          <a:xfrm>
+            <a:off x="914400" y="457200"/>
+            <a:ext cx="10360152" cy="1645920"/>
+          </a:xfrm>
+          <a:prstGeom prst="rect">
+            <a:avLst/>
+          </a:prstGeom>
+          <a:noFill/>
+        </p:spPr>
+        <p:txBody>
+          <a:bodyPr wrap="square">
+            <a:spAutoFit/>
+          </a:bodyPr>
+          <a:lstStyle/>
+          <a:p>
+            <a:pPr algn="ctr">
+              <a:defRPr sz="2800" b="1">
+                <a:solidFill>
+                  <a:srgbClr val="0F172A"/>
+                </a:solidFill>
+              </a:defRPr>
+            </a:pPr>
+            <a:r>
+              <a:t>פיתוח מערכת מבוססת FPGA להתראות נפילה לחולי דמנציה</a:t>
+            </a:r>
+          </a:p>
+          <a:p>
+            <a:pPr algn="ctr">
+              <a:spcBef>
+                <a:spcPts val="800"/>
+              </a:spcBef>
+              <a:defRPr sz="1600">
+                <a:solidFill>
+                  <a:srgbClr val="475569"/>
+                </a:solidFill>
+              </a:defRPr>
+            </a:pPr>
+            <a:r>
+              <a:t>קליטת תמונה בזמן אמת ממצלמת OV7670 והצגתה דרך כרטיס ARTIX A7</a:t>
+            </a:r>
+            <a:br/>
+            <a:r>
+              <a:t>על מנת לאפשר עיבוד תמונה לזיהוי עמידה ממושכת לחולי דמנציה</a:t>
+            </a:r>
+          </a:p>
+        </p:txBody>
+      </p:sp>
+      <p:pic>
+        <p:nvPicPr>
+          <p:cNvPr id="3" name="Picture 2" descr="artix_board.png"/>
+          <p:cNvPicPr>
+            <a:picLocks noChangeAspect="1"/>
+          </p:cNvPicPr>
+          <p:nvPr/>
+        </p:nvPicPr>
+        <p:blipFill>
+          <a:blip r:embed="rId2"/>
+          <a:stretch>
+            <a:fillRect/>
+          </a:stretch>
+        </p:blipFill>
+        <p:spPr>
+          <a:xfrm>
+            <a:off x="3566160" y="2286000"/>
+            <a:ext cx="4572000" cy="3400527"/>
+          </a:xfrm>
+          <a:prstGeom prst="rect">
+            <a:avLst/>
+          </a:prstGeom>
+        </p:spPr>
+      </p:pic>
+      <p:sp>
+        <p:nvSpPr>
+          <p:cNvPr id="4" name="TextBox 3"/>
+          <p:cNvSpPr txBox="1"/>
+          <p:nvPr/>
+        </p:nvSpPr>
+        <p:spPr>
+          <a:xfrm>
+            <a:off x="914400" y="5486400"/>
+            <a:ext cx="10360152" cy="731520"/>
+          </a:xfrm>
+          <a:prstGeom prst="rect">
+            <a:avLst/>
+          </a:prstGeom>
+          <a:noFill/>
+        </p:spPr>
+        <p:txBody>
+          <a:bodyPr wrap="none">
+            <a:spAutoFit/>
+          </a:bodyPr>
+          <a:lstStyle/>
+          <a:p>
+            <a:pPr algn="ctr">
+              <a:defRPr sz="1600" b="1">
+                <a:solidFill>
+                  <a:srgbClr val="1E293B"/>
+                </a:solidFill>
+              </a:defRPr>
+            </a:pPr>
+            <a:r>
+              <a:t>מגיש: יוסי ברים  |  הנדסת חשמל שנה ד  |  המרכז האקדמי לב</a:t>
             </a:r>
           </a:p>
         </p:txBody>

--- a/docs/presentation/output/VGA_Presentation_Yossi.pptx
+++ b/docs/presentation/output/VGA_Presentation_Yossi.pptx
@@ -3096,14 +3096,36 @@
       <p:grpSpPr/>
       <p:sp>
         <p:nvSpPr>
-          <p:cNvPr id="2" name="TextBox 1"/>
+          <p:cNvPr id="2" name="Title 1"/>
+          <p:cNvSpPr>
+            <a:spLocks noGrp="1"/>
+          </p:cNvSpPr>
+          <p:nvPr>
+            <p:ph type="title"/>
+          </p:nvPr>
+        </p:nvSpPr>
+        <p:spPr/>
+        <p:txBody>
+          <a:bodyPr/>
+          <a:lstStyle/>
+          <a:p>
+            <a:pPr rtl="1" algn="ctr"/>
+            <a:r>
+              <a:t>פיתוח מערכת מבוססת FPGA להתראת נפילה לחולי דמנציה</a:t>
+            </a:r>
+          </a:p>
+        </p:txBody>
+      </p:sp>
+      <p:sp>
+        <p:nvSpPr>
+          <p:cNvPr id="3" name="TextBox 2"/>
           <p:cNvSpPr txBox="1"/>
           <p:nvPr/>
         </p:nvSpPr>
         <p:spPr>
           <a:xfrm>
-            <a:off x="914400" y="457200"/>
-            <a:ext cx="10360152" cy="1645920"/>
+            <a:off x="457200" y="1188720"/>
+            <a:ext cx="8229600" cy="457200"/>
           </a:xfrm>
           <a:prstGeom prst="rect">
             <a:avLst/>
@@ -3111,67 +3133,20 @@
           <a:noFill/>
         </p:spPr>
         <p:txBody>
-          <a:bodyPr wrap="square">
+          <a:bodyPr wrap="none">
             <a:spAutoFit/>
           </a:bodyPr>
           <a:lstStyle/>
           <a:p>
-            <a:pPr algn="ctr">
-              <a:defRPr sz="2800" b="1">
-                <a:solidFill>
-                  <a:srgbClr val="0F172A"/>
-                </a:solidFill>
-              </a:defRPr>
+            <a:pPr algn="ctr" rtl="1">
+              <a:defRPr sz="2000"/>
             </a:pPr>
             <a:r>
-              <a:t>פיתוח מערכת מבוססת FPGA להתראות נפילה לחולי דמנציה</a:t>
-            </a:r>
-          </a:p>
-          <a:p>
-            <a:pPr algn="ctr">
-              <a:spcBef>
-                <a:spcPts val="800"/>
-              </a:spcBef>
-              <a:defRPr sz="1600">
-                <a:solidFill>
-                  <a:srgbClr val="475569"/>
-                </a:solidFill>
-              </a:defRPr>
-            </a:pPr>
-            <a:r>
-              <a:t>קליטת תמונה בזמן אמת ממצלמת OV7670 והצגתה דרך כרטיס ARTIX A7</a:t>
-            </a:r>
-            <a:br/>
-            <a:r>
-              <a:t>על מנת לאפשר עיבוד תמונה לזיהוי עמידה ממושכת לחולי דמנציה</a:t>
-            </a:r>
-          </a:p>
-        </p:txBody>
-      </p:sp>
-      <p:pic>
-        <p:nvPicPr>
-          <p:cNvPr id="3" name="Picture 2" descr="artix_board.png"/>
-          <p:cNvPicPr>
-            <a:picLocks noChangeAspect="1"/>
-          </p:cNvPicPr>
-          <p:nvPr/>
-        </p:nvPicPr>
-        <p:blipFill>
-          <a:blip r:embed="rId2"/>
-          <a:stretch>
-            <a:fillRect/>
-          </a:stretch>
-        </p:blipFill>
-        <p:spPr>
-          <a:xfrm>
-            <a:off x="3566160" y="2286000"/>
-            <a:ext cx="4572000" cy="3400527"/>
-          </a:xfrm>
-          <a:prstGeom prst="rect">
-            <a:avLst/>
-          </a:prstGeom>
-        </p:spPr>
-      </p:pic>
+              <a:t>קליטת תמונה בזמן אמת ממצלמת OV7670 והצגתה דרך כרטיס Artix-7.</a:t>
+            </a:r>
+          </a:p>
+        </p:txBody>
+      </p:sp>
       <p:sp>
         <p:nvSpPr>
           <p:cNvPr id="4" name="TextBox 3"/>
@@ -3180,8 +3155,8 @@
         </p:nvSpPr>
         <p:spPr>
           <a:xfrm>
-            <a:off x="914400" y="5486400"/>
-            <a:ext cx="10360152" cy="731520"/>
+            <a:off x="457200" y="5760720"/>
+            <a:ext cx="8229600" cy="457200"/>
           </a:xfrm>
           <a:prstGeom prst="rect">
             <a:avLst/>
@@ -3194,15 +3169,11 @@
           </a:bodyPr>
           <a:lstStyle/>
           <a:p>
-            <a:pPr algn="ctr">
-              <a:defRPr sz="1600" b="1">
-                <a:solidFill>
-                  <a:srgbClr val="1E293B"/>
-                </a:solidFill>
-              </a:defRPr>
+            <a:pPr algn="ctr" rtl="1">
+              <a:defRPr sz="2200" b="1"/>
             </a:pPr>
             <a:r>
-              <a:t>מגיש: יוסי ברים  |  הנדסת חשמל שנה ד  |  המרכז האקדמי לב</a:t>
+              <a:t>מגיש: יוסי ברים | הנדסת חשמל שנה ד', המרכז האקדמי לב</a:t>
             </a:r>
           </a:p>
         </p:txBody>
@@ -3240,6 +3211,7 @@
           <a:bodyPr/>
           <a:lstStyle/>
           <a:p>
+            <a:pPr rtl="1"/>
             <a:r>
               <a:t>ארכיטקטורת המערכת</a:t>
             </a:r>
@@ -3248,47 +3220,556 @@
       </p:sp>
       <p:sp>
         <p:nvSpPr>
-          <p:cNvPr id="3" name="Content Placeholder 2"/>
-          <p:cNvSpPr>
-            <a:spLocks noGrp="1"/>
-          </p:cNvSpPr>
-          <p:nvPr>
-            <p:ph idx="1"/>
-          </p:nvPr>
-        </p:nvSpPr>
-        <p:spPr/>
-        <p:txBody>
-          <a:bodyPr/>
-          <a:lstStyle/>
-          <a:p>
+          <p:cNvPr id="3" name="TextBox 2"/>
+          <p:cNvSpPr txBox="1"/>
+          <p:nvPr/>
+        </p:nvSpPr>
+        <p:spPr>
+          <a:xfrm>
+            <a:off x="457200" y="1097280"/>
+            <a:ext cx="8229600" cy="914400"/>
+          </a:xfrm>
+          <a:prstGeom prst="rect">
+            <a:avLst/>
+          </a:prstGeom>
+          <a:noFill/>
+        </p:spPr>
+        <p:txBody>
+          <a:bodyPr wrap="none">
+            <a:spAutoFit/>
+          </a:bodyPr>
+          <a:lstStyle/>
+          <a:p/>
+          <a:p>
+            <a:pPr algn="r" rtl="1">
+              <a:defRPr sz="1800"/>
+            </a:pPr>
             <a:r>
               <a:t>נתוני התמונה הגולמיים נקלטים מהמצלמה ונאגרים בזיכרון ה-BRAM.</a:t>
             </a:r>
           </a:p>
           <a:p>
+            <a:pPr algn="r" rtl="1">
+              <a:defRPr sz="1800"/>
+            </a:pPr>
             <a:r>
               <a:t>בקר ה-VGA שולף את הנתונים ומעביר לממיר D to A לקבלת אות אנלוגי פיזי למסך.</a:t>
             </a:r>
           </a:p>
-          <a:p>
-            <a:pPr/>
-            <a:r>
-              <a:t>מערכת התראת נפילה (Top Level):</a:t>
-            </a:r>
-          </a:p>
-          <a:p>
-            <a:r>
-              <a:t>Inputs: clk, reset, ov7670_vsync, href, pclk, ov7670_data[7:0], btn[1:0], sw[1:0], scl, sda</a:t>
-            </a:r>
-          </a:p>
-          <a:p>
-            <a:r>
-              <a:t>Outputs: VGA_HS_O, VGA_VS_O, VGA_R[3:0], G[3:0], B[3:0], ov7670_xclk, pwdn, reset, led[3:0]</a:t>
-            </a:r>
-          </a:p>
-          <a:p>
-            <a:r>
-              <a:t>מודולים פנימיים: ov7670_capture, frame_buffer, vga_controller, D to A Converter</a:t>
+        </p:txBody>
+      </p:sp>
+      <p:sp>
+        <p:nvSpPr>
+          <p:cNvPr id="4" name="Rectangle 3"/>
+          <p:cNvSpPr/>
+          <p:nvPr/>
+        </p:nvSpPr>
+        <p:spPr>
+          <a:xfrm>
+            <a:off x="3474720" y="2194560"/>
+            <a:ext cx="2011680" cy="1645920"/>
+          </a:xfrm>
+          <a:prstGeom prst="rect">
+            <a:avLst/>
+          </a:prstGeom>
+          <a:solidFill>
+            <a:srgbClr val="000000"/>
+          </a:solidFill>
+        </p:spPr>
+        <p:style>
+          <a:lnRef idx="1">
+            <a:schemeClr val="accent1"/>
+          </a:lnRef>
+          <a:fillRef idx="3">
+            <a:schemeClr val="accent1"/>
+          </a:fillRef>
+          <a:effectRef idx="2">
+            <a:schemeClr val="accent1"/>
+          </a:effectRef>
+          <a:fontRef idx="minor">
+            <a:schemeClr val="lt1"/>
+          </a:fontRef>
+        </p:style>
+        <p:txBody>
+          <a:bodyPr rtlCol="0" anchor="ctr"/>
+          <a:lstStyle/>
+          <a:p>
+            <a:pPr algn="ctr" rtl="1">
+              <a:defRPr>
+                <a:solidFill>
+                  <a:srgbClr val="FFFFFF"/>
+                </a:solidFill>
+              </a:defRPr>
+            </a:pPr>
+            <a:r>
+              <a:t>מערכת התראת נפילה</a:t>
+            </a:r>
+            <a:br/>
+            <a:r>
+              <a:t>(Top Level)</a:t>
+            </a:r>
+          </a:p>
+        </p:txBody>
+      </p:sp>
+      <p:sp>
+        <p:nvSpPr>
+          <p:cNvPr id="5" name="TextBox 4"/>
+          <p:cNvSpPr txBox="1"/>
+          <p:nvPr/>
+        </p:nvSpPr>
+        <p:spPr>
+          <a:xfrm>
+            <a:off x="1097280" y="1920240"/>
+            <a:ext cx="2286000" cy="1828800"/>
+          </a:xfrm>
+          <a:prstGeom prst="rect">
+            <a:avLst/>
+          </a:prstGeom>
+          <a:noFill/>
+        </p:spPr>
+        <p:txBody>
+          <a:bodyPr wrap="none">
+            <a:spAutoFit/>
+          </a:bodyPr>
+          <a:lstStyle/>
+          <a:p>
+            <a:pPr algn="r">
+              <a:defRPr sz="1300"/>
+            </a:pPr>
+            <a:r>
+              <a:t>Inputs:</a:t>
+            </a:r>
+            <a:br/>
+            <a:r>
+              <a:t>clk, reset</a:t>
+            </a:r>
+            <a:br/>
+            <a:r>
+              <a:t>ov7670_vsync, href, pclk</a:t>
+            </a:r>
+            <a:br/>
+            <a:r>
+              <a:t>ov7670_data[7:0]</a:t>
+            </a:r>
+            <a:br/>
+            <a:r>
+              <a:t>btn[1:0], sw[1:0]</a:t>
+            </a:r>
+            <a:br/>
+            <a:r>
+              <a:t>scl, sda</a:t>
+            </a:r>
+          </a:p>
+        </p:txBody>
+      </p:sp>
+      <p:sp>
+        <p:nvSpPr>
+          <p:cNvPr id="6" name="Right Arrow 5"/>
+          <p:cNvSpPr/>
+          <p:nvPr/>
+        </p:nvSpPr>
+        <p:spPr>
+          <a:xfrm>
+            <a:off x="2834640" y="2834640"/>
+            <a:ext cx="548640" cy="274320"/>
+          </a:xfrm>
+          <a:prstGeom prst="rightArrow">
+            <a:avLst/>
+          </a:prstGeom>
+        </p:spPr>
+        <p:style>
+          <a:lnRef idx="1">
+            <a:schemeClr val="accent1"/>
+          </a:lnRef>
+          <a:fillRef idx="3">
+            <a:schemeClr val="accent1"/>
+          </a:fillRef>
+          <a:effectRef idx="2">
+            <a:schemeClr val="accent1"/>
+          </a:effectRef>
+          <a:fontRef idx="minor">
+            <a:schemeClr val="lt1"/>
+          </a:fontRef>
+        </p:style>
+        <p:txBody>
+          <a:bodyPr rtlCol="0" anchor="ctr"/>
+          <a:lstStyle/>
+          <a:p>
+            <a:pPr algn="ctr"/>
+          </a:p>
+        </p:txBody>
+      </p:sp>
+      <p:sp>
+        <p:nvSpPr>
+          <p:cNvPr id="7" name="TextBox 6"/>
+          <p:cNvSpPr txBox="1"/>
+          <p:nvPr/>
+        </p:nvSpPr>
+        <p:spPr>
+          <a:xfrm>
+            <a:off x="5669280" y="1920240"/>
+            <a:ext cx="3200400" cy="1828800"/>
+          </a:xfrm>
+          <a:prstGeom prst="rect">
+            <a:avLst/>
+          </a:prstGeom>
+          <a:noFill/>
+        </p:spPr>
+        <p:txBody>
+          <a:bodyPr wrap="none">
+            <a:spAutoFit/>
+          </a:bodyPr>
+          <a:lstStyle/>
+          <a:p>
+            <a:pPr>
+              <a:defRPr sz="1300"/>
+            </a:pPr>
+            <a:r>
+              <a:t>Outputs:</a:t>
+            </a:r>
+            <a:br/>
+            <a:r>
+              <a:t>VGA_HS_O, VGA_VS_O</a:t>
+            </a:r>
+            <a:br/>
+            <a:r>
+              <a:t>VGA_R[3:0], G[3:0], B[3:0]</a:t>
+            </a:r>
+            <a:br/>
+            <a:r>
+              <a:t>ov7670_xclk, pwdn, reset</a:t>
+            </a:r>
+            <a:br/>
+            <a:r>
+              <a:t>led[3:0]</a:t>
+            </a:r>
+          </a:p>
+        </p:txBody>
+      </p:sp>
+      <p:sp>
+        <p:nvSpPr>
+          <p:cNvPr id="8" name="Right Arrow 7"/>
+          <p:cNvSpPr/>
+          <p:nvPr/>
+        </p:nvSpPr>
+        <p:spPr>
+          <a:xfrm>
+            <a:off x="5577840" y="2834640"/>
+            <a:ext cx="548640" cy="274320"/>
+          </a:xfrm>
+          <a:prstGeom prst="rightArrow">
+            <a:avLst/>
+          </a:prstGeom>
+        </p:spPr>
+        <p:style>
+          <a:lnRef idx="1">
+            <a:schemeClr val="accent1"/>
+          </a:lnRef>
+          <a:fillRef idx="3">
+            <a:schemeClr val="accent1"/>
+          </a:fillRef>
+          <a:effectRef idx="2">
+            <a:schemeClr val="accent1"/>
+          </a:effectRef>
+          <a:fontRef idx="minor">
+            <a:schemeClr val="lt1"/>
+          </a:fontRef>
+        </p:style>
+        <p:txBody>
+          <a:bodyPr rtlCol="0" anchor="ctr"/>
+          <a:lstStyle/>
+          <a:p>
+            <a:pPr algn="ctr"/>
+          </a:p>
+        </p:txBody>
+      </p:sp>
+      <p:sp>
+        <p:nvSpPr>
+          <p:cNvPr id="9" name="Rounded Rectangle 8"/>
+          <p:cNvSpPr/>
+          <p:nvPr/>
+        </p:nvSpPr>
+        <p:spPr>
+          <a:xfrm>
+            <a:off x="548640" y="4754880"/>
+            <a:ext cx="1554480" cy="731520"/>
+          </a:xfrm>
+          <a:prstGeom prst="roundRect">
+            <a:avLst/>
+          </a:prstGeom>
+          <a:solidFill>
+            <a:srgbClr val="4F81BD"/>
+          </a:solidFill>
+        </p:spPr>
+        <p:style>
+          <a:lnRef idx="1">
+            <a:schemeClr val="accent1"/>
+          </a:lnRef>
+          <a:fillRef idx="3">
+            <a:schemeClr val="accent1"/>
+          </a:fillRef>
+          <a:effectRef idx="2">
+            <a:schemeClr val="accent1"/>
+          </a:effectRef>
+          <a:fontRef idx="minor">
+            <a:schemeClr val="lt1"/>
+          </a:fontRef>
+        </p:style>
+        <p:txBody>
+          <a:bodyPr rtlCol="0" anchor="ctr"/>
+          <a:lstStyle/>
+          <a:p>
+            <a:pPr algn="ctr">
+              <a:defRPr sz="1400"/>
+            </a:pPr>
+            <a:r>
+              <a:t>ov7670_capture</a:t>
+            </a:r>
+          </a:p>
+        </p:txBody>
+      </p:sp>
+      <p:sp>
+        <p:nvSpPr>
+          <p:cNvPr id="10" name="Right Arrow 9"/>
+          <p:cNvSpPr/>
+          <p:nvPr/>
+        </p:nvSpPr>
+        <p:spPr>
+          <a:xfrm>
+            <a:off x="2103120" y="5029200"/>
+            <a:ext cx="457200" cy="182880"/>
+          </a:xfrm>
+          <a:prstGeom prst="rightArrow">
+            <a:avLst/>
+          </a:prstGeom>
+        </p:spPr>
+        <p:style>
+          <a:lnRef idx="1">
+            <a:schemeClr val="accent1"/>
+          </a:lnRef>
+          <a:fillRef idx="3">
+            <a:schemeClr val="accent1"/>
+          </a:fillRef>
+          <a:effectRef idx="2">
+            <a:schemeClr val="accent1"/>
+          </a:effectRef>
+          <a:fontRef idx="minor">
+            <a:schemeClr val="lt1"/>
+          </a:fontRef>
+        </p:style>
+        <p:txBody>
+          <a:bodyPr rtlCol="0" anchor="ctr"/>
+          <a:lstStyle/>
+          <a:p>
+            <a:pPr algn="ctr"/>
+          </a:p>
+        </p:txBody>
+      </p:sp>
+      <p:sp>
+        <p:nvSpPr>
+          <p:cNvPr id="11" name="Rounded Rectangle 10"/>
+          <p:cNvSpPr/>
+          <p:nvPr/>
+        </p:nvSpPr>
+        <p:spPr>
+          <a:xfrm>
+            <a:off x="2560320" y="4754880"/>
+            <a:ext cx="1554480" cy="731520"/>
+          </a:xfrm>
+          <a:prstGeom prst="roundRect">
+            <a:avLst/>
+          </a:prstGeom>
+          <a:solidFill>
+            <a:srgbClr val="4F81BD"/>
+          </a:solidFill>
+        </p:spPr>
+        <p:style>
+          <a:lnRef idx="1">
+            <a:schemeClr val="accent1"/>
+          </a:lnRef>
+          <a:fillRef idx="3">
+            <a:schemeClr val="accent1"/>
+          </a:fillRef>
+          <a:effectRef idx="2">
+            <a:schemeClr val="accent1"/>
+          </a:effectRef>
+          <a:fontRef idx="minor">
+            <a:schemeClr val="lt1"/>
+          </a:fontRef>
+        </p:style>
+        <p:txBody>
+          <a:bodyPr rtlCol="0" anchor="ctr"/>
+          <a:lstStyle/>
+          <a:p>
+            <a:pPr algn="ctr">
+              <a:defRPr sz="1400"/>
+            </a:pPr>
+            <a:r>
+              <a:t>frame_buffer</a:t>
+            </a:r>
+          </a:p>
+        </p:txBody>
+      </p:sp>
+      <p:sp>
+        <p:nvSpPr>
+          <p:cNvPr id="12" name="Right Arrow 11"/>
+          <p:cNvSpPr/>
+          <p:nvPr/>
+        </p:nvSpPr>
+        <p:spPr>
+          <a:xfrm>
+            <a:off x="4114800" y="5029200"/>
+            <a:ext cx="457200" cy="182880"/>
+          </a:xfrm>
+          <a:prstGeom prst="rightArrow">
+            <a:avLst/>
+          </a:prstGeom>
+        </p:spPr>
+        <p:style>
+          <a:lnRef idx="1">
+            <a:schemeClr val="accent1"/>
+          </a:lnRef>
+          <a:fillRef idx="3">
+            <a:schemeClr val="accent1"/>
+          </a:fillRef>
+          <a:effectRef idx="2">
+            <a:schemeClr val="accent1"/>
+          </a:effectRef>
+          <a:fontRef idx="minor">
+            <a:schemeClr val="lt1"/>
+          </a:fontRef>
+        </p:style>
+        <p:txBody>
+          <a:bodyPr rtlCol="0" anchor="ctr"/>
+          <a:lstStyle/>
+          <a:p>
+            <a:pPr algn="ctr"/>
+          </a:p>
+        </p:txBody>
+      </p:sp>
+      <p:sp>
+        <p:nvSpPr>
+          <p:cNvPr id="13" name="Rounded Rectangle 12"/>
+          <p:cNvSpPr/>
+          <p:nvPr/>
+        </p:nvSpPr>
+        <p:spPr>
+          <a:xfrm>
+            <a:off x="4572000" y="4754880"/>
+            <a:ext cx="1554480" cy="731520"/>
+          </a:xfrm>
+          <a:prstGeom prst="roundRect">
+            <a:avLst/>
+          </a:prstGeom>
+          <a:solidFill>
+            <a:srgbClr val="4F81BD"/>
+          </a:solidFill>
+        </p:spPr>
+        <p:style>
+          <a:lnRef idx="1">
+            <a:schemeClr val="accent1"/>
+          </a:lnRef>
+          <a:fillRef idx="3">
+            <a:schemeClr val="accent1"/>
+          </a:fillRef>
+          <a:effectRef idx="2">
+            <a:schemeClr val="accent1"/>
+          </a:effectRef>
+          <a:fontRef idx="minor">
+            <a:schemeClr val="lt1"/>
+          </a:fontRef>
+        </p:style>
+        <p:txBody>
+          <a:bodyPr rtlCol="0" anchor="ctr"/>
+          <a:lstStyle/>
+          <a:p>
+            <a:pPr algn="ctr">
+              <a:defRPr sz="1400"/>
+            </a:pPr>
+            <a:r>
+              <a:t>vga_controller</a:t>
+            </a:r>
+          </a:p>
+        </p:txBody>
+      </p:sp>
+      <p:sp>
+        <p:nvSpPr>
+          <p:cNvPr id="14" name="Right Arrow 13"/>
+          <p:cNvSpPr/>
+          <p:nvPr/>
+        </p:nvSpPr>
+        <p:spPr>
+          <a:xfrm>
+            <a:off x="6126480" y="5029200"/>
+            <a:ext cx="457200" cy="182880"/>
+          </a:xfrm>
+          <a:prstGeom prst="rightArrow">
+            <a:avLst/>
+          </a:prstGeom>
+        </p:spPr>
+        <p:style>
+          <a:lnRef idx="1">
+            <a:schemeClr val="accent1"/>
+          </a:lnRef>
+          <a:fillRef idx="3">
+            <a:schemeClr val="accent1"/>
+          </a:fillRef>
+          <a:effectRef idx="2">
+            <a:schemeClr val="accent1"/>
+          </a:effectRef>
+          <a:fontRef idx="minor">
+            <a:schemeClr val="lt1"/>
+          </a:fontRef>
+        </p:style>
+        <p:txBody>
+          <a:bodyPr rtlCol="0" anchor="ctr"/>
+          <a:lstStyle/>
+          <a:p>
+            <a:pPr algn="ctr"/>
+          </a:p>
+        </p:txBody>
+      </p:sp>
+      <p:sp>
+        <p:nvSpPr>
+          <p:cNvPr id="15" name="Rounded Rectangle 14"/>
+          <p:cNvSpPr/>
+          <p:nvPr/>
+        </p:nvSpPr>
+        <p:spPr>
+          <a:xfrm>
+            <a:off x="6583680" y="4754880"/>
+            <a:ext cx="1554480" cy="731520"/>
+          </a:xfrm>
+          <a:prstGeom prst="roundRect">
+            <a:avLst/>
+          </a:prstGeom>
+          <a:solidFill>
+            <a:srgbClr val="4F81BD"/>
+          </a:solidFill>
+        </p:spPr>
+        <p:style>
+          <a:lnRef idx="1">
+            <a:schemeClr val="accent1"/>
+          </a:lnRef>
+          <a:fillRef idx="3">
+            <a:schemeClr val="accent1"/>
+          </a:fillRef>
+          <a:effectRef idx="2">
+            <a:schemeClr val="accent1"/>
+          </a:effectRef>
+          <a:fontRef idx="minor">
+            <a:schemeClr val="lt1"/>
+          </a:fontRef>
+        </p:style>
+        <p:txBody>
+          <a:bodyPr rtlCol="0" anchor="ctr"/>
+          <a:lstStyle/>
+          <a:p>
+            <a:pPr algn="ctr">
+              <a:defRPr sz="1400"/>
+            </a:pPr>
+            <a:r>
+              <a:t>D to A Converter</a:t>
             </a:r>
           </a:p>
         </p:txBody>
@@ -3326,6 +3807,7 @@
           <a:bodyPr/>
           <a:lstStyle/>
           <a:p>
+            <a:pPr rtl="1"/>
             <a:r>
               <a:t>ממשק ה-VGA: פרוטוקול ותזמונים</a:t>
             </a:r>
@@ -3334,19 +3816,30 @@
       </p:sp>
       <p:sp>
         <p:nvSpPr>
-          <p:cNvPr id="3" name="Content Placeholder 2"/>
-          <p:cNvSpPr>
-            <a:spLocks noGrp="1"/>
-          </p:cNvSpPr>
-          <p:nvPr>
-            <p:ph idx="1"/>
-          </p:nvPr>
-        </p:nvSpPr>
-        <p:spPr/>
-        <p:txBody>
-          <a:bodyPr/>
-          <a:lstStyle/>
-          <a:p>
+          <p:cNvPr id="3" name="TextBox 2"/>
+          <p:cNvSpPr txBox="1"/>
+          <p:nvPr/>
+        </p:nvSpPr>
+        <p:spPr>
+          <a:xfrm>
+            <a:off x="457200" y="1005840"/>
+            <a:ext cx="8229600" cy="731520"/>
+          </a:xfrm>
+          <a:prstGeom prst="rect">
+            <a:avLst/>
+          </a:prstGeom>
+          <a:noFill/>
+        </p:spPr>
+        <p:txBody>
+          <a:bodyPr wrap="none">
+            <a:spAutoFit/>
+          </a:bodyPr>
+          <a:lstStyle/>
+          <a:p/>
+          <a:p>
+            <a:pPr algn="r" rtl="1">
+              <a:defRPr sz="1600"/>
+            </a:pPr>
             <a:r>
               <a:t>הפרוטוקול מבוסס על סריקה קווית (Raster Scan) ואותות סנכרון מדויקים (HSYNC, VSYNC).</a:t>
             </a:r>
@@ -3386,6 +3879,7 @@
           <a:bodyPr/>
           <a:lstStyle/>
           <a:p>
+            <a:pPr rtl="1"/>
             <a:r>
               <a:t>ממשק ה-VGA: שליטה חומרתית ופיזיקה</a:t>
             </a:r>
@@ -3394,29 +3888,46 @@
       </p:sp>
       <p:sp>
         <p:nvSpPr>
-          <p:cNvPr id="3" name="Content Placeholder 2"/>
-          <p:cNvSpPr>
-            <a:spLocks noGrp="1"/>
-          </p:cNvSpPr>
-          <p:nvPr>
-            <p:ph idx="1"/>
-          </p:nvPr>
-        </p:nvSpPr>
-        <p:spPr/>
-        <p:txBody>
-          <a:bodyPr/>
-          <a:lstStyle/>
-          <a:p>
+          <p:cNvPr id="3" name="TextBox 2"/>
+          <p:cNvSpPr txBox="1"/>
+          <p:nvPr/>
+        </p:nvSpPr>
+        <p:spPr>
+          <a:xfrm>
+            <a:off x="457200" y="1005840"/>
+            <a:ext cx="8229600" cy="1097280"/>
+          </a:xfrm>
+          <a:prstGeom prst="rect">
+            <a:avLst/>
+          </a:prstGeom>
+          <a:noFill/>
+        </p:spPr>
+        <p:txBody>
+          <a:bodyPr wrap="none">
+            <a:spAutoFit/>
+          </a:bodyPr>
+          <a:lstStyle/>
+          <a:p/>
+          <a:p>
+            <a:pPr algn="r" rtl="1">
+              <a:defRPr sz="1500"/>
+            </a:pPr>
             <a:r>
               <a:t>שעון הפיקסל מנהל את קצב הסריקה של קרן האלקטרונים (Cathode ray) על המסך.</a:t>
             </a:r>
           </a:p>
           <a:p>
+            <a:pPr algn="r" rtl="1">
+              <a:defRPr sz="1500"/>
+            </a:pPr>
             <a:r>
               <a:t>אותות הסנכרון שולטים בסלילי ההטיה המכוונים את מיקום הקרן.</a:t>
             </a:r>
           </a:p>
           <a:p>
+            <a:pPr algn="r" rtl="1">
+              <a:defRPr sz="1500"/>
+            </a:pPr>
             <a:r>
               <a:t>באזור תצוגה פעיל, הלוגיקה משחררת את נתוני ה-RGB לתותחי האלקטרונים (Electron guns).</a:t>
             </a:r>
@@ -3456,6 +3967,7 @@
           <a:bodyPr/>
           <a:lstStyle/>
           <a:p>
+            <a:pPr rtl="1"/>
             <a:r>
               <a:t>ממשק ה-VGA: מיקום בקר ה-VGA בנתיב הנתונים</a:t>
             </a:r>
@@ -3464,24 +3976,38 @@
       </p:sp>
       <p:sp>
         <p:nvSpPr>
-          <p:cNvPr id="3" name="Content Placeholder 2"/>
-          <p:cNvSpPr>
-            <a:spLocks noGrp="1"/>
-          </p:cNvSpPr>
-          <p:nvPr>
-            <p:ph idx="1"/>
-          </p:nvPr>
-        </p:nvSpPr>
-        <p:spPr/>
-        <p:txBody>
-          <a:bodyPr/>
-          <a:lstStyle/>
-          <a:p>
+          <p:cNvPr id="3" name="TextBox 2"/>
+          <p:cNvSpPr txBox="1"/>
+          <p:nvPr/>
+        </p:nvSpPr>
+        <p:spPr>
+          <a:xfrm>
+            <a:off x="457200" y="1005840"/>
+            <a:ext cx="8229600" cy="1097280"/>
+          </a:xfrm>
+          <a:prstGeom prst="rect">
+            <a:avLst/>
+          </a:prstGeom>
+          <a:noFill/>
+        </p:spPr>
+        <p:txBody>
+          <a:bodyPr wrap="none">
+            <a:spAutoFit/>
+          </a:bodyPr>
+          <a:lstStyle/>
+          <a:p/>
+          <a:p>
+            <a:pPr algn="r" rtl="1">
+              <a:defRPr sz="1600"/>
+            </a:pPr>
             <a:r>
               <a:t>הבקר מקבל שעון פיקסל (25MHz) מבלוק ניהול השעונים של המערכת.</a:t>
             </a:r>
           </a:p>
           <a:p>
+            <a:pPr algn="r" rtl="1">
+              <a:defRPr sz="1600"/>
+            </a:pPr>
             <a:r>
               <a:t>המימוש הלוגי מחשב ומשדר כתובת (addrb) כדי לשלוף נתונים (doutb) ישירות מזיכרון ה-BRAM.</a:t>
             </a:r>
@@ -3521,6 +4047,7 @@
           <a:bodyPr/>
           <a:lstStyle/>
           <a:p>
+            <a:pPr rtl="1"/>
             <a:r>
               <a:t>מקרה בוחן 1: תזמון ירידת שורה (Horizontal Blanking)</a:t>
             </a:r>
@@ -3529,19 +4056,30 @@
       </p:sp>
       <p:sp>
         <p:nvSpPr>
-          <p:cNvPr id="3" name="Content Placeholder 2"/>
-          <p:cNvSpPr>
-            <a:spLocks noGrp="1"/>
-          </p:cNvSpPr>
-          <p:nvPr>
-            <p:ph idx="1"/>
-          </p:nvPr>
-        </p:nvSpPr>
-        <p:spPr/>
-        <p:txBody>
-          <a:bodyPr/>
-          <a:lstStyle/>
-          <a:p>
+          <p:cNvPr id="3" name="TextBox 2"/>
+          <p:cNvSpPr txBox="1"/>
+          <p:nvPr/>
+        </p:nvSpPr>
+        <p:spPr>
+          <a:xfrm>
+            <a:off x="457200" y="1005840"/>
+            <a:ext cx="8229600" cy="731520"/>
+          </a:xfrm>
+          <a:prstGeom prst="rect">
+            <a:avLst/>
+          </a:prstGeom>
+          <a:noFill/>
+        </p:spPr>
+        <p:txBody>
+          <a:bodyPr wrap="none">
+            <a:spAutoFit/>
+          </a:bodyPr>
+          <a:lstStyle/>
+          <a:p/>
+          <a:p>
+            <a:pPr algn="r" rtl="1">
+              <a:defRPr sz="1600"/>
+            </a:pPr>
             <a:r>
               <a:t>ניהול המונים (Horizontal/Vertical) ושליטה במנגנון ההחשכה (Blanking) לחזרת הקרן.</a:t>
             </a:r>
@@ -3581,6 +4119,7 @@
           <a:bodyPr/>
           <a:lstStyle/>
           <a:p>
+            <a:pPr rtl="1"/>
             <a:r>
               <a:t>מקרה בוחן 2: מ-RGB דיגיטלי ליציאה אנלוגית</a:t>
             </a:r>
@@ -3589,19 +4128,30 @@
       </p:sp>
       <p:sp>
         <p:nvSpPr>
-          <p:cNvPr id="3" name="Content Placeholder 2"/>
-          <p:cNvSpPr>
-            <a:spLocks noGrp="1"/>
-          </p:cNvSpPr>
-          <p:nvPr>
-            <p:ph idx="1"/>
-          </p:nvPr>
-        </p:nvSpPr>
-        <p:spPr/>
-        <p:txBody>
-          <a:bodyPr/>
-          <a:lstStyle/>
-          <a:p>
+          <p:cNvPr id="3" name="TextBox 2"/>
+          <p:cNvSpPr txBox="1"/>
+          <p:nvPr/>
+        </p:nvSpPr>
+        <p:spPr>
+          <a:xfrm>
+            <a:off x="457200" y="1005840"/>
+            <a:ext cx="8229600" cy="731520"/>
+          </a:xfrm>
+          <a:prstGeom prst="rect">
+            <a:avLst/>
+          </a:prstGeom>
+          <a:noFill/>
+        </p:spPr>
+        <p:txBody>
+          <a:bodyPr wrap="none">
+            <a:spAutoFit/>
+          </a:bodyPr>
+          <a:lstStyle/>
+          <a:p/>
+          <a:p>
+            <a:pPr algn="r" rtl="1">
+              <a:defRPr sz="1600"/>
+            </a:pPr>
             <a:r>
               <a:t>המרת 12 ביטים של צבע (RGB) למתח פיזי רציף באמצעות רשת נגדים (DAC) ומחבר ה-VGA.</a:t>
             </a:r>

--- a/docs/presentation/output/VGA_Presentation_Yossi.pptx
+++ b/docs/presentation/output/VGA_Presentation_Yossi.pptx
@@ -3150,6 +3150,41 @@
       <p:sp>
         <p:nvSpPr>
           <p:cNvPr id="4" name="TextBox 3"/>
+          <p:cNvSpPr txBox="1"/>
+          <p:nvPr/>
+        </p:nvSpPr>
+        <p:spPr>
+          <a:xfrm>
+            <a:off x="2286000" y="2743200"/>
+            <a:ext cx="4572000" cy="914400"/>
+          </a:xfrm>
+          <a:prstGeom prst="rect">
+            <a:avLst/>
+          </a:prstGeom>
+          <a:noFill/>
+        </p:spPr>
+        <p:txBody>
+          <a:bodyPr wrap="none">
+            <a:spAutoFit/>
+          </a:bodyPr>
+          <a:lstStyle/>
+          <a:p>
+            <a:pPr algn="ctr">
+              <a:defRPr sz="1400">
+                <a:solidFill>
+                  <a:srgbClr val="FF0000"/>
+                </a:solidFill>
+              </a:defRPr>
+            </a:pPr>
+            <a:r>
+              <a:t>[שגיאה: התמונה artix_board.png לא נמצאה בתיקיית assets]</a:t>
+            </a:r>
+          </a:p>
+        </p:txBody>
+      </p:sp>
+      <p:sp>
+        <p:nvSpPr>
+          <p:cNvPr id="5" name="TextBox 4"/>
           <p:cNvSpPr txBox="1"/>
           <p:nvPr/>
         </p:nvSpPr>

--- a/docs/presentation/output/VGA_Presentation_Yossi.pptx
+++ b/docs/presentation/output/VGA_Presentation_Yossi.pptx
@@ -3147,41 +3147,30 @@
           </a:p>
         </p:txBody>
       </p:sp>
-      <p:sp>
-        <p:nvSpPr>
-          <p:cNvPr id="4" name="TextBox 3"/>
-          <p:cNvSpPr txBox="1"/>
+      <p:pic>
+        <p:nvPicPr>
+          <p:cNvPr id="4" name="Picture 3" descr="artix_board.png"/>
+          <p:cNvPicPr>
+            <a:picLocks noChangeAspect="1"/>
+          </p:cNvPicPr>
           <p:nvPr/>
-        </p:nvSpPr>
+        </p:nvPicPr>
+        <p:blipFill>
+          <a:blip r:embed="rId2"/>
+          <a:stretch>
+            <a:fillRect/>
+          </a:stretch>
+        </p:blipFill>
         <p:spPr>
           <a:xfrm>
-            <a:off x="2286000" y="2743200"/>
-            <a:ext cx="4572000" cy="914400"/>
+            <a:off x="2286000" y="1828800"/>
+            <a:ext cx="4572000" cy="3400527"/>
           </a:xfrm>
           <a:prstGeom prst="rect">
             <a:avLst/>
           </a:prstGeom>
-          <a:noFill/>
         </p:spPr>
-        <p:txBody>
-          <a:bodyPr wrap="none">
-            <a:spAutoFit/>
-          </a:bodyPr>
-          <a:lstStyle/>
-          <a:p>
-            <a:pPr algn="ctr">
-              <a:defRPr sz="1400">
-                <a:solidFill>
-                  <a:srgbClr val="FF0000"/>
-                </a:solidFill>
-              </a:defRPr>
-            </a:pPr>
-            <a:r>
-              <a:t>[שגיאה: התמונה artix_board.png לא נמצאה בתיקיית assets]</a:t>
-            </a:r>
-          </a:p>
-        </p:txBody>
-      </p:sp>
+      </p:pic>
       <p:sp>
         <p:nvSpPr>
           <p:cNvPr id="5" name="TextBox 4"/>

--- a/docs/presentation/output/VGA_Presentation_Yossi.pptx
+++ b/docs/presentation/output/VGA_Presentation_Yossi.pptx
@@ -3145,6 +3145,14 @@
               <a:t>קליטת תמונה בזמן אמת ממצלמת OV7670 והצגתה דרך כרטיס Artix-7.</a:t>
             </a:r>
           </a:p>
+          <a:p>
+            <a:pPr algn="ctr" rtl="1">
+              <a:defRPr sz="1700"/>
+            </a:pPr>
+            <a:r>
+              <a:t>על מנת לאפשר עיבוד תמונה לזיהויי עמידה ממושכת לחולי דמנציה.</a:t>
+            </a:r>
+          </a:p>
         </p:txBody>
       </p:sp>
       <p:pic>
@@ -3197,7 +3205,7 @@
               <a:defRPr sz="2200" b="1"/>
             </a:pPr>
             <a:r>
-              <a:t>מגיש: יוסי ברים | הנדסת חשמל שנה ד', המרכז האקדמי לב</a:t>
+              <a:t>מגיש: יוסי ברים | הנדסת חשמל שנה ד| המרכז האקדמי לב</a:t>
             </a:r>
           </a:p>
         </p:txBody>

--- a/docs/presentation/output/VGA_Presentation_Yossi.pptx
+++ b/docs/presentation/output/VGA_Presentation_Yossi.pptx
@@ -3338,7 +3338,7 @@
             </a:r>
             <a:br/>
             <a:r>
-              <a:t>(Top Level)</a:t>
+              <a:t>מבוסס FPGA</a:t>
             </a:r>
           </a:p>
         </p:txBody>
@@ -3839,9 +3839,9 @@
           <a:bodyPr/>
           <a:lstStyle/>
           <a:p>
-            <a:pPr rtl="1"/>
-            <a:r>
-              <a:t>ממשק ה-VGA: פרוטוקול ותזמונים</a:t>
+            <a:pPr rtl="1" algn="ctr"/>
+            <a:r>
+              <a:t>מהו פרוטוקול VGA?</a:t>
             </a:r>
           </a:p>
         </p:txBody>
@@ -3854,8 +3854,8 @@
         </p:nvSpPr>
         <p:spPr>
           <a:xfrm>
-            <a:off x="457200" y="1005840"/>
-            <a:ext cx="8229600" cy="731520"/>
+            <a:off x="457200" y="1097280"/>
+            <a:ext cx="8229600" cy="1371600"/>
           </a:xfrm>
           <a:prstGeom prst="rect">
             <a:avLst/>
@@ -3867,17 +3867,44 @@
             <a:spAutoFit/>
           </a:bodyPr>
           <a:lstStyle/>
-          <a:p/>
           <a:p>
             <a:pPr algn="r" rtl="1">
               <a:defRPr sz="1600"/>
             </a:pPr>
             <a:r>
-              <a:t>הפרוטוקול מבוסס על סריקה קווית (Raster Scan) ואותות סנכרון מדויקים (HSYNC, VSYNC).</a:t>
-            </a:r>
-          </a:p>
-        </p:txBody>
-      </p:sp>
+              <a:t>הפרוטוקול מבוסס על סריקה קווית (raster scan) משמאל לימין ומלמעלה למטה.</a:t>
+            </a:r>
+            <a:br/>
+            <a:r>
+              <a:t>נתוני הצבע משודרים אך ורק באזור הפעיל (active video) ומלווים באותות סינכרון.</a:t>
+            </a:r>
+          </a:p>
+        </p:txBody>
+      </p:sp>
+      <p:pic>
+        <p:nvPicPr>
+          <p:cNvPr id="4" name="Picture 3" descr="vga_raster_scan_timing.png"/>
+          <p:cNvPicPr>
+            <a:picLocks noChangeAspect="1"/>
+          </p:cNvPicPr>
+          <p:nvPr/>
+        </p:nvPicPr>
+        <p:blipFill>
+          <a:blip r:embed="rId2"/>
+          <a:stretch>
+            <a:fillRect/>
+          </a:stretch>
+        </p:blipFill>
+        <p:spPr>
+          <a:xfrm>
+            <a:off x="1828800" y="2743200"/>
+            <a:ext cx="5486400" cy="5373858"/>
+          </a:xfrm>
+          <a:prstGeom prst="rect">
+            <a:avLst/>
+          </a:prstGeom>
+        </p:spPr>
+      </p:pic>
     </p:spTree>
   </p:cSld>
   <p:clrMapOvr>

--- a/docs/presentation/output/VGA_Presentation_Yossi.pptx
+++ b/docs/presentation/output/VGA_Presentation_Yossi.pptx
@@ -11,7 +11,6 @@
     <p:sldId id="259" r:id="rId10"/>
     <p:sldId id="260" r:id="rId11"/>
     <p:sldId id="261" r:id="rId12"/>
-    <p:sldId id="262" r:id="rId13"/>
   </p:sldIdLst>
   <p:sldSz cx="9144000" cy="6858000" type="screen4x3"/>
   <p:notesSz cx="6858000" cy="9144000"/>
@@ -3938,9 +3937,14 @@
           <a:bodyPr/>
           <a:lstStyle/>
           <a:p>
-            <a:pPr rtl="1"/>
-            <a:r>
-              <a:t>ממשק ה-VGA: שליטה חומרתית ופיזיקה</a:t>
+            <a:pPr rtl="1" algn="ctr"/>
+            <a:r>
+              <a:t>ממשק ה-VGA:</a:t>
+            </a:r>
+          </a:p>
+          <a:p>
+            <a:r>
+              <a:t>מהלוגיקה האנלוגית לדיגיטלית</a:t>
             </a:r>
           </a:p>
         </p:txBody>
@@ -3953,8 +3957,8 @@
         </p:nvSpPr>
         <p:spPr>
           <a:xfrm>
-            <a:off x="457200" y="1005840"/>
-            <a:ext cx="8229600" cy="1097280"/>
+            <a:off x="457200" y="1371600"/>
+            <a:ext cx="8229600" cy="1371600"/>
           </a:xfrm>
           <a:prstGeom prst="rect">
             <a:avLst/>
@@ -3969,15 +3973,15 @@
           <a:p/>
           <a:p>
             <a:pPr algn="r" rtl="1">
-              <a:defRPr sz="1500"/>
+              <a:defRPr sz="1600"/>
             </a:pPr>
             <a:r>
-              <a:t>שעון הפיקסל מנהל את קצב הסריקה של קרן האלקטרונים (Cathode ray) על המסך.</a:t>
+              <a:t>שעון הפיקסל מנהל את קצב הסריקה של קרן האלקטרונים על המסך.</a:t>
             </a:r>
           </a:p>
           <a:p>
             <a:pPr algn="r" rtl="1">
-              <a:defRPr sz="1500"/>
+              <a:defRPr sz="1600"/>
             </a:pPr>
             <a:r>
               <a:t>אותות הסנכרון שולטים בסלילי ההטיה המכוונים את מיקום הקרן.</a:t>
@@ -3985,10 +3989,10 @@
           </a:p>
           <a:p>
             <a:pPr algn="r" rtl="1">
-              <a:defRPr sz="1500"/>
+              <a:defRPr sz="1600"/>
             </a:pPr>
             <a:r>
-              <a:t>באזור תצוגה פעיל, הלוגיקה משחררת את נתוני ה-RGB לתותחי האלקטרונים (Electron guns).</a:t>
+              <a:t>באזור תצוגה פעיל, הלוגיקה משחררת את נתוני ה-RGB לתותחי האלקטרונים.</a:t>
             </a:r>
           </a:p>
         </p:txBody>
@@ -4028,86 +4032,6 @@
           <a:p>
             <a:pPr rtl="1"/>
             <a:r>
-              <a:t>ממשק ה-VGA: מיקום בקר ה-VGA בנתיב הנתונים</a:t>
-            </a:r>
-          </a:p>
-        </p:txBody>
-      </p:sp>
-      <p:sp>
-        <p:nvSpPr>
-          <p:cNvPr id="3" name="TextBox 2"/>
-          <p:cNvSpPr txBox="1"/>
-          <p:nvPr/>
-        </p:nvSpPr>
-        <p:spPr>
-          <a:xfrm>
-            <a:off x="457200" y="1005840"/>
-            <a:ext cx="8229600" cy="1097280"/>
-          </a:xfrm>
-          <a:prstGeom prst="rect">
-            <a:avLst/>
-          </a:prstGeom>
-          <a:noFill/>
-        </p:spPr>
-        <p:txBody>
-          <a:bodyPr wrap="none">
-            <a:spAutoFit/>
-          </a:bodyPr>
-          <a:lstStyle/>
-          <a:p/>
-          <a:p>
-            <a:pPr algn="r" rtl="1">
-              <a:defRPr sz="1600"/>
-            </a:pPr>
-            <a:r>
-              <a:t>הבקר מקבל שעון פיקסל (25MHz) מבלוק ניהול השעונים של המערכת.</a:t>
-            </a:r>
-          </a:p>
-          <a:p>
-            <a:pPr algn="r" rtl="1">
-              <a:defRPr sz="1600"/>
-            </a:pPr>
-            <a:r>
-              <a:t>המימוש הלוגי מחשב ומשדר כתובת (addrb) כדי לשלוף נתונים (doutb) ישירות מזיכרון ה-BRAM.</a:t>
-            </a:r>
-          </a:p>
-        </p:txBody>
-      </p:sp>
-    </p:spTree>
-  </p:cSld>
-  <p:clrMapOvr>
-    <a:masterClrMapping/>
-  </p:clrMapOvr>
-</p:sld>
-</file>
-
-<file path=ppt/slides/slide6.xml><?xml version="1.0" encoding="utf-8"?>
-<p:sld xmlns:a="http://schemas.openxmlformats.org/drawingml/2006/main" xmlns:p="http://schemas.openxmlformats.org/presentationml/2006/main" xmlns:r="http://schemas.openxmlformats.org/officeDocument/2006/relationships">
-  <p:cSld>
-    <p:spTree>
-      <p:nvGrpSpPr>
-        <p:cNvPr id="1" name=""/>
-        <p:cNvGrpSpPr/>
-        <p:nvPr/>
-      </p:nvGrpSpPr>
-      <p:grpSpPr/>
-      <p:sp>
-        <p:nvSpPr>
-          <p:cNvPr id="2" name="Title 1"/>
-          <p:cNvSpPr>
-            <a:spLocks noGrp="1"/>
-          </p:cNvSpPr>
-          <p:nvPr>
-            <p:ph type="title"/>
-          </p:nvPr>
-        </p:nvSpPr>
-        <p:spPr/>
-        <p:txBody>
-          <a:bodyPr/>
-          <a:lstStyle/>
-          <a:p>
-            <a:pPr rtl="1"/>
-            <a:r>
               <a:t>מקרה בוחן 1: תזמון ירידת שורה (Horizontal Blanking)</a:t>
             </a:r>
           </a:p>
@@ -4153,7 +4077,7 @@
 </p:sld>
 </file>
 
-<file path=ppt/slides/slide7.xml><?xml version="1.0" encoding="utf-8"?>
+<file path=ppt/slides/slide6.xml><?xml version="1.0" encoding="utf-8"?>
 <p:sld xmlns:a="http://schemas.openxmlformats.org/drawingml/2006/main" xmlns:p="http://schemas.openxmlformats.org/presentationml/2006/main" xmlns:r="http://schemas.openxmlformats.org/officeDocument/2006/relationships">
   <p:cSld>
     <p:spTree>

--- a/docs/presentation/output/VGA_Presentation_Yossi.pptx
+++ b/docs/presentation/output/VGA_Presentation_Yossi.pptx
@@ -3997,6 +3997,30 @@
           </a:p>
         </p:txBody>
       </p:sp>
+      <p:pic>
+        <p:nvPicPr>
+          <p:cNvPr id="4" name="Picture 3" descr="vga_analog_cathode_ray_concept.png"/>
+          <p:cNvPicPr>
+            <a:picLocks noChangeAspect="1"/>
+          </p:cNvPicPr>
+          <p:nvPr/>
+        </p:nvPicPr>
+        <p:blipFill>
+          <a:blip r:embed="rId2"/>
+          <a:stretch>
+            <a:fillRect/>
+          </a:stretch>
+        </p:blipFill>
+        <p:spPr>
+          <a:xfrm>
+            <a:off x="2011680" y="2926080"/>
+            <a:ext cx="4572000" cy="3635868"/>
+          </a:xfrm>
+          <a:prstGeom prst="rect">
+            <a:avLst/>
+          </a:prstGeom>
+        </p:spPr>
+      </p:pic>
     </p:spTree>
   </p:cSld>
   <p:clrMapOvr>

--- a/docs/presentation/output/VGA_Presentation_Yossi.pptx
+++ b/docs/presentation/output/VGA_Presentation_Yossi.pptx
@@ -3973,26 +3973,26 @@
           <a:p/>
           <a:p>
             <a:pPr algn="r" rtl="1">
-              <a:defRPr sz="1600"/>
+              <a:defRPr sz="1800"/>
             </a:pPr>
             <a:r>
-              <a:t>שעון הפיקסל מנהל את קצב הסריקה של קרן האלקטרונים על המסך.</a:t>
+              <a:t>• שעון הפיקסל מנהל את קצב הסריקה של קרן האלקטרונים על המסך.</a:t>
             </a:r>
           </a:p>
           <a:p>
             <a:pPr algn="r" rtl="1">
-              <a:defRPr sz="1600"/>
+              <a:defRPr sz="1800"/>
             </a:pPr>
             <a:r>
-              <a:t>אותות הסנכרון שולטים בסלילי ההטיה המכוונים את מיקום הקרן.</a:t>
+              <a:t>• אותות הסנכרון שולטים בסלילי ההטיה המכוונים את מיקום הקרן.</a:t>
             </a:r>
           </a:p>
           <a:p>
             <a:pPr algn="r" rtl="1">
-              <a:defRPr sz="1600"/>
+              <a:defRPr sz="1800"/>
             </a:pPr>
             <a:r>
-              <a:t>באזור תצוגה פעיל, הלוגיקה משחררת את נתוני ה-RGB לתותחי האלקטרונים.</a:t>
+              <a:t>• באזור תצוגה פעיל, הלוגיקה משחררת את נתוני ה-RGB לתותחי האלקטרונים.</a:t>
             </a:r>
           </a:p>
         </p:txBody>
@@ -4013,8 +4013,8 @@
         </p:blipFill>
         <p:spPr>
           <a:xfrm>
-            <a:off x="2011680" y="2926080"/>
-            <a:ext cx="4572000" cy="3635868"/>
+            <a:off x="2286000" y="2926080"/>
+            <a:ext cx="4114800" cy="3272282"/>
           </a:xfrm>
           <a:prstGeom prst="rect">
             <a:avLst/>

--- a/docs/presentation/output/VGA_Presentation_Yossi.pptx
+++ b/docs/presentation/output/VGA_Presentation_Yossi.pptx
@@ -11,6 +11,9 @@
     <p:sldId id="259" r:id="rId10"/>
     <p:sldId id="260" r:id="rId11"/>
     <p:sldId id="261" r:id="rId12"/>
+    <p:sldId id="262" r:id="rId13"/>
+    <p:sldId id="263" r:id="rId14"/>
+    <p:sldId id="264" r:id="rId15"/>
   </p:sldIdLst>
   <p:sldSz cx="9144000" cy="6858000" type="screen4x3"/>
   <p:notesSz cx="6858000" cy="9144000"/>
@@ -4054,6 +4057,275 @@
           <a:bodyPr/>
           <a:lstStyle/>
           <a:p>
+            <a:pPr rtl="1" algn="ctr"/>
+            <a:r>
+              <a:t>ממשק ה-VGA: תזמונים ורזולוציה</a:t>
+            </a:r>
+          </a:p>
+        </p:txBody>
+      </p:sp>
+      <p:sp>
+        <p:nvSpPr>
+          <p:cNvPr id="3" name="TextBox 2"/>
+          <p:cNvSpPr txBox="1"/>
+          <p:nvPr/>
+        </p:nvSpPr>
+        <p:spPr>
+          <a:xfrm>
+            <a:off x="731520" y="1645920"/>
+            <a:ext cx="7772400" cy="3657600"/>
+          </a:xfrm>
+          <a:prstGeom prst="rect">
+            <a:avLst/>
+          </a:prstGeom>
+          <a:noFill/>
+        </p:spPr>
+        <p:txBody>
+          <a:bodyPr wrap="none">
+            <a:spAutoFit/>
+          </a:bodyPr>
+          <a:lstStyle/>
+          <a:p/>
+          <a:p>
+            <a:pPr algn="r" rtl="1">
+              <a:spcAft>
+                <a:spcPts val="1400"/>
+              </a:spcAft>
+              <a:defRPr sz="2000"/>
+            </a:pPr>
+            <a:r>
+              <a:t>• עבודה ברזולוציה של 640 על 480 פיקסלים.</a:t>
+            </a:r>
+          </a:p>
+          <a:p>
+            <a:pPr algn="r" rtl="1">
+              <a:spcAft>
+                <a:spcPts val="1400"/>
+              </a:spcAft>
+              <a:defRPr sz="2000"/>
+            </a:pPr>
+            <a:r>
+              <a:t>• קצב רענון של 60 הרץ.</a:t>
+            </a:r>
+          </a:p>
+          <a:p>
+            <a:pPr algn="r" rtl="1">
+              <a:spcAft>
+                <a:spcPts val="1400"/>
+              </a:spcAft>
+              <a:defRPr sz="2000"/>
+            </a:pPr>
+            <a:r>
+              <a:t>• דורש שעון פיקסל (Pixel Clock) בתדר של 25 מגה-הרץ.</a:t>
+            </a:r>
+          </a:p>
+        </p:txBody>
+      </p:sp>
+    </p:spTree>
+  </p:cSld>
+  <p:clrMapOvr>
+    <a:masterClrMapping/>
+  </p:clrMapOvr>
+</p:sld>
+</file>
+
+<file path=ppt/slides/slide6.xml><?xml version="1.0" encoding="utf-8"?>
+<p:sld xmlns:a="http://schemas.openxmlformats.org/drawingml/2006/main" xmlns:p="http://schemas.openxmlformats.org/presentationml/2006/main" xmlns:r="http://schemas.openxmlformats.org/officeDocument/2006/relationships">
+  <p:cSld>
+    <p:spTree>
+      <p:nvGrpSpPr>
+        <p:cNvPr id="1" name=""/>
+        <p:cNvGrpSpPr/>
+        <p:nvPr/>
+      </p:nvGrpSpPr>
+      <p:grpSpPr/>
+      <p:sp>
+        <p:nvSpPr>
+          <p:cNvPr id="2" name="Title 1"/>
+          <p:cNvSpPr>
+            <a:spLocks noGrp="1"/>
+          </p:cNvSpPr>
+          <p:nvPr>
+            <p:ph type="title"/>
+          </p:nvPr>
+        </p:nvSpPr>
+        <p:spPr/>
+        <p:txBody>
+          <a:bodyPr/>
+          <a:lstStyle/>
+          <a:p>
+            <a:pPr rtl="1" algn="ctr"/>
+            <a:r>
+              <a:t>ממשק ה-VGA: מונים וסריקה קווית</a:t>
+            </a:r>
+          </a:p>
+        </p:txBody>
+      </p:sp>
+      <p:sp>
+        <p:nvSpPr>
+          <p:cNvPr id="3" name="TextBox 2"/>
+          <p:cNvSpPr txBox="1"/>
+          <p:nvPr/>
+        </p:nvSpPr>
+        <p:spPr>
+          <a:xfrm>
+            <a:off x="731520" y="1371600"/>
+            <a:ext cx="7772400" cy="4114800"/>
+          </a:xfrm>
+          <a:prstGeom prst="rect">
+            <a:avLst/>
+          </a:prstGeom>
+          <a:noFill/>
+        </p:spPr>
+        <p:txBody>
+          <a:bodyPr wrap="none">
+            <a:spAutoFit/>
+          </a:bodyPr>
+          <a:lstStyle/>
+          <a:p/>
+          <a:p>
+            <a:pPr algn="r" rtl="1">
+              <a:spcAft>
+                <a:spcPts val="1400"/>
+              </a:spcAft>
+              <a:defRPr sz="2000"/>
+            </a:pPr>
+            <a:r>
+              <a:t>• סריקה אופקית (שורה): מונה ה-Horizontal סופר 800 מחזורים. רק 640 מתוכם הם תצוגה, והשאר מוקדשים להחשכה (Blanking) ולסנכרון השורה.</a:t>
+            </a:r>
+          </a:p>
+          <a:p>
+            <a:pPr algn="r" rtl="1">
+              <a:spcAft>
+                <a:spcPts val="1400"/>
+              </a:spcAft>
+              <a:defRPr sz="2000"/>
+            </a:pPr>
+            <a:r>
+              <a:t>• סריקה אנכית (פרקים): מונה ה-Vertical סופר 521 שורות, מתוכן 480 פעילות. בסיום, אות הסנכרון (VSYNC) מחזיר את הקרן לראש המסך.</a:t>
+            </a:r>
+          </a:p>
+        </p:txBody>
+      </p:sp>
+    </p:spTree>
+  </p:cSld>
+  <p:clrMapOvr>
+    <a:masterClrMapping/>
+  </p:clrMapOvr>
+</p:sld>
+</file>
+
+<file path=ppt/slides/slide7.xml><?xml version="1.0" encoding="utf-8"?>
+<p:sld xmlns:a="http://schemas.openxmlformats.org/drawingml/2006/main" xmlns:p="http://schemas.openxmlformats.org/presentationml/2006/main" xmlns:r="http://schemas.openxmlformats.org/officeDocument/2006/relationships">
+  <p:cSld>
+    <p:spTree>
+      <p:nvGrpSpPr>
+        <p:cNvPr id="1" name=""/>
+        <p:cNvGrpSpPr/>
+        <p:nvPr/>
+      </p:nvGrpSpPr>
+      <p:grpSpPr/>
+      <p:sp>
+        <p:nvSpPr>
+          <p:cNvPr id="2" name="Title 1"/>
+          <p:cNvSpPr>
+            <a:spLocks noGrp="1"/>
+          </p:cNvSpPr>
+          <p:nvPr>
+            <p:ph type="title"/>
+          </p:nvPr>
+        </p:nvSpPr>
+        <p:spPr/>
+        <p:txBody>
+          <a:bodyPr/>
+          <a:lstStyle/>
+          <a:p>
+            <a:pPr rtl="1" algn="ctr"/>
+            <a:r>
+              <a:t>ממשק ה-VGA: מנגנון השתקה וחיבור ל-BRAM</a:t>
+            </a:r>
+          </a:p>
+        </p:txBody>
+      </p:sp>
+      <p:sp>
+        <p:nvSpPr>
+          <p:cNvPr id="3" name="TextBox 2"/>
+          <p:cNvSpPr txBox="1"/>
+          <p:nvPr/>
+        </p:nvSpPr>
+        <p:spPr>
+          <a:xfrm>
+            <a:off x="731520" y="1371600"/>
+            <a:ext cx="7772400" cy="4114800"/>
+          </a:xfrm>
+          <a:prstGeom prst="rect">
+            <a:avLst/>
+          </a:prstGeom>
+          <a:noFill/>
+        </p:spPr>
+        <p:txBody>
+          <a:bodyPr wrap="none">
+            <a:spAutoFit/>
+          </a:bodyPr>
+          <a:lstStyle/>
+          <a:p/>
+          <a:p>
+            <a:pPr algn="r" rtl="1">
+              <a:spcAft>
+                <a:spcPts val="1400"/>
+              </a:spcAft>
+              <a:defRPr sz="2000"/>
+            </a:pPr>
+            <a:r>
+              <a:t>• מנגנון ההשתקה ב-RTL: מחוץ לאזור התצוגה הפעיל, בקר ال-VGA מאלץ את הצבעים להיות אפס (שחור).</a:t>
+            </a:r>
+          </a:p>
+          <a:p>
+            <a:pPr algn="r" rtl="1">
+              <a:spcAft>
+                <a:spcPts val="1400"/>
+              </a:spcAft>
+              <a:defRPr sz="2000"/>
+            </a:pPr>
+            <a:r>
+              <a:t>• ניהול זיכרון: נתוני הפיקסל נמשכים מזיכרון ה-BRAM אך ורק כאשר הקרן נמצאה באזור המורשה (האזור הפעיל).</a:t>
+            </a:r>
+          </a:p>
+        </p:txBody>
+      </p:sp>
+    </p:spTree>
+  </p:cSld>
+  <p:clrMapOvr>
+    <a:masterClrMapping/>
+  </p:clrMapOvr>
+</p:sld>
+</file>
+
+<file path=ppt/slides/slide8.xml><?xml version="1.0" encoding="utf-8"?>
+<p:sld xmlns:a="http://schemas.openxmlformats.org/drawingml/2006/main" xmlns:p="http://schemas.openxmlformats.org/presentationml/2006/main" xmlns:r="http://schemas.openxmlformats.org/officeDocument/2006/relationships">
+  <p:cSld>
+    <p:spTree>
+      <p:nvGrpSpPr>
+        <p:cNvPr id="1" name=""/>
+        <p:cNvGrpSpPr/>
+        <p:nvPr/>
+      </p:nvGrpSpPr>
+      <p:grpSpPr/>
+      <p:sp>
+        <p:nvSpPr>
+          <p:cNvPr id="2" name="Title 1"/>
+          <p:cNvSpPr>
+            <a:spLocks noGrp="1"/>
+          </p:cNvSpPr>
+          <p:nvPr>
+            <p:ph type="title"/>
+          </p:nvPr>
+        </p:nvSpPr>
+        <p:spPr/>
+        <p:txBody>
+          <a:bodyPr/>
+          <a:lstStyle/>
+          <a:p>
             <a:pPr rtl="1"/>
             <a:r>
               <a:t>מקרה בוחן 1: תזמון ירידת שורה (Horizontal Blanking)</a:t>
@@ -4101,7 +4373,7 @@
 </p:sld>
 </file>
 
-<file path=ppt/slides/slide6.xml><?xml version="1.0" encoding="utf-8"?>
+<file path=ppt/slides/slide9.xml><?xml version="1.0" encoding="utf-8"?>
 <p:sld xmlns:a="http://schemas.openxmlformats.org/drawingml/2006/main" xmlns:p="http://schemas.openxmlformats.org/presentationml/2006/main" xmlns:r="http://schemas.openxmlformats.org/officeDocument/2006/relationships">
   <p:cSld>
     <p:spTree>

--- a/docs/presentation/output/VGA_Presentation_Yossi.pptx
+++ b/docs/presentation/output/VGA_Presentation_Yossi.pptx
@@ -4059,7 +4059,7 @@
           <a:p>
             <a:pPr rtl="1" algn="ctr"/>
             <a:r>
-              <a:t>ממשק ה-VGA: תזמונים ורזולוציה</a:t>
+              <a:t>ממשק ה-VGA: תזמונים ומונים</a:t>
             </a:r>
           </a:p>
         </p:txBody>
@@ -4072,8 +4072,8 @@
         </p:nvSpPr>
         <p:spPr>
           <a:xfrm>
-            <a:off x="731520" y="1645920"/>
-            <a:ext cx="7772400" cy="3657600"/>
+            <a:off x="4754880" y="1371600"/>
+            <a:ext cx="3931920" cy="4572000"/>
           </a:xfrm>
           <a:prstGeom prst="rect">
             <a:avLst/>
@@ -4089,38 +4089,62 @@
           <a:p>
             <a:pPr algn="r" rtl="1">
               <a:spcAft>
-                <a:spcPts val="1400"/>
+                <a:spcPts val="1000"/>
               </a:spcAft>
-              <a:defRPr sz="2000"/>
+              <a:defRPr sz="1600"/>
             </a:pPr>
             <a:r>
-              <a:t>• עבודה ברזולוציה של 640 על 480 פיקסלים.</a:t>
+              <a:t>• עבודה ברזולוציה של 640 על 480 פיקסלים ב-60 הרץ.</a:t>
             </a:r>
           </a:p>
           <a:p>
             <a:pPr algn="r" rtl="1">
               <a:spcAft>
-                <a:spcPts val="1400"/>
+                <a:spcPts val="1000"/>
               </a:spcAft>
-              <a:defRPr sz="2000"/>
+              <a:defRPr sz="1600"/>
             </a:pPr>
             <a:r>
-              <a:t>• קצב רענון של 60 הרץ.</a:t>
+              <a:t>• דורש שעון פיקסל (Pixel Clock) בתדר של 25.175 מגה-הרץ.</a:t>
             </a:r>
           </a:p>
           <a:p>
             <a:pPr algn="r" rtl="1">
               <a:spcAft>
-                <a:spcPts val="1400"/>
+                <a:spcPts val="1000"/>
               </a:spcAft>
-              <a:defRPr sz="2000"/>
+              <a:defRPr sz="1600"/>
             </a:pPr>
             <a:r>
-              <a:t>• דורש שעון פיקסל (Pixel Clock) בתדר של 25 מגה-הרץ.</a:t>
-            </a:r>
-          </a:p>
-        </p:txBody>
-      </p:sp>
+              <a:t>• בלוקי ה-Horiz וה-Vert מממשים את חלוקת הפרוטוקול ל-Active, Front Porch, Sync ו-Back Porch.</a:t>
+            </a:r>
+          </a:p>
+        </p:txBody>
+      </p:sp>
+      <p:pic>
+        <p:nvPicPr>
+          <p:cNvPr id="4" name="Picture 3" descr="vga_counters_logic_flow.png"/>
+          <p:cNvPicPr>
+            <a:picLocks noChangeAspect="1"/>
+          </p:cNvPicPr>
+          <p:nvPr/>
+        </p:nvPicPr>
+        <p:blipFill>
+          <a:blip r:embed="rId2"/>
+          <a:stretch>
+            <a:fillRect/>
+          </a:stretch>
+        </p:blipFill>
+        <p:spPr>
+          <a:xfrm>
+            <a:off x="457200" y="1645920"/>
+            <a:ext cx="4023360" cy="1578395"/>
+          </a:xfrm>
+          <a:prstGeom prst="rect">
+            <a:avLst/>
+          </a:prstGeom>
+        </p:spPr>
+      </p:pic>
     </p:spTree>
   </p:cSld>
   <p:clrMapOvr>
@@ -4186,9 +4210,9 @@
           <a:p>
             <a:pPr algn="r" rtl="1">
               <a:spcAft>
-                <a:spcPts val="1400"/>
+                <a:spcPts val="1000"/>
               </a:spcAft>
-              <a:defRPr sz="2000"/>
+              <a:defRPr sz="1600"/>
             </a:pPr>
             <a:r>
               <a:t>• סריקה אופקית (שורה): מונה ה-Horizontal סופר 800 מחזורים. רק 640 מתוכם הם תצוגה, והשאר מוקדשים להחשכה (Blanking) ולסנכרון השורה.</a:t>
@@ -4197,9 +4221,9 @@
           <a:p>
             <a:pPr algn="r" rtl="1">
               <a:spcAft>
-                <a:spcPts val="1400"/>
+                <a:spcPts val="1000"/>
               </a:spcAft>
-              <a:defRPr sz="2000"/>
+              <a:defRPr sz="1600"/>
             </a:pPr>
             <a:r>
               <a:t>• סריקה אנכית (פרקים): מונה ה-Vertical סופר 521 שורות, מתוכן 480 פעילות. בסיום, אות הסנכרון (VSYNC) מחזיר את הקרן לראש המסך.</a:t>
@@ -4272,9 +4296,9 @@
           <a:p>
             <a:pPr algn="r" rtl="1">
               <a:spcAft>
-                <a:spcPts val="1400"/>
+                <a:spcPts val="1000"/>
               </a:spcAft>
-              <a:defRPr sz="2000"/>
+              <a:defRPr sz="1600"/>
             </a:pPr>
             <a:r>
               <a:t>• מנגנון ההשתקה ב-RTL: מחוץ לאזור התצוגה הפעיל, בקר ال-VGA מאלץ את הצבעים להיות אפס (שחור).</a:t>
@@ -4283,9 +4307,9 @@
           <a:p>
             <a:pPr algn="r" rtl="1">
               <a:spcAft>
-                <a:spcPts val="1400"/>
+                <a:spcPts val="1000"/>
               </a:spcAft>
-              <a:defRPr sz="2000"/>
+              <a:defRPr sz="1600"/>
             </a:pPr>
             <a:r>
               <a:t>• ניהול זיכרון: נתוני הפיקסל נמשכים מזיכרון ה-BRAM אך ורק כאשר הקרן נמצאה באזור המורשה (האזור הפעיל).</a:t>

--- a/docs/presentation/output/VGA_Presentation_Yossi.pptx
+++ b/docs/presentation/output/VGA_Presentation_Yossi.pptx
@@ -14,6 +14,7 @@
     <p:sldId id="262" r:id="rId13"/>
     <p:sldId id="263" r:id="rId14"/>
     <p:sldId id="264" r:id="rId15"/>
+    <p:sldId id="265" r:id="rId16"/>
   </p:sldIdLst>
   <p:sldSz cx="9144000" cy="6858000" type="screen4x3"/>
   <p:notesSz cx="6858000" cy="9144000"/>
@@ -3220,6 +3221,78 @@
 </p:sld>
 </file>
 
+<file path=ppt/slides/slide10.xml><?xml version="1.0" encoding="utf-8"?>
+<p:sld xmlns:a="http://schemas.openxmlformats.org/drawingml/2006/main" xmlns:p="http://schemas.openxmlformats.org/presentationml/2006/main" xmlns:r="http://schemas.openxmlformats.org/officeDocument/2006/relationships">
+  <p:cSld>
+    <p:spTree>
+      <p:nvGrpSpPr>
+        <p:cNvPr id="1" name=""/>
+        <p:cNvGrpSpPr/>
+        <p:nvPr/>
+      </p:nvGrpSpPr>
+      <p:grpSpPr/>
+      <p:sp>
+        <p:nvSpPr>
+          <p:cNvPr id="2" name="Title 1"/>
+          <p:cNvSpPr>
+            <a:spLocks noGrp="1"/>
+          </p:cNvSpPr>
+          <p:nvPr>
+            <p:ph type="title"/>
+          </p:nvPr>
+        </p:nvSpPr>
+        <p:spPr/>
+        <p:txBody>
+          <a:bodyPr/>
+          <a:lstStyle/>
+          <a:p>
+            <a:pPr rtl="1"/>
+            <a:r>
+              <a:t>מקרה בוחן 2: מ-RGB דיגיטלי ליציאה אנלוגית</a:t>
+            </a:r>
+          </a:p>
+        </p:txBody>
+      </p:sp>
+      <p:sp>
+        <p:nvSpPr>
+          <p:cNvPr id="3" name="TextBox 2"/>
+          <p:cNvSpPr txBox="1"/>
+          <p:nvPr/>
+        </p:nvSpPr>
+        <p:spPr>
+          <a:xfrm>
+            <a:off x="457200" y="1005840"/>
+            <a:ext cx="8229600" cy="731520"/>
+          </a:xfrm>
+          <a:prstGeom prst="rect">
+            <a:avLst/>
+          </a:prstGeom>
+          <a:noFill/>
+        </p:spPr>
+        <p:txBody>
+          <a:bodyPr wrap="none">
+            <a:spAutoFit/>
+          </a:bodyPr>
+          <a:lstStyle/>
+          <a:p/>
+          <a:p>
+            <a:pPr algn="r" rtl="1">
+              <a:defRPr sz="1600"/>
+            </a:pPr>
+            <a:r>
+              <a:t>המרת 12 ביטים של צבע (RGB) למתח פיזי רציף באמצעות רשת נגדים (DAC) ומחבר ה-VGA.</a:t>
+            </a:r>
+          </a:p>
+        </p:txBody>
+      </p:sp>
+    </p:spTree>
+  </p:cSld>
+  <p:clrMapOvr>
+    <a:masterClrMapping/>
+  </p:clrMapOvr>
+</p:sld>
+</file>
+
 <file path=ppt/slides/slide2.xml><?xml version="1.0" encoding="utf-8"?>
 <p:sld xmlns:a="http://schemas.openxmlformats.org/drawingml/2006/main" xmlns:p="http://schemas.openxmlformats.org/presentationml/2006/main" xmlns:r="http://schemas.openxmlformats.org/officeDocument/2006/relationships">
   <p:cSld>
@@ -4059,7 +4132,7 @@
           <a:p>
             <a:pPr rtl="1" algn="ctr"/>
             <a:r>
-              <a:t>ממשק ה-VGA: תזמונים ומונים</a:t>
+              <a:t>ממשק ה-VGA: תזמונים ורזולוציה</a:t>
             </a:r>
           </a:p>
         </p:txBody>
@@ -4072,8 +4145,8 @@
         </p:nvSpPr>
         <p:spPr>
           <a:xfrm>
-            <a:off x="4754880" y="1371600"/>
-            <a:ext cx="3931920" cy="4572000"/>
+            <a:off x="4572000" y="1371600"/>
+            <a:ext cx="4114800" cy="4572000"/>
           </a:xfrm>
           <a:prstGeom prst="rect">
             <a:avLst/>
@@ -4094,7 +4167,7 @@
               <a:defRPr sz="1600"/>
             </a:pPr>
             <a:r>
-              <a:t>• עבודה ברזולוציה של 640 על 480 פיקסלים ב-60 הרץ.</a:t>
+              <a:t>• עבודה ברזולוציה סטנדרטית של 640 על 480 פיקסלים בקצב של 60 הרץ.</a:t>
             </a:r>
           </a:p>
           <a:p>
@@ -4105,7 +4178,7 @@
               <a:defRPr sz="1600"/>
             </a:pPr>
             <a:r>
-              <a:t>• דורש שעון פיקסל (Pixel Clock) בתדר של 25.175 מגה-הרץ.</a:t>
+              <a:t>• דורש שעון פיקסל (Pixel Clock) מדויק בתדר של 25.175 מגה-הרץ.</a:t>
             </a:r>
           </a:p>
           <a:p>
@@ -4116,14 +4189,14 @@
               <a:defRPr sz="1600"/>
             </a:pPr>
             <a:r>
-              <a:t>• בלוקי ה-Horiz וה-Vert מממשים את חלוקת הפרוטוקול ל-Active, Front Porch, Sync ו-Back Porch.</a:t>
+              <a:t>• חלוקת מרחב התצוגה לאזור פעיל (Active Region) ואזורי השהייה (Front/Back Porch ו-Sync).</a:t>
             </a:r>
           </a:p>
         </p:txBody>
       </p:sp>
       <p:pic>
         <p:nvPicPr>
-          <p:cNvPr id="4" name="Picture 3" descr="vga_counters_logic_flow.png"/>
+          <p:cNvPr id="4" name="Picture 3" descr="vga_active_vs_blanking_regions.png"/>
           <p:cNvPicPr>
             <a:picLocks noChangeAspect="1"/>
           </p:cNvPicPr>
@@ -4138,7 +4211,7 @@
         <p:spPr>
           <a:xfrm>
             <a:off x="457200" y="1645920"/>
-            <a:ext cx="4023360" cy="1578395"/>
+            <a:ext cx="3840480" cy="3097431"/>
           </a:xfrm>
           <a:prstGeom prst="rect">
             <a:avLst/>
@@ -4180,7 +4253,7 @@
           <a:p>
             <a:pPr rtl="1" algn="ctr"/>
             <a:r>
-              <a:t>ממשק ה-VGA: מונים וסריקה קווית</a:t>
+              <a:t>ממשק ה-VGA: מונים וסריקה קווית (Raster Scan)</a:t>
             </a:r>
           </a:p>
         </p:txBody>
@@ -4193,8 +4266,8 @@
         </p:nvSpPr>
         <p:spPr>
           <a:xfrm>
-            <a:off x="731520" y="1371600"/>
-            <a:ext cx="7772400" cy="4114800"/>
+            <a:off x="4572000" y="1371600"/>
+            <a:ext cx="4114800" cy="4572000"/>
           </a:xfrm>
           <a:prstGeom prst="rect">
             <a:avLst/>
@@ -4215,7 +4288,7 @@
               <a:defRPr sz="1600"/>
             </a:pPr>
             <a:r>
-              <a:t>• סריקה אופקית (שורה): מונה ה-Horizontal סופר 800 מחזורים. רק 640 מתוכם הם תצוגה, והשאר מוקדשים להחשכה (Blanking) ולסנכרון השורה.</a:t>
+              <a:t>• תנועת זיגזג: סריקה מהירה משמאל לימין (Horizontal Retrace) שורה אחר שורה.</a:t>
             </a:r>
           </a:p>
           <a:p>
@@ -4226,11 +4299,46 @@
               <a:defRPr sz="1600"/>
             </a:pPr>
             <a:r>
-              <a:t>• סריקה אנכית (פרקים): מונה ה-Vertical סופר 521 שורות, מתוכן 480 פעילות. בסיום, אות הסנכרון (VSYNC) מחזיר את הקרן לראש המסך.</a:t>
-            </a:r>
-          </a:p>
-        </p:txBody>
-      </p:sp>
+              <a:t>• מונה אופקי סופר 800 מחזורים (640 פעילים + 160 להחשכה וסנכרון).</a:t>
+            </a:r>
+          </a:p>
+          <a:p>
+            <a:pPr algn="r" rtl="1">
+              <a:spcAft>
+                <a:spcPts val="1000"/>
+              </a:spcAft>
+              <a:defRPr sz="1600"/>
+            </a:pPr>
+            <a:r>
+              <a:t>• מונה אנכית סופר 521 שורות (480 פעילות), ובסיומן מבצע Vertical Retrace חזרה לראש המסך.</a:t>
+            </a:r>
+          </a:p>
+        </p:txBody>
+      </p:sp>
+      <p:pic>
+        <p:nvPicPr>
+          <p:cNvPr id="4" name="Picture 3" descr="vga_raster_scan_retrace_concept.png"/>
+          <p:cNvPicPr>
+            <a:picLocks noChangeAspect="1"/>
+          </p:cNvPicPr>
+          <p:nvPr/>
+        </p:nvPicPr>
+        <p:blipFill>
+          <a:blip r:embed="rId2"/>
+          <a:stretch>
+            <a:fillRect/>
+          </a:stretch>
+        </p:blipFill>
+        <p:spPr>
+          <a:xfrm>
+            <a:off x="457200" y="1645920"/>
+            <a:ext cx="3840480" cy="3112810"/>
+          </a:xfrm>
+          <a:prstGeom prst="rect">
+            <a:avLst/>
+          </a:prstGeom>
+        </p:spPr>
+      </p:pic>
     </p:spTree>
   </p:cSld>
   <p:clrMapOvr>
@@ -4266,7 +4374,7 @@
           <a:p>
             <a:pPr rtl="1" algn="ctr"/>
             <a:r>
-              <a:t>ממשק ה-VGA: מנגנון השתקה וחיבור ל-BRAM</a:t>
+              <a:t>ממשק ה-VGA: ארכיטקטורה וניהול BRAM</a:t>
             </a:r>
           </a:p>
         </p:txBody>
@@ -4279,8 +4387,8 @@
         </p:nvSpPr>
         <p:spPr>
           <a:xfrm>
-            <a:off x="731520" y="1371600"/>
-            <a:ext cx="7772400" cy="4114800"/>
+            <a:off x="4572000" y="1371600"/>
+            <a:ext cx="4114800" cy="4572000"/>
           </a:xfrm>
           <a:prstGeom prst="rect">
             <a:avLst/>
@@ -4301,7 +4409,7 @@
               <a:defRPr sz="1600"/>
             </a:pPr>
             <a:r>
-              <a:t>• מנגנון ההשתקה ב-RTL: מחוץ לאזור התצוגה הפעיל, בקר ال-VGA מאלץ את הצבעים להיות אפס (שחור).</a:t>
+              <a:t>• הפרדת רשויות: רכיב ה-vga_sync מנהל את שעוני הסנכרון והכתובת (Pixel X/Y).</a:t>
             </a:r>
           </a:p>
           <a:p>
@@ -4312,11 +4420,46 @@
               <a:defRPr sz="1600"/>
             </a:pPr>
             <a:r>
-              <a:t>• ניהול זיכרון: נתוני הפיקסל נמשכים מזיכרון ה-BRAM אך ורק כאשר הקרן נמצאה באזור המורשה (האזור הפעיל).</a:t>
-            </a:r>
-          </a:p>
-        </p:txBody>
-      </p:sp>
+              <a:t>• מנגנון ההשתקה (Blanking): מחוץ לאזור הפעיל, ערכי ה-RGB מאולצים להתאפס (שחור מוחלט).</a:t>
+            </a:r>
+          </a:p>
+          <a:p>
+            <a:pPr algn="r" rtl="1">
+              <a:spcAft>
+                <a:spcPts val="1000"/>
+              </a:spcAft>
+              <a:defRPr sz="1600"/>
+            </a:pPr>
+            <a:r>
+              <a:t>• שליפת נתונים מותנית: זיכרון ה-BRAM משחרר פיקסלים אך ורק כשהקרן נמצאת באזור המורשה.</a:t>
+            </a:r>
+          </a:p>
+        </p:txBody>
+      </p:sp>
+      <p:pic>
+        <p:nvPicPr>
+          <p:cNvPr id="4" name="Picture 3" descr="vga_fpga_top_architecture.png"/>
+          <p:cNvPicPr>
+            <a:picLocks noChangeAspect="1"/>
+          </p:cNvPicPr>
+          <p:nvPr/>
+        </p:nvPicPr>
+        <p:blipFill>
+          <a:blip r:embed="rId2"/>
+          <a:stretch>
+            <a:fillRect/>
+          </a:stretch>
+        </p:blipFill>
+        <p:spPr>
+          <a:xfrm>
+            <a:off x="457200" y="1645920"/>
+            <a:ext cx="3840480" cy="2102409"/>
+          </a:xfrm>
+          <a:prstGeom prst="rect">
+            <a:avLst/>
+          </a:prstGeom>
+        </p:spPr>
+      </p:pic>
     </p:spTree>
   </p:cSld>
   <p:clrMapOvr>
@@ -4350,9 +4493,9 @@
           <a:bodyPr/>
           <a:lstStyle/>
           <a:p>
-            <a:pPr rtl="1"/>
-            <a:r>
-              <a:t>מקרה בוחן 1: תזמון ירידת שורה (Horizontal Blanking)</a:t>
+            <a:pPr rtl="1" algn="ctr"/>
+            <a:r>
+              <a:t>ממשק ה-VGA: סימולציה ומימוש מעשי</a:t>
             </a:r>
           </a:p>
         </p:txBody>
@@ -4365,8 +4508,8 @@
         </p:nvSpPr>
         <p:spPr>
           <a:xfrm>
-            <a:off x="457200" y="1005840"/>
-            <a:ext cx="8229600" cy="731520"/>
+            <a:off x="4572000" y="1371600"/>
+            <a:ext cx="4114800" cy="4572000"/>
           </a:xfrm>
           <a:prstGeom prst="rect">
             <a:avLst/>
@@ -4381,14 +4524,63 @@
           <a:p/>
           <a:p>
             <a:pPr algn="r" rtl="1">
+              <a:spcAft>
+                <a:spcPts val="1000"/>
+              </a:spcAft>
               <a:defRPr sz="1600"/>
             </a:pPr>
             <a:r>
-              <a:t>ניהול המונים (Horizontal/Vertical) ושליטה במנגנון ההחשכה (Blanking) לחזרת הקרן.</a:t>
-            </a:r>
-          </a:p>
-        </p:txBody>
-      </p:sp>
+              <a:t>• מימוש מעגל המונים (Horiz &amp; Vert) עם חיווט מלא של הפרמטרים התקניים.</a:t>
+            </a:r>
+          </a:p>
+          <a:p>
+            <a:pPr algn="r" rtl="1">
+              <a:spcAft>
+                <a:spcPts val="1000"/>
+              </a:spcAft>
+              <a:defRPr sz="1600"/>
+            </a:pPr>
+            <a:r>
+              <a:t>• בקרת אותות ה-HSYNC, VSYNC וערוצי הצבע (R, G, B).</a:t>
+            </a:r>
+          </a:p>
+          <a:p>
+            <a:pPr algn="r" rtl="1">
+              <a:spcAft>
+                <a:spcPts val="1000"/>
+              </a:spcAft>
+              <a:defRPr sz="1600"/>
+            </a:pPr>
+            <a:r>
+              <a:t>• הצגת פטרן בדיקה ויזואלי המוכיח סנכרון מושלם ותדר שעון יציב ברזולוציית היעד.</a:t>
+            </a:r>
+          </a:p>
+        </p:txBody>
+      </p:sp>
+      <p:pic>
+        <p:nvPicPr>
+          <p:cNvPr id="4" name="Picture 3" descr="vga_counters_logic_flow.png"/>
+          <p:cNvPicPr>
+            <a:picLocks noChangeAspect="1"/>
+          </p:cNvPicPr>
+          <p:nvPr/>
+        </p:nvPicPr>
+        <p:blipFill>
+          <a:blip r:embed="rId2"/>
+          <a:stretch>
+            <a:fillRect/>
+          </a:stretch>
+        </p:blipFill>
+        <p:spPr>
+          <a:xfrm>
+            <a:off x="457200" y="1645920"/>
+            <a:ext cx="3840480" cy="1506650"/>
+          </a:xfrm>
+          <a:prstGeom prst="rect">
+            <a:avLst/>
+          </a:prstGeom>
+        </p:spPr>
+      </p:pic>
     </p:spTree>
   </p:cSld>
   <p:clrMapOvr>
@@ -4424,7 +4616,7 @@
           <a:p>
             <a:pPr rtl="1"/>
             <a:r>
-              <a:t>מקרה בוחן 2: מ-RGB דיגיטלי ליציאה אנלוגית</a:t>
+              <a:t>מקרה בוחן 1: תזמון ירידת שורה (Horizontal Blanking)</a:t>
             </a:r>
           </a:p>
         </p:txBody>
@@ -4456,7 +4648,7 @@
               <a:defRPr sz="1600"/>
             </a:pPr>
             <a:r>
-              <a:t>המרת 12 ביטים של צבע (RGB) למתח פיזי רציף באמצעות רשת נגדים (DAC) ומחבר ה-VGA.</a:t>
+              <a:t>ניהול המונים (Horizontal/Vertical) ושליטה במנגנון ההחשכה (Blanking) לחזרת הקרן.</a:t>
             </a:r>
           </a:p>
         </p:txBody>

--- a/docs/presentation/output/VGA_Presentation_Yossi.pptx
+++ b/docs/presentation/output/VGA_Presentation_Yossi.pptx
@@ -4552,7 +4552,7 @@
               <a:defRPr sz="1600"/>
             </a:pPr>
             <a:r>
-              <a:t>• הצגת פטרן בדיקה ויזואלי המוכיח סנכרון מושלם ותדר שעון יציב ברזולוציית היעד.</a:t>
+              <a:t>• הצגת תבנית בדיקה ויזואלית המוכיח סנכרון מושלם ותדר שעון יציב ברזולוציית היעד.</a:t>
             </a:r>
           </a:p>
         </p:txBody>

--- a/docs/presentation/output/VGA_Presentation_Yossi.pptx
+++ b/docs/presentation/output/VGA_Presentation_Yossi.pptx
@@ -15,6 +15,7 @@
     <p:sldId id="263" r:id="rId14"/>
     <p:sldId id="264" r:id="rId15"/>
     <p:sldId id="265" r:id="rId16"/>
+    <p:sldId id="266" r:id="rId17"/>
   </p:sldIdLst>
   <p:sldSz cx="9144000" cy="6858000" type="screen4x3"/>
   <p:notesSz cx="6858000" cy="9144000"/>
@@ -3248,6 +3249,78 @@
           <a:p>
             <a:pPr rtl="1"/>
             <a:r>
+              <a:t>מקרה בוחן 1: תזמון ירידת שורה (Horizontal Blanking)</a:t>
+            </a:r>
+          </a:p>
+        </p:txBody>
+      </p:sp>
+      <p:sp>
+        <p:nvSpPr>
+          <p:cNvPr id="3" name="TextBox 2"/>
+          <p:cNvSpPr txBox="1"/>
+          <p:nvPr/>
+        </p:nvSpPr>
+        <p:spPr>
+          <a:xfrm>
+            <a:off x="457200" y="1005840"/>
+            <a:ext cx="8229600" cy="731520"/>
+          </a:xfrm>
+          <a:prstGeom prst="rect">
+            <a:avLst/>
+          </a:prstGeom>
+          <a:noFill/>
+        </p:spPr>
+        <p:txBody>
+          <a:bodyPr wrap="none">
+            <a:spAutoFit/>
+          </a:bodyPr>
+          <a:lstStyle/>
+          <a:p/>
+          <a:p>
+            <a:pPr algn="r" rtl="1">
+              <a:defRPr sz="1600"/>
+            </a:pPr>
+            <a:r>
+              <a:t>ניהול המונים (Horizontal/Vertical) ושליטה במנגנון ההחשכה (Blanking) לחזרת הקרן.</a:t>
+            </a:r>
+          </a:p>
+        </p:txBody>
+      </p:sp>
+    </p:spTree>
+  </p:cSld>
+  <p:clrMapOvr>
+    <a:masterClrMapping/>
+  </p:clrMapOvr>
+</p:sld>
+</file>
+
+<file path=ppt/slides/slide11.xml><?xml version="1.0" encoding="utf-8"?>
+<p:sld xmlns:a="http://schemas.openxmlformats.org/drawingml/2006/main" xmlns:p="http://schemas.openxmlformats.org/presentationml/2006/main" xmlns:r="http://schemas.openxmlformats.org/officeDocument/2006/relationships">
+  <p:cSld>
+    <p:spTree>
+      <p:nvGrpSpPr>
+        <p:cNvPr id="1" name=""/>
+        <p:cNvGrpSpPr/>
+        <p:nvPr/>
+      </p:nvGrpSpPr>
+      <p:grpSpPr/>
+      <p:sp>
+        <p:nvSpPr>
+          <p:cNvPr id="2" name="Title 1"/>
+          <p:cNvSpPr>
+            <a:spLocks noGrp="1"/>
+          </p:cNvSpPr>
+          <p:nvPr>
+            <p:ph type="title"/>
+          </p:nvPr>
+        </p:nvSpPr>
+        <p:spPr/>
+        <p:txBody>
+          <a:bodyPr/>
+          <a:lstStyle/>
+          <a:p>
+            <a:pPr rtl="1"/>
+            <a:r>
               <a:t>מקרה בוחן 2: מ-RGB דיגיטלי ליציאה אנלוגית</a:t>
             </a:r>
           </a:p>
@@ -3916,7 +3989,7 @@
           <a:p>
             <a:pPr rtl="1" algn="ctr"/>
             <a:r>
-              <a:t>מהו פרוטוקול VGA?</a:t>
+              <a:t>מבוא ל-VGA: סריקה קווית (Raster Scan)</a:t>
             </a:r>
           </a:p>
         </p:txBody>
@@ -3942,23 +4015,36 @@
             <a:spAutoFit/>
           </a:bodyPr>
           <a:lstStyle/>
+          <a:p/>
           <a:p>
             <a:pPr algn="r" rtl="1">
               <a:defRPr sz="1600"/>
             </a:pPr>
             <a:r>
-              <a:t>הפרוטוקול מבוסס על סריקה קווית (raster scan) משמאל לימין ומלמעלה למטה.</a:t>
-            </a:r>
-            <a:br/>
-            <a:r>
-              <a:t>נתוני הצבע משודרים אך ורק באזור הפעיל (active video) ומלווים באותות סינכרון.</a:t>
+              <a:t>• הציור על המסך מבוסס על קרן שסורקת את הפיקסלים משמאל לימין (שורה) ומלמעלה למטה (פריים).</a:t>
+            </a:r>
+          </a:p>
+          <a:p>
+            <a:pPr algn="r" rtl="1">
+              <a:defRPr sz="1600"/>
+            </a:pPr>
+            <a:r>
+              <a:t>• תנועת הקרן חייבת להיות רציפה, מה שיוצר מסלול בצורת 'זיגזג'.</a:t>
+            </a:r>
+          </a:p>
+          <a:p>
+            <a:pPr algn="r" rtl="1">
+              <a:defRPr sz="1600"/>
+            </a:pPr>
+            <a:r>
+              <a:t>• בכל פעם שהקרן מגיעה לקצה (אופקי או אנכי), נדרש זמן כדי להחזיר אותה לנקודת ההתחלה (Retrace).</a:t>
             </a:r>
           </a:p>
         </p:txBody>
       </p:sp>
       <p:pic>
         <p:nvPicPr>
-          <p:cNvPr id="4" name="Picture 3" descr="vga_raster_scan_timing.png"/>
+          <p:cNvPr id="4" name="Picture 3" descr="vga_raster_scan_retrace_concept.png"/>
           <p:cNvPicPr>
             <a:picLocks noChangeAspect="1"/>
           </p:cNvPicPr>
@@ -3972,8 +4058,8 @@
         </p:blipFill>
         <p:spPr>
           <a:xfrm>
-            <a:off x="1828800" y="2743200"/>
-            <a:ext cx="5486400" cy="5373858"/>
+            <a:off x="2286000" y="2743200"/>
+            <a:ext cx="4114800" cy="3335154"/>
           </a:xfrm>
           <a:prstGeom prst="rect">
             <a:avLst/>
@@ -4015,12 +4101,7 @@
           <a:p>
             <a:pPr rtl="1" algn="ctr"/>
             <a:r>
-              <a:t>ממשק ה-VGA:</a:t>
-            </a:r>
-          </a:p>
-          <a:p>
-            <a:r>
-              <a:t>מהלוגיקה האנלוגית לדיגיטלית</a:t>
+              <a:t>מרחב התצוגה: אזור פעיל מול זמני החשכה</a:t>
             </a:r>
           </a:p>
         </p:txBody>
@@ -4033,7 +4114,7 @@
         </p:nvSpPr>
         <p:spPr>
           <a:xfrm>
-            <a:off x="457200" y="1371600"/>
+            <a:off x="457200" y="1097280"/>
             <a:ext cx="8229600" cy="1371600"/>
           </a:xfrm>
           <a:prstGeom prst="rect">
@@ -4049,33 +4130,33 @@
           <a:p/>
           <a:p>
             <a:pPr algn="r" rtl="1">
-              <a:defRPr sz="1800"/>
+              <a:defRPr sz="1600"/>
             </a:pPr>
             <a:r>
-              <a:t>• שעון הפיקסל מנהל את קצב הסריקה של קרן האלקטרונים על המסך.</a:t>
+              <a:t>• אזור פעיל (Active Region): החלק במרכז המסך שבו משודרים נתוני התמונה בפועל (כגון 640x480).</a:t>
             </a:r>
           </a:p>
           <a:p>
             <a:pPr algn="r" rtl="1">
-              <a:defRPr sz="1800"/>
+              <a:defRPr sz="1600"/>
             </a:pPr>
             <a:r>
-              <a:t>• אותות הסנכרון שולטים בסלילי ההטיה המכוונים את מיקום הקרן.</a:t>
+              <a:t>• זמני השהייה (Front/Back Porch): 'שוליים' של זמן שנועדו לייצב את האות לפני ואחרי הסנכרון.</a:t>
             </a:r>
           </a:p>
           <a:p>
             <a:pPr algn="r" rtl="1">
-              <a:defRPr sz="1800"/>
+              <a:defRPr sz="1600"/>
             </a:pPr>
             <a:r>
-              <a:t>• באזור תצוגה פעיל, הלוגיקה משחררת את נתוני ה-RGB לתותחי האלקטרונים.</a:t>
+              <a:t>• זמן סנכרון (Sync Pulse): פקודה פיזית למסך להחזיר את הקרן אחורה. בזמן זה הקרן חייבת להיות מוחשכת (Blanking).</a:t>
             </a:r>
           </a:p>
         </p:txBody>
       </p:sp>
       <p:pic>
         <p:nvPicPr>
-          <p:cNvPr id="4" name="Picture 3" descr="vga_analog_cathode_ray_concept.png"/>
+          <p:cNvPr id="4" name="Picture 3" descr="vga_active_vs_blanking_regions.png"/>
           <p:cNvPicPr>
             <a:picLocks noChangeAspect="1"/>
           </p:cNvPicPr>
@@ -4090,7 +4171,7 @@
         <p:spPr>
           <a:xfrm>
             <a:off x="2286000" y="2926080"/>
-            <a:ext cx="4114800" cy="3272282"/>
+            <a:ext cx="4572000" cy="3687417"/>
           </a:xfrm>
           <a:prstGeom prst="rect">
             <a:avLst/>
@@ -4132,7 +4213,7 @@
           <a:p>
             <a:pPr rtl="1" algn="ctr"/>
             <a:r>
-              <a:t>ממשק ה-VGA: תזמונים ורזולוציה</a:t>
+              <a:t>תזמונים והחשכה (VGA controller)</a:t>
             </a:r>
           </a:p>
         </p:txBody>
@@ -4145,8 +4226,8 @@
         </p:nvSpPr>
         <p:spPr>
           <a:xfrm>
-            <a:off x="4572000" y="1371600"/>
-            <a:ext cx="4114800" cy="4572000"/>
+            <a:off x="457200" y="1097280"/>
+            <a:ext cx="8229600" cy="1371600"/>
           </a:xfrm>
           <a:prstGeom prst="rect">
             <a:avLst/>
@@ -4158,45 +4239,19 @@
             <a:spAutoFit/>
           </a:bodyPr>
           <a:lstStyle/>
-          <a:p/>
           <a:p>
             <a:pPr algn="r" rtl="1">
-              <a:spcAft>
-                <a:spcPts val="1000"/>
-              </a:spcAft>
               <a:defRPr sz="1600"/>
             </a:pPr>
             <a:r>
-              <a:t>• עבודה ברזולוציה סטנדרטית של 640 על 480 פיקסלים בקצב של 60 הרץ.</a:t>
-            </a:r>
-          </a:p>
-          <a:p>
-            <a:pPr algn="r" rtl="1">
-              <a:spcAft>
-                <a:spcPts val="1000"/>
-              </a:spcAft>
-              <a:defRPr sz="1600"/>
-            </a:pPr>
-            <a:r>
-              <a:t>• דורש שעון פיקסל (Pixel Clock) מדויק בתדר של 25.175 מגה-הרץ.</a:t>
-            </a:r>
-          </a:p>
-          <a:p>
-            <a:pPr algn="r" rtl="1">
-              <a:spcAft>
-                <a:spcPts val="1000"/>
-              </a:spcAft>
-              <a:defRPr sz="1600"/>
-            </a:pPr>
-            <a:r>
-              <a:t>• חלוקת מרחב התצוגה לאזור פעיל (Active Region) ואזורי השהייה (Front/Back Porch ו-Sync).</a:t>
+              <a:t>מוני ה-horizontal וה-vertical מנוהלים על ידי שעון 25 MHz ומחשבים את מיקום הקרן. בזמני ה-porch וה-sync pulse, היציאות נדחפות ל-0000 כדי לאפשר את חזרת הקרן (blanking).</a:t>
             </a:r>
           </a:p>
         </p:txBody>
       </p:sp>
       <p:pic>
         <p:nvPicPr>
-          <p:cNvPr id="4" name="Picture 3" descr="vga_active_vs_blanking_regions.png"/>
+          <p:cNvPr id="4" name="Picture 3" descr="vga_counters_rtl_schematic.png"/>
           <p:cNvPicPr>
             <a:picLocks noChangeAspect="1"/>
           </p:cNvPicPr>
@@ -4210,8 +4265,32 @@
         </p:blipFill>
         <p:spPr>
           <a:xfrm>
-            <a:off x="457200" y="1645920"/>
-            <a:ext cx="3840480" cy="3097431"/>
+            <a:off x="457200" y="2560320"/>
+            <a:ext cx="4114800" cy="2047875"/>
+          </a:xfrm>
+          <a:prstGeom prst="rect">
+            <a:avLst/>
+          </a:prstGeom>
+        </p:spPr>
+      </p:pic>
+      <p:pic>
+        <p:nvPicPr>
+          <p:cNvPr id="5" name="Picture 4" descr="vga_timing_waveform_and_table.png"/>
+          <p:cNvPicPr>
+            <a:picLocks noChangeAspect="1"/>
+          </p:cNvPicPr>
+          <p:nvPr/>
+        </p:nvPicPr>
+        <p:blipFill>
+          <a:blip r:embed="rId3"/>
+          <a:stretch>
+            <a:fillRect/>
+          </a:stretch>
+        </p:blipFill>
+        <p:spPr>
+          <a:xfrm>
+            <a:off x="4754880" y="2377440"/>
+            <a:ext cx="3657600" cy="3623733"/>
           </a:xfrm>
           <a:prstGeom prst="rect">
             <a:avLst/>
@@ -4253,7 +4332,7 @@
           <a:p>
             <a:pPr rtl="1" algn="ctr"/>
             <a:r>
-              <a:t>ממשק ה-VGA: מונים וסריקה קווית (Raster Scan)</a:t>
+              <a:t>מסלול הנתונים: חישוב כתובת הפיקסל ושליפה</a:t>
             </a:r>
           </a:p>
         </p:txBody>
@@ -4266,8 +4345,8 @@
         </p:nvSpPr>
         <p:spPr>
           <a:xfrm>
-            <a:off x="4572000" y="1371600"/>
-            <a:ext cx="4114800" cy="4572000"/>
+            <a:off x="457200" y="1097280"/>
+            <a:ext cx="8229600" cy="1371600"/>
           </a:xfrm>
           <a:prstGeom prst="rect">
             <a:avLst/>
@@ -4282,42 +4361,33 @@
           <a:p/>
           <a:p>
             <a:pPr algn="r" rtl="1">
-              <a:spcAft>
-                <a:spcPts val="1000"/>
-              </a:spcAft>
               <a:defRPr sz="1600"/>
             </a:pPr>
             <a:r>
-              <a:t>• תנועת זיגזג: סריקה מהירה משמאל לימין (Horizontal Retrace) שורה אחר שורה.</a:t>
+              <a:t>• מיקום הקרן (X,Y): המונים hsync_reg ו-vsync_reg מפיקים את הקואורדינטות הדינמיות display_x ו-display_y בתוך האזור הפעיל.</a:t>
             </a:r>
           </a:p>
           <a:p>
             <a:pPr algn="r" rtl="1">
-              <a:spcAft>
-                <a:spcPts val="1000"/>
-              </a:spcAft>
               <a:defRPr sz="1600"/>
             </a:pPr>
             <a:r>
-              <a:t>• מונה אופקי סופר 800 מחזורים (640 פעילים + 160 להחשכה וסנכרון).</a:t>
+              <a:t>• תרגום לכתובת ליניארית: הקואורדינטה מתורגמת מתמטית לכתובת הזיכרון bram_address_next ונשלחת החוצה דרך האות addrb.</a:t>
             </a:r>
           </a:p>
           <a:p>
             <a:pPr algn="r" rtl="1">
-              <a:spcAft>
-                <a:spcPts val="1000"/>
-              </a:spcAft>
               <a:defRPr sz="1600"/>
             </a:pPr>
             <a:r>
-              <a:t>• מונה אנכית סופר 521 שורות (480 פעילות), ובסיומן מבצע Vertical Retrace חזרה לראש המסך.</a:t>
+              <a:t>• שליפה מה-BRAM: רכיב ה-frame_buffer מקבל את הכתובת ומשחרר את 12 הביטים של הפיקסל היישר אל האות doutb של בקר ה-VGA.</a:t>
             </a:r>
           </a:p>
         </p:txBody>
       </p:sp>
       <p:pic>
         <p:nvPicPr>
-          <p:cNvPr id="4" name="Picture 3" descr="vga_raster_scan_retrace_concept.png"/>
+          <p:cNvPr id="4" name="Picture 3" descr="vga_address_bram_flow.png"/>
           <p:cNvPicPr>
             <a:picLocks noChangeAspect="1"/>
           </p:cNvPicPr>
@@ -4331,8 +4401,8 @@
         </p:blipFill>
         <p:spPr>
           <a:xfrm>
-            <a:off x="457200" y="1645920"/>
-            <a:ext cx="3840480" cy="3112810"/>
+            <a:off x="2286000" y="2926080"/>
+            <a:ext cx="4572000" cy="2635032"/>
           </a:xfrm>
           <a:prstGeom prst="rect">
             <a:avLst/>
@@ -4374,7 +4444,7 @@
           <a:p>
             <a:pPr rtl="1" algn="ctr"/>
             <a:r>
-              <a:t>ממשק ה-VGA: ארכיטקטורה וניהול BRAM</a:t>
+              <a:t>עיבוד הפיקסל: ניתוב ל-RGB ומנגנון ה-Blanking</a:t>
             </a:r>
           </a:p>
         </p:txBody>
@@ -4387,8 +4457,8 @@
         </p:nvSpPr>
         <p:spPr>
           <a:xfrm>
-            <a:off x="4572000" y="1371600"/>
-            <a:ext cx="4114800" cy="4572000"/>
+            <a:off x="457200" y="1097280"/>
+            <a:ext cx="8229600" cy="1371600"/>
           </a:xfrm>
           <a:prstGeom prst="rect">
             <a:avLst/>
@@ -4403,42 +4473,33 @@
           <a:p/>
           <a:p>
             <a:pPr algn="r" rtl="1">
-              <a:spcAft>
-                <a:spcPts val="1000"/>
-              </a:spcAft>
               <a:defRPr sz="1600"/>
             </a:pPr>
             <a:r>
-              <a:t>• הפרדת רשויות: רכיב ה-vga_sync מנהל את שעוני הסנכרון והכתובת (Pixel X/Y).</a:t>
+              <a:t>• רישום ופיצול: הנתונים מ-doutb ננעלים באוגר pxl_data_reg ומפוצלים לשגרירים: vga_r_int (ביטים 11:8), vga_g_int (7:4) ו-vga_b_int (3:0).</a:t>
             </a:r>
           </a:p>
           <a:p>
             <a:pPr algn="r" rtl="1">
-              <a:spcAft>
-                <a:spcPts val="1000"/>
-              </a:spcAft>
               <a:defRPr sz="1600"/>
             </a:pPr>
             <a:r>
-              <a:t>• מנגנון ההשתקה (Blanking): מחוץ לאזור הפעיל, ערכי ה-RGB מאולצים להתאפס (שחור מוחלט).</a:t>
+              <a:t>• שומר הסף: האות in_display_area_delayed משמש כדגל המזהה האם הקרן מצוירת כעת על המסך או נמצאת מחוץ לתצוגה.</a:t>
             </a:r>
           </a:p>
           <a:p>
             <a:pPr algn="r" rtl="1">
-              <a:spcAft>
-                <a:spcPts val="1000"/>
-              </a:spcAft>
               <a:defRPr sz="1600"/>
             </a:pPr>
             <a:r>
-              <a:t>• שליפת נתונים מותנית: זיכרון ה-BRAM משחרר פיקסלים אך ורק כשהקרן נמצאת באזור המורשה.</a:t>
+              <a:t>• סינון דיגיטלי (Mux): כאשר הדגל ב-'1', ערכי ה-RGB מועברים ליציאות VGA_R/G/B. בזמני ה-Porch וה-Sync, היציאות נאלצות ל-"0000" (שחור מוחלט).</a:t>
             </a:r>
           </a:p>
         </p:txBody>
       </p:sp>
       <p:pic>
         <p:nvPicPr>
-          <p:cNvPr id="4" name="Picture 3" descr="vga_fpga_top_architecture.png"/>
+          <p:cNvPr id="4" name="Picture 3" descr="vga_rgb_video_on_logic.png"/>
           <p:cNvPicPr>
             <a:picLocks noChangeAspect="1"/>
           </p:cNvPicPr>
@@ -4452,8 +4513,8 @@
         </p:blipFill>
         <p:spPr>
           <a:xfrm>
-            <a:off x="457200" y="1645920"/>
-            <a:ext cx="3840480" cy="2102409"/>
+            <a:off x="2286000" y="2926080"/>
+            <a:ext cx="4572000" cy="2167573"/>
           </a:xfrm>
           <a:prstGeom prst="rect">
             <a:avLst/>
@@ -4495,7 +4556,7 @@
           <a:p>
             <a:pPr rtl="1" algn="ctr"/>
             <a:r>
-              <a:t>ממשק ה-VGA: סימולציה ומימוש מעשי</a:t>
+              <a:t>המרת DAC אנלוגית ומחבר ה-VGA</a:t>
             </a:r>
           </a:p>
         </p:txBody>
@@ -4508,8 +4569,8 @@
         </p:nvSpPr>
         <p:spPr>
           <a:xfrm>
-            <a:off x="4572000" y="1371600"/>
-            <a:ext cx="4114800" cy="4572000"/>
+            <a:off x="457200" y="1005840"/>
+            <a:ext cx="8229600" cy="914400"/>
           </a:xfrm>
           <a:prstGeom prst="rect">
             <a:avLst/>
@@ -4524,42 +4585,25 @@
           <a:p/>
           <a:p>
             <a:pPr algn="r" rtl="1">
-              <a:spcAft>
-                <a:spcPts val="1000"/>
-              </a:spcAft>
               <a:defRPr sz="1600"/>
             </a:pPr>
             <a:r>
-              <a:t>• מימוש מעגל המונים (Horiz &amp; Vert) עם חיווט מלא של הפרמטרים התקניים.</a:t>
+              <a:t>• סולם נגדים (Resistor Network): המרת 12 ביטי ה-RGB למתח אנלוגי רציף באמצעות משקולות נגדים (510Ω עד 4KΩ).</a:t>
             </a:r>
           </a:p>
           <a:p>
             <a:pPr algn="r" rtl="1">
-              <a:spcAft>
-                <a:spcPts val="1000"/>
-              </a:spcAft>
               <a:defRPr sz="1600"/>
             </a:pPr>
             <a:r>
-              <a:t>• בקרת אותות ה-HSYNC, VSYNC וערוצי הצבע (R, G, B).</a:t>
-            </a:r>
-          </a:p>
-          <a:p>
-            <a:pPr algn="r" rtl="1">
-              <a:spcAft>
-                <a:spcPts val="1000"/>
-              </a:spcAft>
-              <a:defRPr sz="1600"/>
-            </a:pPr>
-            <a:r>
-              <a:t>• הצגת תבנית בדיקה ויזואלית המוכיח סנכרון מושלם ותדר שעון יציב ברזולוציית היעד.</a:t>
+              <a:t>• אותות סנכרון (B11 / B12): פיני היציאה מוגנים באמצעות נגדי 100Ω ומזינים ישירות את מחבר ה-DB15 של המסך.</a:t>
             </a:r>
           </a:p>
         </p:txBody>
       </p:sp>
       <p:pic>
         <p:nvPicPr>
-          <p:cNvPr id="4" name="Picture 3" descr="vga_counters_logic_flow.png"/>
+          <p:cNvPr id="4" name="Picture 3" descr="vga_dac_resistor_network.png"/>
           <p:cNvPicPr>
             <a:picLocks noChangeAspect="1"/>
           </p:cNvPicPr>
@@ -4573,8 +4617,32 @@
         </p:blipFill>
         <p:spPr>
           <a:xfrm>
-            <a:off x="457200" y="1645920"/>
-            <a:ext cx="3840480" cy="1506650"/>
+            <a:off x="457200" y="2103120"/>
+            <a:ext cx="4023360" cy="4992221"/>
+          </a:xfrm>
+          <a:prstGeom prst="rect">
+            <a:avLst/>
+          </a:prstGeom>
+        </p:spPr>
+      </p:pic>
+      <p:pic>
+        <p:nvPicPr>
+          <p:cNvPr id="5" name="Picture 4" descr="vga_db15_connector_pins.png"/>
+          <p:cNvPicPr>
+            <a:picLocks noChangeAspect="1"/>
+          </p:cNvPicPr>
+          <p:nvPr/>
+        </p:nvPicPr>
+        <p:blipFill>
+          <a:blip r:embed="rId3"/>
+          <a:stretch>
+            <a:fillRect/>
+          </a:stretch>
+        </p:blipFill>
+        <p:spPr>
+          <a:xfrm>
+            <a:off x="4663440" y="2286000"/>
+            <a:ext cx="4023360" cy="3205277"/>
           </a:xfrm>
           <a:prstGeom prst="rect">
             <a:avLst/>
@@ -4614,9 +4682,9 @@
           <a:bodyPr/>
           <a:lstStyle/>
           <a:p>
-            <a:pPr rtl="1"/>
-            <a:r>
-              <a:t>מקרה בוחן 1: תזמון ירידת שורה (Horizontal Blanking)</a:t>
+            <a:pPr rtl="1" algn="ctr"/>
+            <a:r>
+              <a:t>עומק הנדסי: מחלק המתח ומשקלי הביטים</a:t>
             </a:r>
           </a:p>
         </p:txBody>
@@ -4629,8 +4697,8 @@
         </p:nvSpPr>
         <p:spPr>
           <a:xfrm>
-            <a:off x="457200" y="1005840"/>
-            <a:ext cx="8229600" cy="731520"/>
+            <a:off x="457200" y="1097280"/>
+            <a:ext cx="8229600" cy="1371600"/>
           </a:xfrm>
           <a:prstGeom prst="rect">
             <a:avLst/>
@@ -4648,11 +4716,51 @@
               <a:defRPr sz="1600"/>
             </a:pPr>
             <a:r>
-              <a:t>ניהול המונים (Horizontal/Vertical) ושליטה במנגנון ההחשכה (Blanking) לחזרת הקרן.</a:t>
-            </a:r>
-          </a:p>
-        </p:txBody>
-      </p:sp>
+              <a:t>• משקל פיזי לכל ביט (MSB לעומת LSB): הביט המשמעותי ביותר (MSB) מחובר לנגד הקטן ביותר, ולכן מזזרים את הזרם הגדול ביותר למעגל ומשפיע משמעותית על עוצמת הצבע.</a:t>
+            </a:r>
+          </a:p>
+          <a:p>
+            <a:pPr algn="r" rtl="1">
+              <a:defRPr sz="1600"/>
+            </a:pPr>
+            <a:r>
+              <a:t>• כוונון עדין: לעומתו, הביט הפחות משמעותי (LSB) מחובר לנגד הגדול ביותר בסולם. תרומתו לזרם הכולל היא מזערית ונועדה לכוונון עדין של הגוון.</a:t>
+            </a:r>
+          </a:p>
+          <a:p>
+            <a:pPr algn="r" rtl="1">
+              <a:defRPr sz="1600"/>
+            </a:pPr>
+            <a:r>
+              <a:t>• סכימה אנלוגית על המסך: כל הזרמים מהביטים הפעילים ('1') מתחברים וזורמים יחד דרך נגד הסיומת של המסך (75Ω) אל האדמה. כך נוצר מחלק מתח דינמי המפיק 0V עד 0.7V.</a:t>
+            </a:r>
+          </a:p>
+        </p:txBody>
+      </p:sp>
+      <p:pic>
+        <p:nvPicPr>
+          <p:cNvPr id="4" name="Picture 3" descr="vga_voltage_divider_dac.png"/>
+          <p:cNvPicPr>
+            <a:picLocks noChangeAspect="1"/>
+          </p:cNvPicPr>
+          <p:nvPr/>
+        </p:nvPicPr>
+        <p:blipFill>
+          <a:blip r:embed="rId2"/>
+          <a:stretch>
+            <a:fillRect/>
+          </a:stretch>
+        </p:blipFill>
+        <p:spPr>
+          <a:xfrm>
+            <a:off x="1371600" y="2926080"/>
+            <a:ext cx="6400800" cy="4800600"/>
+          </a:xfrm>
+          <a:prstGeom prst="rect">
+            <a:avLst/>
+          </a:prstGeom>
+        </p:spPr>
+      </p:pic>
     </p:spTree>
   </p:cSld>
   <p:clrMapOvr>

--- a/docs/presentation/output/VGA_Presentation_Yossi.pptx
+++ b/docs/presentation/output/VGA_Presentation_Yossi.pptx
@@ -15,7 +15,6 @@
     <p:sldId id="263" r:id="rId14"/>
     <p:sldId id="264" r:id="rId15"/>
     <p:sldId id="265" r:id="rId16"/>
-    <p:sldId id="266" r:id="rId17"/>
   </p:sldIdLst>
   <p:sldSz cx="9144000" cy="6858000" type="screen4x3"/>
   <p:notesSz cx="6858000" cy="9144000"/>
@@ -3105,56 +3104,48 @@
             <a:spLocks noGrp="1"/>
           </p:cNvSpPr>
           <p:nvPr>
-            <p:ph type="title"/>
-          </p:nvPr>
-        </p:nvSpPr>
-        <p:spPr/>
-        <p:txBody>
-          <a:bodyPr/>
-          <a:lstStyle/>
-          <a:p>
-            <a:pPr rtl="1" algn="ctr"/>
-            <a:r>
-              <a:t>פיתוח מערכת מבוססת FPGA להתראת נפילה לחולי דמנציה</a:t>
-            </a:r>
-          </a:p>
-        </p:txBody>
-      </p:sp>
-      <p:sp>
-        <p:nvSpPr>
-          <p:cNvPr id="3" name="TextBox 2"/>
-          <p:cNvSpPr txBox="1"/>
-          <p:nvPr/>
-        </p:nvSpPr>
-        <p:spPr>
-          <a:xfrm>
-            <a:off x="457200" y="1188720"/>
-            <a:ext cx="8229600" cy="457200"/>
-          </a:xfrm>
-          <a:prstGeom prst="rect">
-            <a:avLst/>
-          </a:prstGeom>
-          <a:noFill/>
-        </p:spPr>
-        <p:txBody>
-          <a:bodyPr wrap="none">
-            <a:spAutoFit/>
-          </a:bodyPr>
-          <a:lstStyle/>
-          <a:p>
-            <a:pPr algn="ctr" rtl="1">
-              <a:defRPr sz="2000"/>
+            <p:ph type="ctrTitle"/>
+          </p:nvPr>
+        </p:nvSpPr>
+        <p:spPr/>
+        <p:txBody>
+          <a:bodyPr/>
+          <a:lstStyle/>
+          <a:p>
+            <a:pPr algn="ctr">
+              <a:defRPr/>
             </a:pPr>
             <a:r>
-              <a:t>קליטת תמונה בזמן אמת ממצלמת OV7670 והצגתה דרך כרטיס Artix-7.</a:t>
-            </a:r>
-          </a:p>
-          <a:p>
-            <a:pPr algn="ctr" rtl="1">
-              <a:defRPr sz="1700"/>
+              <a:t>פיתוח מערכת משובצת מחשב לזיהוי נפילות בזמן אמת</a:t>
+            </a:r>
+          </a:p>
+        </p:txBody>
+      </p:sp>
+      <p:sp>
+        <p:nvSpPr>
+          <p:cNvPr id="3" name="Subtitle 2"/>
+          <p:cNvSpPr>
+            <a:spLocks noGrp="1"/>
+          </p:cNvSpPr>
+          <p:nvPr>
+            <p:ph type="subTitle" idx="1"/>
+          </p:nvPr>
+        </p:nvSpPr>
+        <p:spPr/>
+        <p:txBody>
+          <a:bodyPr/>
+          <a:lstStyle/>
+          <a:p>
+            <a:pPr algn="ctr">
+              <a:defRPr/>
             </a:pPr>
             <a:r>
-              <a:t>על מנת לאפשר עיבוד תמונה לזיהויי עמידה ממושכת לחולי דמנציה.</a:t>
+              <a:t>מימוש חומרתי על כרטיס Artix-7 (Basys 3)</a:t>
+            </a:r>
+          </a:p>
+          <a:p>
+            <a:r>
+              <a:t>ממשק VGA ותקשורת מצלמה</a:t>
             </a:r>
           </a:p>
         </p:txBody>
@@ -3175,45 +3166,14 @@
         </p:blipFill>
         <p:spPr>
           <a:xfrm>
-            <a:off x="2286000" y="1828800"/>
-            <a:ext cx="4572000" cy="3400527"/>
+            <a:off x="2743200" y="4114800"/>
+            <a:ext cx="3657600" cy="2720421"/>
           </a:xfrm>
           <a:prstGeom prst="rect">
             <a:avLst/>
           </a:prstGeom>
         </p:spPr>
       </p:pic>
-      <p:sp>
-        <p:nvSpPr>
-          <p:cNvPr id="5" name="TextBox 4"/>
-          <p:cNvSpPr txBox="1"/>
-          <p:nvPr/>
-        </p:nvSpPr>
-        <p:spPr>
-          <a:xfrm>
-            <a:off x="457200" y="5760720"/>
-            <a:ext cx="8229600" cy="457200"/>
-          </a:xfrm>
-          <a:prstGeom prst="rect">
-            <a:avLst/>
-          </a:prstGeom>
-          <a:noFill/>
-        </p:spPr>
-        <p:txBody>
-          <a:bodyPr wrap="none">
-            <a:spAutoFit/>
-          </a:bodyPr>
-          <a:lstStyle/>
-          <a:p>
-            <a:pPr algn="ctr" rtl="1">
-              <a:defRPr sz="2200" b="1"/>
-            </a:pPr>
-            <a:r>
-              <a:t>מגיש: יוסי ברים | הנדסת חשמל שנה ד| המרכז האקדמי לב</a:t>
-            </a:r>
-          </a:p>
-        </p:txBody>
-      </p:sp>
     </p:spTree>
   </p:cSld>
   <p:clrMapOvr>
@@ -3247,9 +3207,11 @@
           <a:bodyPr/>
           <a:lstStyle/>
           <a:p>
-            <a:pPr rtl="1"/>
-            <a:r>
-              <a:t>מקרה בוחן 1: תזמון ירידת שורה (Horizontal Blanking)</a:t>
+            <a:pPr algn="ctr">
+              <a:defRPr/>
+            </a:pPr>
+            <a:r>
+              <a:t>עומק הנדסי: מחלק המתח ומשקלי הביטים</a:t>
             </a:r>
           </a:p>
         </p:txBody>
@@ -3262,8 +3224,8 @@
         </p:nvSpPr>
         <p:spPr>
           <a:xfrm>
-            <a:off x="457200" y="1005840"/>
-            <a:ext cx="8229600" cy="731520"/>
+            <a:off x="457200" y="1097280"/>
+            <a:ext cx="8229600" cy="1371600"/>
           </a:xfrm>
           <a:prstGeom prst="rect">
             <a:avLst/>
@@ -3277,87 +3239,55 @@
           <a:lstStyle/>
           <a:p/>
           <a:p>
-            <a:pPr algn="r" rtl="1">
-              <a:defRPr sz="1600"/>
+            <a:pPr algn="r">
+              <a:defRPr sz="1800"/>
             </a:pPr>
             <a:r>
-              <a:t>ניהול המונים (Horizontal/Vertical) ושליטה במנגנון ההחשכה (Blanking) לחזרת הקרן.</a:t>
-            </a:r>
-          </a:p>
-        </p:txBody>
-      </p:sp>
-    </p:spTree>
-  </p:cSld>
-  <p:clrMapOvr>
-    <a:masterClrMapping/>
-  </p:clrMapOvr>
-</p:sld>
-</file>
-
-<file path=ppt/slides/slide11.xml><?xml version="1.0" encoding="utf-8"?>
-<p:sld xmlns:a="http://schemas.openxmlformats.org/drawingml/2006/main" xmlns:p="http://schemas.openxmlformats.org/presentationml/2006/main" xmlns:r="http://schemas.openxmlformats.org/officeDocument/2006/relationships">
-  <p:cSld>
-    <p:spTree>
-      <p:nvGrpSpPr>
-        <p:cNvPr id="1" name=""/>
-        <p:cNvGrpSpPr/>
-        <p:nvPr/>
-      </p:nvGrpSpPr>
-      <p:grpSpPr/>
-      <p:sp>
-        <p:nvSpPr>
-          <p:cNvPr id="2" name="Title 1"/>
-          <p:cNvSpPr>
-            <a:spLocks noGrp="1"/>
-          </p:cNvSpPr>
-          <p:nvPr>
-            <p:ph type="title"/>
-          </p:nvPr>
-        </p:nvSpPr>
-        <p:spPr/>
-        <p:txBody>
-          <a:bodyPr/>
-          <a:lstStyle/>
-          <a:p>
-            <a:pPr rtl="1"/>
-            <a:r>
-              <a:t>מקרה בוחן 2: מ-RGB דיגיטלי ליציאה אנלוגית</a:t>
-            </a:r>
-          </a:p>
-        </p:txBody>
-      </p:sp>
-      <p:sp>
-        <p:nvSpPr>
-          <p:cNvPr id="3" name="TextBox 2"/>
-          <p:cNvSpPr txBox="1"/>
+              <a:t>• משקל פיזי לכל ביט (MSB לעומת LSB): ה-MSB מחובר לנגד הקטן ביותר, מזרים את הזרם הגדול ביותר ומשפיע משמעותית על הצבע.</a:t>
+            </a:r>
+          </a:p>
+          <a:p>
+            <a:pPr algn="r">
+              <a:defRPr sz="1800"/>
+            </a:pPr>
+            <a:r>
+              <a:t>• כוונון עדין: ה-LSB מחובר לנגד הגדול ביותר בסולם ומשמש לכוונון עדין של הגוון.</a:t>
+            </a:r>
+          </a:p>
+          <a:p>
+            <a:pPr algn="r">
+              <a:defRPr sz="1800"/>
+            </a:pPr>
+            <a:r>
+              <a:t>• סכימה אנלוגית על המסך: כל הזרמים מתחברים וזורמים דרך נגד הסיומת של המסך (75Ω). כך נוצר מחלק מתח המפיק 0V-0.7V.</a:t>
+            </a:r>
+          </a:p>
+        </p:txBody>
+      </p:sp>
+      <p:pic>
+        <p:nvPicPr>
+          <p:cNvPr id="4" name="Picture 3" descr="vga_voltage_divider_dac.png"/>
+          <p:cNvPicPr>
+            <a:picLocks noChangeAspect="1"/>
+          </p:cNvPicPr>
           <p:nvPr/>
-        </p:nvSpPr>
+        </p:nvPicPr>
+        <p:blipFill>
+          <a:blip r:embed="rId2"/>
+          <a:stretch>
+            <a:fillRect/>
+          </a:stretch>
+        </p:blipFill>
         <p:spPr>
           <a:xfrm>
-            <a:off x="457200" y="1005840"/>
-            <a:ext cx="8229600" cy="731520"/>
+            <a:off x="1371600" y="2926080"/>
+            <a:ext cx="6400800" cy="4800600"/>
           </a:xfrm>
           <a:prstGeom prst="rect">
             <a:avLst/>
           </a:prstGeom>
-          <a:noFill/>
         </p:spPr>
-        <p:txBody>
-          <a:bodyPr wrap="none">
-            <a:spAutoFit/>
-          </a:bodyPr>
-          <a:lstStyle/>
-          <a:p/>
-          <a:p>
-            <a:pPr algn="r" rtl="1">
-              <a:defRPr sz="1600"/>
-            </a:pPr>
-            <a:r>
-              <a:t>המרת 12 ביטים של צבע (RGB) למתח פיזי רציף באמצעות רשת נגדים (DAC) ומחבר ה-VGA.</a:t>
-            </a:r>
-          </a:p>
-        </p:txBody>
-      </p:sp>
+      </p:pic>
     </p:spTree>
   </p:cSld>
   <p:clrMapOvr>
@@ -3391,9 +3321,11 @@
           <a:bodyPr/>
           <a:lstStyle/>
           <a:p>
-            <a:pPr rtl="1"/>
-            <a:r>
-              <a:t>ארכיטקטורת המערכת</a:t>
+            <a:pPr algn="ctr">
+              <a:defRPr/>
+            </a:pPr>
+            <a:r>
+              <a:t>ארכיטקטורת המערכת וזרימת הנתונים</a:t>
             </a:r>
           </a:p>
         </p:txBody>
@@ -3407,7 +3339,7 @@
         <p:spPr>
           <a:xfrm>
             <a:off x="457200" y="1097280"/>
-            <a:ext cx="8229600" cy="914400"/>
+            <a:ext cx="8229600" cy="1371600"/>
           </a:xfrm>
           <a:prstGeom prst="rect">
             <a:avLst/>
@@ -3421,535 +3353,27 @@
           <a:lstStyle/>
           <a:p/>
           <a:p>
-            <a:pPr algn="r" rtl="1">
+            <a:pPr algn="r">
               <a:defRPr sz="1800"/>
             </a:pPr>
             <a:r>
-              <a:t>נתוני התמונה הגולמיים נקלטים מהמצלמה ונאגרים בזיכרון ה-BRAM.</a:t>
-            </a:r>
-          </a:p>
-          <a:p>
-            <a:pPr algn="r" rtl="1">
+              <a:t>• איסוף נתונים: מצלמת OV7670 דוגמת את הווידאו ומעבירה אותו דרך בקר ייעודי.</a:t>
+            </a:r>
+          </a:p>
+          <a:p>
+            <a:pPr algn="r">
               <a:defRPr sz="1800"/>
             </a:pPr>
             <a:r>
-              <a:t>בקר ה-VGA שולף את הנתונים ומעביר לממיר D to A לקבלת אות אנלוגי פיזי למסך.</a:t>
-            </a:r>
-          </a:p>
-        </p:txBody>
-      </p:sp>
-      <p:sp>
-        <p:nvSpPr>
-          <p:cNvPr id="4" name="Rectangle 3"/>
-          <p:cNvSpPr/>
-          <p:nvPr/>
-        </p:nvSpPr>
-        <p:spPr>
-          <a:xfrm>
-            <a:off x="3474720" y="2194560"/>
-            <a:ext cx="2011680" cy="1645920"/>
-          </a:xfrm>
-          <a:prstGeom prst="rect">
-            <a:avLst/>
-          </a:prstGeom>
-          <a:solidFill>
-            <a:srgbClr val="000000"/>
-          </a:solidFill>
-        </p:spPr>
-        <p:style>
-          <a:lnRef idx="1">
-            <a:schemeClr val="accent1"/>
-          </a:lnRef>
-          <a:fillRef idx="3">
-            <a:schemeClr val="accent1"/>
-          </a:fillRef>
-          <a:effectRef idx="2">
-            <a:schemeClr val="accent1"/>
-          </a:effectRef>
-          <a:fontRef idx="minor">
-            <a:schemeClr val="lt1"/>
-          </a:fontRef>
-        </p:style>
-        <p:txBody>
-          <a:bodyPr rtlCol="0" anchor="ctr"/>
-          <a:lstStyle/>
-          <a:p>
-            <a:pPr algn="ctr" rtl="1">
-              <a:defRPr>
-                <a:solidFill>
-                  <a:srgbClr val="FFFFFF"/>
-                </a:solidFill>
-              </a:defRPr>
+              <a:t>• זיכרון מרכזי (Frame Buffer): הנתונים נשמרים בזיכרון BRAM המשמש חוצץ בין שעון המצלמה לשעון המסך.</a:t>
+            </a:r>
+          </a:p>
+          <a:p>
+            <a:pPr algn="r">
+              <a:defRPr sz="1800"/>
             </a:pPr>
             <a:r>
-              <a:t>מערכת התראת נפילה</a:t>
-            </a:r>
-            <a:br/>
-            <a:r>
-              <a:t>מבוסס FPGA</a:t>
-            </a:r>
-          </a:p>
-        </p:txBody>
-      </p:sp>
-      <p:sp>
-        <p:nvSpPr>
-          <p:cNvPr id="5" name="TextBox 4"/>
-          <p:cNvSpPr txBox="1"/>
-          <p:nvPr/>
-        </p:nvSpPr>
-        <p:spPr>
-          <a:xfrm>
-            <a:off x="1097280" y="1920240"/>
-            <a:ext cx="2286000" cy="1828800"/>
-          </a:xfrm>
-          <a:prstGeom prst="rect">
-            <a:avLst/>
-          </a:prstGeom>
-          <a:noFill/>
-        </p:spPr>
-        <p:txBody>
-          <a:bodyPr wrap="none">
-            <a:spAutoFit/>
-          </a:bodyPr>
-          <a:lstStyle/>
-          <a:p>
-            <a:pPr algn="r">
-              <a:defRPr sz="1300"/>
-            </a:pPr>
-            <a:r>
-              <a:t>Inputs:</a:t>
-            </a:r>
-            <a:br/>
-            <a:r>
-              <a:t>clk, reset</a:t>
-            </a:r>
-            <a:br/>
-            <a:r>
-              <a:t>ov7670_vsync, href, pclk</a:t>
-            </a:r>
-            <a:br/>
-            <a:r>
-              <a:t>ov7670_data[7:0]</a:t>
-            </a:r>
-            <a:br/>
-            <a:r>
-              <a:t>btn[1:0], sw[1:0]</a:t>
-            </a:r>
-            <a:br/>
-            <a:r>
-              <a:t>scl, sda</a:t>
-            </a:r>
-          </a:p>
-        </p:txBody>
-      </p:sp>
-      <p:sp>
-        <p:nvSpPr>
-          <p:cNvPr id="6" name="Right Arrow 5"/>
-          <p:cNvSpPr/>
-          <p:nvPr/>
-        </p:nvSpPr>
-        <p:spPr>
-          <a:xfrm>
-            <a:off x="2834640" y="2834640"/>
-            <a:ext cx="548640" cy="274320"/>
-          </a:xfrm>
-          <a:prstGeom prst="rightArrow">
-            <a:avLst/>
-          </a:prstGeom>
-        </p:spPr>
-        <p:style>
-          <a:lnRef idx="1">
-            <a:schemeClr val="accent1"/>
-          </a:lnRef>
-          <a:fillRef idx="3">
-            <a:schemeClr val="accent1"/>
-          </a:fillRef>
-          <a:effectRef idx="2">
-            <a:schemeClr val="accent1"/>
-          </a:effectRef>
-          <a:fontRef idx="minor">
-            <a:schemeClr val="lt1"/>
-          </a:fontRef>
-        </p:style>
-        <p:txBody>
-          <a:bodyPr rtlCol="0" anchor="ctr"/>
-          <a:lstStyle/>
-          <a:p>
-            <a:pPr algn="ctr"/>
-          </a:p>
-        </p:txBody>
-      </p:sp>
-      <p:sp>
-        <p:nvSpPr>
-          <p:cNvPr id="7" name="TextBox 6"/>
-          <p:cNvSpPr txBox="1"/>
-          <p:nvPr/>
-        </p:nvSpPr>
-        <p:spPr>
-          <a:xfrm>
-            <a:off x="5669280" y="1920240"/>
-            <a:ext cx="3200400" cy="1828800"/>
-          </a:xfrm>
-          <a:prstGeom prst="rect">
-            <a:avLst/>
-          </a:prstGeom>
-          <a:noFill/>
-        </p:spPr>
-        <p:txBody>
-          <a:bodyPr wrap="none">
-            <a:spAutoFit/>
-          </a:bodyPr>
-          <a:lstStyle/>
-          <a:p>
-            <a:pPr>
-              <a:defRPr sz="1300"/>
-            </a:pPr>
-            <a:r>
-              <a:t>Outputs:</a:t>
-            </a:r>
-            <a:br/>
-            <a:r>
-              <a:t>VGA_HS_O, VGA_VS_O</a:t>
-            </a:r>
-            <a:br/>
-            <a:r>
-              <a:t>VGA_R[3:0], G[3:0], B[3:0]</a:t>
-            </a:r>
-            <a:br/>
-            <a:r>
-              <a:t>ov7670_xclk, pwdn, reset</a:t>
-            </a:r>
-            <a:br/>
-            <a:r>
-              <a:t>led[3:0]</a:t>
-            </a:r>
-          </a:p>
-        </p:txBody>
-      </p:sp>
-      <p:sp>
-        <p:nvSpPr>
-          <p:cNvPr id="8" name="Right Arrow 7"/>
-          <p:cNvSpPr/>
-          <p:nvPr/>
-        </p:nvSpPr>
-        <p:spPr>
-          <a:xfrm>
-            <a:off x="5577840" y="2834640"/>
-            <a:ext cx="548640" cy="274320"/>
-          </a:xfrm>
-          <a:prstGeom prst="rightArrow">
-            <a:avLst/>
-          </a:prstGeom>
-        </p:spPr>
-        <p:style>
-          <a:lnRef idx="1">
-            <a:schemeClr val="accent1"/>
-          </a:lnRef>
-          <a:fillRef idx="3">
-            <a:schemeClr val="accent1"/>
-          </a:fillRef>
-          <a:effectRef idx="2">
-            <a:schemeClr val="accent1"/>
-          </a:effectRef>
-          <a:fontRef idx="minor">
-            <a:schemeClr val="lt1"/>
-          </a:fontRef>
-        </p:style>
-        <p:txBody>
-          <a:bodyPr rtlCol="0" anchor="ctr"/>
-          <a:lstStyle/>
-          <a:p>
-            <a:pPr algn="ctr"/>
-          </a:p>
-        </p:txBody>
-      </p:sp>
-      <p:sp>
-        <p:nvSpPr>
-          <p:cNvPr id="9" name="Rounded Rectangle 8"/>
-          <p:cNvSpPr/>
-          <p:nvPr/>
-        </p:nvSpPr>
-        <p:spPr>
-          <a:xfrm>
-            <a:off x="548640" y="4754880"/>
-            <a:ext cx="1554480" cy="731520"/>
-          </a:xfrm>
-          <a:prstGeom prst="roundRect">
-            <a:avLst/>
-          </a:prstGeom>
-          <a:solidFill>
-            <a:srgbClr val="4F81BD"/>
-          </a:solidFill>
-        </p:spPr>
-        <p:style>
-          <a:lnRef idx="1">
-            <a:schemeClr val="accent1"/>
-          </a:lnRef>
-          <a:fillRef idx="3">
-            <a:schemeClr val="accent1"/>
-          </a:fillRef>
-          <a:effectRef idx="2">
-            <a:schemeClr val="accent1"/>
-          </a:effectRef>
-          <a:fontRef idx="minor">
-            <a:schemeClr val="lt1"/>
-          </a:fontRef>
-        </p:style>
-        <p:txBody>
-          <a:bodyPr rtlCol="0" anchor="ctr"/>
-          <a:lstStyle/>
-          <a:p>
-            <a:pPr algn="ctr">
-              <a:defRPr sz="1400"/>
-            </a:pPr>
-            <a:r>
-              <a:t>ov7670_capture</a:t>
-            </a:r>
-          </a:p>
-        </p:txBody>
-      </p:sp>
-      <p:sp>
-        <p:nvSpPr>
-          <p:cNvPr id="10" name="Right Arrow 9"/>
-          <p:cNvSpPr/>
-          <p:nvPr/>
-        </p:nvSpPr>
-        <p:spPr>
-          <a:xfrm>
-            <a:off x="2103120" y="5029200"/>
-            <a:ext cx="457200" cy="182880"/>
-          </a:xfrm>
-          <a:prstGeom prst="rightArrow">
-            <a:avLst/>
-          </a:prstGeom>
-        </p:spPr>
-        <p:style>
-          <a:lnRef idx="1">
-            <a:schemeClr val="accent1"/>
-          </a:lnRef>
-          <a:fillRef idx="3">
-            <a:schemeClr val="accent1"/>
-          </a:fillRef>
-          <a:effectRef idx="2">
-            <a:schemeClr val="accent1"/>
-          </a:effectRef>
-          <a:fontRef idx="minor">
-            <a:schemeClr val="lt1"/>
-          </a:fontRef>
-        </p:style>
-        <p:txBody>
-          <a:bodyPr rtlCol="0" anchor="ctr"/>
-          <a:lstStyle/>
-          <a:p>
-            <a:pPr algn="ctr"/>
-          </a:p>
-        </p:txBody>
-      </p:sp>
-      <p:sp>
-        <p:nvSpPr>
-          <p:cNvPr id="11" name="Rounded Rectangle 10"/>
-          <p:cNvSpPr/>
-          <p:nvPr/>
-        </p:nvSpPr>
-        <p:spPr>
-          <a:xfrm>
-            <a:off x="2560320" y="4754880"/>
-            <a:ext cx="1554480" cy="731520"/>
-          </a:xfrm>
-          <a:prstGeom prst="roundRect">
-            <a:avLst/>
-          </a:prstGeom>
-          <a:solidFill>
-            <a:srgbClr val="4F81BD"/>
-          </a:solidFill>
-        </p:spPr>
-        <p:style>
-          <a:lnRef idx="1">
-            <a:schemeClr val="accent1"/>
-          </a:lnRef>
-          <a:fillRef idx="3">
-            <a:schemeClr val="accent1"/>
-          </a:fillRef>
-          <a:effectRef idx="2">
-            <a:schemeClr val="accent1"/>
-          </a:effectRef>
-          <a:fontRef idx="minor">
-            <a:schemeClr val="lt1"/>
-          </a:fontRef>
-        </p:style>
-        <p:txBody>
-          <a:bodyPr rtlCol="0" anchor="ctr"/>
-          <a:lstStyle/>
-          <a:p>
-            <a:pPr algn="ctr">
-              <a:defRPr sz="1400"/>
-            </a:pPr>
-            <a:r>
-              <a:t>frame_buffer</a:t>
-            </a:r>
-          </a:p>
-        </p:txBody>
-      </p:sp>
-      <p:sp>
-        <p:nvSpPr>
-          <p:cNvPr id="12" name="Right Arrow 11"/>
-          <p:cNvSpPr/>
-          <p:nvPr/>
-        </p:nvSpPr>
-        <p:spPr>
-          <a:xfrm>
-            <a:off x="4114800" y="5029200"/>
-            <a:ext cx="457200" cy="182880"/>
-          </a:xfrm>
-          <a:prstGeom prst="rightArrow">
-            <a:avLst/>
-          </a:prstGeom>
-        </p:spPr>
-        <p:style>
-          <a:lnRef idx="1">
-            <a:schemeClr val="accent1"/>
-          </a:lnRef>
-          <a:fillRef idx="3">
-            <a:schemeClr val="accent1"/>
-          </a:fillRef>
-          <a:effectRef idx="2">
-            <a:schemeClr val="accent1"/>
-          </a:effectRef>
-          <a:fontRef idx="minor">
-            <a:schemeClr val="lt1"/>
-          </a:fontRef>
-        </p:style>
-        <p:txBody>
-          <a:bodyPr rtlCol="0" anchor="ctr"/>
-          <a:lstStyle/>
-          <a:p>
-            <a:pPr algn="ctr"/>
-          </a:p>
-        </p:txBody>
-      </p:sp>
-      <p:sp>
-        <p:nvSpPr>
-          <p:cNvPr id="13" name="Rounded Rectangle 12"/>
-          <p:cNvSpPr/>
-          <p:nvPr/>
-        </p:nvSpPr>
-        <p:spPr>
-          <a:xfrm>
-            <a:off x="4572000" y="4754880"/>
-            <a:ext cx="1554480" cy="731520"/>
-          </a:xfrm>
-          <a:prstGeom prst="roundRect">
-            <a:avLst/>
-          </a:prstGeom>
-          <a:solidFill>
-            <a:srgbClr val="4F81BD"/>
-          </a:solidFill>
-        </p:spPr>
-        <p:style>
-          <a:lnRef idx="1">
-            <a:schemeClr val="accent1"/>
-          </a:lnRef>
-          <a:fillRef idx="3">
-            <a:schemeClr val="accent1"/>
-          </a:fillRef>
-          <a:effectRef idx="2">
-            <a:schemeClr val="accent1"/>
-          </a:effectRef>
-          <a:fontRef idx="minor">
-            <a:schemeClr val="lt1"/>
-          </a:fontRef>
-        </p:style>
-        <p:txBody>
-          <a:bodyPr rtlCol="0" anchor="ctr"/>
-          <a:lstStyle/>
-          <a:p>
-            <a:pPr algn="ctr">
-              <a:defRPr sz="1400"/>
-            </a:pPr>
-            <a:r>
-              <a:t>vga_controller</a:t>
-            </a:r>
-          </a:p>
-        </p:txBody>
-      </p:sp>
-      <p:sp>
-        <p:nvSpPr>
-          <p:cNvPr id="14" name="Right Arrow 13"/>
-          <p:cNvSpPr/>
-          <p:nvPr/>
-        </p:nvSpPr>
-        <p:spPr>
-          <a:xfrm>
-            <a:off x="6126480" y="5029200"/>
-            <a:ext cx="457200" cy="182880"/>
-          </a:xfrm>
-          <a:prstGeom prst="rightArrow">
-            <a:avLst/>
-          </a:prstGeom>
-        </p:spPr>
-        <p:style>
-          <a:lnRef idx="1">
-            <a:schemeClr val="accent1"/>
-          </a:lnRef>
-          <a:fillRef idx="3">
-            <a:schemeClr val="accent1"/>
-          </a:fillRef>
-          <a:effectRef idx="2">
-            <a:schemeClr val="accent1"/>
-          </a:effectRef>
-          <a:fontRef idx="minor">
-            <a:schemeClr val="lt1"/>
-          </a:fontRef>
-        </p:style>
-        <p:txBody>
-          <a:bodyPr rtlCol="0" anchor="ctr"/>
-          <a:lstStyle/>
-          <a:p>
-            <a:pPr algn="ctr"/>
-          </a:p>
-        </p:txBody>
-      </p:sp>
-      <p:sp>
-        <p:nvSpPr>
-          <p:cNvPr id="15" name="Rounded Rectangle 14"/>
-          <p:cNvSpPr/>
-          <p:nvPr/>
-        </p:nvSpPr>
-        <p:spPr>
-          <a:xfrm>
-            <a:off x="6583680" y="4754880"/>
-            <a:ext cx="1554480" cy="731520"/>
-          </a:xfrm>
-          <a:prstGeom prst="roundRect">
-            <a:avLst/>
-          </a:prstGeom>
-          <a:solidFill>
-            <a:srgbClr val="4F81BD"/>
-          </a:solidFill>
-        </p:spPr>
-        <p:style>
-          <a:lnRef idx="1">
-            <a:schemeClr val="accent1"/>
-          </a:lnRef>
-          <a:fillRef idx="3">
-            <a:schemeClr val="accent1"/>
-          </a:fillRef>
-          <a:effectRef idx="2">
-            <a:schemeClr val="accent1"/>
-          </a:effectRef>
-          <a:fontRef idx="minor">
-            <a:schemeClr val="lt1"/>
-          </a:fontRef>
-        </p:style>
-        <p:txBody>
-          <a:bodyPr rtlCol="0" anchor="ctr"/>
-          <a:lstStyle/>
-          <a:p>
-            <a:pPr algn="ctr">
-              <a:defRPr sz="1400"/>
-            </a:pPr>
-            <a:r>
-              <a:t>D to A Converter</a:t>
+              <a:t>• תצוגה: בקר ה-VGA קורא ברציפות מהזיכרון ומייצר את אותות הסנכרון והצבע למסך.</a:t>
             </a:r>
           </a:p>
         </p:txBody>
@@ -3987,9 +3411,11 @@
           <a:bodyPr/>
           <a:lstStyle/>
           <a:p>
-            <a:pPr rtl="1" algn="ctr"/>
-            <a:r>
-              <a:t>מבוא ל-VGA: סריקה קווית (Raster Scan)</a:t>
+            <a:pPr algn="ctr">
+              <a:defRPr/>
+            </a:pPr>
+            <a:r>
+              <a:t>מבוא ל-VGA: קונספט תותח האלקטרונים (CRT)</a:t>
             </a:r>
           </a:p>
         </p:txBody>
@@ -4017,34 +3443,34 @@
           <a:lstStyle/>
           <a:p/>
           <a:p>
-            <a:pPr algn="r" rtl="1">
-              <a:defRPr sz="1600"/>
+            <a:pPr algn="r">
+              <a:defRPr sz="1800"/>
             </a:pPr>
             <a:r>
-              <a:t>• הציור על המסך מבוסס על קרן שסורקת את הפיקסלים משמאל לימין (שורה) ומלמעלה למטה (פריים).</a:t>
-            </a:r>
-          </a:p>
-          <a:p>
-            <a:pPr algn="r" rtl="1">
-              <a:defRPr sz="1600"/>
+              <a:t>• מקור הפרוטוקול: טכנולוגיית ה-VGA פותחה במקור עבור מסכי שפופרת קרן קתודית (CRT) המבוססים על פיזיקה אנלוגית.</a:t>
+            </a:r>
+          </a:p>
+          <a:p>
+            <a:pPr algn="r">
+              <a:defRPr sz="1800"/>
             </a:pPr>
             <a:r>
-              <a:t>• תנועת הקרן חייבת להיות רציפה, מה שיוצר מסלול בצורת 'זיגזג'.</a:t>
-            </a:r>
-          </a:p>
-          <a:p>
-            <a:pPr algn="r" rtl="1">
-              <a:defRPr sz="1600"/>
+              <a:t>• תותח אלקטרונים: המסך פועל באמצעות קרן פיזית הנורית על גבי מסך מצופה זרחן. עוצמת הזרם קובעת את עוצמת ההארה של כל פיקסל.</a:t>
+            </a:r>
+          </a:p>
+          <a:p>
+            <a:pPr algn="r">
+              <a:defRPr sz="1800"/>
             </a:pPr>
             <a:r>
-              <a:t>• בכל פעם שהקרן מגיעה לקצה (אופקי או אנכי), נדרש זמן כדי להחזיר אותה לנקודת ההתחלה (Retrace).</a:t>
+              <a:t>• המורשת האנלוגית: למרות שכיום המסכים מודרניים, הפרוטוקול מחייב שידור אותות השהייה שיאפשרו לקרן הפיזית זמן תנועה וחזרה.</a:t>
             </a:r>
           </a:p>
         </p:txBody>
       </p:sp>
       <p:pic>
         <p:nvPicPr>
-          <p:cNvPr id="4" name="Picture 3" descr="vga_raster_scan_retrace_concept.png"/>
+          <p:cNvPr id="4" name="Picture 3" descr="vga_analog_cathode_ray_concept.png"/>
           <p:cNvPicPr>
             <a:picLocks noChangeAspect="1"/>
           </p:cNvPicPr>
@@ -4058,8 +3484,8 @@
         </p:blipFill>
         <p:spPr>
           <a:xfrm>
-            <a:off x="2286000" y="2743200"/>
-            <a:ext cx="4114800" cy="3335154"/>
+            <a:off x="2286000" y="2926080"/>
+            <a:ext cx="4572000" cy="3635868"/>
           </a:xfrm>
           <a:prstGeom prst="rect">
             <a:avLst/>
@@ -4099,9 +3525,11 @@
           <a:bodyPr/>
           <a:lstStyle/>
           <a:p>
-            <a:pPr rtl="1" algn="ctr"/>
-            <a:r>
-              <a:t>מרחב התצוגה: אזור פעיל מול זמני החשכה</a:t>
+            <a:pPr algn="ctr">
+              <a:defRPr/>
+            </a:pPr>
+            <a:r>
+              <a:t>עקרונות תצוגה: סריקה קווית (Raster Scan)</a:t>
             </a:r>
           </a:p>
         </p:txBody>
@@ -4129,34 +3557,34 @@
           <a:lstStyle/>
           <a:p/>
           <a:p>
-            <a:pPr algn="r" rtl="1">
-              <a:defRPr sz="1600"/>
+            <a:pPr algn="r">
+              <a:defRPr sz="1800"/>
             </a:pPr>
             <a:r>
-              <a:t>• אזור פעיל (Active Region): החלק במרכז המסך שבו משודרים נתוני התמונה בפועל (כגון 640x480).</a:t>
-            </a:r>
-          </a:p>
-          <a:p>
-            <a:pPr algn="r" rtl="1">
-              <a:defRPr sz="1600"/>
+              <a:t>• ציור רציף: התמונה נבנית על ידי סריקת פיקסלים משמאל לימין ומלמעלה למטה.</a:t>
+            </a:r>
+          </a:p>
+          <a:p>
+            <a:pPr algn="r">
+              <a:defRPr sz="1800"/>
             </a:pPr>
             <a:r>
-              <a:t>• זמני השהייה (Front/Back Porch): 'שוליים' של זמן שנועדו לייצב את האות לפני ואחרי הסנכרון.</a:t>
-            </a:r>
-          </a:p>
-          <a:p>
-            <a:pPr algn="r" rtl="1">
-              <a:defRPr sz="1600"/>
+              <a:t>• חזרה אופקית (H-Retrace): בסיום כל שורה, על הקרן לחזור לצידו השמאלי של המסך כדי להתחיל שורה חדשה.</a:t>
+            </a:r>
+          </a:p>
+          <a:p>
+            <a:pPr algn="r">
+              <a:defRPr sz="1800"/>
             </a:pPr>
             <a:r>
-              <a:t>• זמן סנכרון (Sync Pulse): פקודה פיזית למסך להחזיר את הקרן אחורה. בזמן זה הקרן חייבת להיות מוחשכת (Blanking).</a:t>
+              <a:t>• חזרה אנכית (V-Retrace): בסיום פריים שלם, הקרן חוזרת לפינה השמאלית העליונה לפריים הבא.</a:t>
             </a:r>
           </a:p>
         </p:txBody>
       </p:sp>
       <p:pic>
         <p:nvPicPr>
-          <p:cNvPr id="4" name="Picture 3" descr="vga_active_vs_blanking_regions.png"/>
+          <p:cNvPr id="4" name="Picture 3" descr="vga_raster_scan_retrace_concept.png"/>
           <p:cNvPicPr>
             <a:picLocks noChangeAspect="1"/>
           </p:cNvPicPr>
@@ -4170,8 +3598,8 @@
         </p:blipFill>
         <p:spPr>
           <a:xfrm>
-            <a:off x="2286000" y="2926080"/>
-            <a:ext cx="4572000" cy="3687417"/>
+            <a:off x="1828800" y="3200400"/>
+            <a:ext cx="5486400" cy="4446872"/>
           </a:xfrm>
           <a:prstGeom prst="rect">
             <a:avLst/>
@@ -4211,9 +3639,11 @@
           <a:bodyPr/>
           <a:lstStyle/>
           <a:p>
-            <a:pPr rtl="1" algn="ctr"/>
-            <a:r>
-              <a:t>תזמונים והחשכה (VGA controller)</a:t>
+            <a:pPr algn="ctr">
+              <a:defRPr/>
+            </a:pPr>
+            <a:r>
+              <a:t>מרחב התצוגה ואזורי החשכה</a:t>
             </a:r>
           </a:p>
         </p:txBody>
@@ -4239,19 +3669,36 @@
             <a:spAutoFit/>
           </a:bodyPr>
           <a:lstStyle/>
-          <a:p>
-            <a:pPr algn="r" rtl="1">
-              <a:defRPr sz="1600"/>
+          <a:p/>
+          <a:p>
+            <a:pPr algn="r">
+              <a:defRPr sz="1800"/>
             </a:pPr>
             <a:r>
-              <a:t>מוני ה-horizontal וה-vertical מנוהלים על ידי שעון 25 MHz ומחשבים את מיקום הקרן. בזמני ה-porch וה-sync pulse, היציאות נדחפות ל-0000 כדי לאפשר את חזרת הקרן (blanking).</a:t>
+              <a:t>• אזור פעיל (Active Video): הזמן בו הקרן מציירת פיקסלים רלוונטיים על המסך.</a:t>
+            </a:r>
+          </a:p>
+          <a:p>
+            <a:pPr algn="r">
+              <a:defRPr sz="1800"/>
+            </a:pPr>
+            <a:r>
+              <a:t>• שוליים (Front/Back Porch): אזורי ביטחון (השחרה) המפרידים בין מידע הצבע לבין פולס הסנכרון.</a:t>
+            </a:r>
+          </a:p>
+          <a:p>
+            <a:pPr algn="r">
+              <a:defRPr sz="1800"/>
+            </a:pPr>
+            <a:r>
+              <a:t>• פולס סנכרון (Sync Pulse): פקודה לוגית המורה למסך לבצע את החזרה בפועל (אופקית או אנכית).</a:t>
             </a:r>
           </a:p>
         </p:txBody>
       </p:sp>
       <p:pic>
         <p:nvPicPr>
-          <p:cNvPr id="4" name="Picture 3" descr="vga_counters_rtl_schematic.png"/>
+          <p:cNvPr id="4" name="Picture 3" descr="vga_active_vs_blanking_regions.png"/>
           <p:cNvPicPr>
             <a:picLocks noChangeAspect="1"/>
           </p:cNvPicPr>
@@ -4265,32 +3712,8 @@
         </p:blipFill>
         <p:spPr>
           <a:xfrm>
-            <a:off x="457200" y="2560320"/>
-            <a:ext cx="4114800" cy="2047875"/>
-          </a:xfrm>
-          <a:prstGeom prst="rect">
-            <a:avLst/>
-          </a:prstGeom>
-        </p:spPr>
-      </p:pic>
-      <p:pic>
-        <p:nvPicPr>
-          <p:cNvPr id="5" name="Picture 4" descr="vga_timing_waveform_and_table.png"/>
-          <p:cNvPicPr>
-            <a:picLocks noChangeAspect="1"/>
-          </p:cNvPicPr>
-          <p:nvPr/>
-        </p:nvPicPr>
-        <p:blipFill>
-          <a:blip r:embed="rId3"/>
-          <a:stretch>
-            <a:fillRect/>
-          </a:stretch>
-        </p:blipFill>
-        <p:spPr>
-          <a:xfrm>
-            <a:off x="4754880" y="2377440"/>
-            <a:ext cx="3657600" cy="3623733"/>
+            <a:off x="1828800" y="3200400"/>
+            <a:ext cx="5486400" cy="4424901"/>
           </a:xfrm>
           <a:prstGeom prst="rect">
             <a:avLst/>
@@ -4330,9 +3753,11 @@
           <a:bodyPr/>
           <a:lstStyle/>
           <a:p>
-            <a:pPr rtl="1" algn="ctr"/>
-            <a:r>
-              <a:t>מסלול הנתונים: חישוב כתובת הפיקסל ושליפה</a:t>
+            <a:pPr algn="ctr">
+              <a:defRPr/>
+            </a:pPr>
+            <a:r>
+              <a:t>מימוש בחומרה: מוני סנכרון ותזמונים</a:t>
             </a:r>
           </a:p>
         </p:txBody>
@@ -4360,34 +3785,34 @@
           <a:lstStyle/>
           <a:p/>
           <a:p>
-            <a:pPr algn="r" rtl="1">
-              <a:defRPr sz="1600"/>
+            <a:pPr algn="r">
+              <a:defRPr sz="1800"/>
             </a:pPr>
             <a:r>
-              <a:t>• מיקום הקרן (X,Y): המונים hsync_reg ו-vsync_reg מפיקים את הקואורדינטות הדינמיות display_x ו-display_y בתוך האזור הפעיל.</a:t>
-            </a:r>
-          </a:p>
-          <a:p>
-            <a:pPr algn="r" rtl="1">
-              <a:defRPr sz="1600"/>
+              <a:t>• שעון פיקסל (25MHz): קצב העבודה נגזר מדרישת התקן ל-640x480 ב-60Hz.</a:t>
+            </a:r>
+          </a:p>
+          <a:p>
+            <a:pPr algn="r">
+              <a:defRPr sz="1800"/>
             </a:pPr>
             <a:r>
-              <a:t>• תרגום לכתובת ליניארית: הקואורדינטה מתורגמת מתמטית לכתובת הזיכרון bram_address_next ונשלחת החוצה דרך האות addrb.</a:t>
-            </a:r>
-          </a:p>
-          <a:p>
-            <a:pPr algn="r" rtl="1">
-              <a:defRPr sz="1600"/>
+              <a:t>• מונה אופקי (h_count): סופר פיקסלים בשורה (0 עד 799). מאתחל את המונה האנכי בסיום שורה.</a:t>
+            </a:r>
+          </a:p>
+          <a:p>
+            <a:pPr algn="r">
+              <a:defRPr sz="1800"/>
             </a:pPr>
             <a:r>
-              <a:t>• שליפה מה-BRAM: רכיב ה-frame_buffer מקבל את הכתובת ומשחרר את 12 הביטים של הפיקסל היישר אל האות doutb של בקר ה-VGA.</a:t>
+              <a:t>• מונה אנכי (v_count): סופר שורות במסך (0 עד 520).</a:t>
             </a:r>
           </a:p>
         </p:txBody>
       </p:sp>
       <p:pic>
         <p:nvPicPr>
-          <p:cNvPr id="4" name="Picture 3" descr="vga_address_bram_flow.png"/>
+          <p:cNvPr id="4" name="Picture 3" descr="vga_timing_waveform_and_table.png"/>
           <p:cNvPicPr>
             <a:picLocks noChangeAspect="1"/>
           </p:cNvPicPr>
@@ -4401,8 +3826,32 @@
         </p:blipFill>
         <p:spPr>
           <a:xfrm>
-            <a:off x="2286000" y="2926080"/>
-            <a:ext cx="4572000" cy="2635032"/>
+            <a:off x="457200" y="2926080"/>
+            <a:ext cx="4114800" cy="4076700"/>
+          </a:xfrm>
+          <a:prstGeom prst="rect">
+            <a:avLst/>
+          </a:prstGeom>
+        </p:spPr>
+      </p:pic>
+      <p:pic>
+        <p:nvPicPr>
+          <p:cNvPr id="5" name="Picture 4" descr="vga_counters_rtl_schematic.png"/>
+          <p:cNvPicPr>
+            <a:picLocks noChangeAspect="1"/>
+          </p:cNvPicPr>
+          <p:nvPr/>
+        </p:nvPicPr>
+        <p:blipFill>
+          <a:blip r:embed="rId3"/>
+          <a:stretch>
+            <a:fillRect/>
+          </a:stretch>
+        </p:blipFill>
+        <p:spPr>
+          <a:xfrm>
+            <a:off x="5029200" y="2926080"/>
+            <a:ext cx="3657600" cy="1820333"/>
           </a:xfrm>
           <a:prstGeom prst="rect">
             <a:avLst/>
@@ -4442,9 +3891,11 @@
           <a:bodyPr/>
           <a:lstStyle/>
           <a:p>
-            <a:pPr rtl="1" algn="ctr"/>
-            <a:r>
-              <a:t>עיבוד הפיקסל: ניתוב ל-RGB ומנגנון ה-Blanking</a:t>
+            <a:pPr algn="ctr">
+              <a:defRPr/>
+            </a:pPr>
+            <a:r>
+              <a:t>מסלול הנתונים (Data Path): משעון לכתובת</a:t>
             </a:r>
           </a:p>
         </p:txBody>
@@ -4472,34 +3923,34 @@
           <a:lstStyle/>
           <a:p/>
           <a:p>
-            <a:pPr algn="r" rtl="1">
-              <a:defRPr sz="1600"/>
+            <a:pPr algn="r">
+              <a:defRPr sz="1800"/>
             </a:pPr>
             <a:r>
-              <a:t>• רישום ופיצול: הנתונים מ-doutb ננעלים באוגר pxl_data_reg ומפוצלים לשגרירים: vga_r_int (ביטים 11:8), vga_g_int (7:4) ו-vga_b_int (3:0).</a:t>
-            </a:r>
-          </a:p>
-          <a:p>
-            <a:pPr algn="r" rtl="1">
-              <a:defRPr sz="1600"/>
+              <a:t>• תרגום קואורדינטות: מוני ה-X וה-Y המציינים את מיקום הקרן עוברים מניפולציה מתמטית.</a:t>
+            </a:r>
+          </a:p>
+          <a:p>
+            <a:pPr algn="r">
+              <a:defRPr sz="1800"/>
             </a:pPr>
             <a:r>
-              <a:t>• שומר הסף: האות in_display_area_delayed משמש כדגל המזהה האם הקרן מצוירת כעת על המסך או נמצאת מחוץ לתצוגה.</a:t>
-            </a:r>
-          </a:p>
-          <a:p>
-            <a:pPr algn="r" rtl="1">
-              <a:defRPr sz="1600"/>
+              <a:t>• יצירת כתובת (Address Generation): הקואורדינטות הופכות לכתובת לינארית חד-ממדית (addrb).</a:t>
+            </a:r>
+          </a:p>
+          <a:p>
+            <a:pPr algn="r">
+              <a:defRPr sz="1800"/>
             </a:pPr>
             <a:r>
-              <a:t>• סינון דיגיטלי (Mux): כאשר הדגל ב-'1', ערכי ה-RGB מועברים ליציאות VGA_R/G/B. בזמני ה-Porch וה-Sync, היציאות נאלצות ל-"0000" (שחור מוחלט).</a:t>
+              <a:t>• שליפת המידע: הכתובת מועברת ל-BRAM, שמוציא בתגובה וקטור של 12 ביטים (doutb) המייצג את צבע הפיקסל.</a:t>
             </a:r>
           </a:p>
         </p:txBody>
       </p:sp>
       <p:pic>
         <p:nvPicPr>
-          <p:cNvPr id="4" name="Picture 3" descr="vga_rgb_video_on_logic.png"/>
+          <p:cNvPr id="4" name="Picture 3" descr="vga_address_bram_flow.png"/>
           <p:cNvPicPr>
             <a:picLocks noChangeAspect="1"/>
           </p:cNvPicPr>
@@ -4513,8 +3964,8 @@
         </p:blipFill>
         <p:spPr>
           <a:xfrm>
-            <a:off x="2286000" y="2926080"/>
-            <a:ext cx="4572000" cy="2167573"/>
+            <a:off x="1828800" y="3200400"/>
+            <a:ext cx="5486400" cy="3162038"/>
           </a:xfrm>
           <a:prstGeom prst="rect">
             <a:avLst/>
@@ -4554,9 +4005,11 @@
           <a:bodyPr/>
           <a:lstStyle/>
           <a:p>
-            <a:pPr rtl="1" algn="ctr"/>
-            <a:r>
-              <a:t>המרת DAC אנלוגית ומחבר ה-VGA</a:t>
+            <a:pPr algn="ctr">
+              <a:defRPr/>
+            </a:pPr>
+            <a:r>
+              <a:t>ניתוב RGB ובקרת סינון (Blanking Logic)</a:t>
             </a:r>
           </a:p>
         </p:txBody>
@@ -4569,8 +4022,8 @@
         </p:nvSpPr>
         <p:spPr>
           <a:xfrm>
-            <a:off x="457200" y="1005840"/>
-            <a:ext cx="8229600" cy="914400"/>
+            <a:off x="457200" y="1097280"/>
+            <a:ext cx="8229600" cy="1371600"/>
           </a:xfrm>
           <a:prstGeom prst="rect">
             <a:avLst/>
@@ -4584,26 +4037,34 @@
           <a:lstStyle/>
           <a:p/>
           <a:p>
-            <a:pPr algn="r" rtl="1">
-              <a:defRPr sz="1600"/>
+            <a:pPr algn="r">
+              <a:defRPr sz="1800"/>
             </a:pPr>
             <a:r>
-              <a:t>• סולם נגדים (Resistor Network): המרת 12 ביטי ה-RGB למתח אנלוגי רציף באמצעות משקולות נגדים (510Ω עד 4KΩ).</a:t>
-            </a:r>
-          </a:p>
-          <a:p>
-            <a:pPr algn="r" rtl="1">
-              <a:defRPr sz="1600"/>
+              <a:t>• חלוקה לערוצים: וקטור ה-12 ביט (doutb) מפוצל ל-3 וקטורים של 4 ביטים: אדום, ירוק וכחול.</a:t>
+            </a:r>
+          </a:p>
+          <a:p>
+            <a:pPr algn="r">
+              <a:defRPr sz="1800"/>
             </a:pPr>
             <a:r>
-              <a:t>• אותות סנכרון (B11 / B12): פיני היציאה מוגנים באמצעות נגדי 100Ω ומזינים ישירות את מחבר ה-DB15 של המסך.</a:t>
+              <a:t>• דגל Display Enable: האות in_display_area מזהה מתי הקרן נמצאת מחוץ לאזור הפעיל (בזמן Retrace או Porch).</a:t>
+            </a:r>
+          </a:p>
+          <a:p>
+            <a:pPr algn="r">
+              <a:defRPr sz="1800"/>
+            </a:pPr>
+            <a:r>
+              <a:t>• החשכה אקטיבית: מעגל מרבב (MUX) מאלץ את נתוני הצבע ל-0000 כאשר אנו מחוץ לתצוגה, כדי למנוע שיבושים במסך.</a:t>
             </a:r>
           </a:p>
         </p:txBody>
       </p:sp>
       <p:pic>
         <p:nvPicPr>
-          <p:cNvPr id="4" name="Picture 3" descr="vga_dac_resistor_network.png"/>
+          <p:cNvPr id="4" name="Picture 3" descr="vga_rgb_video_on_logic.png"/>
           <p:cNvPicPr>
             <a:picLocks noChangeAspect="1"/>
           </p:cNvPicPr>
@@ -4617,32 +4078,8 @@
         </p:blipFill>
         <p:spPr>
           <a:xfrm>
-            <a:off x="457200" y="2103120"/>
-            <a:ext cx="4023360" cy="4992221"/>
-          </a:xfrm>
-          <a:prstGeom prst="rect">
-            <a:avLst/>
-          </a:prstGeom>
-        </p:spPr>
-      </p:pic>
-      <p:pic>
-        <p:nvPicPr>
-          <p:cNvPr id="5" name="Picture 4" descr="vga_db15_connector_pins.png"/>
-          <p:cNvPicPr>
-            <a:picLocks noChangeAspect="1"/>
-          </p:cNvPicPr>
-          <p:nvPr/>
-        </p:nvPicPr>
-        <p:blipFill>
-          <a:blip r:embed="rId3"/>
-          <a:stretch>
-            <a:fillRect/>
-          </a:stretch>
-        </p:blipFill>
-        <p:spPr>
-          <a:xfrm>
-            <a:off x="4663440" y="2286000"/>
-            <a:ext cx="4023360" cy="3205277"/>
+            <a:off x="2286000" y="3200400"/>
+            <a:ext cx="4572000" cy="2167573"/>
           </a:xfrm>
           <a:prstGeom prst="rect">
             <a:avLst/>
@@ -4682,9 +4119,11 @@
           <a:bodyPr/>
           <a:lstStyle/>
           <a:p>
-            <a:pPr rtl="1" algn="ctr"/>
-            <a:r>
-              <a:t>עומק הנדסי: מחלק המתח ומשקלי הביטים</a:t>
+            <a:pPr algn="ctr">
+              <a:defRPr/>
+            </a:pPr>
+            <a:r>
+              <a:t>ממיר דיגיטלי לאנלוגי: מביטים לזרמים</a:t>
             </a:r>
           </a:p>
         </p:txBody>
@@ -4712,34 +4151,34 @@
           <a:lstStyle/>
           <a:p/>
           <a:p>
-            <a:pPr algn="r" rtl="1">
-              <a:defRPr sz="1600"/>
+            <a:pPr algn="r">
+              <a:defRPr sz="1800"/>
             </a:pPr>
             <a:r>
-              <a:t>• משקל פיזי לכל ביט (MSB לעומת LSB): הביט המשמעותי ביותר (MSB) מחובר לנגד הקטן ביותר, ולכן מזזרים את הזרם הגדול ביותר למעגל ומשפיע משמעותית על עוצמת הצבע.</a:t>
-            </a:r>
-          </a:p>
-          <a:p>
-            <a:pPr algn="r" rtl="1">
-              <a:defRPr sz="1600"/>
+              <a:t>• ממשק פיזי (HD-DB15): המחבר החיצוני דורש מתחים אנלוגיים (0V-0.7V) עבור כל צבע (פינים 1,2,3).</a:t>
+            </a:r>
+          </a:p>
+          <a:p>
+            <a:pPr algn="r">
+              <a:defRPr sz="1800"/>
             </a:pPr>
             <a:r>
-              <a:t>• כוונון עדין: לעומתו, הביט הפחות משמעותי (LSB) מחובר לנגד הגדול ביותר בסולם. תרומתו לזרם הכולל היא מזערית ונועדה לכוונון עדין של הגוון.</a:t>
-            </a:r>
-          </a:p>
-          <a:p>
-            <a:pPr algn="r" rtl="1">
-              <a:defRPr sz="1600"/>
+              <a:t>• DAC מבוסס נגדים: כרטיס ה-Artix-7 משתמש ברשת נגדים פסיבית (R-2R Ladder) להמרת ה-4 ביטים של כל צבע למתח.</a:t>
+            </a:r>
+          </a:p>
+          <a:p>
+            <a:pPr algn="r">
+              <a:defRPr sz="1800"/>
             </a:pPr>
             <a:r>
-              <a:t>• סכימה אנלוגית על המסך: כל הזרמים מהביטים הפעילים ('1') מתחברים וזורמים יחד דרך נגד הסיומת של המסך (75Ω) אל האדמה. כך נוצר מחלק מתח דינמי המפיק 0V עד 0.7V.</a:t>
+              <a:t>• הגנת סנכרון: פיני ה-HSYNC וה-VSYNC מוגנים על ידי נגדים בטור למניעת זרם קצר.</a:t>
             </a:r>
           </a:p>
         </p:txBody>
       </p:sp>
       <p:pic>
         <p:nvPicPr>
-          <p:cNvPr id="4" name="Picture 3" descr="vga_voltage_divider_dac.png"/>
+          <p:cNvPr id="4" name="Picture 3" descr="vga_dac_resistor_network.png"/>
           <p:cNvPicPr>
             <a:picLocks noChangeAspect="1"/>
           </p:cNvPicPr>
@@ -4753,8 +4192,32 @@
         </p:blipFill>
         <p:spPr>
           <a:xfrm>
-            <a:off x="1371600" y="2926080"/>
-            <a:ext cx="6400800" cy="4800600"/>
+            <a:off x="457200" y="3200400"/>
+            <a:ext cx="4114800" cy="5105680"/>
+          </a:xfrm>
+          <a:prstGeom prst="rect">
+            <a:avLst/>
+          </a:prstGeom>
+        </p:spPr>
+      </p:pic>
+      <p:pic>
+        <p:nvPicPr>
+          <p:cNvPr id="5" name="Picture 4" descr="vga_db15_connector_pins.png"/>
+          <p:cNvPicPr>
+            <a:picLocks noChangeAspect="1"/>
+          </p:cNvPicPr>
+          <p:nvPr/>
+        </p:nvPicPr>
+        <p:blipFill>
+          <a:blip r:embed="rId3"/>
+          <a:stretch>
+            <a:fillRect/>
+          </a:stretch>
+        </p:blipFill>
+        <p:spPr>
+          <a:xfrm>
+            <a:off x="5029200" y="3200400"/>
+            <a:ext cx="3657600" cy="2913888"/>
           </a:xfrm>
           <a:prstGeom prst="rect">
             <a:avLst/>

--- a/docs/presentation/output/VGA_Presentation_Yossi.pptx
+++ b/docs/presentation/output/VGA_Presentation_Yossi.pptx
@@ -15,6 +15,7 @@
     <p:sldId id="263" r:id="rId14"/>
     <p:sldId id="264" r:id="rId15"/>
     <p:sldId id="265" r:id="rId16"/>
+    <p:sldId id="266" r:id="rId17"/>
   </p:sldIdLst>
   <p:sldSz cx="9144000" cy="6858000" type="screen4x3"/>
   <p:notesSz cx="6858000" cy="9144000"/>
@@ -3104,7 +3105,7 @@
             <a:spLocks noGrp="1"/>
           </p:cNvSpPr>
           <p:nvPr>
-            <p:ph type="ctrTitle"/>
+            <p:ph type="title"/>
           </p:nvPr>
         </p:nvSpPr>
         <p:spPr/>
@@ -3112,40 +3113,48 @@
           <a:bodyPr/>
           <a:lstStyle/>
           <a:p>
-            <a:pPr algn="ctr">
-              <a:defRPr/>
+            <a:pPr rtl="1" algn="ctr"/>
+            <a:r>
+              <a:t>פיתוח מערכת מבוססת FPGA להתראת נפילה לחולי דמנציה</a:t>
+            </a:r>
+          </a:p>
+        </p:txBody>
+      </p:sp>
+      <p:sp>
+        <p:nvSpPr>
+          <p:cNvPr id="3" name="TextBox 2"/>
+          <p:cNvSpPr txBox="1"/>
+          <p:nvPr/>
+        </p:nvSpPr>
+        <p:spPr>
+          <a:xfrm>
+            <a:off x="457200" y="1188720"/>
+            <a:ext cx="8229600" cy="457200"/>
+          </a:xfrm>
+          <a:prstGeom prst="rect">
+            <a:avLst/>
+          </a:prstGeom>
+          <a:noFill/>
+        </p:spPr>
+        <p:txBody>
+          <a:bodyPr wrap="none">
+            <a:spAutoFit/>
+          </a:bodyPr>
+          <a:lstStyle/>
+          <a:p>
+            <a:pPr algn="ctr" rtl="1">
+              <a:defRPr sz="2000"/>
             </a:pPr>
             <a:r>
-              <a:t>פיתוח מערכת משובצת מחשב לזיהוי נפילות בזמן אמת</a:t>
-            </a:r>
-          </a:p>
-        </p:txBody>
-      </p:sp>
-      <p:sp>
-        <p:nvSpPr>
-          <p:cNvPr id="3" name="Subtitle 2"/>
-          <p:cNvSpPr>
-            <a:spLocks noGrp="1"/>
-          </p:cNvSpPr>
-          <p:nvPr>
-            <p:ph type="subTitle" idx="1"/>
-          </p:nvPr>
-        </p:nvSpPr>
-        <p:spPr/>
-        <p:txBody>
-          <a:bodyPr/>
-          <a:lstStyle/>
-          <a:p>
-            <a:pPr algn="ctr">
-              <a:defRPr/>
+              <a:t>קליטת תמונה בזמן אמת ממצלמת OV7670 והצגתה דרך כרטיס Artix-7.</a:t>
+            </a:r>
+          </a:p>
+          <a:p>
+            <a:pPr algn="ctr" rtl="1">
+              <a:defRPr sz="1700"/>
             </a:pPr>
             <a:r>
-              <a:t>מימוש חומרתי על כרטיס Artix-7 (Basys 3)</a:t>
-            </a:r>
-          </a:p>
-          <a:p>
-            <a:r>
-              <a:t>ממשק VGA ותקשורת מצלמה</a:t>
+              <a:t>על מנת לאפשר עיבוד תמונה לזיהויי עמידה ממושכת לחולי דמנציה.</a:t>
             </a:r>
           </a:p>
         </p:txBody>
@@ -3166,14 +3175,45 @@
         </p:blipFill>
         <p:spPr>
           <a:xfrm>
-            <a:off x="2743200" y="4114800"/>
-            <a:ext cx="3657600" cy="2720421"/>
+            <a:off x="2286000" y="1828800"/>
+            <a:ext cx="4572000" cy="3400527"/>
           </a:xfrm>
           <a:prstGeom prst="rect">
             <a:avLst/>
           </a:prstGeom>
         </p:spPr>
       </p:pic>
+      <p:sp>
+        <p:nvSpPr>
+          <p:cNvPr id="5" name="TextBox 4"/>
+          <p:cNvSpPr txBox="1"/>
+          <p:nvPr/>
+        </p:nvSpPr>
+        <p:spPr>
+          <a:xfrm>
+            <a:off x="457200" y="5760720"/>
+            <a:ext cx="8229600" cy="457200"/>
+          </a:xfrm>
+          <a:prstGeom prst="rect">
+            <a:avLst/>
+          </a:prstGeom>
+          <a:noFill/>
+        </p:spPr>
+        <p:txBody>
+          <a:bodyPr wrap="none">
+            <a:spAutoFit/>
+          </a:bodyPr>
+          <a:lstStyle/>
+          <a:p>
+            <a:pPr algn="ctr" rtl="1">
+              <a:defRPr sz="2200" b="1"/>
+            </a:pPr>
+            <a:r>
+              <a:t>מגיש: יוסי ברים | הנדסת חשמל שנה ד| המרכז האקדמי לב</a:t>
+            </a:r>
+          </a:p>
+        </p:txBody>
+      </p:sp>
     </p:spTree>
   </p:cSld>
   <p:clrMapOvr>
@@ -3207,11 +3247,9 @@
           <a:bodyPr/>
           <a:lstStyle/>
           <a:p>
-            <a:pPr algn="ctr">
-              <a:defRPr/>
-            </a:pPr>
-            <a:r>
-              <a:t>עומק הנדסי: מחלק המתח ומשקלי הביטים</a:t>
+            <a:pPr rtl="1"/>
+            <a:r>
+              <a:t>מקרה בוחן 1: תזמון ירידת שורה (Horizontal Blanking)</a:t>
             </a:r>
           </a:p>
         </p:txBody>
@@ -3224,8 +3262,8 @@
         </p:nvSpPr>
         <p:spPr>
           <a:xfrm>
-            <a:off x="457200" y="1097280"/>
-            <a:ext cx="8229600" cy="1371600"/>
+            <a:off x="457200" y="1005840"/>
+            <a:ext cx="8229600" cy="731520"/>
           </a:xfrm>
           <a:prstGeom prst="rect">
             <a:avLst/>
@@ -3239,55 +3277,87 @@
           <a:lstStyle/>
           <a:p/>
           <a:p>
-            <a:pPr algn="r">
-              <a:defRPr sz="1800"/>
+            <a:pPr algn="r" rtl="1">
+              <a:defRPr sz="1600"/>
             </a:pPr>
             <a:r>
-              <a:t>• משקל פיזי לכל ביט (MSB לעומת LSB): ה-MSB מחובר לנגד הקטן ביותר, מזרים את הזרם הגדול ביותר ומשפיע משמעותית על הצבע.</a:t>
-            </a:r>
-          </a:p>
-          <a:p>
-            <a:pPr algn="r">
-              <a:defRPr sz="1800"/>
-            </a:pPr>
-            <a:r>
-              <a:t>• כוונון עדין: ה-LSB מחובר לנגד הגדול ביותר בסולם ומשמש לכוונון עדין של הגוון.</a:t>
-            </a:r>
-          </a:p>
-          <a:p>
-            <a:pPr algn="r">
-              <a:defRPr sz="1800"/>
-            </a:pPr>
-            <a:r>
-              <a:t>• סכימה אנלוגית על המסך: כל הזרמים מתחברים וזורמים דרך נגד הסיומת של המסך (75Ω). כך נוצר מחלק מתח המפיק 0V-0.7V.</a:t>
-            </a:r>
-          </a:p>
-        </p:txBody>
-      </p:sp>
-      <p:pic>
-        <p:nvPicPr>
-          <p:cNvPr id="4" name="Picture 3" descr="vga_voltage_divider_dac.png"/>
-          <p:cNvPicPr>
-            <a:picLocks noChangeAspect="1"/>
-          </p:cNvPicPr>
+              <a:t>ניהול המונים (Horizontal/Vertical) ושליטה במנגנון ההחשכה (Blanking) לחזרת הקרן.</a:t>
+            </a:r>
+          </a:p>
+        </p:txBody>
+      </p:sp>
+    </p:spTree>
+  </p:cSld>
+  <p:clrMapOvr>
+    <a:masterClrMapping/>
+  </p:clrMapOvr>
+</p:sld>
+</file>
+
+<file path=ppt/slides/slide11.xml><?xml version="1.0" encoding="utf-8"?>
+<p:sld xmlns:a="http://schemas.openxmlformats.org/drawingml/2006/main" xmlns:p="http://schemas.openxmlformats.org/presentationml/2006/main" xmlns:r="http://schemas.openxmlformats.org/officeDocument/2006/relationships">
+  <p:cSld>
+    <p:spTree>
+      <p:nvGrpSpPr>
+        <p:cNvPr id="1" name=""/>
+        <p:cNvGrpSpPr/>
+        <p:nvPr/>
+      </p:nvGrpSpPr>
+      <p:grpSpPr/>
+      <p:sp>
+        <p:nvSpPr>
+          <p:cNvPr id="2" name="Title 1"/>
+          <p:cNvSpPr>
+            <a:spLocks noGrp="1"/>
+          </p:cNvSpPr>
+          <p:nvPr>
+            <p:ph type="title"/>
+          </p:nvPr>
+        </p:nvSpPr>
+        <p:spPr/>
+        <p:txBody>
+          <a:bodyPr/>
+          <a:lstStyle/>
+          <a:p>
+            <a:pPr rtl="1"/>
+            <a:r>
+              <a:t>מקרה בוחן 2: מ-RGB דיגיטלי ליציאה אנלוגית</a:t>
+            </a:r>
+          </a:p>
+        </p:txBody>
+      </p:sp>
+      <p:sp>
+        <p:nvSpPr>
+          <p:cNvPr id="3" name="TextBox 2"/>
+          <p:cNvSpPr txBox="1"/>
           <p:nvPr/>
-        </p:nvPicPr>
-        <p:blipFill>
-          <a:blip r:embed="rId2"/>
-          <a:stretch>
-            <a:fillRect/>
-          </a:stretch>
-        </p:blipFill>
-        <p:spPr>
-          <a:xfrm>
-            <a:off x="1371600" y="2926080"/>
-            <a:ext cx="6400800" cy="4800600"/>
+        </p:nvSpPr>
+        <p:spPr>
+          <a:xfrm>
+            <a:off x="457200" y="1005840"/>
+            <a:ext cx="8229600" cy="731520"/>
           </a:xfrm>
           <a:prstGeom prst="rect">
             <a:avLst/>
           </a:prstGeom>
-        </p:spPr>
-      </p:pic>
+          <a:noFill/>
+        </p:spPr>
+        <p:txBody>
+          <a:bodyPr wrap="none">
+            <a:spAutoFit/>
+          </a:bodyPr>
+          <a:lstStyle/>
+          <a:p/>
+          <a:p>
+            <a:pPr algn="r" rtl="1">
+              <a:defRPr sz="1600"/>
+            </a:pPr>
+            <a:r>
+              <a:t>המרת 12 ביטים של צבע (RGB) למתח פיזי רציף באמצעות רשת נגדים (DAC) ומחבר ה-VGA.</a:t>
+            </a:r>
+          </a:p>
+        </p:txBody>
+      </p:sp>
     </p:spTree>
   </p:cSld>
   <p:clrMapOvr>
@@ -3321,11 +3391,9 @@
           <a:bodyPr/>
           <a:lstStyle/>
           <a:p>
-            <a:pPr algn="ctr">
-              <a:defRPr/>
-            </a:pPr>
-            <a:r>
-              <a:t>ארכיטקטורת המערכת וזרימת הנתונים</a:t>
+            <a:pPr rtl="1"/>
+            <a:r>
+              <a:t>ארכיטקטורת המערכת</a:t>
             </a:r>
           </a:p>
         </p:txBody>
@@ -3339,7 +3407,7 @@
         <p:spPr>
           <a:xfrm>
             <a:off x="457200" y="1097280"/>
-            <a:ext cx="8229600" cy="1371600"/>
+            <a:ext cx="8229600" cy="914400"/>
           </a:xfrm>
           <a:prstGeom prst="rect">
             <a:avLst/>
@@ -3353,27 +3421,535 @@
           <a:lstStyle/>
           <a:p/>
           <a:p>
-            <a:pPr algn="r">
+            <a:pPr algn="r" rtl="1">
               <a:defRPr sz="1800"/>
             </a:pPr>
             <a:r>
-              <a:t>• איסוף נתונים: מצלמת OV7670 דוגמת את הווידאו ומעבירה אותו דרך בקר ייעודי.</a:t>
-            </a:r>
-          </a:p>
-          <a:p>
-            <a:pPr algn="r">
+              <a:t>נתוני התמונה הגולמיים נקלטים מהמצלמה ונאגרים בזיכרון ה-BRAM.</a:t>
+            </a:r>
+          </a:p>
+          <a:p>
+            <a:pPr algn="r" rtl="1">
               <a:defRPr sz="1800"/>
             </a:pPr>
             <a:r>
-              <a:t>• זיכרון מרכזי (Frame Buffer): הנתונים נשמרים בזיכרון BRAM המשמש חוצץ בין שעון המצלמה לשעון המסך.</a:t>
-            </a:r>
-          </a:p>
+              <a:t>בקר ה-VGA שולף את הנתונים ומעביר לממיר D to A לקבלת אות אנלוגי פיזי למסך.</a:t>
+            </a:r>
+          </a:p>
+        </p:txBody>
+      </p:sp>
+      <p:sp>
+        <p:nvSpPr>
+          <p:cNvPr id="4" name="Rectangle 3"/>
+          <p:cNvSpPr/>
+          <p:nvPr/>
+        </p:nvSpPr>
+        <p:spPr>
+          <a:xfrm>
+            <a:off x="3474720" y="2194560"/>
+            <a:ext cx="2011680" cy="1645920"/>
+          </a:xfrm>
+          <a:prstGeom prst="rect">
+            <a:avLst/>
+          </a:prstGeom>
+          <a:solidFill>
+            <a:srgbClr val="000000"/>
+          </a:solidFill>
+        </p:spPr>
+        <p:style>
+          <a:lnRef idx="1">
+            <a:schemeClr val="accent1"/>
+          </a:lnRef>
+          <a:fillRef idx="3">
+            <a:schemeClr val="accent1"/>
+          </a:fillRef>
+          <a:effectRef idx="2">
+            <a:schemeClr val="accent1"/>
+          </a:effectRef>
+          <a:fontRef idx="minor">
+            <a:schemeClr val="lt1"/>
+          </a:fontRef>
+        </p:style>
+        <p:txBody>
+          <a:bodyPr rtlCol="0" anchor="ctr"/>
+          <a:lstStyle/>
+          <a:p>
+            <a:pPr algn="ctr" rtl="1">
+              <a:defRPr>
+                <a:solidFill>
+                  <a:srgbClr val="FFFFFF"/>
+                </a:solidFill>
+              </a:defRPr>
+            </a:pPr>
+            <a:r>
+              <a:t>מערכת התראת נפילה</a:t>
+            </a:r>
+            <a:br/>
+            <a:r>
+              <a:t>מבוסס FPGA</a:t>
+            </a:r>
+          </a:p>
+        </p:txBody>
+      </p:sp>
+      <p:sp>
+        <p:nvSpPr>
+          <p:cNvPr id="5" name="TextBox 4"/>
+          <p:cNvSpPr txBox="1"/>
+          <p:nvPr/>
+        </p:nvSpPr>
+        <p:spPr>
+          <a:xfrm>
+            <a:off x="1097280" y="1920240"/>
+            <a:ext cx="2286000" cy="1828800"/>
+          </a:xfrm>
+          <a:prstGeom prst="rect">
+            <a:avLst/>
+          </a:prstGeom>
+          <a:noFill/>
+        </p:spPr>
+        <p:txBody>
+          <a:bodyPr wrap="none">
+            <a:spAutoFit/>
+          </a:bodyPr>
+          <a:lstStyle/>
           <a:p>
             <a:pPr algn="r">
-              <a:defRPr sz="1800"/>
+              <a:defRPr sz="1300"/>
             </a:pPr>
             <a:r>
-              <a:t>• תצוגה: בקר ה-VGA קורא ברציפות מהזיכרון ומייצר את אותות הסנכרון והצבע למסך.</a:t>
+              <a:t>Inputs:</a:t>
+            </a:r>
+            <a:br/>
+            <a:r>
+              <a:t>clk, reset</a:t>
+            </a:r>
+            <a:br/>
+            <a:r>
+              <a:t>ov7670_vsync, href, pclk</a:t>
+            </a:r>
+            <a:br/>
+            <a:r>
+              <a:t>ov7670_data[7:0]</a:t>
+            </a:r>
+            <a:br/>
+            <a:r>
+              <a:t>btn[1:0], sw[1:0]</a:t>
+            </a:r>
+            <a:br/>
+            <a:r>
+              <a:t>scl, sda</a:t>
+            </a:r>
+          </a:p>
+        </p:txBody>
+      </p:sp>
+      <p:sp>
+        <p:nvSpPr>
+          <p:cNvPr id="6" name="Right Arrow 5"/>
+          <p:cNvSpPr/>
+          <p:nvPr/>
+        </p:nvSpPr>
+        <p:spPr>
+          <a:xfrm>
+            <a:off x="2834640" y="2834640"/>
+            <a:ext cx="548640" cy="274320"/>
+          </a:xfrm>
+          <a:prstGeom prst="rightArrow">
+            <a:avLst/>
+          </a:prstGeom>
+        </p:spPr>
+        <p:style>
+          <a:lnRef idx="1">
+            <a:schemeClr val="accent1"/>
+          </a:lnRef>
+          <a:fillRef idx="3">
+            <a:schemeClr val="accent1"/>
+          </a:fillRef>
+          <a:effectRef idx="2">
+            <a:schemeClr val="accent1"/>
+          </a:effectRef>
+          <a:fontRef idx="minor">
+            <a:schemeClr val="lt1"/>
+          </a:fontRef>
+        </p:style>
+        <p:txBody>
+          <a:bodyPr rtlCol="0" anchor="ctr"/>
+          <a:lstStyle/>
+          <a:p>
+            <a:pPr algn="ctr"/>
+          </a:p>
+        </p:txBody>
+      </p:sp>
+      <p:sp>
+        <p:nvSpPr>
+          <p:cNvPr id="7" name="TextBox 6"/>
+          <p:cNvSpPr txBox="1"/>
+          <p:nvPr/>
+        </p:nvSpPr>
+        <p:spPr>
+          <a:xfrm>
+            <a:off x="5669280" y="1920240"/>
+            <a:ext cx="3200400" cy="1828800"/>
+          </a:xfrm>
+          <a:prstGeom prst="rect">
+            <a:avLst/>
+          </a:prstGeom>
+          <a:noFill/>
+        </p:spPr>
+        <p:txBody>
+          <a:bodyPr wrap="none">
+            <a:spAutoFit/>
+          </a:bodyPr>
+          <a:lstStyle/>
+          <a:p>
+            <a:pPr>
+              <a:defRPr sz="1300"/>
+            </a:pPr>
+            <a:r>
+              <a:t>Outputs:</a:t>
+            </a:r>
+            <a:br/>
+            <a:r>
+              <a:t>VGA_HS_O, VGA_VS_O</a:t>
+            </a:r>
+            <a:br/>
+            <a:r>
+              <a:t>VGA_R[3:0], G[3:0], B[3:0]</a:t>
+            </a:r>
+            <a:br/>
+            <a:r>
+              <a:t>ov7670_xclk, pwdn, reset</a:t>
+            </a:r>
+            <a:br/>
+            <a:r>
+              <a:t>led[3:0]</a:t>
+            </a:r>
+          </a:p>
+        </p:txBody>
+      </p:sp>
+      <p:sp>
+        <p:nvSpPr>
+          <p:cNvPr id="8" name="Right Arrow 7"/>
+          <p:cNvSpPr/>
+          <p:nvPr/>
+        </p:nvSpPr>
+        <p:spPr>
+          <a:xfrm>
+            <a:off x="5577840" y="2834640"/>
+            <a:ext cx="548640" cy="274320"/>
+          </a:xfrm>
+          <a:prstGeom prst="rightArrow">
+            <a:avLst/>
+          </a:prstGeom>
+        </p:spPr>
+        <p:style>
+          <a:lnRef idx="1">
+            <a:schemeClr val="accent1"/>
+          </a:lnRef>
+          <a:fillRef idx="3">
+            <a:schemeClr val="accent1"/>
+          </a:fillRef>
+          <a:effectRef idx="2">
+            <a:schemeClr val="accent1"/>
+          </a:effectRef>
+          <a:fontRef idx="minor">
+            <a:schemeClr val="lt1"/>
+          </a:fontRef>
+        </p:style>
+        <p:txBody>
+          <a:bodyPr rtlCol="0" anchor="ctr"/>
+          <a:lstStyle/>
+          <a:p>
+            <a:pPr algn="ctr"/>
+          </a:p>
+        </p:txBody>
+      </p:sp>
+      <p:sp>
+        <p:nvSpPr>
+          <p:cNvPr id="9" name="Rounded Rectangle 8"/>
+          <p:cNvSpPr/>
+          <p:nvPr/>
+        </p:nvSpPr>
+        <p:spPr>
+          <a:xfrm>
+            <a:off x="548640" y="4754880"/>
+            <a:ext cx="1554480" cy="731520"/>
+          </a:xfrm>
+          <a:prstGeom prst="roundRect">
+            <a:avLst/>
+          </a:prstGeom>
+          <a:solidFill>
+            <a:srgbClr val="4F81BD"/>
+          </a:solidFill>
+        </p:spPr>
+        <p:style>
+          <a:lnRef idx="1">
+            <a:schemeClr val="accent1"/>
+          </a:lnRef>
+          <a:fillRef idx="3">
+            <a:schemeClr val="accent1"/>
+          </a:fillRef>
+          <a:effectRef idx="2">
+            <a:schemeClr val="accent1"/>
+          </a:effectRef>
+          <a:fontRef idx="minor">
+            <a:schemeClr val="lt1"/>
+          </a:fontRef>
+        </p:style>
+        <p:txBody>
+          <a:bodyPr rtlCol="0" anchor="ctr"/>
+          <a:lstStyle/>
+          <a:p>
+            <a:pPr algn="ctr">
+              <a:defRPr sz="1400"/>
+            </a:pPr>
+            <a:r>
+              <a:t>ov7670_capture</a:t>
+            </a:r>
+          </a:p>
+        </p:txBody>
+      </p:sp>
+      <p:sp>
+        <p:nvSpPr>
+          <p:cNvPr id="10" name="Right Arrow 9"/>
+          <p:cNvSpPr/>
+          <p:nvPr/>
+        </p:nvSpPr>
+        <p:spPr>
+          <a:xfrm>
+            <a:off x="2103120" y="5029200"/>
+            <a:ext cx="457200" cy="182880"/>
+          </a:xfrm>
+          <a:prstGeom prst="rightArrow">
+            <a:avLst/>
+          </a:prstGeom>
+        </p:spPr>
+        <p:style>
+          <a:lnRef idx="1">
+            <a:schemeClr val="accent1"/>
+          </a:lnRef>
+          <a:fillRef idx="3">
+            <a:schemeClr val="accent1"/>
+          </a:fillRef>
+          <a:effectRef idx="2">
+            <a:schemeClr val="accent1"/>
+          </a:effectRef>
+          <a:fontRef idx="minor">
+            <a:schemeClr val="lt1"/>
+          </a:fontRef>
+        </p:style>
+        <p:txBody>
+          <a:bodyPr rtlCol="0" anchor="ctr"/>
+          <a:lstStyle/>
+          <a:p>
+            <a:pPr algn="ctr"/>
+          </a:p>
+        </p:txBody>
+      </p:sp>
+      <p:sp>
+        <p:nvSpPr>
+          <p:cNvPr id="11" name="Rounded Rectangle 10"/>
+          <p:cNvSpPr/>
+          <p:nvPr/>
+        </p:nvSpPr>
+        <p:spPr>
+          <a:xfrm>
+            <a:off x="2560320" y="4754880"/>
+            <a:ext cx="1554480" cy="731520"/>
+          </a:xfrm>
+          <a:prstGeom prst="roundRect">
+            <a:avLst/>
+          </a:prstGeom>
+          <a:solidFill>
+            <a:srgbClr val="4F81BD"/>
+          </a:solidFill>
+        </p:spPr>
+        <p:style>
+          <a:lnRef idx="1">
+            <a:schemeClr val="accent1"/>
+          </a:lnRef>
+          <a:fillRef idx="3">
+            <a:schemeClr val="accent1"/>
+          </a:fillRef>
+          <a:effectRef idx="2">
+            <a:schemeClr val="accent1"/>
+          </a:effectRef>
+          <a:fontRef idx="minor">
+            <a:schemeClr val="lt1"/>
+          </a:fontRef>
+        </p:style>
+        <p:txBody>
+          <a:bodyPr rtlCol="0" anchor="ctr"/>
+          <a:lstStyle/>
+          <a:p>
+            <a:pPr algn="ctr">
+              <a:defRPr sz="1400"/>
+            </a:pPr>
+            <a:r>
+              <a:t>frame_buffer</a:t>
+            </a:r>
+          </a:p>
+        </p:txBody>
+      </p:sp>
+      <p:sp>
+        <p:nvSpPr>
+          <p:cNvPr id="12" name="Right Arrow 11"/>
+          <p:cNvSpPr/>
+          <p:nvPr/>
+        </p:nvSpPr>
+        <p:spPr>
+          <a:xfrm>
+            <a:off x="4114800" y="5029200"/>
+            <a:ext cx="457200" cy="182880"/>
+          </a:xfrm>
+          <a:prstGeom prst="rightArrow">
+            <a:avLst/>
+          </a:prstGeom>
+        </p:spPr>
+        <p:style>
+          <a:lnRef idx="1">
+            <a:schemeClr val="accent1"/>
+          </a:lnRef>
+          <a:fillRef idx="3">
+            <a:schemeClr val="accent1"/>
+          </a:fillRef>
+          <a:effectRef idx="2">
+            <a:schemeClr val="accent1"/>
+          </a:effectRef>
+          <a:fontRef idx="minor">
+            <a:schemeClr val="lt1"/>
+          </a:fontRef>
+        </p:style>
+        <p:txBody>
+          <a:bodyPr rtlCol="0" anchor="ctr"/>
+          <a:lstStyle/>
+          <a:p>
+            <a:pPr algn="ctr"/>
+          </a:p>
+        </p:txBody>
+      </p:sp>
+      <p:sp>
+        <p:nvSpPr>
+          <p:cNvPr id="13" name="Rounded Rectangle 12"/>
+          <p:cNvSpPr/>
+          <p:nvPr/>
+        </p:nvSpPr>
+        <p:spPr>
+          <a:xfrm>
+            <a:off x="4572000" y="4754880"/>
+            <a:ext cx="1554480" cy="731520"/>
+          </a:xfrm>
+          <a:prstGeom prst="roundRect">
+            <a:avLst/>
+          </a:prstGeom>
+          <a:solidFill>
+            <a:srgbClr val="4F81BD"/>
+          </a:solidFill>
+        </p:spPr>
+        <p:style>
+          <a:lnRef idx="1">
+            <a:schemeClr val="accent1"/>
+          </a:lnRef>
+          <a:fillRef idx="3">
+            <a:schemeClr val="accent1"/>
+          </a:fillRef>
+          <a:effectRef idx="2">
+            <a:schemeClr val="accent1"/>
+          </a:effectRef>
+          <a:fontRef idx="minor">
+            <a:schemeClr val="lt1"/>
+          </a:fontRef>
+        </p:style>
+        <p:txBody>
+          <a:bodyPr rtlCol="0" anchor="ctr"/>
+          <a:lstStyle/>
+          <a:p>
+            <a:pPr algn="ctr">
+              <a:defRPr sz="1400"/>
+            </a:pPr>
+            <a:r>
+              <a:t>vga_controller</a:t>
+            </a:r>
+          </a:p>
+        </p:txBody>
+      </p:sp>
+      <p:sp>
+        <p:nvSpPr>
+          <p:cNvPr id="14" name="Right Arrow 13"/>
+          <p:cNvSpPr/>
+          <p:nvPr/>
+        </p:nvSpPr>
+        <p:spPr>
+          <a:xfrm>
+            <a:off x="6126480" y="5029200"/>
+            <a:ext cx="457200" cy="182880"/>
+          </a:xfrm>
+          <a:prstGeom prst="rightArrow">
+            <a:avLst/>
+          </a:prstGeom>
+        </p:spPr>
+        <p:style>
+          <a:lnRef idx="1">
+            <a:schemeClr val="accent1"/>
+          </a:lnRef>
+          <a:fillRef idx="3">
+            <a:schemeClr val="accent1"/>
+          </a:fillRef>
+          <a:effectRef idx="2">
+            <a:schemeClr val="accent1"/>
+          </a:effectRef>
+          <a:fontRef idx="minor">
+            <a:schemeClr val="lt1"/>
+          </a:fontRef>
+        </p:style>
+        <p:txBody>
+          <a:bodyPr rtlCol="0" anchor="ctr"/>
+          <a:lstStyle/>
+          <a:p>
+            <a:pPr algn="ctr"/>
+          </a:p>
+        </p:txBody>
+      </p:sp>
+      <p:sp>
+        <p:nvSpPr>
+          <p:cNvPr id="15" name="Rounded Rectangle 14"/>
+          <p:cNvSpPr/>
+          <p:nvPr/>
+        </p:nvSpPr>
+        <p:spPr>
+          <a:xfrm>
+            <a:off x="6583680" y="4754880"/>
+            <a:ext cx="1554480" cy="731520"/>
+          </a:xfrm>
+          <a:prstGeom prst="roundRect">
+            <a:avLst/>
+          </a:prstGeom>
+          <a:solidFill>
+            <a:srgbClr val="4F81BD"/>
+          </a:solidFill>
+        </p:spPr>
+        <p:style>
+          <a:lnRef idx="1">
+            <a:schemeClr val="accent1"/>
+          </a:lnRef>
+          <a:fillRef idx="3">
+            <a:schemeClr val="accent1"/>
+          </a:fillRef>
+          <a:effectRef idx="2">
+            <a:schemeClr val="accent1"/>
+          </a:effectRef>
+          <a:fontRef idx="minor">
+            <a:schemeClr val="lt1"/>
+          </a:fontRef>
+        </p:style>
+        <p:txBody>
+          <a:bodyPr rtlCol="0" anchor="ctr"/>
+          <a:lstStyle/>
+          <a:p>
+            <a:pPr algn="ctr">
+              <a:defRPr sz="1400"/>
+            </a:pPr>
+            <a:r>
+              <a:t>D to A Converter</a:t>
             </a:r>
           </a:p>
         </p:txBody>
@@ -3411,11 +3987,9 @@
           <a:bodyPr/>
           <a:lstStyle/>
           <a:p>
-            <a:pPr algn="ctr">
-              <a:defRPr/>
-            </a:pPr>
-            <a:r>
-              <a:t>מבוא ל-VGA: קונספט תותח האלקטרונים (CRT)</a:t>
+            <a:pPr rtl="1" algn="ctr"/>
+            <a:r>
+              <a:t>מבוא ל-VGA: סריקה קווית (Raster Scan)</a:t>
             </a:r>
           </a:p>
         </p:txBody>
@@ -3443,34 +4017,34 @@
           <a:lstStyle/>
           <a:p/>
           <a:p>
-            <a:pPr algn="r">
-              <a:defRPr sz="1800"/>
+            <a:pPr algn="r" rtl="1">
+              <a:defRPr sz="1600"/>
             </a:pPr>
             <a:r>
-              <a:t>• מקור הפרוטוקול: טכנולוגיית ה-VGA פותחה במקור עבור מסכי שפופרת קרן קתודית (CRT) המבוססים על פיזיקה אנלוגית.</a:t>
-            </a:r>
-          </a:p>
-          <a:p>
-            <a:pPr algn="r">
-              <a:defRPr sz="1800"/>
+              <a:t>• הציור על המסך מבוסס על קרן שסורקת את הפיקסלים משמאל לימין (שורה) ומלמעלה למטה (פריים).</a:t>
+            </a:r>
+          </a:p>
+          <a:p>
+            <a:pPr algn="r" rtl="1">
+              <a:defRPr sz="1600"/>
             </a:pPr>
             <a:r>
-              <a:t>• תותח אלקטרונים: המסך פועל באמצעות קרן פיזית הנורית על גבי מסך מצופה זרחן. עוצמת הזרם קובעת את עוצמת ההארה של כל פיקסל.</a:t>
-            </a:r>
-          </a:p>
-          <a:p>
-            <a:pPr algn="r">
-              <a:defRPr sz="1800"/>
+              <a:t>• תנועת הקרן חייבת להיות רציפה, מה שיוצר מסלול בצורת 'זיגזג'.</a:t>
+            </a:r>
+          </a:p>
+          <a:p>
+            <a:pPr algn="r" rtl="1">
+              <a:defRPr sz="1600"/>
             </a:pPr>
             <a:r>
-              <a:t>• המורשת האנלוגית: למרות שכיום המסכים מודרניים, הפרוטוקול מחייב שידור אותות השהייה שיאפשרו לקרן הפיזית זמן תנועה וחזרה.</a:t>
+              <a:t>• בכל פעם שהקרן מגיעה לקצה (אופקי או אנכי), נדרש זמן כדי להחזיר אותה לנקודת ההתחלה (Retrace).</a:t>
             </a:r>
           </a:p>
         </p:txBody>
       </p:sp>
       <p:pic>
         <p:nvPicPr>
-          <p:cNvPr id="4" name="Picture 3" descr="vga_analog_cathode_ray_concept.png"/>
+          <p:cNvPr id="4" name="Picture 3" descr="vga_raster_scan_retrace_concept.png"/>
           <p:cNvPicPr>
             <a:picLocks noChangeAspect="1"/>
           </p:cNvPicPr>
@@ -3484,8 +4058,8 @@
         </p:blipFill>
         <p:spPr>
           <a:xfrm>
-            <a:off x="2286000" y="2926080"/>
-            <a:ext cx="4572000" cy="3635868"/>
+            <a:off x="2286000" y="2743200"/>
+            <a:ext cx="4114800" cy="3335154"/>
           </a:xfrm>
           <a:prstGeom prst="rect">
             <a:avLst/>
@@ -3525,11 +4099,9 @@
           <a:bodyPr/>
           <a:lstStyle/>
           <a:p>
-            <a:pPr algn="ctr">
-              <a:defRPr/>
-            </a:pPr>
-            <a:r>
-              <a:t>עקרונות תצוגה: סריקה קווית (Raster Scan)</a:t>
+            <a:pPr rtl="1" algn="ctr"/>
+            <a:r>
+              <a:t>מרחב התצוגה: אזור פעיל מול זמני החשכה</a:t>
             </a:r>
           </a:p>
         </p:txBody>
@@ -3557,34 +4129,34 @@
           <a:lstStyle/>
           <a:p/>
           <a:p>
-            <a:pPr algn="r">
-              <a:defRPr sz="1800"/>
+            <a:pPr algn="r" rtl="1">
+              <a:defRPr sz="1600"/>
             </a:pPr>
             <a:r>
-              <a:t>• ציור רציף: התמונה נבנית על ידי סריקת פיקסלים משמאל לימין ומלמעלה למטה.</a:t>
-            </a:r>
-          </a:p>
-          <a:p>
-            <a:pPr algn="r">
-              <a:defRPr sz="1800"/>
+              <a:t>• אזור פעיל (Active Region): החלק במרכז המסך שבו משודרים נתוני התמונה בפועל (כגון 640x480).</a:t>
+            </a:r>
+          </a:p>
+          <a:p>
+            <a:pPr algn="r" rtl="1">
+              <a:defRPr sz="1600"/>
             </a:pPr>
             <a:r>
-              <a:t>• חזרה אופקית (H-Retrace): בסיום כל שורה, על הקרן לחזור לצידו השמאלי של המסך כדי להתחיל שורה חדשה.</a:t>
-            </a:r>
-          </a:p>
-          <a:p>
-            <a:pPr algn="r">
-              <a:defRPr sz="1800"/>
+              <a:t>• זמני השהייה (Front/Back Porch): 'שוליים' של זמן שנועדו לייצב את האות לפני ואחרי הסנכרון.</a:t>
+            </a:r>
+          </a:p>
+          <a:p>
+            <a:pPr algn="r" rtl="1">
+              <a:defRPr sz="1600"/>
             </a:pPr>
             <a:r>
-              <a:t>• חזרה אנכית (V-Retrace): בסיום פריים שלם, הקרן חוזרת לפינה השמאלית העליונה לפריים הבא.</a:t>
+              <a:t>• זמן סנכרון (Sync Pulse): פקודה פיזית למסך להחזיר את הקרן אחורה. בזמן זה הקרן חייבת להיות מוחשכת (Blanking).</a:t>
             </a:r>
           </a:p>
         </p:txBody>
       </p:sp>
       <p:pic>
         <p:nvPicPr>
-          <p:cNvPr id="4" name="Picture 3" descr="vga_raster_scan_retrace_concept.png"/>
+          <p:cNvPr id="4" name="Picture 3" descr="vga_active_vs_blanking_regions.png"/>
           <p:cNvPicPr>
             <a:picLocks noChangeAspect="1"/>
           </p:cNvPicPr>
@@ -3598,8 +4170,8 @@
         </p:blipFill>
         <p:spPr>
           <a:xfrm>
-            <a:off x="1828800" y="3200400"/>
-            <a:ext cx="5486400" cy="4446872"/>
+            <a:off x="2286000" y="2926080"/>
+            <a:ext cx="4572000" cy="3687417"/>
           </a:xfrm>
           <a:prstGeom prst="rect">
             <a:avLst/>
@@ -3639,11 +4211,9 @@
           <a:bodyPr/>
           <a:lstStyle/>
           <a:p>
-            <a:pPr algn="ctr">
-              <a:defRPr/>
-            </a:pPr>
-            <a:r>
-              <a:t>מרחב התצוגה ואזורי החשכה</a:t>
+            <a:pPr rtl="1" algn="ctr"/>
+            <a:r>
+              <a:t>תזמונים והחשכה (VGA controller)</a:t>
             </a:r>
           </a:p>
         </p:txBody>
@@ -3669,36 +4239,19 @@
             <a:spAutoFit/>
           </a:bodyPr>
           <a:lstStyle/>
-          <a:p/>
-          <a:p>
-            <a:pPr algn="r">
-              <a:defRPr sz="1800"/>
+          <a:p>
+            <a:pPr algn="r" rtl="1">
+              <a:defRPr sz="1600"/>
             </a:pPr>
             <a:r>
-              <a:t>• אזור פעיל (Active Video): הזמן בו הקרן מציירת פיקסלים רלוונטיים על המסך.</a:t>
-            </a:r>
-          </a:p>
-          <a:p>
-            <a:pPr algn="r">
-              <a:defRPr sz="1800"/>
-            </a:pPr>
-            <a:r>
-              <a:t>• שוליים (Front/Back Porch): אזורי ביטחון (השחרה) המפרידים בין מידע הצבע לבין פולס הסנכרון.</a:t>
-            </a:r>
-          </a:p>
-          <a:p>
-            <a:pPr algn="r">
-              <a:defRPr sz="1800"/>
-            </a:pPr>
-            <a:r>
-              <a:t>• פולס סנכרון (Sync Pulse): פקודה לוגית המורה למסך לבצע את החזרה בפועל (אופקית או אנכית).</a:t>
+              <a:t>מוני ה-horizontal וה-vertical מנוהלים על ידי שעון 25 MHz ומחשבים את מיקום הקרן. בזמני ה-porch וה-sync pulse, היציאות נדחפות ל-0000 כדי לאפשר את חזרת הקרן (blanking).</a:t>
             </a:r>
           </a:p>
         </p:txBody>
       </p:sp>
       <p:pic>
         <p:nvPicPr>
-          <p:cNvPr id="4" name="Picture 3" descr="vga_active_vs_blanking_regions.png"/>
+          <p:cNvPr id="4" name="Picture 3" descr="vga_counters_rtl_schematic.png"/>
           <p:cNvPicPr>
             <a:picLocks noChangeAspect="1"/>
           </p:cNvPicPr>
@@ -3712,8 +4265,32 @@
         </p:blipFill>
         <p:spPr>
           <a:xfrm>
-            <a:off x="1828800" y="3200400"/>
-            <a:ext cx="5486400" cy="4424901"/>
+            <a:off x="457200" y="2560320"/>
+            <a:ext cx="4114800" cy="2047875"/>
+          </a:xfrm>
+          <a:prstGeom prst="rect">
+            <a:avLst/>
+          </a:prstGeom>
+        </p:spPr>
+      </p:pic>
+      <p:pic>
+        <p:nvPicPr>
+          <p:cNvPr id="5" name="Picture 4" descr="vga_timing_waveform_and_table.png"/>
+          <p:cNvPicPr>
+            <a:picLocks noChangeAspect="1"/>
+          </p:cNvPicPr>
+          <p:nvPr/>
+        </p:nvPicPr>
+        <p:blipFill>
+          <a:blip r:embed="rId3"/>
+          <a:stretch>
+            <a:fillRect/>
+          </a:stretch>
+        </p:blipFill>
+        <p:spPr>
+          <a:xfrm>
+            <a:off x="4754880" y="2377440"/>
+            <a:ext cx="3657600" cy="3623733"/>
           </a:xfrm>
           <a:prstGeom prst="rect">
             <a:avLst/>
@@ -3753,11 +4330,9 @@
           <a:bodyPr/>
           <a:lstStyle/>
           <a:p>
-            <a:pPr algn="ctr">
-              <a:defRPr/>
-            </a:pPr>
-            <a:r>
-              <a:t>מימוש בחומרה: מוני סנכרון ותזמונים</a:t>
+            <a:pPr rtl="1" algn="ctr"/>
+            <a:r>
+              <a:t>מסלול הנתונים: חישוב כתובת הפיקסל ושליפה</a:t>
             </a:r>
           </a:p>
         </p:txBody>
@@ -3785,34 +4360,34 @@
           <a:lstStyle/>
           <a:p/>
           <a:p>
-            <a:pPr algn="r">
-              <a:defRPr sz="1800"/>
+            <a:pPr algn="r" rtl="1">
+              <a:defRPr sz="1600"/>
             </a:pPr>
             <a:r>
-              <a:t>• שעון פיקסל (25MHz): קצב העבודה נגזר מדרישת התקן ל-640x480 ב-60Hz.</a:t>
-            </a:r>
-          </a:p>
-          <a:p>
-            <a:pPr algn="r">
-              <a:defRPr sz="1800"/>
+              <a:t>• מיקום הקרן (X,Y): המונים hsync_reg ו-vsync_reg מפיקים את הקואורדינטות הדינמיות display_x ו-display_y בתוך האזור הפעיל.</a:t>
+            </a:r>
+          </a:p>
+          <a:p>
+            <a:pPr algn="r" rtl="1">
+              <a:defRPr sz="1600"/>
             </a:pPr>
             <a:r>
-              <a:t>• מונה אופקי (h_count): סופר פיקסלים בשורה (0 עד 799). מאתחל את המונה האנכי בסיום שורה.</a:t>
-            </a:r>
-          </a:p>
-          <a:p>
-            <a:pPr algn="r">
-              <a:defRPr sz="1800"/>
+              <a:t>• תרגום לכתובת ליניארית: הקואורדינטה מתורגמת מתמטית לכתובת הזיכרון bram_address_next ונשלחת החוצה דרך האות addrb.</a:t>
+            </a:r>
+          </a:p>
+          <a:p>
+            <a:pPr algn="r" rtl="1">
+              <a:defRPr sz="1600"/>
             </a:pPr>
             <a:r>
-              <a:t>• מונה אנכי (v_count): סופר שורות במסך (0 עד 520).</a:t>
+              <a:t>• שליפה מה-BRAM: רכיב ה-frame_buffer מקבל את הכתובת ומשחרר את 12 הביטים של הפיקסל היישר אל האות doutb של בקר ה-VGA.</a:t>
             </a:r>
           </a:p>
         </p:txBody>
       </p:sp>
       <p:pic>
         <p:nvPicPr>
-          <p:cNvPr id="4" name="Picture 3" descr="vga_timing_waveform_and_table.png"/>
+          <p:cNvPr id="4" name="Picture 3" descr="vga_address_bram_flow.png"/>
           <p:cNvPicPr>
             <a:picLocks noChangeAspect="1"/>
           </p:cNvPicPr>
@@ -3826,32 +4401,8 @@
         </p:blipFill>
         <p:spPr>
           <a:xfrm>
-            <a:off x="457200" y="2926080"/>
-            <a:ext cx="4114800" cy="4076700"/>
-          </a:xfrm>
-          <a:prstGeom prst="rect">
-            <a:avLst/>
-          </a:prstGeom>
-        </p:spPr>
-      </p:pic>
-      <p:pic>
-        <p:nvPicPr>
-          <p:cNvPr id="5" name="Picture 4" descr="vga_counters_rtl_schematic.png"/>
-          <p:cNvPicPr>
-            <a:picLocks noChangeAspect="1"/>
-          </p:cNvPicPr>
-          <p:nvPr/>
-        </p:nvPicPr>
-        <p:blipFill>
-          <a:blip r:embed="rId3"/>
-          <a:stretch>
-            <a:fillRect/>
-          </a:stretch>
-        </p:blipFill>
-        <p:spPr>
-          <a:xfrm>
-            <a:off x="5029200" y="2926080"/>
-            <a:ext cx="3657600" cy="1820333"/>
+            <a:off x="2286000" y="2926080"/>
+            <a:ext cx="4572000" cy="2635032"/>
           </a:xfrm>
           <a:prstGeom prst="rect">
             <a:avLst/>
@@ -3891,11 +4442,9 @@
           <a:bodyPr/>
           <a:lstStyle/>
           <a:p>
-            <a:pPr algn="ctr">
-              <a:defRPr/>
-            </a:pPr>
-            <a:r>
-              <a:t>מסלול הנתונים (Data Path): משעון לכתובת</a:t>
+            <a:pPr rtl="1" algn="ctr"/>
+            <a:r>
+              <a:t>עיבוד הפיקסל: ניתוב ל-RGB ומנגנון ה-Blanking</a:t>
             </a:r>
           </a:p>
         </p:txBody>
@@ -3923,34 +4472,34 @@
           <a:lstStyle/>
           <a:p/>
           <a:p>
-            <a:pPr algn="r">
-              <a:defRPr sz="1800"/>
+            <a:pPr algn="r" rtl="1">
+              <a:defRPr sz="1600"/>
             </a:pPr>
             <a:r>
-              <a:t>• תרגום קואורדינטות: מוני ה-X וה-Y המציינים את מיקום הקרן עוברים מניפולציה מתמטית.</a:t>
-            </a:r>
-          </a:p>
-          <a:p>
-            <a:pPr algn="r">
-              <a:defRPr sz="1800"/>
+              <a:t>• רישום ופיצול: הנתונים מ-doutb ננעלים באוגר pxl_data_reg ומפוצלים לשגרירים: vga_r_int (ביטים 11:8), vga_g_int (7:4) ו-vga_b_int (3:0).</a:t>
+            </a:r>
+          </a:p>
+          <a:p>
+            <a:pPr algn="r" rtl="1">
+              <a:defRPr sz="1600"/>
             </a:pPr>
             <a:r>
-              <a:t>• יצירת כתובת (Address Generation): הקואורדינטות הופכות לכתובת לינארית חד-ממדית (addrb).</a:t>
-            </a:r>
-          </a:p>
-          <a:p>
-            <a:pPr algn="r">
-              <a:defRPr sz="1800"/>
+              <a:t>• שומר הסף: האות in_display_area_delayed משמש כדגל המזהה האם הקרן מצוירת כעת על המסך או נמצאת מחוץ לתצוגה.</a:t>
+            </a:r>
+          </a:p>
+          <a:p>
+            <a:pPr algn="r" rtl="1">
+              <a:defRPr sz="1600"/>
             </a:pPr>
             <a:r>
-              <a:t>• שליפת המידע: הכתובת מועברת ל-BRAM, שמוציא בתגובה וקטור של 12 ביטים (doutb) המייצג את צבע הפיקסל.</a:t>
+              <a:t>• סינון דיגיטלי (Mux): כאשר הדגל ב-'1', ערכי ה-RGB מועברים ליציאות VGA_R/G/B. בזמני ה-Porch וה-Sync, היציאות נאלצות ל-"0000" (שחור מוחלט).</a:t>
             </a:r>
           </a:p>
         </p:txBody>
       </p:sp>
       <p:pic>
         <p:nvPicPr>
-          <p:cNvPr id="4" name="Picture 3" descr="vga_address_bram_flow.png"/>
+          <p:cNvPr id="4" name="Picture 3" descr="vga_rgb_video_on_logic.png"/>
           <p:cNvPicPr>
             <a:picLocks noChangeAspect="1"/>
           </p:cNvPicPr>
@@ -3964,8 +4513,8 @@
         </p:blipFill>
         <p:spPr>
           <a:xfrm>
-            <a:off x="1828800" y="3200400"/>
-            <a:ext cx="5486400" cy="3162038"/>
+            <a:off x="2286000" y="2926080"/>
+            <a:ext cx="4572000" cy="2167573"/>
           </a:xfrm>
           <a:prstGeom prst="rect">
             <a:avLst/>
@@ -4005,11 +4554,9 @@
           <a:bodyPr/>
           <a:lstStyle/>
           <a:p>
-            <a:pPr algn="ctr">
-              <a:defRPr/>
-            </a:pPr>
-            <a:r>
-              <a:t>ניתוב RGB ובקרת סינון (Blanking Logic)</a:t>
+            <a:pPr rtl="1" algn="ctr"/>
+            <a:r>
+              <a:t>המרת DAC אנלוגית ומחבר ה-VGA</a:t>
             </a:r>
           </a:p>
         </p:txBody>
@@ -4022,8 +4569,8 @@
         </p:nvSpPr>
         <p:spPr>
           <a:xfrm>
-            <a:off x="457200" y="1097280"/>
-            <a:ext cx="8229600" cy="1371600"/>
+            <a:off x="457200" y="1005840"/>
+            <a:ext cx="8229600" cy="914400"/>
           </a:xfrm>
           <a:prstGeom prst="rect">
             <a:avLst/>
@@ -4037,34 +4584,26 @@
           <a:lstStyle/>
           <a:p/>
           <a:p>
-            <a:pPr algn="r">
-              <a:defRPr sz="1800"/>
+            <a:pPr algn="r" rtl="1">
+              <a:defRPr sz="1600"/>
             </a:pPr>
             <a:r>
-              <a:t>• חלוקה לערוצים: וקטור ה-12 ביט (doutb) מפוצל ל-3 וקטורים של 4 ביטים: אדום, ירוק וכחול.</a:t>
-            </a:r>
-          </a:p>
-          <a:p>
-            <a:pPr algn="r">
-              <a:defRPr sz="1800"/>
+              <a:t>• סולם נגדים (Resistor Network): המרת 12 ביטי ה-RGB למתח אנלוגי רציף באמצעות משקולות נגדים (510Ω עד 4KΩ).</a:t>
+            </a:r>
+          </a:p>
+          <a:p>
+            <a:pPr algn="r" rtl="1">
+              <a:defRPr sz="1600"/>
             </a:pPr>
             <a:r>
-              <a:t>• דגל Display Enable: האות in_display_area מזהה מתי הקרן נמצאת מחוץ לאזור הפעיל (בזמן Retrace או Porch).</a:t>
-            </a:r>
-          </a:p>
-          <a:p>
-            <a:pPr algn="r">
-              <a:defRPr sz="1800"/>
-            </a:pPr>
-            <a:r>
-              <a:t>• החשכה אקטיבית: מעגל מרבב (MUX) מאלץ את נתוני הצבע ל-0000 כאשר אנו מחוץ לתצוגה, כדי למנוע שיבושים במסך.</a:t>
+              <a:t>• אותות סנכרון (B11 / B12): פיני היציאה מוגנים באמצעות נגדי 100Ω ומזינים ישירות את מחבר ה-DB15 של המסך.</a:t>
             </a:r>
           </a:p>
         </p:txBody>
       </p:sp>
       <p:pic>
         <p:nvPicPr>
-          <p:cNvPr id="4" name="Picture 3" descr="vga_rgb_video_on_logic.png"/>
+          <p:cNvPr id="4" name="Picture 3" descr="vga_dac_resistor_network.png"/>
           <p:cNvPicPr>
             <a:picLocks noChangeAspect="1"/>
           </p:cNvPicPr>
@@ -4078,8 +4617,32 @@
         </p:blipFill>
         <p:spPr>
           <a:xfrm>
-            <a:off x="2286000" y="3200400"/>
-            <a:ext cx="4572000" cy="2167573"/>
+            <a:off x="457200" y="2103120"/>
+            <a:ext cx="4023360" cy="4992221"/>
+          </a:xfrm>
+          <a:prstGeom prst="rect">
+            <a:avLst/>
+          </a:prstGeom>
+        </p:spPr>
+      </p:pic>
+      <p:pic>
+        <p:nvPicPr>
+          <p:cNvPr id="5" name="Picture 4" descr="vga_db15_connector_pins.png"/>
+          <p:cNvPicPr>
+            <a:picLocks noChangeAspect="1"/>
+          </p:cNvPicPr>
+          <p:nvPr/>
+        </p:nvPicPr>
+        <p:blipFill>
+          <a:blip r:embed="rId3"/>
+          <a:stretch>
+            <a:fillRect/>
+          </a:stretch>
+        </p:blipFill>
+        <p:spPr>
+          <a:xfrm>
+            <a:off x="4663440" y="2286000"/>
+            <a:ext cx="4023360" cy="3205277"/>
           </a:xfrm>
           <a:prstGeom prst="rect">
             <a:avLst/>
@@ -4119,11 +4682,9 @@
           <a:bodyPr/>
           <a:lstStyle/>
           <a:p>
-            <a:pPr algn="ctr">
-              <a:defRPr/>
-            </a:pPr>
-            <a:r>
-              <a:t>ממיר דיגיטלי לאנלוגי: מביטים לזרמים</a:t>
+            <a:pPr rtl="1" algn="ctr"/>
+            <a:r>
+              <a:t>עומק הנדסי: מחלק המתח ומשקלי הביטים</a:t>
             </a:r>
           </a:p>
         </p:txBody>
@@ -4151,34 +4712,34 @@
           <a:lstStyle/>
           <a:p/>
           <a:p>
-            <a:pPr algn="r">
-              <a:defRPr sz="1800"/>
+            <a:pPr algn="r" rtl="1">
+              <a:defRPr sz="1600"/>
             </a:pPr>
             <a:r>
-              <a:t>• ממשק פיזי (HD-DB15): המחבר החיצוני דורש מתחים אנלוגיים (0V-0.7V) עבור כל צבע (פינים 1,2,3).</a:t>
-            </a:r>
-          </a:p>
-          <a:p>
-            <a:pPr algn="r">
-              <a:defRPr sz="1800"/>
+              <a:t>• משקל פיזי לכל ביט (MSB לעומת LSB): הביט המשמעותי ביותר (MSB) מחובר לנגד הקטן ביותר, ולכן מזזרים את הזרם הגדול ביותר למעגל ומשפיע משמעותית על עוצמת הצבע.</a:t>
+            </a:r>
+          </a:p>
+          <a:p>
+            <a:pPr algn="r" rtl="1">
+              <a:defRPr sz="1600"/>
             </a:pPr>
             <a:r>
-              <a:t>• DAC מבוסס נגדים: כרטיס ה-Artix-7 משתמש ברשת נגדים פסיבית (R-2R Ladder) להמרת ה-4 ביטים של כל צבע למתח.</a:t>
-            </a:r>
-          </a:p>
-          <a:p>
-            <a:pPr algn="r">
-              <a:defRPr sz="1800"/>
+              <a:t>• כוונון עדין: לעומתו, הביט הפחות משמעותי (LSB) מחובר לנגד הגדול ביותר בסולם. תרומתו לזרם הכולל היא מזערית ונועדה לכוונון עדין של הגוון.</a:t>
+            </a:r>
+          </a:p>
+          <a:p>
+            <a:pPr algn="r" rtl="1">
+              <a:defRPr sz="1600"/>
             </a:pPr>
             <a:r>
-              <a:t>• הגנת סנכרון: פיני ה-HSYNC וה-VSYNC מוגנים על ידי נגדים בטור למניעת זרם קצר.</a:t>
+              <a:t>• סכימה אנלוגית על המסך: כל הזרמים מהביטים הפעילים ('1') מתחברים וזורמים יחד דרך נגד הסיומת של המסך (75Ω) אל האדמה. כך נוצר מחלק מתח דינמי המפיק 0V עד 0.7V.</a:t>
             </a:r>
           </a:p>
         </p:txBody>
       </p:sp>
       <p:pic>
         <p:nvPicPr>
-          <p:cNvPr id="4" name="Picture 3" descr="vga_dac_resistor_network.png"/>
+          <p:cNvPr id="4" name="Picture 3" descr="vga_voltage_divider_dac.png"/>
           <p:cNvPicPr>
             <a:picLocks noChangeAspect="1"/>
           </p:cNvPicPr>
@@ -4192,32 +4753,8 @@
         </p:blipFill>
         <p:spPr>
           <a:xfrm>
-            <a:off x="457200" y="3200400"/>
-            <a:ext cx="4114800" cy="5105680"/>
-          </a:xfrm>
-          <a:prstGeom prst="rect">
-            <a:avLst/>
-          </a:prstGeom>
-        </p:spPr>
-      </p:pic>
-      <p:pic>
-        <p:nvPicPr>
-          <p:cNvPr id="5" name="Picture 4" descr="vga_db15_connector_pins.png"/>
-          <p:cNvPicPr>
-            <a:picLocks noChangeAspect="1"/>
-          </p:cNvPicPr>
-          <p:nvPr/>
-        </p:nvPicPr>
-        <p:blipFill>
-          <a:blip r:embed="rId3"/>
-          <a:stretch>
-            <a:fillRect/>
-          </a:stretch>
-        </p:blipFill>
-        <p:spPr>
-          <a:xfrm>
-            <a:off x="5029200" y="3200400"/>
-            <a:ext cx="3657600" cy="2913888"/>
+            <a:off x="1371600" y="2926080"/>
+            <a:ext cx="6400800" cy="4800600"/>
           </a:xfrm>
           <a:prstGeom prst="rect">
             <a:avLst/>

--- a/docs/presentation/output/VGA_Presentation_Yossi.pptx
+++ b/docs/presentation/output/VGA_Presentation_Yossi.pptx
@@ -16,6 +16,7 @@
     <p:sldId id="264" r:id="rId15"/>
     <p:sldId id="265" r:id="rId16"/>
     <p:sldId id="266" r:id="rId17"/>
+    <p:sldId id="267" r:id="rId18"/>
   </p:sldIdLst>
   <p:sldSz cx="9144000" cy="6858000" type="screen4x3"/>
   <p:notesSz cx="6858000" cy="9144000"/>
@@ -3247,9 +3248,9 @@
           <a:bodyPr/>
           <a:lstStyle/>
           <a:p>
-            <a:pPr rtl="1"/>
-            <a:r>
-              <a:t>מקרה בוחן 1: תזמון ירידת שורה (Horizontal Blanking)</a:t>
+            <a:pPr rtl="1" algn="ctr"/>
+            <a:r>
+              <a:t>עומק הנדסי: מחלק המתח ומשקלי הביטים</a:t>
             </a:r>
           </a:p>
         </p:txBody>
@@ -3262,8 +3263,8 @@
         </p:nvSpPr>
         <p:spPr>
           <a:xfrm>
-            <a:off x="457200" y="1005840"/>
-            <a:ext cx="8229600" cy="731520"/>
+            <a:off x="457200" y="1097280"/>
+            <a:ext cx="8229600" cy="1371600"/>
           </a:xfrm>
           <a:prstGeom prst="rect">
             <a:avLst/>
@@ -3281,11 +3282,51 @@
               <a:defRPr sz="1600"/>
             </a:pPr>
             <a:r>
-              <a:t>ניהול המונים (Horizontal/Vertical) ושליטה במנגנון ההחשכה (Blanking) לחזרת הקרן.</a:t>
-            </a:r>
-          </a:p>
-        </p:txBody>
-      </p:sp>
+              <a:t>• משקל פיזי לכל ביט (MSB לעומת LSB): הביט המשמעותי ביותר (MSB) מחובר לנגד הקטן ביותר, ולכן מזזרים את הזרם הגדול ביותר למעגל ומשפיע משמעותית על עוצמת הצבע.</a:t>
+            </a:r>
+          </a:p>
+          <a:p>
+            <a:pPr algn="r" rtl="1">
+              <a:defRPr sz="1600"/>
+            </a:pPr>
+            <a:r>
+              <a:t>• כוונון עדין: לעומתו, הביט הפחות משמעותי (LSB) מחובר לנגד הגדול ביותר בסולם. תרומתו לזרם הכולל היא מזערית ונועדה לכוונון עדין של הגוון.</a:t>
+            </a:r>
+          </a:p>
+          <a:p>
+            <a:pPr algn="r" rtl="1">
+              <a:defRPr sz="1600"/>
+            </a:pPr>
+            <a:r>
+              <a:t>• סכימה אנלוגית על המסך: כל הזרמים מהביטים הפעילים ('1') מתחברים וזורמים יחד דרך נגד הסיומת של המסך (75Ω) אל האדמה. כך נוצר מחלק מתח דינמי המפיק 0V עד 0.7V.</a:t>
+            </a:r>
+          </a:p>
+        </p:txBody>
+      </p:sp>
+      <p:pic>
+        <p:nvPicPr>
+          <p:cNvPr id="4" name="Picture 3" descr="vga_voltage_divider_dac.png"/>
+          <p:cNvPicPr>
+            <a:picLocks noChangeAspect="1"/>
+          </p:cNvPicPr>
+          <p:nvPr/>
+        </p:nvPicPr>
+        <p:blipFill>
+          <a:blip r:embed="rId2"/>
+          <a:stretch>
+            <a:fillRect/>
+          </a:stretch>
+        </p:blipFill>
+        <p:spPr>
+          <a:xfrm>
+            <a:off x="1371600" y="2926080"/>
+            <a:ext cx="6400800" cy="4800600"/>
+          </a:xfrm>
+          <a:prstGeom prst="rect">
+            <a:avLst/>
+          </a:prstGeom>
+        </p:spPr>
+      </p:pic>
     </p:spTree>
   </p:cSld>
   <p:clrMapOvr>
@@ -3321,6 +3362,78 @@
           <a:p>
             <a:pPr rtl="1"/>
             <a:r>
+              <a:t>מקרה בוחן 1: תזמון ירידת שורה (Horizontal Blanking)</a:t>
+            </a:r>
+          </a:p>
+        </p:txBody>
+      </p:sp>
+      <p:sp>
+        <p:nvSpPr>
+          <p:cNvPr id="3" name="TextBox 2"/>
+          <p:cNvSpPr txBox="1"/>
+          <p:nvPr/>
+        </p:nvSpPr>
+        <p:spPr>
+          <a:xfrm>
+            <a:off x="457200" y="1005840"/>
+            <a:ext cx="8229600" cy="731520"/>
+          </a:xfrm>
+          <a:prstGeom prst="rect">
+            <a:avLst/>
+          </a:prstGeom>
+          <a:noFill/>
+        </p:spPr>
+        <p:txBody>
+          <a:bodyPr wrap="none">
+            <a:spAutoFit/>
+          </a:bodyPr>
+          <a:lstStyle/>
+          <a:p/>
+          <a:p>
+            <a:pPr algn="r" rtl="1">
+              <a:defRPr sz="1600"/>
+            </a:pPr>
+            <a:r>
+              <a:t>ניהול המונים (Horizontal/Vertical) ושליטה במנגנון ההחשכה (Blanking) לחזרת הקרן.</a:t>
+            </a:r>
+          </a:p>
+        </p:txBody>
+      </p:sp>
+    </p:spTree>
+  </p:cSld>
+  <p:clrMapOvr>
+    <a:masterClrMapping/>
+  </p:clrMapOvr>
+</p:sld>
+</file>
+
+<file path=ppt/slides/slide12.xml><?xml version="1.0" encoding="utf-8"?>
+<p:sld xmlns:a="http://schemas.openxmlformats.org/drawingml/2006/main" xmlns:p="http://schemas.openxmlformats.org/presentationml/2006/main" xmlns:r="http://schemas.openxmlformats.org/officeDocument/2006/relationships">
+  <p:cSld>
+    <p:spTree>
+      <p:nvGrpSpPr>
+        <p:cNvPr id="1" name=""/>
+        <p:cNvGrpSpPr/>
+        <p:nvPr/>
+      </p:nvGrpSpPr>
+      <p:grpSpPr/>
+      <p:sp>
+        <p:nvSpPr>
+          <p:cNvPr id="2" name="Title 1"/>
+          <p:cNvSpPr>
+            <a:spLocks noGrp="1"/>
+          </p:cNvSpPr>
+          <p:nvPr>
+            <p:ph type="title"/>
+          </p:nvPr>
+        </p:nvSpPr>
+        <p:spPr/>
+        <p:txBody>
+          <a:bodyPr/>
+          <a:lstStyle/>
+          <a:p>
+            <a:pPr rtl="1"/>
+            <a:r>
               <a:t>מקרה בוחן 2: מ-RGB דיגיטלי ליציאה אנלוגית</a:t>
             </a:r>
           </a:p>
@@ -3989,7 +4102,7 @@
           <a:p>
             <a:pPr rtl="1" algn="ctr"/>
             <a:r>
-              <a:t>מבוא ל-VGA: סריקה קווית (Raster Scan)</a:t>
+              <a:t>מבוא ל-VGA: קונספט תותח האלקטרונים (CRT)</a:t>
             </a:r>
           </a:p>
         </p:txBody>
@@ -4021,7 +4134,7 @@
               <a:defRPr sz="1600"/>
             </a:pPr>
             <a:r>
-              <a:t>• הציור על המסך מבוסס על קרן שסורקת את הפיקסלים משמאל לימין (שורה) ומלמעלה למטה (פריים).</a:t>
+              <a:t>• מקור הפרוטוקול: טכנולוגיית ה-VGA פותחה במקור עבור מסכי שפופרת קרן קתודית (CRT) המבוססים על פיזיקה אנלוגית.</a:t>
             </a:r>
           </a:p>
           <a:p>
@@ -4029,7 +4142,7 @@
               <a:defRPr sz="1600"/>
             </a:pPr>
             <a:r>
-              <a:t>• תנועת הקרן חייבת להיות רציפה, מה שיוצר מסלול בצורת 'זיגזג'.</a:t>
+              <a:t>• תותח אלקטרונים: המסך פועל באמצעות קרן פיזית הנורית על גבי מסך מצופה זרחן. עוצמת הזרם קובעת את עוצמת ההארה של כל פיקסל.</a:t>
             </a:r>
           </a:p>
           <a:p>
@@ -4037,14 +4150,14 @@
               <a:defRPr sz="1600"/>
             </a:pPr>
             <a:r>
-              <a:t>• בכל פעם שהקרן מגיעה לקצה (אופקי או אנכי), נדרש זמן כדי להחזיר אותה לנקודת ההתחלה (Retrace).</a:t>
+              <a:t>• המורשת האנלוגית: למרות שכיום המסכים מודרניים, הפרוטוקול מחייב שידור אותות השהייה שיאפשרו לקרן הפיזית זמן תנועה וחזרה.</a:t>
             </a:r>
           </a:p>
         </p:txBody>
       </p:sp>
       <p:pic>
         <p:nvPicPr>
-          <p:cNvPr id="4" name="Picture 3" descr="vga_raster_scan_retrace_concept.png"/>
+          <p:cNvPr id="4" name="Picture 3" descr="vga_analog_cathode_ray_concept.png"/>
           <p:cNvPicPr>
             <a:picLocks noChangeAspect="1"/>
           </p:cNvPicPr>
@@ -4058,8 +4171,8 @@
         </p:blipFill>
         <p:spPr>
           <a:xfrm>
-            <a:off x="2286000" y="2743200"/>
-            <a:ext cx="4114800" cy="3335154"/>
+            <a:off x="2286000" y="2926080"/>
+            <a:ext cx="4572000" cy="3635868"/>
           </a:xfrm>
           <a:prstGeom prst="rect">
             <a:avLst/>
@@ -4101,7 +4214,7 @@
           <a:p>
             <a:pPr rtl="1" algn="ctr"/>
             <a:r>
-              <a:t>מרחב התצוגה: אזור פעיל מול זמני החשכה</a:t>
+              <a:t>מבוא ל-VGA: סריקה קווית (Raster Scan)</a:t>
             </a:r>
           </a:p>
         </p:txBody>
@@ -4133,7 +4246,7 @@
               <a:defRPr sz="1600"/>
             </a:pPr>
             <a:r>
-              <a:t>• אזור פעיל (Active Region): החלק במרכז המסך שבו משודרים נתוני התמונה בפועל (כגון 640x480).</a:t>
+              <a:t>• הציור על המסך מבוסס על קרן שסורקת את הפיקסלים משמאל לימין (שורה) ומלמעלה למטה (פריים).</a:t>
             </a:r>
           </a:p>
           <a:p>
@@ -4141,7 +4254,7 @@
               <a:defRPr sz="1600"/>
             </a:pPr>
             <a:r>
-              <a:t>• זמני השהייה (Front/Back Porch): 'שוליים' של זמן שנועדו לייצב את האות לפני ואחרי הסנכרון.</a:t>
+              <a:t>• תנועת הקרן חייבת להיות רציפה, מה שיוצר מסלול בצורת 'זיגזג'.</a:t>
             </a:r>
           </a:p>
           <a:p>
@@ -4149,14 +4262,14 @@
               <a:defRPr sz="1600"/>
             </a:pPr>
             <a:r>
-              <a:t>• זמן סנכרון (Sync Pulse): פקודה פיזית למסך להחזיר את הקרן אחורה. בזמן זה הקרן חייבת להיות מוחשכת (Blanking).</a:t>
+              <a:t>• בכל פעם שהקרן מגיעה לקצה (אופקי או אנכי), נדרש זמן כדי להחזיר אותה לנקודת ההתחלה (Retrace).</a:t>
             </a:r>
           </a:p>
         </p:txBody>
       </p:sp>
       <p:pic>
         <p:nvPicPr>
-          <p:cNvPr id="4" name="Picture 3" descr="vga_active_vs_blanking_regions.png"/>
+          <p:cNvPr id="4" name="Picture 3" descr="vga_raster_scan_retrace_concept.png"/>
           <p:cNvPicPr>
             <a:picLocks noChangeAspect="1"/>
           </p:cNvPicPr>
@@ -4170,8 +4283,8 @@
         </p:blipFill>
         <p:spPr>
           <a:xfrm>
-            <a:off x="2286000" y="2926080"/>
-            <a:ext cx="4572000" cy="3687417"/>
+            <a:off x="2286000" y="2743200"/>
+            <a:ext cx="4114800" cy="3335154"/>
           </a:xfrm>
           <a:prstGeom prst="rect">
             <a:avLst/>
@@ -4213,7 +4326,7 @@
           <a:p>
             <a:pPr rtl="1" algn="ctr"/>
             <a:r>
-              <a:t>תזמונים והחשכה (VGA controller)</a:t>
+              <a:t>מרחב התצוגה: אזור פעיל מול זמני החשכה</a:t>
             </a:r>
           </a:p>
         </p:txBody>
@@ -4239,19 +4352,36 @@
             <a:spAutoFit/>
           </a:bodyPr>
           <a:lstStyle/>
+          <a:p/>
           <a:p>
             <a:pPr algn="r" rtl="1">
               <a:defRPr sz="1600"/>
             </a:pPr>
             <a:r>
-              <a:t>מוני ה-horizontal וה-vertical מנוהלים על ידי שעון 25 MHz ומחשבים את מיקום הקרן. בזמני ה-porch וה-sync pulse, היציאות נדחפות ל-0000 כדי לאפשר את חזרת הקרן (blanking).</a:t>
+              <a:t>• אזור פעיל (Active Region): החלק במרכז המסך שבו משודרים נתוני התמונה בפועל (כגון 640x480).</a:t>
+            </a:r>
+          </a:p>
+          <a:p>
+            <a:pPr algn="r" rtl="1">
+              <a:defRPr sz="1600"/>
+            </a:pPr>
+            <a:r>
+              <a:t>• זמני השהייה (Front/Back Porch): 'שוליים' של זמן שנועדו לייצב את האות לפני ואחרי הסנכרון.</a:t>
+            </a:r>
+          </a:p>
+          <a:p>
+            <a:pPr algn="r" rtl="1">
+              <a:defRPr sz="1600"/>
+            </a:pPr>
+            <a:r>
+              <a:t>• זמן סנכרון (Sync Pulse): פקודה פיזית למסך להחזיר את הקרן אחורה. בזמן זה הקרן חייבת להיות מוחשכת (Blanking).</a:t>
             </a:r>
           </a:p>
         </p:txBody>
       </p:sp>
       <p:pic>
         <p:nvPicPr>
-          <p:cNvPr id="4" name="Picture 3" descr="vga_counters_rtl_schematic.png"/>
+          <p:cNvPr id="4" name="Picture 3" descr="vga_active_vs_blanking_regions.png"/>
           <p:cNvPicPr>
             <a:picLocks noChangeAspect="1"/>
           </p:cNvPicPr>
@@ -4265,32 +4395,8 @@
         </p:blipFill>
         <p:spPr>
           <a:xfrm>
-            <a:off x="457200" y="2560320"/>
-            <a:ext cx="4114800" cy="2047875"/>
-          </a:xfrm>
-          <a:prstGeom prst="rect">
-            <a:avLst/>
-          </a:prstGeom>
-        </p:spPr>
-      </p:pic>
-      <p:pic>
-        <p:nvPicPr>
-          <p:cNvPr id="5" name="Picture 4" descr="vga_timing_waveform_and_table.png"/>
-          <p:cNvPicPr>
-            <a:picLocks noChangeAspect="1"/>
-          </p:cNvPicPr>
-          <p:nvPr/>
-        </p:nvPicPr>
-        <p:blipFill>
-          <a:blip r:embed="rId3"/>
-          <a:stretch>
-            <a:fillRect/>
-          </a:stretch>
-        </p:blipFill>
-        <p:spPr>
-          <a:xfrm>
-            <a:off x="4754880" y="2377440"/>
-            <a:ext cx="3657600" cy="3623733"/>
+            <a:off x="2286000" y="2926080"/>
+            <a:ext cx="4572000" cy="3687417"/>
           </a:xfrm>
           <a:prstGeom prst="rect">
             <a:avLst/>
@@ -4332,7 +4438,7 @@
           <a:p>
             <a:pPr rtl="1" algn="ctr"/>
             <a:r>
-              <a:t>מסלול הנתונים: חישוב כתובת הפיקסל ושליפה</a:t>
+              <a:t>תזמונים והחשכה (VGA controller)</a:t>
             </a:r>
           </a:p>
         </p:txBody>
@@ -4358,36 +4464,19 @@
             <a:spAutoFit/>
           </a:bodyPr>
           <a:lstStyle/>
-          <a:p/>
           <a:p>
             <a:pPr algn="r" rtl="1">
               <a:defRPr sz="1600"/>
             </a:pPr>
             <a:r>
-              <a:t>• מיקום הקרן (X,Y): המונים hsync_reg ו-vsync_reg מפיקים את הקואורדינטות הדינמיות display_x ו-display_y בתוך האזור הפעיל.</a:t>
-            </a:r>
-          </a:p>
-          <a:p>
-            <a:pPr algn="r" rtl="1">
-              <a:defRPr sz="1600"/>
-            </a:pPr>
-            <a:r>
-              <a:t>• תרגום לכתובת ליניארית: הקואורדינטה מתורגמת מתמטית לכתובת הזיכרון bram_address_next ונשלחת החוצה דרך האות addrb.</a:t>
-            </a:r>
-          </a:p>
-          <a:p>
-            <a:pPr algn="r" rtl="1">
-              <a:defRPr sz="1600"/>
-            </a:pPr>
-            <a:r>
-              <a:t>• שליפה מה-BRAM: רכיב ה-frame_buffer מקבל את הכתובת ומשחרר את 12 הביטים של הפיקסל היישר אל האות doutb של בקר ה-VGA.</a:t>
+              <a:t>מוני ה-horizontal וה-vertical מנוהלים על ידי שעון 25 MHz ומחשבים את מיקום הקרן. בזמני ה-porch וה-sync pulse, היציאות נדחפות ל-0000 כדי לאפשר את חזרת הקרן (blanking).</a:t>
             </a:r>
           </a:p>
         </p:txBody>
       </p:sp>
       <p:pic>
         <p:nvPicPr>
-          <p:cNvPr id="4" name="Picture 3" descr="vga_address_bram_flow.png"/>
+          <p:cNvPr id="4" name="Picture 3" descr="vga_counters_rtl_schematic.png"/>
           <p:cNvPicPr>
             <a:picLocks noChangeAspect="1"/>
           </p:cNvPicPr>
@@ -4401,8 +4490,32 @@
         </p:blipFill>
         <p:spPr>
           <a:xfrm>
-            <a:off x="2286000" y="2926080"/>
-            <a:ext cx="4572000" cy="2635032"/>
+            <a:off x="457200" y="2560320"/>
+            <a:ext cx="4114800" cy="2047875"/>
+          </a:xfrm>
+          <a:prstGeom prst="rect">
+            <a:avLst/>
+          </a:prstGeom>
+        </p:spPr>
+      </p:pic>
+      <p:pic>
+        <p:nvPicPr>
+          <p:cNvPr id="5" name="Picture 4" descr="vga_timing_waveform_and_table.png"/>
+          <p:cNvPicPr>
+            <a:picLocks noChangeAspect="1"/>
+          </p:cNvPicPr>
+          <p:nvPr/>
+        </p:nvPicPr>
+        <p:blipFill>
+          <a:blip r:embed="rId3"/>
+          <a:stretch>
+            <a:fillRect/>
+          </a:stretch>
+        </p:blipFill>
+        <p:spPr>
+          <a:xfrm>
+            <a:off x="4754880" y="2377440"/>
+            <a:ext cx="3657600" cy="3623733"/>
           </a:xfrm>
           <a:prstGeom prst="rect">
             <a:avLst/>
@@ -4444,7 +4557,7 @@
           <a:p>
             <a:pPr rtl="1" algn="ctr"/>
             <a:r>
-              <a:t>עיבוד הפיקסל: ניתוב ל-RGB ומנגנון ה-Blanking</a:t>
+              <a:t>מסלול הנתונים: חישוב כתובת הפיקסל ושליפה</a:t>
             </a:r>
           </a:p>
         </p:txBody>
@@ -4476,7 +4589,7 @@
               <a:defRPr sz="1600"/>
             </a:pPr>
             <a:r>
-              <a:t>• רישום ופיצול: הנתונים מ-doutb ננעלים באוגר pxl_data_reg ומפוצלים לשגרירים: vga_r_int (ביטים 11:8), vga_g_int (7:4) ו-vga_b_int (3:0).</a:t>
+              <a:t>• מיקום הקרן (X,Y): המונים hsync_reg ו-vsync_reg מפיקים את הקואורדינטות הדינמיות display_x ו-display_y בתוך האזור הפעיל.</a:t>
             </a:r>
           </a:p>
           <a:p>
@@ -4484,7 +4597,7 @@
               <a:defRPr sz="1600"/>
             </a:pPr>
             <a:r>
-              <a:t>• שומר הסף: האות in_display_area_delayed משמש כדגל המזהה האם הקרן מצוירת כעת על המסך או נמצאת מחוץ לתצוגה.</a:t>
+              <a:t>• תרגום לכתובת ליניארית: הקואורדינטה מתורגמת מתמטית לכתובת הזיכרון bram_address_next ונשלחת החוצה דרך האות addrb.</a:t>
             </a:r>
           </a:p>
           <a:p>
@@ -4492,14 +4605,14 @@
               <a:defRPr sz="1600"/>
             </a:pPr>
             <a:r>
-              <a:t>• סינון דיגיטלי (Mux): כאשר הדגל ב-'1', ערכי ה-RGB מועברים ליציאות VGA_R/G/B. בזמני ה-Porch וה-Sync, היציאות נאלצות ל-"0000" (שחור מוחלט).</a:t>
+              <a:t>• שליפה מה-BRAM: רכיב ה-frame_buffer מקבל את הכתובת ומשחרר את 12 הביטים של הפיקסל היישר אל האות doutb של בקר ה-VGA.</a:t>
             </a:r>
           </a:p>
         </p:txBody>
       </p:sp>
       <p:pic>
         <p:nvPicPr>
-          <p:cNvPr id="4" name="Picture 3" descr="vga_rgb_video_on_logic.png"/>
+          <p:cNvPr id="4" name="Picture 3" descr="vga_address_bram_flow.png"/>
           <p:cNvPicPr>
             <a:picLocks noChangeAspect="1"/>
           </p:cNvPicPr>
@@ -4514,7 +4627,7 @@
         <p:spPr>
           <a:xfrm>
             <a:off x="2286000" y="2926080"/>
-            <a:ext cx="4572000" cy="2167573"/>
+            <a:ext cx="4572000" cy="2635032"/>
           </a:xfrm>
           <a:prstGeom prst="rect">
             <a:avLst/>
@@ -4556,7 +4669,7 @@
           <a:p>
             <a:pPr rtl="1" algn="ctr"/>
             <a:r>
-              <a:t>המרת DAC אנלוגית ומחבר ה-VGA</a:t>
+              <a:t>עיבוד הפיקסל: ניתוב ל-RGB ומנגנון ה-Blanking</a:t>
             </a:r>
           </a:p>
         </p:txBody>
@@ -4569,8 +4682,8 @@
         </p:nvSpPr>
         <p:spPr>
           <a:xfrm>
-            <a:off x="457200" y="1005840"/>
-            <a:ext cx="8229600" cy="914400"/>
+            <a:off x="457200" y="1097280"/>
+            <a:ext cx="8229600" cy="1371600"/>
           </a:xfrm>
           <a:prstGeom prst="rect">
             <a:avLst/>
@@ -4588,7 +4701,7 @@
               <a:defRPr sz="1600"/>
             </a:pPr>
             <a:r>
-              <a:t>• סולם נגדים (Resistor Network): המרת 12 ביטי ה-RGB למתח אנלוגי רציף באמצעות משקולות נגדים (510Ω עד 4KΩ).</a:t>
+              <a:t>• רישום ופיצול: הנתונים מ-doutb ננעלים באוגר pxl_data_reg ומפוצלים לשגרירים: vga_r_int (ביטים 11:8), vga_g_int (7:4) ו-vga_b_int (3:0).</a:t>
             </a:r>
           </a:p>
           <a:p>
@@ -4596,14 +4709,22 @@
               <a:defRPr sz="1600"/>
             </a:pPr>
             <a:r>
-              <a:t>• אותות סנכרון (B11 / B12): פיני היציאה מוגנים באמצעות נגדי 100Ω ומזינים ישירות את מחבר ה-DB15 של המסך.</a:t>
+              <a:t>• שומר הסף: האות in_display_area_delayed משמש כדגל המזהה האם הקרן מצוירת כעת על המסך או נמצאת מחוץ לתצוגה.</a:t>
+            </a:r>
+          </a:p>
+          <a:p>
+            <a:pPr algn="r" rtl="1">
+              <a:defRPr sz="1600"/>
+            </a:pPr>
+            <a:r>
+              <a:t>• סינון דיגיטלי (Mux): כאשר הדגל ב-'1', ערכי ה-RGB מועברים ליציאות VGA_R/G/B. בזמני ה-Porch וה-Sync, היציאות נאלצות ל-"0000" (שחור מוחלט).</a:t>
             </a:r>
           </a:p>
         </p:txBody>
       </p:sp>
       <p:pic>
         <p:nvPicPr>
-          <p:cNvPr id="4" name="Picture 3" descr="vga_dac_resistor_network.png"/>
+          <p:cNvPr id="4" name="Picture 3" descr="vga_rgb_video_on_logic.png"/>
           <p:cNvPicPr>
             <a:picLocks noChangeAspect="1"/>
           </p:cNvPicPr>
@@ -4617,32 +4738,8 @@
         </p:blipFill>
         <p:spPr>
           <a:xfrm>
-            <a:off x="457200" y="2103120"/>
-            <a:ext cx="4023360" cy="4992221"/>
-          </a:xfrm>
-          <a:prstGeom prst="rect">
-            <a:avLst/>
-          </a:prstGeom>
-        </p:spPr>
-      </p:pic>
-      <p:pic>
-        <p:nvPicPr>
-          <p:cNvPr id="5" name="Picture 4" descr="vga_db15_connector_pins.png"/>
-          <p:cNvPicPr>
-            <a:picLocks noChangeAspect="1"/>
-          </p:cNvPicPr>
-          <p:nvPr/>
-        </p:nvPicPr>
-        <p:blipFill>
-          <a:blip r:embed="rId3"/>
-          <a:stretch>
-            <a:fillRect/>
-          </a:stretch>
-        </p:blipFill>
-        <p:spPr>
-          <a:xfrm>
-            <a:off x="4663440" y="2286000"/>
-            <a:ext cx="4023360" cy="3205277"/>
+            <a:off x="2286000" y="2926080"/>
+            <a:ext cx="4572000" cy="2167573"/>
           </a:xfrm>
           <a:prstGeom prst="rect">
             <a:avLst/>
@@ -4684,7 +4781,7 @@
           <a:p>
             <a:pPr rtl="1" algn="ctr"/>
             <a:r>
-              <a:t>עומק הנדסי: מחלק המתח ומשקלי הביטים</a:t>
+              <a:t>המרת DAC אנלוגית ומחבר ה-VGA</a:t>
             </a:r>
           </a:p>
         </p:txBody>
@@ -4697,8 +4794,8 @@
         </p:nvSpPr>
         <p:spPr>
           <a:xfrm>
-            <a:off x="457200" y="1097280"/>
-            <a:ext cx="8229600" cy="1371600"/>
+            <a:off x="457200" y="1005840"/>
+            <a:ext cx="8229600" cy="914400"/>
           </a:xfrm>
           <a:prstGeom prst="rect">
             <a:avLst/>
@@ -4716,7 +4813,7 @@
               <a:defRPr sz="1600"/>
             </a:pPr>
             <a:r>
-              <a:t>• משקל פיזי לכל ביט (MSB לעומת LSB): הביט המשמעותי ביותר (MSB) מחובר לנגד הקטן ביותר, ולכן מזזרים את הזרם הגדול ביותר למעגל ומשפיע משמעותית על עוצמת הצבע.</a:t>
+              <a:t>• סולם נגדים (Resistor Network): המרת 12 ביטי ה-RGB למתח אנלוגי רציף באמצעות משקולות נגדים (510Ω עד 4KΩ).</a:t>
             </a:r>
           </a:p>
           <a:p>
@@ -4724,22 +4821,14 @@
               <a:defRPr sz="1600"/>
             </a:pPr>
             <a:r>
-              <a:t>• כוונון עדין: לעומתו, הביט הפחות משמעותי (LSB) מחובר לנגד הגדול ביותר בסולם. תרומתו לזרם הכולל היא מזערית ונועדה לכוונון עדין של הגוון.</a:t>
-            </a:r>
-          </a:p>
-          <a:p>
-            <a:pPr algn="r" rtl="1">
-              <a:defRPr sz="1600"/>
-            </a:pPr>
-            <a:r>
-              <a:t>• סכימה אנלוגית על המסך: כל הזרמים מהביטים הפעילים ('1') מתחברים וזורמים יחד דרך נגד הסיומת של המסך (75Ω) אל האדמה. כך נוצר מחלק מתח דינמי המפיק 0V עד 0.7V.</a:t>
+              <a:t>• אותות סנכרון (B11 / B12): פיני היציאה מוגנים באמצעות נגדי 100Ω ומזינים ישירות את מחבר ה-DB15 של המסך.</a:t>
             </a:r>
           </a:p>
         </p:txBody>
       </p:sp>
       <p:pic>
         <p:nvPicPr>
-          <p:cNvPr id="4" name="Picture 3" descr="vga_voltage_divider_dac.png"/>
+          <p:cNvPr id="4" name="Picture 3" descr="vga_dac_resistor_network.png"/>
           <p:cNvPicPr>
             <a:picLocks noChangeAspect="1"/>
           </p:cNvPicPr>
@@ -4753,8 +4842,32 @@
         </p:blipFill>
         <p:spPr>
           <a:xfrm>
-            <a:off x="1371600" y="2926080"/>
-            <a:ext cx="6400800" cy="4800600"/>
+            <a:off x="457200" y="2103120"/>
+            <a:ext cx="4023360" cy="4992221"/>
+          </a:xfrm>
+          <a:prstGeom prst="rect">
+            <a:avLst/>
+          </a:prstGeom>
+        </p:spPr>
+      </p:pic>
+      <p:pic>
+        <p:nvPicPr>
+          <p:cNvPr id="5" name="Picture 4" descr="vga_db15_connector_pins.png"/>
+          <p:cNvPicPr>
+            <a:picLocks noChangeAspect="1"/>
+          </p:cNvPicPr>
+          <p:nvPr/>
+        </p:nvPicPr>
+        <p:blipFill>
+          <a:blip r:embed="rId3"/>
+          <a:stretch>
+            <a:fillRect/>
+          </a:stretch>
+        </p:blipFill>
+        <p:spPr>
+          <a:xfrm>
+            <a:off x="4663440" y="2286000"/>
+            <a:ext cx="4023360" cy="3205277"/>
           </a:xfrm>
           <a:prstGeom prst="rect">
             <a:avLst/>

--- a/docs/presentation/output/VGA_Presentation_Yossi.pptx
+++ b/docs/presentation/output/VGA_Presentation_Yossi.pptx
@@ -15,8 +15,6 @@
     <p:sldId id="263" r:id="rId14"/>
     <p:sldId id="264" r:id="rId15"/>
     <p:sldId id="265" r:id="rId16"/>
-    <p:sldId id="266" r:id="rId17"/>
-    <p:sldId id="267" r:id="rId18"/>
   </p:sldIdLst>
   <p:sldSz cx="9144000" cy="6858000" type="screen4x3"/>
   <p:notesSz cx="6858000" cy="9144000"/>
@@ -3335,150 +3333,6 @@
 </p:sld>
 </file>
 
-<file path=ppt/slides/slide11.xml><?xml version="1.0" encoding="utf-8"?>
-<p:sld xmlns:a="http://schemas.openxmlformats.org/drawingml/2006/main" xmlns:p="http://schemas.openxmlformats.org/presentationml/2006/main" xmlns:r="http://schemas.openxmlformats.org/officeDocument/2006/relationships">
-  <p:cSld>
-    <p:spTree>
-      <p:nvGrpSpPr>
-        <p:cNvPr id="1" name=""/>
-        <p:cNvGrpSpPr/>
-        <p:nvPr/>
-      </p:nvGrpSpPr>
-      <p:grpSpPr/>
-      <p:sp>
-        <p:nvSpPr>
-          <p:cNvPr id="2" name="Title 1"/>
-          <p:cNvSpPr>
-            <a:spLocks noGrp="1"/>
-          </p:cNvSpPr>
-          <p:nvPr>
-            <p:ph type="title"/>
-          </p:nvPr>
-        </p:nvSpPr>
-        <p:spPr/>
-        <p:txBody>
-          <a:bodyPr/>
-          <a:lstStyle/>
-          <a:p>
-            <a:pPr rtl="1"/>
-            <a:r>
-              <a:t>מקרה בוחן 1: תזמון ירידת שורה (Horizontal Blanking)</a:t>
-            </a:r>
-          </a:p>
-        </p:txBody>
-      </p:sp>
-      <p:sp>
-        <p:nvSpPr>
-          <p:cNvPr id="3" name="TextBox 2"/>
-          <p:cNvSpPr txBox="1"/>
-          <p:nvPr/>
-        </p:nvSpPr>
-        <p:spPr>
-          <a:xfrm>
-            <a:off x="457200" y="1005840"/>
-            <a:ext cx="8229600" cy="731520"/>
-          </a:xfrm>
-          <a:prstGeom prst="rect">
-            <a:avLst/>
-          </a:prstGeom>
-          <a:noFill/>
-        </p:spPr>
-        <p:txBody>
-          <a:bodyPr wrap="none">
-            <a:spAutoFit/>
-          </a:bodyPr>
-          <a:lstStyle/>
-          <a:p/>
-          <a:p>
-            <a:pPr algn="r" rtl="1">
-              <a:defRPr sz="1600"/>
-            </a:pPr>
-            <a:r>
-              <a:t>ניהול המונים (Horizontal/Vertical) ושליטה במנגנון ההחשכה (Blanking) לחזרת הקרן.</a:t>
-            </a:r>
-          </a:p>
-        </p:txBody>
-      </p:sp>
-    </p:spTree>
-  </p:cSld>
-  <p:clrMapOvr>
-    <a:masterClrMapping/>
-  </p:clrMapOvr>
-</p:sld>
-</file>
-
-<file path=ppt/slides/slide12.xml><?xml version="1.0" encoding="utf-8"?>
-<p:sld xmlns:a="http://schemas.openxmlformats.org/drawingml/2006/main" xmlns:p="http://schemas.openxmlformats.org/presentationml/2006/main" xmlns:r="http://schemas.openxmlformats.org/officeDocument/2006/relationships">
-  <p:cSld>
-    <p:spTree>
-      <p:nvGrpSpPr>
-        <p:cNvPr id="1" name=""/>
-        <p:cNvGrpSpPr/>
-        <p:nvPr/>
-      </p:nvGrpSpPr>
-      <p:grpSpPr/>
-      <p:sp>
-        <p:nvSpPr>
-          <p:cNvPr id="2" name="Title 1"/>
-          <p:cNvSpPr>
-            <a:spLocks noGrp="1"/>
-          </p:cNvSpPr>
-          <p:nvPr>
-            <p:ph type="title"/>
-          </p:nvPr>
-        </p:nvSpPr>
-        <p:spPr/>
-        <p:txBody>
-          <a:bodyPr/>
-          <a:lstStyle/>
-          <a:p>
-            <a:pPr rtl="1"/>
-            <a:r>
-              <a:t>מקרה בוחן 2: מ-RGB דיגיטלי ליציאה אנלוגית</a:t>
-            </a:r>
-          </a:p>
-        </p:txBody>
-      </p:sp>
-      <p:sp>
-        <p:nvSpPr>
-          <p:cNvPr id="3" name="TextBox 2"/>
-          <p:cNvSpPr txBox="1"/>
-          <p:nvPr/>
-        </p:nvSpPr>
-        <p:spPr>
-          <a:xfrm>
-            <a:off x="457200" y="1005840"/>
-            <a:ext cx="8229600" cy="731520"/>
-          </a:xfrm>
-          <a:prstGeom prst="rect">
-            <a:avLst/>
-          </a:prstGeom>
-          <a:noFill/>
-        </p:spPr>
-        <p:txBody>
-          <a:bodyPr wrap="none">
-            <a:spAutoFit/>
-          </a:bodyPr>
-          <a:lstStyle/>
-          <a:p/>
-          <a:p>
-            <a:pPr algn="r" rtl="1">
-              <a:defRPr sz="1600"/>
-            </a:pPr>
-            <a:r>
-              <a:t>המרת 12 ביטים של צבע (RGB) למתח פיזי רציף באמצעות רשת נגדים (DAC) ומחבר ה-VGA.</a:t>
-            </a:r>
-          </a:p>
-        </p:txBody>
-      </p:sp>
-    </p:spTree>
-  </p:cSld>
-  <p:clrMapOvr>
-    <a:masterClrMapping/>
-  </p:clrMapOvr>
-</p:sld>
-</file>
-
 <file path=ppt/slides/slide2.xml><?xml version="1.0" encoding="utf-8"?>
 <p:sld xmlns:a="http://schemas.openxmlformats.org/drawingml/2006/main" xmlns:p="http://schemas.openxmlformats.org/presentationml/2006/main" xmlns:r="http://schemas.openxmlformats.org/officeDocument/2006/relationships">
   <p:cSld>
@@ -4326,7 +4180,7 @@
           <a:p>
             <a:pPr rtl="1" algn="ctr"/>
             <a:r>
-              <a:t>מרחב התצוגה: אזור פעיל מול זמני החשכה</a:t>
+              <a:t>מרחב התצוגה: צלילה לערכי ה-Horizontal</a:t>
             </a:r>
           </a:p>
         </p:txBody>
@@ -4339,8 +4193,8 @@
         </p:nvSpPr>
         <p:spPr>
           <a:xfrm>
-            <a:off x="457200" y="1097280"/>
-            <a:ext cx="8229600" cy="1371600"/>
+            <a:off x="182880" y="1097280"/>
+            <a:ext cx="8686800" cy="1371600"/>
           </a:xfrm>
           <a:prstGeom prst="rect">
             <a:avLst/>
@@ -4358,7 +4212,7 @@
               <a:defRPr sz="1600"/>
             </a:pPr>
             <a:r>
-              <a:t>• אזור פעיל (Active Region): החלק במרכז המסך שבו משודרים נתוני התמונה בפועל (כגון 640x480).</a:t>
+              <a:t>• אזור פעיל (640 פיקסלים): המידע האקטיבי. תקן ה-VGA מקצה בדיוק 640 מחזורי שעון לציור השורה בפועל.</a:t>
             </a:r>
           </a:p>
           <a:p>
@@ -4366,7 +4220,7 @@
               <a:defRPr sz="1600"/>
             </a:pPr>
             <a:r>
-              <a:t>• זמני השהייה (Front/Back Porch): 'שוליים' של זמן שנועדו לייצב את האות לפני ואחרי הסנכרון.</a:t>
+              <a:t>• שוליים וסנכרון (Front 16, Sync 96, Back 48): זמנים אלו נועדו במקור כדי לאפשר לקרן האלקטרונים (CRT) לכבות ולחזור שמאלה.</a:t>
             </a:r>
           </a:p>
           <a:p>
@@ -4374,7 +4228,15 @@
               <a:defRPr sz="1600"/>
             </a:pPr>
             <a:r>
-              <a:t>• זמן סנכרון (Sync Pulse): פקודה פיזית למסך להחזיר את הקרן אחורה. בזמן זה הקרן חייבת להיות מוחשכת (Blanking).</a:t>
+              <a:t>• למה זה נדרש כיום? במסכי LCD/LED מודרניים אין קרן פיזית, אך הבקרים עדיין דורשים את 'הזמנים המתים' הללו (Blanking).</a:t>
+            </a:r>
+          </a:p>
+          <a:p>
+            <a:pPr algn="r" rtl="1">
+              <a:defRPr sz="1600"/>
+            </a:pPr>
+            <a:r>
+              <a:t>• תאימות תקן (VESA): שמירה על תזמונים אלו היא קריטית. ללא הדיליי המדויק הזה, המסך לא יסתנכרן ויציג שגיאת 'No Signal'.</a:t>
             </a:r>
           </a:p>
         </p:txBody>
@@ -4395,7 +4257,7 @@
         </p:blipFill>
         <p:spPr>
           <a:xfrm>
-            <a:off x="2286000" y="2926080"/>
+            <a:off x="2286000" y="3200400"/>
             <a:ext cx="4572000" cy="3687417"/>
           </a:xfrm>
           <a:prstGeom prst="rect">
@@ -4438,7 +4300,7 @@
           <a:p>
             <a:pPr rtl="1" algn="ctr"/>
             <a:r>
-              <a:t>תזמונים והחשכה (VGA controller)</a:t>
+              <a:t>תזמונים והחשכה בחומרה (VGA Controller)</a:t>
             </a:r>
           </a:p>
         </p:txBody>
@@ -4451,8 +4313,8 @@
         </p:nvSpPr>
         <p:spPr>
           <a:xfrm>
-            <a:off x="457200" y="1097280"/>
-            <a:ext cx="8229600" cy="1371600"/>
+            <a:off x="182880" y="1097280"/>
+            <a:ext cx="8686800" cy="1371600"/>
           </a:xfrm>
           <a:prstGeom prst="rect">
             <a:avLst/>
@@ -4464,12 +4326,29 @@
             <a:spAutoFit/>
           </a:bodyPr>
           <a:lstStyle/>
+          <a:p/>
           <a:p>
             <a:pPr algn="r" rtl="1">
               <a:defRPr sz="1600"/>
             </a:pPr>
             <a:r>
-              <a:t>מוני ה-horizontal וה-vertical מנוהלים על ידי שעון 25 MHz ומחשבים את מיקום הקרן. בזמני ה-porch וה-sync pulse, היציאות נדחפות ל-0000 כדי לאפשר את חזרת הקרן (blanking).</a:t>
+              <a:t>• מחזור שלם (800 פיקסלים): חיבור הערכים (640+16+96+48) דורש מהמונה האופקי (h_count) לספור מ-0 ועד 799.</a:t>
+            </a:r>
+          </a:p>
+          <a:p>
+            <a:pPr algn="r" rtl="1">
+              <a:defRPr sz="1600"/>
+            </a:pPr>
+            <a:r>
+              <a:t>• שעון פיקסל 25MHz: כל 'פיקסל' שקול למחזור שעון אחד של 40ns. סנכרון זה מבטיח קצב ריענון תקני של 60Hz.</a:t>
+            </a:r>
+          </a:p>
+          <a:p>
+            <a:pPr algn="r" rtl="1">
+              <a:defRPr sz="1600"/>
+            </a:pPr>
+            <a:r>
+              <a:t>• אכיפת שחור (Blanking): מחוץ לתחום ה-640, הלוגיקה שלנו מאלצת "0000" ב-RGB כדי למנוע 'מריחות' צבע בעת תנועת הקרן.</a:t>
             </a:r>
           </a:p>
         </p:txBody>
@@ -4490,7 +4369,7 @@
         </p:blipFill>
         <p:spPr>
           <a:xfrm>
-            <a:off x="457200" y="2560320"/>
+            <a:off x="457200" y="2926080"/>
             <a:ext cx="4114800" cy="2047875"/>
           </a:xfrm>
           <a:prstGeom prst="rect">
@@ -4514,7 +4393,7 @@
         </p:blipFill>
         <p:spPr>
           <a:xfrm>
-            <a:off x="4754880" y="2377440"/>
+            <a:off x="4754880" y="2560320"/>
             <a:ext cx="3657600" cy="3623733"/>
           </a:xfrm>
           <a:prstGeom prst="rect">

--- a/docs/presentation/output/VGA_Presentation_Yossi.pptx
+++ b/docs/presentation/output/VGA_Presentation_Yossi.pptx
@@ -15,6 +15,8 @@
     <p:sldId id="263" r:id="rId14"/>
     <p:sldId id="264" r:id="rId15"/>
     <p:sldId id="265" r:id="rId16"/>
+    <p:sldId id="266" r:id="rId17"/>
+    <p:sldId id="267" r:id="rId18"/>
   </p:sldIdLst>
   <p:sldSz cx="9144000" cy="6858000" type="screen4x3"/>
   <p:notesSz cx="6858000" cy="9144000"/>
@@ -3319,6 +3321,214 @@
           <a:xfrm>
             <a:off x="1371600" y="2926080"/>
             <a:ext cx="6400800" cy="4800600"/>
+          </a:xfrm>
+          <a:prstGeom prst="rect">
+            <a:avLst/>
+          </a:prstGeom>
+        </p:spPr>
+      </p:pic>
+    </p:spTree>
+  </p:cSld>
+  <p:clrMapOvr>
+    <a:masterClrMapping/>
+  </p:clrMapOvr>
+</p:sld>
+</file>
+
+<file path=ppt/slides/slide11.xml><?xml version="1.0" encoding="utf-8"?>
+<p:sld xmlns:a="http://schemas.openxmlformats.org/drawingml/2006/main" xmlns:p="http://schemas.openxmlformats.org/presentationml/2006/main" xmlns:r="http://schemas.openxmlformats.org/officeDocument/2006/relationships">
+  <p:cSld>
+    <p:spTree>
+      <p:nvGrpSpPr>
+        <p:cNvPr id="1" name=""/>
+        <p:cNvGrpSpPr/>
+        <p:nvPr/>
+      </p:nvGrpSpPr>
+      <p:grpSpPr/>
+      <p:sp>
+        <p:nvSpPr>
+          <p:cNvPr id="2" name="Title 1"/>
+          <p:cNvSpPr>
+            <a:spLocks noGrp="1"/>
+          </p:cNvSpPr>
+          <p:nvPr>
+            <p:ph type="title"/>
+          </p:nvPr>
+        </p:nvSpPr>
+        <p:spPr/>
+        <p:txBody>
+          <a:bodyPr/>
+          <a:lstStyle/>
+          <a:p>
+            <a:pPr rtl="1" algn="ctr"/>
+            <a:r>
+              <a:t>מבט-על: זרימת נתונים ותחומי שעון (RTL)</a:t>
+            </a:r>
+          </a:p>
+        </p:txBody>
+      </p:sp>
+      <p:sp>
+        <p:nvSpPr>
+          <p:cNvPr id="3" name="TextBox 2"/>
+          <p:cNvSpPr txBox="1"/>
+          <p:nvPr/>
+        </p:nvSpPr>
+        <p:spPr>
+          <a:xfrm>
+            <a:off x="182880" y="1097280"/>
+            <a:ext cx="8686800" cy="1371600"/>
+          </a:xfrm>
+          <a:prstGeom prst="rect">
+            <a:avLst/>
+          </a:prstGeom>
+          <a:noFill/>
+        </p:spPr>
+        <p:txBody>
+          <a:bodyPr wrap="none">
+            <a:spAutoFit/>
+          </a:bodyPr>
+          <a:lstStyle/>
+          <a:p/>
+          <a:p>
+            <a:pPr algn="r" rtl="1">
+              <a:defRPr sz="1600"/>
+            </a:pPr>
+            <a:r>
+              <a:t>• מחולל שעונים (clk_generator): רכיב PLL המקבל שעון מערכת ומפיק שעון 25MHz נפרד ל-VGA ושעון ייעודי למצלמה.</a:t>
+            </a:r>
+          </a:p>
+          <a:p>
+            <a:pPr algn="r" rtl="1">
+              <a:defRPr sz="1600"/>
+            </a:pPr>
+            <a:r>
+              <a:t>• גישור חציית שעונים (CDC): זיכרון ה-BRAM (בתצורת Dual-Port) פועל כחוצץ בטוח בין קצב הכתיבה לקצב הקריאה.</a:t>
+            </a:r>
+          </a:p>
+          <a:p>
+            <a:pPr algn="r" rtl="1">
+              <a:defRPr sz="1600"/>
+            </a:pPr>
+            <a:r>
+              <a:t>• תחום אדום (Camera Domain): קליטת הפיקסלים מהמצלמה (ov7670_capture) ודחיפתם לפורט A של הזיכרון (clka).</a:t>
+            </a:r>
+          </a:p>
+          <a:p>
+            <a:pPr algn="r" rtl="1">
+              <a:defRPr sz="1600"/>
+            </a:pPr>
+            <a:r>
+              <a:t>• תחום כחול (VGA Domain): המיקוד שלנו – שליפת הפיקסלים מפורט B (clkb) על ידי בקר ה-VGA וייצור אותות התצוגה.</a:t>
+            </a:r>
+          </a:p>
+        </p:txBody>
+      </p:sp>
+    </p:spTree>
+  </p:cSld>
+  <p:clrMapOvr>
+    <a:masterClrMapping/>
+  </p:clrMapOvr>
+</p:sld>
+</file>
+
+<file path=ppt/slides/slide12.xml><?xml version="1.0" encoding="utf-8"?>
+<p:sld xmlns:a="http://schemas.openxmlformats.org/drawingml/2006/main" xmlns:p="http://schemas.openxmlformats.org/presentationml/2006/main" xmlns:r="http://schemas.openxmlformats.org/officeDocument/2006/relationships">
+  <p:cSld>
+    <p:spTree>
+      <p:nvGrpSpPr>
+        <p:cNvPr id="1" name=""/>
+        <p:cNvGrpSpPr/>
+        <p:nvPr/>
+      </p:nvGrpSpPr>
+      <p:grpSpPr/>
+      <p:sp>
+        <p:nvSpPr>
+          <p:cNvPr id="2" name="Title 1"/>
+          <p:cNvSpPr>
+            <a:spLocks noGrp="1"/>
+          </p:cNvSpPr>
+          <p:nvPr>
+            <p:ph type="title"/>
+          </p:nvPr>
+        </p:nvSpPr>
+        <p:spPr/>
+        <p:txBody>
+          <a:bodyPr/>
+          <a:lstStyle/>
+          <a:p>
+            <a:pPr rtl="1" algn="ctr"/>
+            <a:r>
+              <a:t>ניהול שעונים במערכת (Clock Generator)</a:t>
+            </a:r>
+          </a:p>
+        </p:txBody>
+      </p:sp>
+      <p:sp>
+        <p:nvSpPr>
+          <p:cNvPr id="3" name="TextBox 2"/>
+          <p:cNvSpPr txBox="1"/>
+          <p:nvPr/>
+        </p:nvSpPr>
+        <p:spPr>
+          <a:xfrm>
+            <a:off x="182880" y="1097280"/>
+            <a:ext cx="8686800" cy="1371600"/>
+          </a:xfrm>
+          <a:prstGeom prst="rect">
+            <a:avLst/>
+          </a:prstGeom>
+          <a:noFill/>
+        </p:spPr>
+        <p:txBody>
+          <a:bodyPr wrap="none">
+            <a:spAutoFit/>
+          </a:bodyPr>
+          <a:lstStyle/>
+          <a:p/>
+          <a:p>
+            <a:pPr algn="r" rtl="1">
+              <a:defRPr sz="1600"/>
+            </a:pPr>
+            <a:r>
+              <a:t>• מקור שעון (System Clock): כניסת clk מקבלת את שעון הלוח המקורי (100MHz) ומזינה את ה-PLL (clk_wiz_0).</a:t>
+            </a:r>
+          </a:p>
+          <a:p>
+            <a:pPr algn="r" rtl="1">
+              <a:defRPr sz="1600"/>
+            </a:pPr>
+            <a:r>
+              <a:t>• שעון תצוגה (vga_pll): ה-PLL מפיק תדר של 25MHz המזין את בקר ה-VGA (pxl_clk) ואת פורט הקריאה (clkb) ב-BRAM.</a:t>
+            </a:r>
+          </a:p>
+          <a:p>
+            <a:pPr algn="r" rtl="1">
+              <a:defRPr sz="1600"/>
+            </a:pPr>
+            <a:r>
+              <a:t>• שעון מצלמה (xclk_pll): הפקת שעון ייעודי של 24MHz (xclk_ov7670) המנותב החוצה לסנכרון רכיב המצלמה.</a:t>
+            </a:r>
+          </a:p>
+        </p:txBody>
+      </p:sp>
+      <p:pic>
+        <p:nvPicPr>
+          <p:cNvPr id="4" name="Picture 3" descr="clk_wiz_instantiation.png"/>
+          <p:cNvPicPr>
+            <a:picLocks noChangeAspect="1"/>
+          </p:cNvPicPr>
+          <p:nvPr/>
+        </p:nvPicPr>
+        <p:blipFill>
+          <a:blip r:embed="rId2"/>
+          <a:stretch>
+            <a:fillRect/>
+          </a:stretch>
+        </p:blipFill>
+        <p:spPr>
+          <a:xfrm>
+            <a:off x="2286000" y="2926080"/>
+            <a:ext cx="4572000" cy="3237682"/>
           </a:xfrm>
           <a:prstGeom prst="rect">
             <a:avLst/>

--- a/docs/presentation/output/VGA_Presentation_Yossi.pptx
+++ b/docs/presentation/output/VGA_Presentation_Yossi.pptx
@@ -3420,6 +3420,116 @@
             <a:r>
               <a:t>• תחום כחול (VGA Domain): המיקוד שלנו – שליפת הפיקסלים מפורט B (clkb) על ידי בקר ה-VGA וייצור אותות התצוגה.</a:t>
             </a:r>
+          </a:p>
+        </p:txBody>
+      </p:sp>
+      <p:pic>
+        <p:nvPicPr>
+          <p:cNvPr id="4" name="Picture 3" descr="rtl_direct_vga_path.png"/>
+          <p:cNvPicPr>
+            <a:picLocks noChangeAspect="1"/>
+          </p:cNvPicPr>
+          <p:nvPr/>
+        </p:nvPicPr>
+        <p:blipFill>
+          <a:blip r:embed="rId2"/>
+          <a:stretch>
+            <a:fillRect/>
+          </a:stretch>
+        </p:blipFill>
+        <p:spPr>
+          <a:xfrm>
+            <a:off x="457200" y="2743200"/>
+            <a:ext cx="8229600" cy="4342751"/>
+          </a:xfrm>
+          <a:prstGeom prst="rect">
+            <a:avLst/>
+          </a:prstGeom>
+        </p:spPr>
+      </p:pic>
+      <p:sp>
+        <p:nvSpPr>
+          <p:cNvPr id="5" name="Rectangle 4"/>
+          <p:cNvSpPr/>
+          <p:nvPr/>
+        </p:nvSpPr>
+        <p:spPr>
+          <a:xfrm>
+            <a:off x="914400" y="2926080"/>
+            <a:ext cx="3657600" cy="3474720"/>
+          </a:xfrm>
+          <a:prstGeom prst="rect">
+            <a:avLst/>
+          </a:prstGeom>
+          <a:noFill/>
+          <a:ln w="38100">
+            <a:solidFill>
+              <a:srgbClr val="FF0000"/>
+            </a:solidFill>
+          </a:ln>
+        </p:spPr>
+        <p:style>
+          <a:lnRef idx="1">
+            <a:schemeClr val="accent1"/>
+          </a:lnRef>
+          <a:fillRef idx="3">
+            <a:schemeClr val="accent1"/>
+          </a:fillRef>
+          <a:effectRef idx="2">
+            <a:schemeClr val="accent1"/>
+          </a:effectRef>
+          <a:fontRef idx="minor">
+            <a:schemeClr val="lt1"/>
+          </a:fontRef>
+        </p:style>
+        <p:txBody>
+          <a:bodyPr rtlCol="0" anchor="ctr"/>
+          <a:lstStyle/>
+          <a:p>
+            <a:pPr algn="ctr"/>
+          </a:p>
+        </p:txBody>
+      </p:sp>
+      <p:sp>
+        <p:nvSpPr>
+          <p:cNvPr id="6" name="Rectangle 5"/>
+          <p:cNvSpPr/>
+          <p:nvPr/>
+        </p:nvSpPr>
+        <p:spPr>
+          <a:xfrm>
+            <a:off x="4663440" y="2926080"/>
+            <a:ext cx="3657600" cy="3474720"/>
+          </a:xfrm>
+          <a:prstGeom prst="rect">
+            <a:avLst/>
+          </a:prstGeom>
+          <a:noFill/>
+          <a:ln w="50800">
+            <a:solidFill>
+              <a:srgbClr val="0070C0"/>
+            </a:solidFill>
+          </a:ln>
+        </p:spPr>
+        <p:style>
+          <a:lnRef idx="1">
+            <a:schemeClr val="accent1"/>
+          </a:lnRef>
+          <a:fillRef idx="3">
+            <a:schemeClr val="accent1"/>
+          </a:fillRef>
+          <a:effectRef idx="2">
+            <a:schemeClr val="accent1"/>
+          </a:effectRef>
+          <a:fontRef idx="minor">
+            <a:schemeClr val="lt1"/>
+          </a:fontRef>
+        </p:style>
+        <p:txBody>
+          <a:bodyPr rtlCol="0" anchor="ctr"/>
+          <a:lstStyle/>
+          <a:p>
+            <a:pPr algn="ctr"/>
           </a:p>
         </p:txBody>
       </p:sp>

--- a/docs/presentation/output/VGA_Presentation_Yossi.pptx
+++ b/docs/presentation/output/VGA_Presentation_Yossi.pptx
@@ -17,6 +17,8 @@
     <p:sldId id="265" r:id="rId16"/>
     <p:sldId id="266" r:id="rId17"/>
     <p:sldId id="267" r:id="rId18"/>
+    <p:sldId id="268" r:id="rId19"/>
+    <p:sldId id="269" r:id="rId20"/>
   </p:sldIdLst>
   <p:sldSz cx="9144000" cy="6858000" type="screen4x3"/>
   <p:notesSz cx="6858000" cy="9144000"/>
@@ -3645,6 +3647,214 @@
           </a:prstGeom>
         </p:spPr>
       </p:pic>
+    </p:spTree>
+  </p:cSld>
+  <p:clrMapOvr>
+    <a:masterClrMapping/>
+  </p:clrMapOvr>
+</p:sld>
+</file>
+
+<file path=ppt/slides/slide13.xml><?xml version="1.0" encoding="utf-8"?>
+<p:sld xmlns:a="http://schemas.openxmlformats.org/drawingml/2006/main" xmlns:p="http://schemas.openxmlformats.org/presentationml/2006/main" xmlns:r="http://schemas.openxmlformats.org/officeDocument/2006/relationships">
+  <p:cSld>
+    <p:spTree>
+      <p:nvGrpSpPr>
+        <p:cNvPr id="1" name=""/>
+        <p:cNvGrpSpPr/>
+        <p:nvPr/>
+      </p:nvGrpSpPr>
+      <p:grpSpPr/>
+      <p:sp>
+        <p:nvSpPr>
+          <p:cNvPr id="2" name="Title 1"/>
+          <p:cNvSpPr>
+            <a:spLocks noGrp="1"/>
+          </p:cNvSpPr>
+          <p:nvPr>
+            <p:ph type="title"/>
+          </p:nvPr>
+        </p:nvSpPr>
+        <p:spPr/>
+        <p:txBody>
+          <a:bodyPr/>
+          <a:lstStyle/>
+          <a:p>
+            <a:pPr rtl="1" algn="ctr"/>
+            <a:r>
+              <a:t>זיכרון ה-BRAM: חוצץ התמונה (Frame Buffer)</a:t>
+            </a:r>
+          </a:p>
+        </p:txBody>
+      </p:sp>
+      <p:sp>
+        <p:nvSpPr>
+          <p:cNvPr id="3" name="TextBox 2"/>
+          <p:cNvSpPr txBox="1"/>
+          <p:nvPr/>
+        </p:nvSpPr>
+        <p:spPr>
+          <a:xfrm>
+            <a:off x="182880" y="1097280"/>
+            <a:ext cx="8686800" cy="1371600"/>
+          </a:xfrm>
+          <a:prstGeom prst="rect">
+            <a:avLst/>
+          </a:prstGeom>
+          <a:noFill/>
+        </p:spPr>
+        <p:txBody>
+          <a:bodyPr wrap="none">
+            <a:spAutoFit/>
+          </a:bodyPr>
+          <a:lstStyle/>
+          <a:p/>
+          <a:p>
+            <a:pPr algn="r" rtl="1">
+              <a:defRPr sz="1600"/>
+            </a:pPr>
+            <a:r>
+              <a:t>• תצורת Dual-Port: הפרדה מוחלטת לחומרת כתיבה (A) וקריאה (B). זהו הפתרון שלנו ל-CDC (חציית תחומי שעון) המונע התנגשויות נתונים.</a:t>
+            </a:r>
+          </a:p>
+          <a:p>
+            <a:pPr algn="r" rtl="1">
+              <a:defRPr sz="1600"/>
+            </a:pPr>
+            <a:r>
+              <a:t>• שעונים א-סינכרוניים: הכתיבה (clka) מתבצעת בתדר המערכת (100MHz), בעוד הקריאה למסך (clkb) מונעת בלעדית על ידי שעון ה-VGA שלנו (25MHz).</a:t>
+            </a:r>
+          </a:p>
+          <a:p>
+            <a:pPr algn="r" rtl="1">
+              <a:defRPr sz="1600"/>
+            </a:pPr>
+            <a:r>
+              <a:t>• ממדי הזיכרון (307,200x12): הזיכרון מוקצה במדויק להכיל 307,200 פיקסלים (רזולוציה של 640x480).</a:t>
+            </a:r>
+          </a:p>
+          <a:p>
+            <a:pPr algn="r" rtl="1">
+              <a:defRPr sz="1600"/>
+            </a:pPr>
+            <a:r>
+              <a:t>• תפוקת הנתונים: האות doutb משחרר 12 ביט של צבע (RGB) בכל מחזור שעון (25MHz) ישירות לבקר ה-VGA.</a:t>
+            </a:r>
+          </a:p>
+        </p:txBody>
+      </p:sp>
+      <p:pic>
+        <p:nvPicPr>
+          <p:cNvPr id="4" name="Picture 3" descr="bram_ip_symbol.png"/>
+          <p:cNvPicPr>
+            <a:picLocks noChangeAspect="1"/>
+          </p:cNvPicPr>
+          <p:nvPr/>
+        </p:nvPicPr>
+        <p:blipFill>
+          <a:blip r:embed="rId2"/>
+          <a:stretch>
+            <a:fillRect/>
+          </a:stretch>
+        </p:blipFill>
+        <p:spPr>
+          <a:xfrm>
+            <a:off x="2286000" y="3200400"/>
+            <a:ext cx="4572000" cy="9007011"/>
+          </a:xfrm>
+          <a:prstGeom prst="rect">
+            <a:avLst/>
+          </a:prstGeom>
+        </p:spPr>
+      </p:pic>
+    </p:spTree>
+  </p:cSld>
+  <p:clrMapOvr>
+    <a:masterClrMapping/>
+  </p:clrMapOvr>
+</p:sld>
+</file>
+
+<file path=ppt/slides/slide14.xml><?xml version="1.0" encoding="utf-8"?>
+<p:sld xmlns:a="http://schemas.openxmlformats.org/drawingml/2006/main" xmlns:p="http://schemas.openxmlformats.org/presentationml/2006/main" xmlns:r="http://schemas.openxmlformats.org/officeDocument/2006/relationships">
+  <p:cSld>
+    <p:spTree>
+      <p:nvGrpSpPr>
+        <p:cNvPr id="1" name=""/>
+        <p:cNvGrpSpPr/>
+        <p:nvPr/>
+      </p:nvGrpSpPr>
+      <p:grpSpPr/>
+      <p:sp>
+        <p:nvSpPr>
+          <p:cNvPr id="2" name="Title 1"/>
+          <p:cNvSpPr>
+            <a:spLocks noGrp="1"/>
+          </p:cNvSpPr>
+          <p:nvPr>
+            <p:ph type="title"/>
+          </p:nvPr>
+        </p:nvSpPr>
+        <p:spPr/>
+        <p:txBody>
+          <a:bodyPr/>
+          <a:lstStyle/>
+          <a:p>
+            <a:pPr rtl="1" algn="ctr"/>
+            <a:r>
+              <a:t>ממשק המצלמה: מהעולם הפיזי אל הזיכרון</a:t>
+            </a:r>
+          </a:p>
+        </p:txBody>
+      </p:sp>
+      <p:sp>
+        <p:nvSpPr>
+          <p:cNvPr id="3" name="TextBox 2"/>
+          <p:cNvSpPr txBox="1"/>
+          <p:nvPr/>
+        </p:nvSpPr>
+        <p:spPr>
+          <a:xfrm>
+            <a:off x="182880" y="1097280"/>
+            <a:ext cx="8686800" cy="1371600"/>
+          </a:xfrm>
+          <a:prstGeom prst="rect">
+            <a:avLst/>
+          </a:prstGeom>
+          <a:noFill/>
+        </p:spPr>
+        <p:txBody>
+          <a:bodyPr wrap="none">
+            <a:spAutoFit/>
+          </a:bodyPr>
+          <a:lstStyle/>
+          <a:p/>
+          <a:p>
+            <a:pPr algn="r" rtl="1">
+              <a:defRPr sz="1600"/>
+            </a:pPr>
+            <a:r>
+              <a:t>• הגשר הפיזי (XCLK מול PCLK): ה-FPGA מפיק 24MHz (XCLK) החוצה להפעלת המצלמה. בתגובה, המצלמה משדרת חזרה פיקסלים יחד עם שעון סנכרון עצמאי משלה (PCLK).</a:t>
+            </a:r>
+          </a:p>
+          <a:p>
+            <a:pPr algn="r" rtl="1">
+              <a:defRPr sz="1600"/>
+            </a:pPr>
+            <a:r>
+              <a:t>• לכידת הנתונים: רכיב ה-ov7670_capture רץ בתדר המערכת (100MHz) המאפשר דגימה מהירה ובטוחה של ה-PCLK ואסיפת 12 ביט של צבע.</a:t>
+            </a:r>
+          </a:p>
+          <a:p>
+            <a:pPr algn="r" rtl="1">
+              <a:defRPr sz="1600"/>
+            </a:pPr>
+            <a:r>
+              <a:t>• כתיבה לזיכרון: הבלוק מייצר את הכתובת (addra), המידע (dina), ודגל הכתיבה (wea) ודוחף אותם לפורט A של ה-BRAM.</a:t>
+            </a:r>
+          </a:p>
+        </p:txBody>
+      </p:sp>
     </p:spTree>
   </p:cSld>
   <p:clrMapOvr>

--- a/docs/presentation/output/VGA_Presentation_Yossi.pptx
+++ b/docs/presentation/output/VGA_Presentation_Yossi.pptx
@@ -3760,7 +3760,7 @@
         <p:spPr>
           <a:xfrm>
             <a:off x="2286000" y="3200400"/>
-            <a:ext cx="4572000" cy="9007011"/>
+            <a:ext cx="4572000" cy="3214168"/>
           </a:xfrm>
           <a:prstGeom prst="rect">
             <a:avLst/>

--- a/docs/presentation/output/VGA_Presentation_Yossi.pptx
+++ b/docs/presentation/output/VGA_Presentation_Yossi.pptx
@@ -3855,6 +3855,30 @@
           </a:p>
         </p:txBody>
       </p:sp>
+      <p:pic>
+        <p:nvPicPr>
+          <p:cNvPr id="4" name="Picture 3" descr="camera_capture_flow.png.jpeg"/>
+          <p:cNvPicPr>
+            <a:picLocks noChangeAspect="1"/>
+          </p:cNvPicPr>
+          <p:nvPr/>
+        </p:nvPicPr>
+        <p:blipFill>
+          <a:blip r:embed="rId2"/>
+          <a:stretch>
+            <a:fillRect/>
+          </a:stretch>
+        </p:blipFill>
+        <p:spPr>
+          <a:xfrm>
+            <a:off x="2286000" y="3200400"/>
+            <a:ext cx="4572000" cy="3429000"/>
+          </a:xfrm>
+          <a:prstGeom prst="rect">
+            <a:avLst/>
+          </a:prstGeom>
+        </p:spPr>
+      </p:pic>
     </p:spTree>
   </p:cSld>
   <p:clrMapOvr>

--- a/docs/presentation/output/VGA_Presentation_Yossi.pptx
+++ b/docs/presentation/output/VGA_Presentation_Yossi.pptx
@@ -19,6 +19,7 @@
     <p:sldId id="267" r:id="rId18"/>
     <p:sldId id="268" r:id="rId19"/>
     <p:sldId id="269" r:id="rId20"/>
+    <p:sldId id="270" r:id="rId21"/>
   </p:sldIdLst>
   <p:sldSz cx="9144000" cy="6858000" type="screen4x3"/>
   <p:notesSz cx="6858000" cy="9144000"/>
@@ -3364,7 +3365,7 @@
           <a:p>
             <a:pPr rtl="1" algn="ctr"/>
             <a:r>
-              <a:t>מבט-על: זרימת נתונים ותחומי שעון (RTL)</a:t>
+              <a:t>סיכום המבוא: מהעולם האנלוגי ללוגיקה הדיגיטלית</a:t>
             </a:r>
           </a:p>
         </p:txBody>
@@ -3396,7 +3397,7 @@
               <a:defRPr sz="1600"/>
             </a:pPr>
             <a:r>
-              <a:t>• מחולל שעונים (clk_generator): רכיב PLL המקבל שעון מערכת ומפיק שעון 25MHz נפרד ל-VGA ושעון ייעודי למצלמה.</a:t>
+              <a:t>• 1. המסע הפיזיקלי (Macroscopic): הבנת דרישות ה-VGA הקלאסי - סריקה, זמני החשכה (Blanking) והמרה אנלוגית (DAC).</a:t>
             </a:r>
           </a:p>
           <a:p>
@@ -3404,7 +3405,7 @@
               <a:defRPr sz="1600"/>
             </a:pPr>
             <a:r>
-              <a:t>• גישור חציית שעונים (CDC): זיכרון ה-BRAM (בתצורת Dual-Port) פועל כחוצץ בטוח בין קצב הכתיבה לקצב הקריאה.</a:t>
+              <a:t>• 2. רמת המערכת (Board Level): מיפוי השחקנים על הלוח – סנכרון השעונים, קליטת המצלמה, וה-BRAM כגשר בין העולמות.</a:t>
             </a:r>
           </a:p>
           <a:p>
@@ -3412,7 +3413,7 @@
               <a:defRPr sz="1600"/>
             </a:pPr>
             <a:r>
-              <a:t>• תחום אדום (Camera Domain): קליטת הפיקסלים מהמצלמה (ov7670_capture) ודחיפתם לפורט A של הזיכרון (clka).</a:t>
+              <a:t>• 3. מיקרו-ארכיטקטורה (RTL): פיצול בקר ה-VGA לשני תהליכים מקבילים – מחולל תזמונים (vga_sync) ומחולל פיקסלים (RGB).</a:t>
             </a:r>
           </a:p>
           <a:p>
@@ -3420,118 +3421,47 @@
               <a:defRPr sz="1600"/>
             </a:pPr>
             <a:r>
-              <a:t>• תחום כחול (VGA Domain): המיקוד שלנו – שליפת הפיקסלים מפורט B (clkb) על ידי בקר ה-VGA וייצור אותות התצוגה.</a:t>
-            </a:r>
-          </a:p>
-        </p:txBody>
-      </p:sp>
-      <p:pic>
-        <p:nvPicPr>
-          <p:cNvPr id="4" name="Picture 3" descr="rtl_direct_vga_path.png"/>
-          <p:cNvPicPr>
-            <a:picLocks noChangeAspect="1"/>
-          </p:cNvPicPr>
+              <a:t>• 4. ולידציה והוכחת התכן (Verification): השלב הבא – אימות הלוגיקה הפנימית באמצעות סימולציות (ModelSim/Vivado).</a:t>
+            </a:r>
+          </a:p>
+        </p:txBody>
+      </p:sp>
+      <p:sp>
+        <p:nvSpPr>
+          <p:cNvPr id="4" name="TextBox 3"/>
+          <p:cNvSpPr txBox="1"/>
           <p:nvPr/>
-        </p:nvPicPr>
-        <p:blipFill>
-          <a:blip r:embed="rId2"/>
-          <a:stretch>
-            <a:fillRect/>
-          </a:stretch>
-        </p:blipFill>
-        <p:spPr>
-          <a:xfrm>
-            <a:off x="457200" y="2743200"/>
-            <a:ext cx="8229600" cy="4342751"/>
-          </a:xfrm>
-          <a:prstGeom prst="rect">
-            <a:avLst/>
-          </a:prstGeom>
-        </p:spPr>
-      </p:pic>
-      <p:sp>
-        <p:nvSpPr>
-          <p:cNvPr id="5" name="Rectangle 4"/>
-          <p:cNvSpPr/>
-          <p:nvPr/>
-        </p:nvSpPr>
-        <p:spPr>
-          <a:xfrm>
-            <a:off x="914400" y="2926080"/>
-            <a:ext cx="3657600" cy="3474720"/>
+        </p:nvSpPr>
+        <p:spPr>
+          <a:xfrm>
+            <a:off x="2286000" y="3657600"/>
+            <a:ext cx="4572000" cy="914400"/>
           </a:xfrm>
           <a:prstGeom prst="rect">
             <a:avLst/>
           </a:prstGeom>
           <a:noFill/>
-          <a:ln w="38100">
-            <a:solidFill>
-              <a:srgbClr val="FF0000"/>
-            </a:solidFill>
-          </a:ln>
-        </p:spPr>
-        <p:style>
-          <a:lnRef idx="1">
-            <a:schemeClr val="accent1"/>
-          </a:lnRef>
-          <a:fillRef idx="3">
-            <a:schemeClr val="accent1"/>
-          </a:fillRef>
-          <a:effectRef idx="2">
-            <a:schemeClr val="accent1"/>
-          </a:effectRef>
-          <a:fontRef idx="minor">
-            <a:schemeClr val="lt1"/>
-          </a:fontRef>
-        </p:style>
-        <p:txBody>
-          <a:bodyPr rtlCol="0" anchor="ctr"/>
-          <a:lstStyle/>
-          <a:p>
-            <a:pPr algn="ctr"/>
-          </a:p>
-        </p:txBody>
-      </p:sp>
-      <p:sp>
-        <p:nvSpPr>
-          <p:cNvPr id="6" name="Rectangle 5"/>
-          <p:cNvSpPr/>
-          <p:nvPr/>
-        </p:nvSpPr>
-        <p:spPr>
-          <a:xfrm>
-            <a:off x="4663440" y="2926080"/>
-            <a:ext cx="3657600" cy="3474720"/>
-          </a:xfrm>
-          <a:prstGeom prst="rect">
-            <a:avLst/>
-          </a:prstGeom>
-          <a:noFill/>
-          <a:ln w="50800">
-            <a:solidFill>
-              <a:srgbClr val="0070C0"/>
-            </a:solidFill>
-          </a:ln>
-        </p:spPr>
-        <p:style>
-          <a:lnRef idx="1">
-            <a:schemeClr val="accent1"/>
-          </a:lnRef>
-          <a:fillRef idx="3">
-            <a:schemeClr val="accent1"/>
-          </a:fillRef>
-          <a:effectRef idx="2">
-            <a:schemeClr val="accent1"/>
-          </a:effectRef>
-          <a:fontRef idx="minor">
-            <a:schemeClr val="lt1"/>
-          </a:fontRef>
-        </p:style>
-        <p:txBody>
-          <a:bodyPr rtlCol="0" anchor="ctr"/>
-          <a:lstStyle/>
-          <a:p>
-            <a:pPr algn="ctr"/>
+        </p:spPr>
+        <p:txBody>
+          <a:bodyPr wrap="none">
+            <a:spAutoFit/>
+          </a:bodyPr>
+          <a:lstStyle/>
+          <a:p>
+            <a:pPr algn="ctr">
+              <a:defRPr sz="1400">
+                <a:solidFill>
+                  <a:srgbClr val="FF0000"/>
+                </a:solidFill>
+              </a:defRPr>
+            </a:pPr>
+            <a:r>
+              <a:t>[שגיאה: התמונה לא נמצאה בנתיב: docs\presentation_x0007_ssets</a:t>
+            </a:r>
+            <a:br/>
+            <a:r>
+              <a:t>ga_fpga_top_architecture.png]</a:t>
+            </a:r>
           </a:p>
         </p:txBody>
       </p:sp>
@@ -3570,7 +3500,7 @@
           <a:p>
             <a:pPr rtl="1" algn="ctr"/>
             <a:r>
-              <a:t>ניהול שעונים במערכת (Clock Generator)</a:t>
+              <a:t>מבט-על: זרימת נתונים ותחומי שעון (RTL)</a:t>
             </a:r>
           </a:p>
         </p:txBody>
@@ -3602,7 +3532,7 @@
               <a:defRPr sz="1600"/>
             </a:pPr>
             <a:r>
-              <a:t>• מקור שעון (System Clock): כניסת clk מקבלת את שעון הלוח המקורי (100MHz) ומזינה את ה-PLL (clk_wiz_0).</a:t>
+              <a:t>• מחולל שעונים (clk_generator): רכיב PLL המקבל שעון מערכת ומפיק שעון 25MHz נפרד ל-VGA ושעון ייעודי למצלמה.</a:t>
             </a:r>
           </a:p>
           <a:p>
@@ -3610,7 +3540,7 @@
               <a:defRPr sz="1600"/>
             </a:pPr>
             <a:r>
-              <a:t>• שעון תצוגה (vga_pll): ה-PLL מפיק תדר של 25MHz המזין את בקר ה-VGA (pxl_clk) ואת פורט הקריאה (clkb) ב-BRAM.</a:t>
+              <a:t>• גישור חציית שעונים (CDC): זיכרון ה-BRAM (בתצורת Dual-Port) פועל כחוצץ בטוח בין קצב הכתיבה לקצב הקריאה.</a:t>
             </a:r>
           </a:p>
           <a:p>
@@ -3618,14 +3548,22 @@
               <a:defRPr sz="1600"/>
             </a:pPr>
             <a:r>
-              <a:t>• שעון מצלמה (xclk_pll): הפקת שעון ייעודי של 24MHz (xclk_ov7670) המנותב החוצה לסנכרון רכיב המצלמה.</a:t>
+              <a:t>• תחום אדום (Camera Domain): קליטת הפיקסלים מהמצלמה (ov7670_capture) ודחיפתם לפורט A של הזיכרון (clka).</a:t>
+            </a:r>
+          </a:p>
+          <a:p>
+            <a:pPr algn="r" rtl="1">
+              <a:defRPr sz="1600"/>
+            </a:pPr>
+            <a:r>
+              <a:t>• תחום כחול (VGA Domain): המיקוד שלנו – שליפת הפיקסלים מפורט B (clkb) על ידי בקר ה-VGA וייצור אותות התצוגה.</a:t>
             </a:r>
           </a:p>
         </p:txBody>
       </p:sp>
       <p:pic>
         <p:nvPicPr>
-          <p:cNvPr id="4" name="Picture 3" descr="clk_wiz_instantiation.png"/>
+          <p:cNvPr id="4" name="Picture 3" descr="rtl_direct_vga_path.png"/>
           <p:cNvPicPr>
             <a:picLocks noChangeAspect="1"/>
           </p:cNvPicPr>
@@ -3639,14 +3577,100 @@
         </p:blipFill>
         <p:spPr>
           <a:xfrm>
-            <a:off x="2286000" y="2926080"/>
-            <a:ext cx="4572000" cy="3237682"/>
+            <a:off x="457200" y="2743200"/>
+            <a:ext cx="8229600" cy="4342751"/>
           </a:xfrm>
           <a:prstGeom prst="rect">
             <a:avLst/>
           </a:prstGeom>
         </p:spPr>
       </p:pic>
+      <p:sp>
+        <p:nvSpPr>
+          <p:cNvPr id="5" name="Rectangle 4"/>
+          <p:cNvSpPr/>
+          <p:nvPr/>
+        </p:nvSpPr>
+        <p:spPr>
+          <a:xfrm>
+            <a:off x="914400" y="2926080"/>
+            <a:ext cx="3657600" cy="3474720"/>
+          </a:xfrm>
+          <a:prstGeom prst="rect">
+            <a:avLst/>
+          </a:prstGeom>
+          <a:noFill/>
+          <a:ln w="38100">
+            <a:solidFill>
+              <a:srgbClr val="FF0000"/>
+            </a:solidFill>
+          </a:ln>
+        </p:spPr>
+        <p:style>
+          <a:lnRef idx="1">
+            <a:schemeClr val="accent1"/>
+          </a:lnRef>
+          <a:fillRef idx="3">
+            <a:schemeClr val="accent1"/>
+          </a:fillRef>
+          <a:effectRef idx="2">
+            <a:schemeClr val="accent1"/>
+          </a:effectRef>
+          <a:fontRef idx="minor">
+            <a:schemeClr val="lt1"/>
+          </a:fontRef>
+        </p:style>
+        <p:txBody>
+          <a:bodyPr rtlCol="0" anchor="ctr"/>
+          <a:lstStyle/>
+          <a:p>
+            <a:pPr algn="ctr"/>
+          </a:p>
+        </p:txBody>
+      </p:sp>
+      <p:sp>
+        <p:nvSpPr>
+          <p:cNvPr id="6" name="Rectangle 5"/>
+          <p:cNvSpPr/>
+          <p:nvPr/>
+        </p:nvSpPr>
+        <p:spPr>
+          <a:xfrm>
+            <a:off x="4663440" y="2926080"/>
+            <a:ext cx="3657600" cy="3474720"/>
+          </a:xfrm>
+          <a:prstGeom prst="rect">
+            <a:avLst/>
+          </a:prstGeom>
+          <a:noFill/>
+          <a:ln w="50800">
+            <a:solidFill>
+              <a:srgbClr val="0070C0"/>
+            </a:solidFill>
+          </a:ln>
+        </p:spPr>
+        <p:style>
+          <a:lnRef idx="1">
+            <a:schemeClr val="accent1"/>
+          </a:lnRef>
+          <a:fillRef idx="3">
+            <a:schemeClr val="accent1"/>
+          </a:fillRef>
+          <a:effectRef idx="2">
+            <a:schemeClr val="accent1"/>
+          </a:effectRef>
+          <a:fontRef idx="minor">
+            <a:schemeClr val="lt1"/>
+          </a:fontRef>
+        </p:style>
+        <p:txBody>
+          <a:bodyPr rtlCol="0" anchor="ctr"/>
+          <a:lstStyle/>
+          <a:p>
+            <a:pPr algn="ctr"/>
+          </a:p>
+        </p:txBody>
+      </p:sp>
     </p:spTree>
   </p:cSld>
   <p:clrMapOvr>
@@ -3682,6 +3706,118 @@
           <a:p>
             <a:pPr rtl="1" algn="ctr"/>
             <a:r>
+              <a:t>ניהול שעונים במערכת (Clock Generator)</a:t>
+            </a:r>
+          </a:p>
+        </p:txBody>
+      </p:sp>
+      <p:sp>
+        <p:nvSpPr>
+          <p:cNvPr id="3" name="TextBox 2"/>
+          <p:cNvSpPr txBox="1"/>
+          <p:nvPr/>
+        </p:nvSpPr>
+        <p:spPr>
+          <a:xfrm>
+            <a:off x="182880" y="1097280"/>
+            <a:ext cx="8686800" cy="1371600"/>
+          </a:xfrm>
+          <a:prstGeom prst="rect">
+            <a:avLst/>
+          </a:prstGeom>
+          <a:noFill/>
+        </p:spPr>
+        <p:txBody>
+          <a:bodyPr wrap="none">
+            <a:spAutoFit/>
+          </a:bodyPr>
+          <a:lstStyle/>
+          <a:p/>
+          <a:p>
+            <a:pPr algn="r" rtl="1">
+              <a:defRPr sz="1600"/>
+            </a:pPr>
+            <a:r>
+              <a:t>• מקור שעון (System Clock): כניסת clk מקבלת את שעון הלוח המקורי (100MHz) ומזינה את ה-PLL (clk_wiz_0).</a:t>
+            </a:r>
+          </a:p>
+          <a:p>
+            <a:pPr algn="r" rtl="1">
+              <a:defRPr sz="1600"/>
+            </a:pPr>
+            <a:r>
+              <a:t>• שעון תצוגה (vga_pll): ה-PLL מפיק תדר של 25MHz המזין את בקר ה-VGA (pxl_clk) ואת פורט הקריאה (clkb) ב-BRAM.</a:t>
+            </a:r>
+          </a:p>
+          <a:p>
+            <a:pPr algn="r" rtl="1">
+              <a:defRPr sz="1600"/>
+            </a:pPr>
+            <a:r>
+              <a:t>• שעון מצלמה (xclk_pll): הפקת שעון ייעודי של 24MHz (xclk_ov7670) המנותב החוצה לסנכרון רכיב המצלמה.</a:t>
+            </a:r>
+          </a:p>
+        </p:txBody>
+      </p:sp>
+      <p:pic>
+        <p:nvPicPr>
+          <p:cNvPr id="4" name="Picture 3" descr="clk_wiz_instantiation.png"/>
+          <p:cNvPicPr>
+            <a:picLocks noChangeAspect="1"/>
+          </p:cNvPicPr>
+          <p:nvPr/>
+        </p:nvPicPr>
+        <p:blipFill>
+          <a:blip r:embed="rId2"/>
+          <a:stretch>
+            <a:fillRect/>
+          </a:stretch>
+        </p:blipFill>
+        <p:spPr>
+          <a:xfrm>
+            <a:off x="2286000" y="2926080"/>
+            <a:ext cx="4572000" cy="3237682"/>
+          </a:xfrm>
+          <a:prstGeom prst="rect">
+            <a:avLst/>
+          </a:prstGeom>
+        </p:spPr>
+      </p:pic>
+    </p:spTree>
+  </p:cSld>
+  <p:clrMapOvr>
+    <a:masterClrMapping/>
+  </p:clrMapOvr>
+</p:sld>
+</file>
+
+<file path=ppt/slides/slide14.xml><?xml version="1.0" encoding="utf-8"?>
+<p:sld xmlns:a="http://schemas.openxmlformats.org/drawingml/2006/main" xmlns:p="http://schemas.openxmlformats.org/presentationml/2006/main" xmlns:r="http://schemas.openxmlformats.org/officeDocument/2006/relationships">
+  <p:cSld>
+    <p:spTree>
+      <p:nvGrpSpPr>
+        <p:cNvPr id="1" name=""/>
+        <p:cNvGrpSpPr/>
+        <p:nvPr/>
+      </p:nvGrpSpPr>
+      <p:grpSpPr/>
+      <p:sp>
+        <p:nvSpPr>
+          <p:cNvPr id="2" name="Title 1"/>
+          <p:cNvSpPr>
+            <a:spLocks noGrp="1"/>
+          </p:cNvSpPr>
+          <p:nvPr>
+            <p:ph type="title"/>
+          </p:nvPr>
+        </p:nvSpPr>
+        <p:spPr/>
+        <p:txBody>
+          <a:bodyPr/>
+          <a:lstStyle/>
+          <a:p>
+            <a:pPr rtl="1" algn="ctr"/>
+            <a:r>
               <a:t>זיכרון ה-BRAM: חוצץ התמונה (Frame Buffer)</a:t>
             </a:r>
           </a:p>
@@ -3775,7 +3911,7 @@
 </p:sld>
 </file>
 
-<file path=ppt/slides/slide14.xml><?xml version="1.0" encoding="utf-8"?>
+<file path=ppt/slides/slide15.xml><?xml version="1.0" encoding="utf-8"?>
 <p:sld xmlns:a="http://schemas.openxmlformats.org/drawingml/2006/main" xmlns:p="http://schemas.openxmlformats.org/presentationml/2006/main" xmlns:r="http://schemas.openxmlformats.org/officeDocument/2006/relationships">
   <p:cSld>
     <p:spTree>

--- a/docs/presentation/output/VGA_Presentation_Yossi.pptx
+++ b/docs/presentation/output/VGA_Presentation_Yossi.pptx
@@ -3365,7 +3365,7 @@
           <a:p>
             <a:pPr rtl="1" algn="ctr"/>
             <a:r>
-              <a:t>סיכום המבוא: מהעולם האנלוגי ללוגיקה הדיגיטלית</a:t>
+              <a:t>סיכום תיאורטי: לקראת ארכיטקטורת החומרה</a:t>
             </a:r>
           </a:p>
         </p:txBody>
@@ -3397,7 +3397,7 @@
               <a:defRPr sz="1600"/>
             </a:pPr>
             <a:r>
-              <a:t>• 1. המסע הפיזיקלי (Macroscopic): הבנת דרישות ה-VGA הקלאסי - סריקה, זמני החשכה (Blanking) והמרה אנלוגית (DAC).</a:t>
+              <a:t>• האתגר הפיזיקלי: ראינו שהמסך החיצוני דורש תזמונים מדויקים ונוקשים (Sync, Blanking) והמרת צבע רציפה (DAC) כדי לפעול כראוי.</a:t>
             </a:r>
           </a:p>
           <a:p>
@@ -3405,7 +3405,7 @@
               <a:defRPr sz="1600"/>
             </a:pPr>
             <a:r>
-              <a:t>• 2. רמת המערכת (Board Level): מיפוי השחקנים על הלוח – סנכרון השעונים, קליטת המצלמה, וה-BRAM כגשר בין העולמות.</a:t>
+              <a:t>• המעבר פנימה (FPGA): כדי לייצר את האותות הללו בזמן אמת ובאמינות מוחלטת, אנו נכנסים אל תוך הלוגיקה הדיגיטלית (RTL) על הכרטיס.</a:t>
             </a:r>
           </a:p>
           <a:p>
@@ -3413,7 +3413,7 @@
               <a:defRPr sz="1600"/>
             </a:pPr>
             <a:r>
-              <a:t>• 3. מיקרו-ארכיטקטורה (RTL): פיצול בקר ה-VGA לשני תהליכים מקבילים – מחולל תזמונים (vga_sync) ומחולל פיקסלים (RGB).</a:t>
+              <a:t>• תפקיד ה-VGA Controller: זהו רכיב הגישור הסופי במערכת. הוא שואב נתונים מהזיכרון הפנימי ומתרגם אותם לאותות הפיזיים שהמסך דורש.</a:t>
             </a:r>
           </a:p>
           <a:p>
@@ -3421,50 +3421,35 @@
               <a:defRPr sz="1600"/>
             </a:pPr>
             <a:r>
-              <a:t>• 4. ולידציה והוכחת התכן (Verification): השלב הבא – אימות הלוגיקה הפנימית באמצעות סימולציות (ModelSim/Vivado).</a:t>
-            </a:r>
-          </a:p>
-        </p:txBody>
-      </p:sp>
-      <p:sp>
-        <p:nvSpPr>
-          <p:cNvPr id="4" name="TextBox 3"/>
-          <p:cNvSpPr txBox="1"/>
+              <a:t>• התחנה הבאה: נמפה את האקו-סיסטם על הכרטיס (שעונים, מצלמה, חוצץ זיכרון) ולאחר מכן נצלול פנימה אל הלוגיקה של בקר ה-VGA עצמו.</a:t>
+            </a:r>
+          </a:p>
+        </p:txBody>
+      </p:sp>
+      <p:pic>
+        <p:nvPicPr>
+          <p:cNvPr id="4" name="Picture 3" descr="vga_fpga_top_architecture.png"/>
+          <p:cNvPicPr>
+            <a:picLocks noChangeAspect="1"/>
+          </p:cNvPicPr>
           <p:nvPr/>
-        </p:nvSpPr>
-        <p:spPr>
-          <a:xfrm>
-            <a:off x="2286000" y="3657600"/>
-            <a:ext cx="4572000" cy="914400"/>
+        </p:nvPicPr>
+        <p:blipFill>
+          <a:blip r:embed="rId2"/>
+          <a:stretch>
+            <a:fillRect/>
+          </a:stretch>
+        </p:blipFill>
+        <p:spPr>
+          <a:xfrm>
+            <a:off x="2286000" y="3291840"/>
+            <a:ext cx="4572000" cy="2502868"/>
           </a:xfrm>
           <a:prstGeom prst="rect">
             <a:avLst/>
           </a:prstGeom>
-          <a:noFill/>
-        </p:spPr>
-        <p:txBody>
-          <a:bodyPr wrap="none">
-            <a:spAutoFit/>
-          </a:bodyPr>
-          <a:lstStyle/>
-          <a:p>
-            <a:pPr algn="ctr">
-              <a:defRPr sz="1400">
-                <a:solidFill>
-                  <a:srgbClr val="FF0000"/>
-                </a:solidFill>
-              </a:defRPr>
-            </a:pPr>
-            <a:r>
-              <a:t>[שגיאה: התמונה לא נמצאה בנתיב: docs\presentation_x0007_ssets</a:t>
-            </a:r>
-            <a:br/>
-            <a:r>
-              <a:t>ga_fpga_top_architecture.png]</a:t>
-            </a:r>
-          </a:p>
-        </p:txBody>
-      </p:sp>
+        </p:spPr>
+      </p:pic>
     </p:spTree>
   </p:cSld>
   <p:clrMapOvr>

--- a/docs/presentation/output/VGA_Presentation_Yossi.pptx
+++ b/docs/presentation/output/VGA_Presentation_Yossi.pptx
@@ -3993,7 +3993,7 @@
         <p:spPr>
           <a:xfrm>
             <a:off x="2286000" y="3200400"/>
-            <a:ext cx="4572000" cy="3429000"/>
+            <a:ext cx="4572000" cy="3591426"/>
           </a:xfrm>
           <a:prstGeom prst="rect">
             <a:avLst/>

--- a/docs/presentation/output/VGA_Presentation_Yossi.pptx
+++ b/docs/presentation/output/VGA_Presentation_Yossi.pptx
@@ -20,6 +20,8 @@
     <p:sldId id="268" r:id="rId19"/>
     <p:sldId id="269" r:id="rId20"/>
     <p:sldId id="270" r:id="rId21"/>
+    <p:sldId id="271" r:id="rId22"/>
+    <p:sldId id="272" r:id="rId23"/>
   </p:sldIdLst>
   <p:sldSz cx="9144000" cy="6858000" type="screen4x3"/>
   <p:notesSz cx="6858000" cy="9144000"/>
@@ -4000,6 +4002,249 @@
           </a:prstGeom>
         </p:spPr>
       </p:pic>
+    </p:spTree>
+  </p:cSld>
+  <p:clrMapOvr>
+    <a:masterClrMapping/>
+  </p:clrMapOvr>
+</p:sld>
+</file>
+
+<file path=ppt/slides/slide16.xml><?xml version="1.0" encoding="utf-8"?>
+<p:sld xmlns:a="http://schemas.openxmlformats.org/drawingml/2006/main" xmlns:p="http://schemas.openxmlformats.org/presentationml/2006/main" xmlns:r="http://schemas.openxmlformats.org/officeDocument/2006/relationships">
+  <p:cSld>
+    <p:spTree>
+      <p:nvGrpSpPr>
+        <p:cNvPr id="1" name=""/>
+        <p:cNvGrpSpPr/>
+        <p:nvPr/>
+      </p:nvGrpSpPr>
+      <p:grpSpPr/>
+      <p:sp>
+        <p:nvSpPr>
+          <p:cNvPr id="2" name="Title 1"/>
+          <p:cNvSpPr>
+            <a:spLocks noGrp="1"/>
+          </p:cNvSpPr>
+          <p:nvPr>
+            <p:ph type="title"/>
+          </p:nvPr>
+        </p:nvSpPr>
+        <p:spPr/>
+        <p:txBody>
+          <a:bodyPr/>
+          <a:lstStyle/>
+          <a:p>
+            <a:pPr rtl="1" algn="ctr"/>
+            <a:r>
+              <a:t>ממשק הזיכרון (BRAM): ממדים וסנכרון נתונים</a:t>
+            </a:r>
+          </a:p>
+        </p:txBody>
+      </p:sp>
+      <p:sp>
+        <p:nvSpPr>
+          <p:cNvPr id="3" name="TextBox 2"/>
+          <p:cNvSpPr txBox="1"/>
+          <p:nvPr/>
+        </p:nvSpPr>
+        <p:spPr>
+          <a:xfrm>
+            <a:off x="182880" y="1097280"/>
+            <a:ext cx="8686800" cy="1828800"/>
+          </a:xfrm>
+          <a:prstGeom prst="rect">
+            <a:avLst/>
+          </a:prstGeom>
+          <a:noFill/>
+        </p:spPr>
+        <p:txBody>
+          <a:bodyPr wrap="none">
+            <a:spAutoFit/>
+          </a:bodyPr>
+          <a:lstStyle/>
+          <a:p/>
+          <a:p>
+            <a:pPr algn="r" rtl="1">
+              <a:defRPr sz="1600"/>
+            </a:pPr>
+            <a:r>
+              <a:t>• תרגום קואורדינטות: הכתובת לזיכרון (addrb באורך 19 ביט) מחושבת מתמטית לפי המיקום באזור הפעיל: Y * 640 + X.</a:t>
+            </a:r>
+          </a:p>
+          <a:p>
+            <a:pPr algn="r" rtl="1">
+              <a:defRPr sz="1600"/>
+            </a:pPr>
+            <a:r>
+              <a:t>• מנגנון ה-Pipeline (עיכוב מכוון): לזיכרון ה-BRAM יש זמן תגובה. הקוד רושם את הנתון הנכנס (doutb) לתוך אוגר פנימי (pxl_data_reg) בעליית השעון הבאה.</a:t>
+            </a:r>
+          </a:p>
+          <a:p>
+            <a:pPr algn="r" rtl="1">
+              <a:defRPr sz="1600"/>
+            </a:pPr>
+            <a:r>
+              <a:t>• סנכרון שומר הסף: כדי לפצות על השהיית הזיכרון, דגל אזור התצוגה (in_display_area) מושהה גם הוא במחזור שעון אחד (ל-in_display_area_delayed).</a:t>
+            </a:r>
+          </a:p>
+          <a:p>
+            <a:pPr algn="r" rtl="1">
+              <a:defRPr sz="1600"/>
+            </a:pPr>
+            <a:r>
+              <a:t>• ניתוב דיגיטלי (Mux): רק כאשר הדגל המושהה דולק, 12 הביטים מפוצלים ומנותבים ליציאות VGA_R, VGA_G ו-VGA_B (4 ביטים לצבע).</a:t>
+            </a:r>
+          </a:p>
+        </p:txBody>
+      </p:sp>
+      <p:pic>
+        <p:nvPicPr>
+          <p:cNvPr id="4" name="Picture 3" descr="vga_address_logic_code.png"/>
+          <p:cNvPicPr>
+            <a:picLocks noChangeAspect="1"/>
+          </p:cNvPicPr>
+          <p:nvPr/>
+        </p:nvPicPr>
+        <p:blipFill>
+          <a:blip r:embed="rId2"/>
+          <a:stretch>
+            <a:fillRect/>
+          </a:stretch>
+        </p:blipFill>
+        <p:spPr>
+          <a:xfrm>
+            <a:off x="2286000" y="3657600"/>
+            <a:ext cx="4572000" cy="4487168"/>
+          </a:xfrm>
+          <a:prstGeom prst="rect">
+            <a:avLst/>
+          </a:prstGeom>
+        </p:spPr>
+      </p:pic>
+    </p:spTree>
+  </p:cSld>
+  <p:clrMapOvr>
+    <a:masterClrMapping/>
+  </p:clrMapOvr>
+</p:sld>
+</file>
+
+<file path=ppt/slides/slide17.xml><?xml version="1.0" encoding="utf-8"?>
+<p:sld xmlns:a="http://schemas.openxmlformats.org/drawingml/2006/main" xmlns:p="http://schemas.openxmlformats.org/presentationml/2006/main" xmlns:r="http://schemas.openxmlformats.org/officeDocument/2006/relationships">
+  <p:cSld>
+    <p:spTree>
+      <p:nvGrpSpPr>
+        <p:cNvPr id="1" name=""/>
+        <p:cNvGrpSpPr/>
+        <p:nvPr/>
+      </p:nvGrpSpPr>
+      <p:grpSpPr/>
+      <p:sp>
+        <p:nvSpPr>
+          <p:cNvPr id="2" name="Title 1"/>
+          <p:cNvSpPr>
+            <a:spLocks noGrp="1"/>
+          </p:cNvSpPr>
+          <p:nvPr>
+            <p:ph type="title"/>
+          </p:nvPr>
+        </p:nvSpPr>
+        <p:spPr/>
+        <p:txBody>
+          <a:bodyPr/>
+          <a:lstStyle/>
+          <a:p>
+            <a:pPr rtl="1" algn="ctr"/>
+            <a:r>
+              <a:t>אימות מסלול הנתונים: VGA Controller ↔ BRAM</a:t>
+            </a:r>
+          </a:p>
+        </p:txBody>
+      </p:sp>
+      <p:sp>
+        <p:nvSpPr>
+          <p:cNvPr id="3" name="TextBox 2"/>
+          <p:cNvSpPr txBox="1"/>
+          <p:nvPr/>
+        </p:nvSpPr>
+        <p:spPr>
+          <a:xfrm>
+            <a:off x="182880" y="1097280"/>
+            <a:ext cx="8686800" cy="1371600"/>
+          </a:xfrm>
+          <a:prstGeom prst="rect">
+            <a:avLst/>
+          </a:prstGeom>
+          <a:noFill/>
+        </p:spPr>
+        <p:txBody>
+          <a:bodyPr wrap="none">
+            <a:spAutoFit/>
+          </a:bodyPr>
+          <a:lstStyle/>
+          <a:p/>
+          <a:p>
+            <a:pPr algn="r" rtl="1">
+              <a:defRPr sz="1600"/>
+            </a:pPr>
+            <a:r>
+              <a:t>• מטרת הסימולציה: הוכחת לחיצת היד (Handshake) שבין בקשת הכתובת (addrb) לקבלת נתוני הפיקסל (doutb).</a:t>
+            </a:r>
+          </a:p>
+          <a:p>
+            <a:pPr algn="r" rtl="1">
+              <a:defRPr sz="1600"/>
+            </a:pPr>
+            <a:r>
+              <a:t>• דגימה בזמן אמת: ניתן לראות בבירור כיצד הכתובת עולה, ולאחר מחזור שעון, המידע מופיע ב-pxl_data_reg.</a:t>
+            </a:r>
+          </a:p>
+          <a:p>
+            <a:pPr algn="r" rtl="1">
+              <a:defRPr sz="1600"/>
+            </a:pPr>
+            <a:r>
+              <a:t>• מניעת זבל ויזואלי: הסימולציה מוכיחה שבמעבר ל-Blanking (סוף שורה), יציאות ה-RGB נחתכות ל-0 מיידית, למרות שהזיכרון עדיין פולט מידע ישן.</a:t>
+            </a:r>
+          </a:p>
+        </p:txBody>
+      </p:sp>
+      <p:sp>
+        <p:nvSpPr>
+          <p:cNvPr id="4" name="TextBox 3"/>
+          <p:cNvSpPr txBox="1"/>
+          <p:nvPr/>
+        </p:nvSpPr>
+        <p:spPr>
+          <a:xfrm>
+            <a:off x="2286000" y="4114800"/>
+            <a:ext cx="4572000" cy="914400"/>
+          </a:xfrm>
+          <a:prstGeom prst="rect">
+            <a:avLst/>
+          </a:prstGeom>
+          <a:noFill/>
+        </p:spPr>
+        <p:txBody>
+          <a:bodyPr wrap="none">
+            <a:spAutoFit/>
+          </a:bodyPr>
+          <a:lstStyle/>
+          <a:p>
+            <a:pPr algn="ctr">
+              <a:defRPr sz="1400">
+                <a:solidFill>
+                  <a:srgbClr val="0070C0"/>
+                </a:solidFill>
+              </a:defRPr>
+            </a:pPr>
+            <a:r>
+              <a:t>[שומר מקום: כאן תיכנס תמונת ה-Waveform של זרימת הנתונים]</a:t>
+            </a:r>
+          </a:p>
+        </p:txBody>
+      </p:sp>
     </p:spTree>
   </p:cSld>
   <p:clrMapOvr>

--- a/docs/presentation/output/VGA_Presentation_Yossi.pptx
+++ b/docs/presentation/output/VGA_Presentation_Yossi.pptx
@@ -4012,7 +4012,7 @@
         <p:spPr>
           <a:xfrm>
             <a:off x="2286000" y="3200400"/>
-            <a:ext cx="4572000" cy="3214168"/>
+            <a:ext cx="4572000" cy="2165476"/>
           </a:xfrm>
           <a:prstGeom prst="rect">
             <a:avLst/>
@@ -4206,7 +4206,7 @@
               <a:defRPr sz="1600"/>
             </a:pPr>
             <a:r>
-              <a:t>• מנגנון ה-Pipeline (עיכוב מכוון): לזיכרון ה-BRAM יש זמן תגובה. הקוד רושם את הנתון הנכנס (doutb) לתוך אוגר פנימי (pxl_data_reg) בעליית השעון הבאה.</a:t>
+              <a:t>• מנגנון ה-Pipeline (עיכוב מכוון): הקריאה מהזיכרון א-סינכרונית. כדי להבטיח יציבות, הקוד נועל את הנתון הנכנס (doutb) לתוך אוגר פנימי (pxl_data_reg) בעליית השעון הבאה.</a:t>
             </a:r>
           </a:p>
           <a:p>
@@ -4326,7 +4326,7 @@
               <a:defRPr sz="1600"/>
             </a:pPr>
             <a:r>
-              <a:t>• דגימה בזמן אמת: ניתן לראות בבירור כיצד הכתובת עולה, ולאחר מחזור שעון, המידע מופיע ב-pxl_data_reg.</a:t>
+              <a:t>• דגימה בזמן אמת: ניתן לראות בבירור כיצד הכתובת עולה, המידע מופיע מיידית ב-doutb (קריאה א-סינכרונית), וננעל באוגר pxl_data_reg בעליית השעון הבאה.</a:t>
             </a:r>
           </a:p>
           <a:p>
@@ -4356,7 +4356,7 @@
         <p:spPr>
           <a:xfrm>
             <a:off x="914400" y="3291840"/>
-            <a:ext cx="7315200" cy="3721894"/>
+            <a:ext cx="7315200" cy="3693319"/>
           </a:xfrm>
           <a:prstGeom prst="rect">
             <a:avLst/>

--- a/docs/presentation/output/VGA_Presentation_Yossi.pptx
+++ b/docs/presentation/output/VGA_Presentation_Yossi.pptx
@@ -22,7 +22,6 @@
     <p:sldId id="270" r:id="rId21"/>
     <p:sldId id="271" r:id="rId22"/>
     <p:sldId id="272" r:id="rId23"/>
-    <p:sldId id="273" r:id="rId24"/>
   </p:sldIdLst>
   <p:sldSz cx="9144000" cy="6858000" type="screen4x3"/>
   <p:notesSz cx="6858000" cy="9144000"/>
@@ -3256,7 +3255,7 @@
           <a:p>
             <a:pPr rtl="1" algn="ctr"/>
             <a:r>
-              <a:t>המרת DAC אנלוגית ומחבר ה-VGA</a:t>
+              <a:t>  מחלק המתח ומשקלי הביטים</a:t>
             </a:r>
           </a:p>
         </p:txBody>
@@ -3269,8 +3268,8 @@
         </p:nvSpPr>
         <p:spPr>
           <a:xfrm>
-            <a:off x="457200" y="1005840"/>
-            <a:ext cx="8229600" cy="914400"/>
+            <a:off x="457200" y="1097280"/>
+            <a:ext cx="8229600" cy="1371600"/>
           </a:xfrm>
           <a:prstGeom prst="rect">
             <a:avLst/>
@@ -3288,7 +3287,7 @@
               <a:defRPr sz="1600"/>
             </a:pPr>
             <a:r>
-              <a:t>• סולם נגדים (Resistor Network): המרת 12 ביטי ה-RGB למתח אנלוגי רציף באמצעות משקולות נגדים (510Ω עד 4KΩ).</a:t>
+              <a:t>• משקל פיזי לכל ביט (MSB לעומת LSB): הביט המשמעותי ביותר (MSB) מחובר לנגד הקטן ביותר, ולכן מזזרים את הזרם הגדול ביותר למעגל ומשפיע משמעותית על עוצמת הצבע.</a:t>
             </a:r>
           </a:p>
           <a:p>
@@ -3296,14 +3295,22 @@
               <a:defRPr sz="1600"/>
             </a:pPr>
             <a:r>
-              <a:t>• אותות סנכרון (B11 / B12): פיני היציאה מוגנים באמצעות נגדי 100Ω ומזינים ישירות את מחבר ה-DB15 של המסך.</a:t>
+              <a:t>• כוונון עדין: לעומתו, הביט הפחות משמעותי (LSB) מחובר לנגד הגדול ביותר בסולם. תרומתו לזרם הכולל היא מזערית ונועדה לכוונון עדין של הגוון.</a:t>
+            </a:r>
+          </a:p>
+          <a:p>
+            <a:pPr algn="r" rtl="1">
+              <a:defRPr sz="1600"/>
+            </a:pPr>
+            <a:r>
+              <a:t>• סכימה אנלוגית על המסך: כל הזרמים מהביטים הפעילים ('1') מתחברים וזורמים יחד דרך נגד הסיומת של המסך (75Ω) אל האדמה. כך נוצר מחלק מתח דינמי המפיק 0V עד 0.7V.</a:t>
             </a:r>
           </a:p>
         </p:txBody>
       </p:sp>
       <p:pic>
         <p:nvPicPr>
-          <p:cNvPr id="4" name="Picture 3" descr="vga_dac_resistor_network.png"/>
+          <p:cNvPr id="4" name="Picture 3" descr="vga_voltage_divider_dac.png"/>
           <p:cNvPicPr>
             <a:picLocks noChangeAspect="1"/>
           </p:cNvPicPr>
@@ -3317,32 +3324,8 @@
         </p:blipFill>
         <p:spPr>
           <a:xfrm>
-            <a:off x="457200" y="2103120"/>
-            <a:ext cx="4023360" cy="4992221"/>
-          </a:xfrm>
-          <a:prstGeom prst="rect">
-            <a:avLst/>
-          </a:prstGeom>
-        </p:spPr>
-      </p:pic>
-      <p:pic>
-        <p:nvPicPr>
-          <p:cNvPr id="5" name="Picture 4" descr="vga_db15_connector_pins.png"/>
-          <p:cNvPicPr>
-            <a:picLocks noChangeAspect="1"/>
-          </p:cNvPicPr>
-          <p:nvPr/>
-        </p:nvPicPr>
-        <p:blipFill>
-          <a:blip r:embed="rId3"/>
-          <a:stretch>
-            <a:fillRect/>
-          </a:stretch>
-        </p:blipFill>
-        <p:spPr>
-          <a:xfrm>
-            <a:off x="4663440" y="2286000"/>
-            <a:ext cx="4023360" cy="3205277"/>
+            <a:off x="1371600" y="2926080"/>
+            <a:ext cx="6400800" cy="4800600"/>
           </a:xfrm>
           <a:prstGeom prst="rect">
             <a:avLst/>
@@ -3384,7 +3367,7 @@
           <a:p>
             <a:pPr rtl="1" algn="ctr"/>
             <a:r>
-              <a:t>עומק הנדסי: מחלק המתח ומשקלי הביטים</a:t>
+              <a:t>סיכום תיאורטי: לקראת ארכיטקטורת החומרה</a:t>
             </a:r>
           </a:p>
         </p:txBody>
@@ -3397,8 +3380,8 @@
         </p:nvSpPr>
         <p:spPr>
           <a:xfrm>
-            <a:off x="457200" y="1097280"/>
-            <a:ext cx="8229600" cy="1371600"/>
+            <a:off x="182880" y="1097280"/>
+            <a:ext cx="8686800" cy="1371600"/>
           </a:xfrm>
           <a:prstGeom prst="rect">
             <a:avLst/>
@@ -3416,7 +3399,7 @@
               <a:defRPr sz="1600"/>
             </a:pPr>
             <a:r>
-              <a:t>• משקל פיזי לכל ביט (MSB לעומת LSB): הביט המשמעותי ביותר (MSB) מחובר לנגד הקטן ביותר, ולכן מזזרים את הזרם הגדול ביותר למעגל ומשפיע משמעותית על עוצמת הצבע.</a:t>
+              <a:t>• האתגר הפיזיקלי: ראינו שהמסך החיצוני דורש תזמונים מדויקים ונוקשים (Sync, Blanking) והמרת צבע רציפה (DAC) כדי לפעול כראוי.</a:t>
             </a:r>
           </a:p>
           <a:p>
@@ -3424,7 +3407,7 @@
               <a:defRPr sz="1600"/>
             </a:pPr>
             <a:r>
-              <a:t>• כוונון עדין: לעומתו, הביט הפחות משמעותי (LSB) מחובר לנגד הגדול ביותר בסולם. תרומתו לזרם הכולל היא מזערית ונועדה לכוונון עדין של הגוון.</a:t>
+              <a:t>• המעבר פנימה (FPGA): כדי לייצר את האותות הללו בזמן אמת ובאמינות מוחלטת, אנו נכנסים אל תוך הלוגיקה הדיגיטלית (RTL) על הכרטיס.</a:t>
             </a:r>
           </a:p>
           <a:p>
@@ -3432,14 +3415,22 @@
               <a:defRPr sz="1600"/>
             </a:pPr>
             <a:r>
-              <a:t>• סכימה אנלוגית על המסך: כל הזרמים מהביטים הפעילים ('1') מתחברים וזורמים יחד דרך נגד הסיומת של המסך (75Ω) אל האדמה. כך נוצר מחלק מתח דינמי המפיק 0V עד 0.7V.</a:t>
+              <a:t>• תפקיד ה-VGA Controller: זהו רכיב הגישור הסופי במערכת. הוא שואב נתונים מהזיכרון הפנימי ומתרגם אותם לאותות הפיזיים שהמסך דורש.</a:t>
+            </a:r>
+          </a:p>
+          <a:p>
+            <a:pPr algn="r" rtl="1">
+              <a:defRPr sz="1600"/>
+            </a:pPr>
+            <a:r>
+              <a:t>• התחנה הבאה: נמפה את האקו-סיסטם על הכרטיס (שעונים, מצלמה, חוצץ זיכרון) ולאחר מכן נצלול פנימה אל הלוגיקה של בקר ה-VGA עצמו.</a:t>
             </a:r>
           </a:p>
         </p:txBody>
       </p:sp>
       <p:pic>
         <p:nvPicPr>
-          <p:cNvPr id="4" name="Picture 3" descr="vga_voltage_divider_dac.png"/>
+          <p:cNvPr id="4" name="Picture 3" descr="vga_fpga_top_architecture.png"/>
           <p:cNvPicPr>
             <a:picLocks noChangeAspect="1"/>
           </p:cNvPicPr>
@@ -3453,8 +3444,8 @@
         </p:blipFill>
         <p:spPr>
           <a:xfrm>
-            <a:off x="1371600" y="2926080"/>
-            <a:ext cx="6400800" cy="4800600"/>
+            <a:off x="2286000" y="3291840"/>
+            <a:ext cx="4572000" cy="2502868"/>
           </a:xfrm>
           <a:prstGeom prst="rect">
             <a:avLst/>
@@ -3496,7 +3487,7 @@
           <a:p>
             <a:pPr rtl="1" algn="ctr"/>
             <a:r>
-              <a:t>סיכום תיאורטי: לקראת ארכיטקטורת החומרה</a:t>
+              <a:t>מבט-על: זרימת נתונים ותחומי שעון (RTL)</a:t>
             </a:r>
           </a:p>
         </p:txBody>
@@ -3528,7 +3519,7 @@
               <a:defRPr sz="1600"/>
             </a:pPr>
             <a:r>
-              <a:t>• האתגר הפיזיקלי: ראינו שהמסך החיצוני דורש תזמונים מדויקים ונוקשים (Sync, Blanking) והמרת צבע רציפה (DAC) כדי לפעול כראוי.</a:t>
+              <a:t>• מחולל שעונים (clk_generator): רכיב PLL המקבל שעון מערכת ומפיק שעון 25MHz נפרד ל-VGA ושעון ייעודי למצלמה.</a:t>
             </a:r>
           </a:p>
           <a:p>
@@ -3536,7 +3527,7 @@
               <a:defRPr sz="1600"/>
             </a:pPr>
             <a:r>
-              <a:t>• המעבר פנימה (FPGA): כדי לייצר את האותות הללו בזמן אמת ובאמינות מוחלטת, אנו נכנסים אל תוך הלוגיקה הדיגיטלית (RTL) על הכרטיס.</a:t>
+              <a:t>• גישור חציית שעונים (CDC): זיכרון ה-BRAM (בתצורת Dual-Port) פועל כחוצץ בטוח בין קצב הכתיבה לקצב הקריאה.</a:t>
             </a:r>
           </a:p>
           <a:p>
@@ -3544,7 +3535,7 @@
               <a:defRPr sz="1600"/>
             </a:pPr>
             <a:r>
-              <a:t>• תפקיד ה-VGA Controller: זהו רכיב הגישור הסופי במערכת. הוא שואב נתונים מהזיכרון הפנימי ומתרגם אותם לאותות הפיזיים שהמסך דורש.</a:t>
+              <a:t>• תחום אדום (Camera Domain): קליטת הפיקסלים מהמצלמה (ov7670_capture) ודחיפתם לפורט A של הזיכרון (clka).</a:t>
             </a:r>
           </a:p>
           <a:p>
@@ -3552,14 +3543,14 @@
               <a:defRPr sz="1600"/>
             </a:pPr>
             <a:r>
-              <a:t>• התחנה הבאה: נמפה את האקו-סיסטם על הכרטיס (שעונים, מצלמה, חוצץ זיכרון) ולאחר מכן נצלול פנימה אל הלוגיקה של בקר ה-VGA עצמו.</a:t>
+              <a:t>• תחום כחול (VGA Domain): המיקוד שלנו – שליפת הפיקסלים מפורט B (clkb) על ידי בקר ה-VGA וייצור אותות התצוגה.</a:t>
             </a:r>
           </a:p>
         </p:txBody>
       </p:sp>
       <p:pic>
         <p:nvPicPr>
-          <p:cNvPr id="4" name="Picture 3" descr="vga_fpga_top_architecture.png"/>
+          <p:cNvPr id="4" name="Picture 3" descr="rtl_direct_vga_path.png"/>
           <p:cNvPicPr>
             <a:picLocks noChangeAspect="1"/>
           </p:cNvPicPr>
@@ -3573,14 +3564,100 @@
         </p:blipFill>
         <p:spPr>
           <a:xfrm>
-            <a:off x="2286000" y="3291840"/>
-            <a:ext cx="4572000" cy="2502868"/>
+            <a:off x="457200" y="2743200"/>
+            <a:ext cx="8229600" cy="4342751"/>
           </a:xfrm>
           <a:prstGeom prst="rect">
             <a:avLst/>
           </a:prstGeom>
         </p:spPr>
       </p:pic>
+      <p:sp>
+        <p:nvSpPr>
+          <p:cNvPr id="5" name="Rectangle 4"/>
+          <p:cNvSpPr/>
+          <p:nvPr/>
+        </p:nvSpPr>
+        <p:spPr>
+          <a:xfrm>
+            <a:off x="914400" y="2926080"/>
+            <a:ext cx="3657600" cy="3474720"/>
+          </a:xfrm>
+          <a:prstGeom prst="rect">
+            <a:avLst/>
+          </a:prstGeom>
+          <a:noFill/>
+          <a:ln w="38100">
+            <a:solidFill>
+              <a:srgbClr val="FF0000"/>
+            </a:solidFill>
+          </a:ln>
+        </p:spPr>
+        <p:style>
+          <a:lnRef idx="1">
+            <a:schemeClr val="accent1"/>
+          </a:lnRef>
+          <a:fillRef idx="3">
+            <a:schemeClr val="accent1"/>
+          </a:fillRef>
+          <a:effectRef idx="2">
+            <a:schemeClr val="accent1"/>
+          </a:effectRef>
+          <a:fontRef idx="minor">
+            <a:schemeClr val="lt1"/>
+          </a:fontRef>
+        </p:style>
+        <p:txBody>
+          <a:bodyPr rtlCol="0" anchor="ctr"/>
+          <a:lstStyle/>
+          <a:p>
+            <a:pPr algn="ctr"/>
+          </a:p>
+        </p:txBody>
+      </p:sp>
+      <p:sp>
+        <p:nvSpPr>
+          <p:cNvPr id="6" name="Rectangle 5"/>
+          <p:cNvSpPr/>
+          <p:nvPr/>
+        </p:nvSpPr>
+        <p:spPr>
+          <a:xfrm>
+            <a:off x="4663440" y="2926080"/>
+            <a:ext cx="3657600" cy="3474720"/>
+          </a:xfrm>
+          <a:prstGeom prst="rect">
+            <a:avLst/>
+          </a:prstGeom>
+          <a:noFill/>
+          <a:ln w="50800">
+            <a:solidFill>
+              <a:srgbClr val="0070C0"/>
+            </a:solidFill>
+          </a:ln>
+        </p:spPr>
+        <p:style>
+          <a:lnRef idx="1">
+            <a:schemeClr val="accent1"/>
+          </a:lnRef>
+          <a:fillRef idx="3">
+            <a:schemeClr val="accent1"/>
+          </a:fillRef>
+          <a:effectRef idx="2">
+            <a:schemeClr val="accent1"/>
+          </a:effectRef>
+          <a:fontRef idx="minor">
+            <a:schemeClr val="lt1"/>
+          </a:fontRef>
+        </p:style>
+        <p:txBody>
+          <a:bodyPr rtlCol="0" anchor="ctr"/>
+          <a:lstStyle/>
+          <a:p>
+            <a:pPr algn="ctr"/>
+          </a:p>
+        </p:txBody>
+      </p:sp>
     </p:spTree>
   </p:cSld>
   <p:clrMapOvr>
@@ -3616,7 +3693,7 @@
           <a:p>
             <a:pPr rtl="1" algn="ctr"/>
             <a:r>
-              <a:t>מבט-על: זרימת נתונים ותחומי שעון (RTL)</a:t>
+              <a:t>ניהול שעונים במערכת (Clock Generator)</a:t>
             </a:r>
           </a:p>
         </p:txBody>
@@ -3648,7 +3725,7 @@
               <a:defRPr sz="1600"/>
             </a:pPr>
             <a:r>
-              <a:t>• מחולל שעונים (clk_generator): רכיב PLL המקבל שעון מערכת ומפיק שעון 25MHz נפרד ל-VGA ושעון ייעודי למצלמה.</a:t>
+              <a:t>• מקור שעון (System Clock): כניסת clk מקבלת את שעון הלוח המקורי (100MHz) ומזינה את ה-PLL (clk_wiz_0).</a:t>
             </a:r>
           </a:p>
           <a:p>
@@ -3656,7 +3733,7 @@
               <a:defRPr sz="1600"/>
             </a:pPr>
             <a:r>
-              <a:t>• גישור חציית שעונים (CDC): זיכרון ה-BRAM (בתצורת Dual-Port) פועל כחוצץ בטוח בין קצב הכתיבה לקצב הקריאה.</a:t>
+              <a:t>• שעון תצוגה (vga_pll): ה-PLL מפיק תדר של 25MHz המזין את בקר ה-VGA (pxl_clk) ואת פורט הקריאה (clkb) ב-BRAM.</a:t>
             </a:r>
           </a:p>
           <a:p>
@@ -3664,22 +3741,14 @@
               <a:defRPr sz="1600"/>
             </a:pPr>
             <a:r>
-              <a:t>• תחום אדום (Camera Domain): קליטת הפיקסלים מהמצלמה (ov7670_capture) ודחיפתם לפורט A של הזיכרון (clka).</a:t>
-            </a:r>
-          </a:p>
-          <a:p>
-            <a:pPr algn="r" rtl="1">
-              <a:defRPr sz="1600"/>
-            </a:pPr>
-            <a:r>
-              <a:t>• תחום כחול (VGA Domain): המיקוד שלנו – שליפת הפיקסלים מפורט B (clkb) על ידי בקר ה-VGA וייצור אותות התצוגה.</a:t>
+              <a:t>• שעון מצלמה (xclk_pll): הפקת שעון ייעודי של 24MHz (xclk_ov7670) המנותב החוצה לסנכרון רכיב המצלמה.</a:t>
             </a:r>
           </a:p>
         </p:txBody>
       </p:sp>
       <p:pic>
         <p:nvPicPr>
-          <p:cNvPr id="4" name="Picture 3" descr="rtl_direct_vga_path.png"/>
+          <p:cNvPr id="4" name="Picture 3" descr="clk_wiz_instantiation.png"/>
           <p:cNvPicPr>
             <a:picLocks noChangeAspect="1"/>
           </p:cNvPicPr>
@@ -3693,100 +3762,14 @@
         </p:blipFill>
         <p:spPr>
           <a:xfrm>
-            <a:off x="457200" y="2743200"/>
-            <a:ext cx="8229600" cy="4342751"/>
+            <a:off x="2286000" y="2926080"/>
+            <a:ext cx="4572000" cy="3237682"/>
           </a:xfrm>
           <a:prstGeom prst="rect">
             <a:avLst/>
           </a:prstGeom>
         </p:spPr>
       </p:pic>
-      <p:sp>
-        <p:nvSpPr>
-          <p:cNvPr id="5" name="Rectangle 4"/>
-          <p:cNvSpPr/>
-          <p:nvPr/>
-        </p:nvSpPr>
-        <p:spPr>
-          <a:xfrm>
-            <a:off x="914400" y="2926080"/>
-            <a:ext cx="3657600" cy="3474720"/>
-          </a:xfrm>
-          <a:prstGeom prst="rect">
-            <a:avLst/>
-          </a:prstGeom>
-          <a:noFill/>
-          <a:ln w="38100">
-            <a:solidFill>
-              <a:srgbClr val="FF0000"/>
-            </a:solidFill>
-          </a:ln>
-        </p:spPr>
-        <p:style>
-          <a:lnRef idx="1">
-            <a:schemeClr val="accent1"/>
-          </a:lnRef>
-          <a:fillRef idx="3">
-            <a:schemeClr val="accent1"/>
-          </a:fillRef>
-          <a:effectRef idx="2">
-            <a:schemeClr val="accent1"/>
-          </a:effectRef>
-          <a:fontRef idx="minor">
-            <a:schemeClr val="lt1"/>
-          </a:fontRef>
-        </p:style>
-        <p:txBody>
-          <a:bodyPr rtlCol="0" anchor="ctr"/>
-          <a:lstStyle/>
-          <a:p>
-            <a:pPr algn="ctr"/>
-          </a:p>
-        </p:txBody>
-      </p:sp>
-      <p:sp>
-        <p:nvSpPr>
-          <p:cNvPr id="6" name="Rectangle 5"/>
-          <p:cNvSpPr/>
-          <p:nvPr/>
-        </p:nvSpPr>
-        <p:spPr>
-          <a:xfrm>
-            <a:off x="4663440" y="2926080"/>
-            <a:ext cx="3657600" cy="3474720"/>
-          </a:xfrm>
-          <a:prstGeom prst="rect">
-            <a:avLst/>
-          </a:prstGeom>
-          <a:noFill/>
-          <a:ln w="50800">
-            <a:solidFill>
-              <a:srgbClr val="0070C0"/>
-            </a:solidFill>
-          </a:ln>
-        </p:spPr>
-        <p:style>
-          <a:lnRef idx="1">
-            <a:schemeClr val="accent1"/>
-          </a:lnRef>
-          <a:fillRef idx="3">
-            <a:schemeClr val="accent1"/>
-          </a:fillRef>
-          <a:effectRef idx="2">
-            <a:schemeClr val="accent1"/>
-          </a:effectRef>
-          <a:fontRef idx="minor">
-            <a:schemeClr val="lt1"/>
-          </a:fontRef>
-        </p:style>
-        <p:txBody>
-          <a:bodyPr rtlCol="0" anchor="ctr"/>
-          <a:lstStyle/>
-          <a:p>
-            <a:pPr algn="ctr"/>
-          </a:p>
-        </p:txBody>
-      </p:sp>
     </p:spTree>
   </p:cSld>
   <p:clrMapOvr>
@@ -3822,7 +3805,7 @@
           <a:p>
             <a:pPr rtl="1" algn="ctr"/>
             <a:r>
-              <a:t>ניהול שעונים במערכת (Clock Generator)</a:t>
+              <a:t>זיכרון ה-BRAM: חוצץ התמונה (Frame Buffer)</a:t>
             </a:r>
           </a:p>
         </p:txBody>
@@ -3854,7 +3837,7 @@
               <a:defRPr sz="1600"/>
             </a:pPr>
             <a:r>
-              <a:t>• מקור שעון (System Clock): כניסת clk מקבלת את שעון הלוח המקורי (100MHz) ומזינה את ה-PLL (clk_wiz_0).</a:t>
+              <a:t>• תצורת Dual-Port: הפרדה מוחלטת לחומרת כתיבה (A) וקריאה (B). זהו הפתרון שלנו ל-CDC (חציית תחומי שעון) המונע התנגשויות נתונים.</a:t>
             </a:r>
           </a:p>
           <a:p>
@@ -3862,7 +3845,7 @@
               <a:defRPr sz="1600"/>
             </a:pPr>
             <a:r>
-              <a:t>• שעון תצוגה (vga_pll): ה-PLL מפיק תדר של 25MHz המזין את בקר ה-VGA (pxl_clk) ואת פורט הקריאה (clkb) ב-BRAM.</a:t>
+              <a:t>• שעונים א-סינכרוניים: הכתיבה (clka) מתבצעת בתדר המערכת (100MHz), בעוד הקריאה למסך (clkb) מונעת בלעדית על ידי שעון ה-VGA שלנו (25MHz).</a:t>
             </a:r>
           </a:p>
           <a:p>
@@ -3870,14 +3853,22 @@
               <a:defRPr sz="1600"/>
             </a:pPr>
             <a:r>
-              <a:t>• שעון מצלמה (xclk_pll): הפקת שעון ייעודי של 24MHz (xclk_ov7670) המנותב החוצה לסנכרון רכיב המצלמה.</a:t>
+              <a:t>• ממדי הזיכרון (307,200x12): הזיכרון מוקצה במדויק להכיל 307,200 פיקסלים (רזולוציה של 640x480).</a:t>
+            </a:r>
+          </a:p>
+          <a:p>
+            <a:pPr algn="r" rtl="1">
+              <a:defRPr sz="1600"/>
+            </a:pPr>
+            <a:r>
+              <a:t>• תפוקת הנתונים: האות doutb משחרר 12 ביט של צבע (RGB) בכל מחזור שעון (25MHz) ישירות לבקר ה-VGA.</a:t>
             </a:r>
           </a:p>
         </p:txBody>
       </p:sp>
       <p:pic>
         <p:nvPicPr>
-          <p:cNvPr id="4" name="Picture 3" descr="clk_wiz_instantiation.png"/>
+          <p:cNvPr id="4" name="Picture 3" descr="bram_ip_symbol.png"/>
           <p:cNvPicPr>
             <a:picLocks noChangeAspect="1"/>
           </p:cNvPicPr>
@@ -3891,8 +3882,8 @@
         </p:blipFill>
         <p:spPr>
           <a:xfrm>
-            <a:off x="2286000" y="2926080"/>
-            <a:ext cx="4572000" cy="3237682"/>
+            <a:off x="2286000" y="3200400"/>
+            <a:ext cx="4572000" cy="2165476"/>
           </a:xfrm>
           <a:prstGeom prst="rect">
             <a:avLst/>
@@ -3934,7 +3925,7 @@
           <a:p>
             <a:pPr rtl="1" algn="ctr"/>
             <a:r>
-              <a:t>זיכרון ה-BRAM: חוצץ התמונה (Frame Buffer)</a:t>
+              <a:t>ממשק המצלמה: מהעולם הפיזי אל הזיכרון</a:t>
             </a:r>
           </a:p>
         </p:txBody>
@@ -3966,7 +3957,7 @@
               <a:defRPr sz="1600"/>
             </a:pPr>
             <a:r>
-              <a:t>• תצורת Dual-Port: הפרדה מוחלטת לחומרת כתיבה (A) וקריאה (B). זהו הפתרון שלנו ל-CDC (חציית תחומי שעון) המונע התנגשויות נתונים.</a:t>
+              <a:t>• הגשר הפיזי (XCLK מול PCLK): ה-FPGA מפיק 24MHz (XCLK) החוצה להפעלת המצלמה. בתגובה, המצלמה משדרת חזרה פיקסלים יחד עם שעון סנכרון עצמאי משלה (PCLK).</a:t>
             </a:r>
           </a:p>
           <a:p>
@@ -3974,7 +3965,7 @@
               <a:defRPr sz="1600"/>
             </a:pPr>
             <a:r>
-              <a:t>• שעונים א-סינכרוניים: הכתיבה (clka) מתבצעת בתדר המערכת (100MHz), בעוד הקריאה למסך (clkb) מונעת בלעדית על ידי שעון ה-VGA שלנו (25MHz).</a:t>
+              <a:t>• לכידת הנתונים: רכיב ה-ov7670_capture רץ בתדר המערכת (100MHz) המאפשר דגימה מהירה ובטוחה של ה-PCLK ואסיפת 12 ביט של צבע.</a:t>
             </a:r>
           </a:p>
           <a:p>
@@ -3982,22 +3973,14 @@
               <a:defRPr sz="1600"/>
             </a:pPr>
             <a:r>
-              <a:t>• ממדי הזיכרון (307,200x12): הזיכרון מוקצה במדויק להכיל 307,200 פיקסלים (רזולוציה של 640x480).</a:t>
-            </a:r>
-          </a:p>
-          <a:p>
-            <a:pPr algn="r" rtl="1">
-              <a:defRPr sz="1600"/>
-            </a:pPr>
-            <a:r>
-              <a:t>• תפוקת הנתונים: האות doutb משחרר 12 ביט של צבע (RGB) בכל מחזור שעון (25MHz) ישירות לבקר ה-VGA.</a:t>
+              <a:t>• כתיבה לזיכרון: הבלוק מייצר את הכתובת (addra), המידע (dina), ודגל הכתיבה (wea) ודוחף אותם לפורט A של ה-BRAM.</a:t>
             </a:r>
           </a:p>
         </p:txBody>
       </p:sp>
       <p:pic>
         <p:nvPicPr>
-          <p:cNvPr id="4" name="Picture 3" descr="bram_ip_symbol.png"/>
+          <p:cNvPr id="4" name="Picture 3" descr="camera_capture_flow.png.jpeg"/>
           <p:cNvPicPr>
             <a:picLocks noChangeAspect="1"/>
           </p:cNvPicPr>
@@ -4012,7 +3995,7 @@
         <p:spPr>
           <a:xfrm>
             <a:off x="2286000" y="3200400"/>
-            <a:ext cx="4572000" cy="2165476"/>
+            <a:ext cx="4572000" cy="3591426"/>
           </a:xfrm>
           <a:prstGeom prst="rect">
             <a:avLst/>
@@ -4054,118 +4037,6 @@
           <a:p>
             <a:pPr rtl="1" algn="ctr"/>
             <a:r>
-              <a:t>ממשק המצלמה: מהעולם הפיזי אל הזיכרון</a:t>
-            </a:r>
-          </a:p>
-        </p:txBody>
-      </p:sp>
-      <p:sp>
-        <p:nvSpPr>
-          <p:cNvPr id="3" name="TextBox 2"/>
-          <p:cNvSpPr txBox="1"/>
-          <p:nvPr/>
-        </p:nvSpPr>
-        <p:spPr>
-          <a:xfrm>
-            <a:off x="182880" y="1097280"/>
-            <a:ext cx="8686800" cy="1371600"/>
-          </a:xfrm>
-          <a:prstGeom prst="rect">
-            <a:avLst/>
-          </a:prstGeom>
-          <a:noFill/>
-        </p:spPr>
-        <p:txBody>
-          <a:bodyPr wrap="none">
-            <a:spAutoFit/>
-          </a:bodyPr>
-          <a:lstStyle/>
-          <a:p/>
-          <a:p>
-            <a:pPr algn="r" rtl="1">
-              <a:defRPr sz="1600"/>
-            </a:pPr>
-            <a:r>
-              <a:t>• הגשר הפיזי (XCLK מול PCLK): ה-FPGA מפיק 24MHz (XCLK) החוצה להפעלת המצלמה. בתגובה, המצלמה משדרת חזרה פיקסלים יחד עם שעון סנכרון עצמאי משלה (PCLK).</a:t>
-            </a:r>
-          </a:p>
-          <a:p>
-            <a:pPr algn="r" rtl="1">
-              <a:defRPr sz="1600"/>
-            </a:pPr>
-            <a:r>
-              <a:t>• לכידת הנתונים: רכיב ה-ov7670_capture רץ בתדר המערכת (100MHz) המאפשר דגימה מהירה ובטוחה של ה-PCLK ואסיפת 12 ביט של צבע.</a:t>
-            </a:r>
-          </a:p>
-          <a:p>
-            <a:pPr algn="r" rtl="1">
-              <a:defRPr sz="1600"/>
-            </a:pPr>
-            <a:r>
-              <a:t>• כתיבה לזיכרון: הבלוק מייצר את הכתובת (addra), המידע (dina), ודגל הכתיבה (wea) ודוחף אותם לפורט A של ה-BRAM.</a:t>
-            </a:r>
-          </a:p>
-        </p:txBody>
-      </p:sp>
-      <p:pic>
-        <p:nvPicPr>
-          <p:cNvPr id="4" name="Picture 3" descr="camera_capture_flow.png.jpeg"/>
-          <p:cNvPicPr>
-            <a:picLocks noChangeAspect="1"/>
-          </p:cNvPicPr>
-          <p:nvPr/>
-        </p:nvPicPr>
-        <p:blipFill>
-          <a:blip r:embed="rId2"/>
-          <a:stretch>
-            <a:fillRect/>
-          </a:stretch>
-        </p:blipFill>
-        <p:spPr>
-          <a:xfrm>
-            <a:off x="2286000" y="3200400"/>
-            <a:ext cx="4572000" cy="3591426"/>
-          </a:xfrm>
-          <a:prstGeom prst="rect">
-            <a:avLst/>
-          </a:prstGeom>
-        </p:spPr>
-      </p:pic>
-    </p:spTree>
-  </p:cSld>
-  <p:clrMapOvr>
-    <a:masterClrMapping/>
-  </p:clrMapOvr>
-</p:sld>
-</file>
-
-<file path=ppt/slides/slide17.xml><?xml version="1.0" encoding="utf-8"?>
-<p:sld xmlns:a="http://schemas.openxmlformats.org/drawingml/2006/main" xmlns:p="http://schemas.openxmlformats.org/presentationml/2006/main" xmlns:r="http://schemas.openxmlformats.org/officeDocument/2006/relationships">
-  <p:cSld>
-    <p:spTree>
-      <p:nvGrpSpPr>
-        <p:cNvPr id="1" name=""/>
-        <p:cNvGrpSpPr/>
-        <p:nvPr/>
-      </p:nvGrpSpPr>
-      <p:grpSpPr/>
-      <p:sp>
-        <p:nvSpPr>
-          <p:cNvPr id="2" name="Title 1"/>
-          <p:cNvSpPr>
-            <a:spLocks noGrp="1"/>
-          </p:cNvSpPr>
-          <p:nvPr>
-            <p:ph type="title"/>
-          </p:nvPr>
-        </p:nvSpPr>
-        <p:spPr/>
-        <p:txBody>
-          <a:bodyPr/>
-          <a:lstStyle/>
-          <a:p>
-            <a:pPr rtl="1" algn="ctr"/>
-            <a:r>
               <a:t>ממשק הזיכרון (BRAM): ממדים וסנכרון נתונים</a:t>
             </a:r>
           </a:p>
@@ -4259,7 +4130,7 @@
 </p:sld>
 </file>
 
-<file path=ppt/slides/slide18.xml><?xml version="1.0" encoding="utf-8"?>
+<file path=ppt/slides/slide17.xml><?xml version="1.0" encoding="utf-8"?>
 <p:sld xmlns:a="http://schemas.openxmlformats.org/drawingml/2006/main" xmlns:p="http://schemas.openxmlformats.org/presentationml/2006/main" xmlns:r="http://schemas.openxmlformats.org/officeDocument/2006/relationships">
   <p:cSld>
     <p:spTree>
@@ -5596,7 +5467,7 @@
           <a:p>
             <a:pPr rtl="1" algn="ctr"/>
             <a:r>
-              <a:t>מרחב התצוגה: צלילה לערכי ה-Horizontal</a:t>
+              <a:t>תזמונים והחשכה בחומרה (VGA Controller)</a:t>
             </a:r>
           </a:p>
         </p:txBody>
@@ -5628,7 +5499,7 @@
               <a:defRPr sz="1600"/>
             </a:pPr>
             <a:r>
-              <a:t>• אזור פעיל (640 פיקסלים): המידע האקטיבי. תקן ה-VGA מקצה בדיוק 640 מחזורי שעון לציור השורה בפועל.</a:t>
+              <a:t>• מחזור שלם (800 פיקסלים): חיבור הערכים (640+16+96+48) דורש מהמונה האופקי (h_count) לספור מ-0 ועד 799.</a:t>
             </a:r>
           </a:p>
           <a:p>
@@ -5636,7 +5507,7 @@
               <a:defRPr sz="1600"/>
             </a:pPr>
             <a:r>
-              <a:t>• שוליים וסנכרון (Front 16, Sync 96, Back 48): זמנים אלו נועדו במקור כדי לאפשר לקרן האלקטרונים (CRT) לכבות ולחזור שמאלה.</a:t>
+              <a:t>• שעון פיקסל 25MHz: כל 'פיקסל' שקול למחזור שעון אחד של 40ns. סנכרון זה מבטיח קצב ריענון תקני של 60Hz.</a:t>
             </a:r>
           </a:p>
           <a:p>
@@ -5644,22 +5515,14 @@
               <a:defRPr sz="1600"/>
             </a:pPr>
             <a:r>
-              <a:t>• למה זה נדרש כיום? במסכי LCD/LED מודרניים אין קרן פיזית, אך הבקרים עדיין דורשים את 'הזמנים המתים' הללו (Blanking).</a:t>
-            </a:r>
-          </a:p>
-          <a:p>
-            <a:pPr algn="r" rtl="1">
-              <a:defRPr sz="1600"/>
-            </a:pPr>
-            <a:r>
-              <a:t>• תאימות תקן (VESA): שמירה על תזמונים אלו היא קריטית. ללא הדיליי המדויק הזה, המסך לא יסתנכרן ויציג שגיאת 'No Signal'.</a:t>
+              <a:t>• אכיפת שחור (Blanking): מחוץ לתחום ה-640, הלוגיקה שלנו מאלצת "0000" ב-RGB כדי למנוע 'מריחות' צבע בעת תנועת הקרן.</a:t>
             </a:r>
           </a:p>
         </p:txBody>
       </p:sp>
       <p:pic>
         <p:nvPicPr>
-          <p:cNvPr id="4" name="Picture 3" descr="vga_active_vs_blanking_regions.png"/>
+          <p:cNvPr id="4" name="Picture 3" descr="vga_counters_rtl_schematic.png"/>
           <p:cNvPicPr>
             <a:picLocks noChangeAspect="1"/>
           </p:cNvPicPr>
@@ -5673,8 +5536,32 @@
         </p:blipFill>
         <p:spPr>
           <a:xfrm>
-            <a:off x="2286000" y="3200400"/>
-            <a:ext cx="4572000" cy="3687417"/>
+            <a:off x="457200" y="2926080"/>
+            <a:ext cx="4114800" cy="2047875"/>
+          </a:xfrm>
+          <a:prstGeom prst="rect">
+            <a:avLst/>
+          </a:prstGeom>
+        </p:spPr>
+      </p:pic>
+      <p:pic>
+        <p:nvPicPr>
+          <p:cNvPr id="5" name="Picture 4" descr="vga_timing_waveform_and_table.png"/>
+          <p:cNvPicPr>
+            <a:picLocks noChangeAspect="1"/>
+          </p:cNvPicPr>
+          <p:nvPr/>
+        </p:nvPicPr>
+        <p:blipFill>
+          <a:blip r:embed="rId3"/>
+          <a:stretch>
+            <a:fillRect/>
+          </a:stretch>
+        </p:blipFill>
+        <p:spPr>
+          <a:xfrm>
+            <a:off x="4754880" y="2560320"/>
+            <a:ext cx="3657600" cy="3623733"/>
           </a:xfrm>
           <a:prstGeom prst="rect">
             <a:avLst/>
@@ -5716,7 +5603,7 @@
           <a:p>
             <a:pPr rtl="1" algn="ctr"/>
             <a:r>
-              <a:t>תזמונים והחשכה בחומרה (VGA Controller)</a:t>
+              <a:t>מסלול הנתונים: חישוב כתובת הפיקסל ושליפה</a:t>
             </a:r>
           </a:p>
         </p:txBody>
@@ -5729,8 +5616,8 @@
         </p:nvSpPr>
         <p:spPr>
           <a:xfrm>
-            <a:off x="182880" y="1097280"/>
-            <a:ext cx="8686800" cy="1371600"/>
+            <a:off x="457200" y="1097280"/>
+            <a:ext cx="8229600" cy="1371600"/>
           </a:xfrm>
           <a:prstGeom prst="rect">
             <a:avLst/>
@@ -5748,7 +5635,7 @@
               <a:defRPr sz="1600"/>
             </a:pPr>
             <a:r>
-              <a:t>• מחזור שלם (800 פיקסלים): חיבור הערכים (640+16+96+48) דורש מהמונה האופקי (h_count) לספור מ-0 ועד 799.</a:t>
+              <a:t>• מיקום הקרן (X,Y): המונים hsync_reg ו-vsync_reg מפיקים את הקואורדינטות הדינמיות display_x ו-display_y בתוך האזור הפעיל.</a:t>
             </a:r>
           </a:p>
           <a:p>
@@ -5756,7 +5643,7 @@
               <a:defRPr sz="1600"/>
             </a:pPr>
             <a:r>
-              <a:t>• שעון פיקסל 25MHz: כל 'פיקסל' שקול למחזור שעון אחד של 40ns. סנכרון זה מבטיח קצב ריענון תקני של 60Hz.</a:t>
+              <a:t>• תרגום לכתובת ליניארית: הקואורדינטה מתורגמת מתמטית לכתובת הזיכרון bram_address_next ונשלחת החוצה דרך האות addrb.</a:t>
             </a:r>
           </a:p>
           <a:p>
@@ -5764,14 +5651,14 @@
               <a:defRPr sz="1600"/>
             </a:pPr>
             <a:r>
-              <a:t>• אכיפת שחור (Blanking): מחוץ לתחום ה-640, הלוגיקה שלנו מאלצת "0000" ב-RGB כדי למנוע 'מריחות' צבע בעת תנועת הקרן.</a:t>
+              <a:t>• שליפה מה-BRAM: רכיב ה-frame_buffer מקבל את הכתובת ומשחרר את 12 הביטים של הפיקסל היישר אל האות doutb של בקר ה-VGA.</a:t>
             </a:r>
           </a:p>
         </p:txBody>
       </p:sp>
       <p:pic>
         <p:nvPicPr>
-          <p:cNvPr id="4" name="Picture 3" descr="vga_counters_rtl_schematic.png"/>
+          <p:cNvPr id="4" name="Picture 3" descr="vga_address_bram_flow.png"/>
           <p:cNvPicPr>
             <a:picLocks noChangeAspect="1"/>
           </p:cNvPicPr>
@@ -5785,32 +5672,8 @@
         </p:blipFill>
         <p:spPr>
           <a:xfrm>
-            <a:off x="457200" y="2926080"/>
-            <a:ext cx="4114800" cy="2047875"/>
-          </a:xfrm>
-          <a:prstGeom prst="rect">
-            <a:avLst/>
-          </a:prstGeom>
-        </p:spPr>
-      </p:pic>
-      <p:pic>
-        <p:nvPicPr>
-          <p:cNvPr id="5" name="Picture 4" descr="vga_timing_waveform_and_table.png"/>
-          <p:cNvPicPr>
-            <a:picLocks noChangeAspect="1"/>
-          </p:cNvPicPr>
-          <p:nvPr/>
-        </p:nvPicPr>
-        <p:blipFill>
-          <a:blip r:embed="rId3"/>
-          <a:stretch>
-            <a:fillRect/>
-          </a:stretch>
-        </p:blipFill>
-        <p:spPr>
-          <a:xfrm>
-            <a:off x="4754880" y="2560320"/>
-            <a:ext cx="3657600" cy="3623733"/>
+            <a:off x="2286000" y="2926080"/>
+            <a:ext cx="4572000" cy="2635032"/>
           </a:xfrm>
           <a:prstGeom prst="rect">
             <a:avLst/>
@@ -5852,7 +5715,7 @@
           <a:p>
             <a:pPr rtl="1" algn="ctr"/>
             <a:r>
-              <a:t>מסלול הנתונים: חישוב כתובת הפיקסל ושליפה</a:t>
+              <a:t>עיבוד הפיקסל: ניתוב ל-RGB ומנגנון ה-Blanking</a:t>
             </a:r>
           </a:p>
         </p:txBody>
@@ -5884,7 +5747,7 @@
               <a:defRPr sz="1600"/>
             </a:pPr>
             <a:r>
-              <a:t>• מיקום הקרן (X,Y): המונים hsync_reg ו-vsync_reg מפיקים את הקואורדינטות הדינמיות display_x ו-display_y בתוך האזור הפעיל.</a:t>
+              <a:t>• רישום ופיצול: הנתונים מ-doutb ננעלים באוגר pxl_data_reg ומפוצלים לשגרירים: vga_r_int (ביטים 11:8), vga_g_int (7:4) ו-vga_b_int (3:0).</a:t>
             </a:r>
           </a:p>
           <a:p>
@@ -5892,7 +5755,7 @@
               <a:defRPr sz="1600"/>
             </a:pPr>
             <a:r>
-              <a:t>• תרגום לכתובת ליניארית: הקואורדינטה מתורגמת מתמטית לכתובת הזיכרון bram_address_next ונשלחת החוצה דרך האות addrb.</a:t>
+              <a:t>• שומר הסף: האות in_display_area_delayed משמש כדגל המזהה האם הקרן מצוירת כעת על המסך או נמצאת מחוץ לתצוגה.</a:t>
             </a:r>
           </a:p>
           <a:p>
@@ -5900,14 +5763,14 @@
               <a:defRPr sz="1600"/>
             </a:pPr>
             <a:r>
-              <a:t>• שליפה מה-BRAM: רכיב ה-frame_buffer מקבל את הכתובת ומשחרר את 12 הביטים של הפיקסל היישר אל האות doutb של בקר ה-VGA.</a:t>
+              <a:t>• סינון דיגיטלי (Mux): כאשר הדגל ב-'1', ערכי ה-RGB מועברים ליציאות VGA_R/G/B. בזמני ה-Porch וה-Sync, היציאות נאלצות ל-"0000" (שחור מוחלט).</a:t>
             </a:r>
           </a:p>
         </p:txBody>
       </p:sp>
       <p:pic>
         <p:nvPicPr>
-          <p:cNvPr id="4" name="Picture 3" descr="vga_address_bram_flow.png"/>
+          <p:cNvPr id="4" name="Picture 3" descr="vga_rgb_video_on_logic.png"/>
           <p:cNvPicPr>
             <a:picLocks noChangeAspect="1"/>
           </p:cNvPicPr>
@@ -5922,7 +5785,7 @@
         <p:spPr>
           <a:xfrm>
             <a:off x="2286000" y="2926080"/>
-            <a:ext cx="4572000" cy="2635032"/>
+            <a:ext cx="4572000" cy="2167573"/>
           </a:xfrm>
           <a:prstGeom prst="rect">
             <a:avLst/>
@@ -5964,7 +5827,7 @@
           <a:p>
             <a:pPr rtl="1" algn="ctr"/>
             <a:r>
-              <a:t>עיבוד הפיקסל: ניתוב ל-RGB ומנגנון ה-Blanking</a:t>
+              <a:t>המרת DAC אנלוגית ומחבר ה-VGA</a:t>
             </a:r>
           </a:p>
         </p:txBody>
@@ -5977,8 +5840,8 @@
         </p:nvSpPr>
         <p:spPr>
           <a:xfrm>
-            <a:off x="457200" y="1097280"/>
-            <a:ext cx="8229600" cy="1371600"/>
+            <a:off x="457200" y="1005840"/>
+            <a:ext cx="8229600" cy="914400"/>
           </a:xfrm>
           <a:prstGeom prst="rect">
             <a:avLst/>
@@ -5996,7 +5859,7 @@
               <a:defRPr sz="1600"/>
             </a:pPr>
             <a:r>
-              <a:t>• רישום ופיצול: הנתונים מ-doutb ננעלים באוגר pxl_data_reg ומפוצלים לשגרירים: vga_r_int (ביטים 11:8), vga_g_int (7:4) ו-vga_b_int (3:0).</a:t>
+              <a:t>• סולם נגדים (Resistor Network): המרת 12 ביטי ה-RGB למתח אנלוגי רציף באמצעות משקולות נגדים (510Ω עד 4KΩ).</a:t>
             </a:r>
           </a:p>
           <a:p>
@@ -6004,22 +5867,14 @@
               <a:defRPr sz="1600"/>
             </a:pPr>
             <a:r>
-              <a:t>• שומר הסף: האות in_display_area_delayed משמש כדגל המזהה האם הקרן מצוירת כעת על המסך או נמצאת מחוץ לתצוגה.</a:t>
-            </a:r>
-          </a:p>
-          <a:p>
-            <a:pPr algn="r" rtl="1">
-              <a:defRPr sz="1600"/>
-            </a:pPr>
-            <a:r>
-              <a:t>• סינון דיגיטלי (Mux): כאשר הדגל ב-'1', ערכי ה-RGB מועברים ליציאות VGA_R/G/B. בזמני ה-Porch וה-Sync, היציאות נאלצות ל-"0000" (שחור מוחלט).</a:t>
+              <a:t>• אותות סנכרון (B11 / B12): פיני היציאה מוגנים באמצעות נגדי 100Ω ומזינים ישירות את מחבר ה-DB15 של המסך.</a:t>
             </a:r>
           </a:p>
         </p:txBody>
       </p:sp>
       <p:pic>
         <p:nvPicPr>
-          <p:cNvPr id="4" name="Picture 3" descr="vga_rgb_video_on_logic.png"/>
+          <p:cNvPr id="4" name="Picture 3" descr="vga_dac_resistor_network.png"/>
           <p:cNvPicPr>
             <a:picLocks noChangeAspect="1"/>
           </p:cNvPicPr>
@@ -6033,8 +5888,32 @@
         </p:blipFill>
         <p:spPr>
           <a:xfrm>
-            <a:off x="2286000" y="2926080"/>
-            <a:ext cx="4572000" cy="2167573"/>
+            <a:off x="457200" y="2103120"/>
+            <a:ext cx="4023360" cy="4992221"/>
+          </a:xfrm>
+          <a:prstGeom prst="rect">
+            <a:avLst/>
+          </a:prstGeom>
+        </p:spPr>
+      </p:pic>
+      <p:pic>
+        <p:nvPicPr>
+          <p:cNvPr id="5" name="Picture 4" descr="vga_db15_connector_pins.png"/>
+          <p:cNvPicPr>
+            <a:picLocks noChangeAspect="1"/>
+          </p:cNvPicPr>
+          <p:nvPr/>
+        </p:nvPicPr>
+        <p:blipFill>
+          <a:blip r:embed="rId3"/>
+          <a:stretch>
+            <a:fillRect/>
+          </a:stretch>
+        </p:blipFill>
+        <p:spPr>
+          <a:xfrm>
+            <a:off x="4663440" y="2286000"/>
+            <a:ext cx="4023360" cy="3205277"/>
           </a:xfrm>
           <a:prstGeom prst="rect">
             <a:avLst/>

--- a/docs/presentation/output/VGA_Presentation_Yossi.pptx
+++ b/docs/presentation/output/VGA_Presentation_Yossi.pptx
@@ -22,6 +22,10 @@
     <p:sldId id="270" r:id="rId21"/>
     <p:sldId id="271" r:id="rId22"/>
     <p:sldId id="272" r:id="rId23"/>
+    <p:sldId id="273" r:id="rId24"/>
+    <p:sldId id="274" r:id="rId25"/>
+    <p:sldId id="275" r:id="rId26"/>
+    <p:sldId id="276" r:id="rId27"/>
   </p:sldIdLst>
   <p:sldSz cx="9144000" cy="6858000" type="screen4x3"/>
   <p:notesSz cx="6858000" cy="9144000"/>
@@ -4242,6 +4246,241 @@
 </p:sld>
 </file>
 
+<file path=ppt/slides/slide18.xml><?xml version="1.0" encoding="utf-8"?>
+<p:sld xmlns:a="http://schemas.openxmlformats.org/drawingml/2006/main" xmlns:p="http://schemas.openxmlformats.org/presentationml/2006/main" xmlns:r="http://schemas.openxmlformats.org/officeDocument/2006/relationships">
+  <p:cSld>
+    <p:spTree>
+      <p:nvGrpSpPr>
+        <p:cNvPr id="1" name=""/>
+        <p:cNvGrpSpPr/>
+        <p:nvPr/>
+      </p:nvGrpSpPr>
+      <p:grpSpPr/>
+      <p:sp>
+        <p:nvSpPr>
+          <p:cNvPr id="2" name="Title 1"/>
+          <p:cNvSpPr>
+            <a:spLocks noGrp="1"/>
+          </p:cNvSpPr>
+          <p:nvPr>
+            <p:ph type="title"/>
+          </p:nvPr>
+        </p:nvSpPr>
+        <p:spPr/>
+        <p:txBody>
+          <a:bodyPr/>
+          <a:lstStyle/>
+          <a:p>
+            <a:pPr rtl="1" algn="ctr"/>
+            <a:r>
+              <a:t>מבוא לאימות התקן: מחזור שורה שלם (Ts)</a:t>
+            </a:r>
+          </a:p>
+        </p:txBody>
+      </p:sp>
+      <p:sp>
+        <p:nvSpPr>
+          <p:cNvPr id="3" name="TextBox 2"/>
+          <p:cNvSpPr txBox="1"/>
+          <p:nvPr/>
+        </p:nvSpPr>
+        <p:spPr>
+          <a:xfrm>
+            <a:off x="182880" y="1097280"/>
+            <a:ext cx="8686800" cy="1371600"/>
+          </a:xfrm>
+          <a:prstGeom prst="rect">
+            <a:avLst/>
+          </a:prstGeom>
+          <a:noFill/>
+        </p:spPr>
+        <p:txBody>
+          <a:bodyPr wrap="none">
+            <a:spAutoFit/>
+          </a:bodyPr>
+          <a:lstStyle/>
+          <a:p/>
+          <a:p>
+            <a:pPr algn="r" rtl="1">
+              <a:defRPr sz="1600"/>
+            </a:pPr>
+            <a:r>
+              <a:t>• שלב ב' - מהדיגיטל לפיזיקה: לאחר שהוכחנו את אמינות שליפת הנתונים מהזיכרון, כעת נוכיח שהחומרה מייצרת את התזמונים הפיזיים הנדרשים בתקן ה-VGA.</a:t>
+            </a:r>
+          </a:p>
+          <a:p>
+            <a:pPr algn="r" rtl="1">
+              <a:defRPr sz="1600"/>
+            </a:pPr>
+            <a:r>
+              <a:t>• מפת הדרכים (Macro to Micro): נתחיל ממבט-על של שורת מסך שלמה, ונצלול בהדרגה לניתוח האזורים הפעילים, זמני ההמתנה (Porches) ודופק הסנכרון.</a:t>
+            </a:r>
+          </a:p>
+          <a:p>
+            <a:pPr algn="r" rtl="1">
+              <a:defRPr sz="1600"/>
+            </a:pPr>
+            <a:r>
+              <a:t>• הוכחת מחזור השורה: התקן דורש 800 מחזורי שעון. מונה ה-hsync_reg סופר 0-799 במדויק, ומדידת הסמנים מוכיחה דלתא של 32us.</a:t>
+            </a:r>
+          </a:p>
+        </p:txBody>
+      </p:sp>
+      <p:pic>
+        <p:nvPicPr>
+          <p:cNvPr id="4" name="Picture 3" descr="modelsim_full_line_ts.png"/>
+          <p:cNvPicPr>
+            <a:picLocks noChangeAspect="1"/>
+          </p:cNvPicPr>
+          <p:nvPr/>
+        </p:nvPicPr>
+        <p:blipFill>
+          <a:blip r:embed="rId2"/>
+          <a:stretch>
+            <a:fillRect/>
+          </a:stretch>
+        </p:blipFill>
+        <p:spPr>
+          <a:xfrm>
+            <a:off x="914400" y="3291840"/>
+            <a:ext cx="7315200" cy="3621881"/>
+          </a:xfrm>
+          <a:prstGeom prst="rect">
+            <a:avLst/>
+          </a:prstGeom>
+        </p:spPr>
+      </p:pic>
+    </p:spTree>
+  </p:cSld>
+  <p:clrMapOvr>
+    <a:masterClrMapping/>
+  </p:clrMapOvr>
+</p:sld>
+</file>
+
+<file path=ppt/slides/slide19.xml><?xml version="1.0" encoding="utf-8"?>
+<p:sld xmlns:a="http://schemas.openxmlformats.org/drawingml/2006/main" xmlns:p="http://schemas.openxmlformats.org/presentationml/2006/main" xmlns:r="http://schemas.openxmlformats.org/officeDocument/2006/relationships">
+  <p:cSld>
+    <p:spTree>
+      <p:nvGrpSpPr>
+        <p:cNvPr id="1" name=""/>
+        <p:cNvGrpSpPr/>
+        <p:nvPr/>
+      </p:nvGrpSpPr>
+      <p:grpSpPr/>
+      <p:sp>
+        <p:nvSpPr>
+          <p:cNvPr id="2" name="Title 1"/>
+          <p:cNvSpPr>
+            <a:spLocks noGrp="1"/>
+          </p:cNvSpPr>
+          <p:nvPr>
+            <p:ph type="title"/>
+          </p:nvPr>
+        </p:nvSpPr>
+        <p:spPr/>
+        <p:txBody>
+          <a:bodyPr/>
+          <a:lstStyle/>
+          <a:p>
+            <a:pPr rtl="1" algn="ctr"/>
+            <a:r>
+              <a:t>ליבת התצוגה: אימות האזור הפעיל (Tdisp)</a:t>
+            </a:r>
+          </a:p>
+        </p:txBody>
+      </p:sp>
+      <p:sp>
+        <p:nvSpPr>
+          <p:cNvPr id="3" name="TextBox 2"/>
+          <p:cNvSpPr txBox="1"/>
+          <p:nvPr/>
+        </p:nvSpPr>
+        <p:spPr>
+          <a:xfrm>
+            <a:off x="182880" y="1097280"/>
+            <a:ext cx="8686800" cy="1371600"/>
+          </a:xfrm>
+          <a:prstGeom prst="rect">
+            <a:avLst/>
+          </a:prstGeom>
+          <a:noFill/>
+        </p:spPr>
+        <p:txBody>
+          <a:bodyPr wrap="none">
+            <a:spAutoFit/>
+          </a:bodyPr>
+          <a:lstStyle/>
+          <a:p/>
+          <a:p>
+            <a:pPr algn="r" rtl="1">
+              <a:defRPr sz="1600"/>
+            </a:pPr>
+            <a:r>
+              <a:t>• תזמון הנתונים: מתוך כלל מחזור השורה, מוקצים בדיוק 640 מחזורי שעון לציור הפיקסלים (25.6us).</a:t>
+            </a:r>
+          </a:p>
+          <a:p>
+            <a:pPr algn="r" rtl="1">
+              <a:defRPr sz="1600"/>
+            </a:pPr>
+            <a:r>
+              <a:t>• דגל הבקרה: האות in_display_area עולה ל-'1' ומאפשר את שליפת הנתונים רק בטווח המורשה.</a:t>
+            </a:r>
+          </a:p>
+          <a:p>
+            <a:pPr algn="r" rtl="1">
+              <a:defRPr sz="1600"/>
+            </a:pPr>
+            <a:r>
+              <a:t>• מונה הפיקסלים הפעיל: המונה display_x סופר במדויק מ-0 ועד 639. לאורך כל החלון הזה, יציאות ה-RGB פולטות נתונים אקטיביים למסך.</a:t>
+            </a:r>
+          </a:p>
+        </p:txBody>
+      </p:sp>
+      <p:sp>
+        <p:nvSpPr>
+          <p:cNvPr id="4" name="TextBox 3"/>
+          <p:cNvSpPr txBox="1"/>
+          <p:nvPr/>
+        </p:nvSpPr>
+        <p:spPr>
+          <a:xfrm>
+            <a:off x="2286000" y="4114800"/>
+            <a:ext cx="4572000" cy="914400"/>
+          </a:xfrm>
+          <a:prstGeom prst="rect">
+            <a:avLst/>
+          </a:prstGeom>
+          <a:noFill/>
+        </p:spPr>
+        <p:txBody>
+          <a:bodyPr wrap="none">
+            <a:spAutoFit/>
+          </a:bodyPr>
+          <a:lstStyle/>
+          <a:p>
+            <a:pPr algn="ctr">
+              <a:defRPr sz="1400">
+                <a:solidFill>
+                  <a:srgbClr val="0070C0"/>
+                </a:solidFill>
+              </a:defRPr>
+            </a:pPr>
+            <a:r>
+              <a:t>[שומר מקום: modelsim_active_display_tdisp.png]</a:t>
+            </a:r>
+          </a:p>
+        </p:txBody>
+      </p:sp>
+    </p:spTree>
+  </p:cSld>
+  <p:clrMapOvr>
+    <a:masterClrMapping/>
+  </p:clrMapOvr>
+</p:sld>
+</file>
+
 <file path=ppt/slides/slide2.xml><?xml version="1.0" encoding="utf-8"?>
 <p:sld xmlns:a="http://schemas.openxmlformats.org/drawingml/2006/main" xmlns:p="http://schemas.openxmlformats.org/presentationml/2006/main" xmlns:r="http://schemas.openxmlformats.org/officeDocument/2006/relationships">
   <p:cSld>
@@ -4826,6 +5065,252 @@
             </a:pPr>
             <a:r>
               <a:t>D to A Converter</a:t>
+            </a:r>
+          </a:p>
+        </p:txBody>
+      </p:sp>
+    </p:spTree>
+  </p:cSld>
+  <p:clrMapOvr>
+    <a:masterClrMapping/>
+  </p:clrMapOvr>
+</p:sld>
+</file>
+
+<file path=ppt/slides/slide20.xml><?xml version="1.0" encoding="utf-8"?>
+<p:sld xmlns:a="http://schemas.openxmlformats.org/drawingml/2006/main" xmlns:p="http://schemas.openxmlformats.org/presentationml/2006/main" xmlns:r="http://schemas.openxmlformats.org/officeDocument/2006/relationships">
+  <p:cSld>
+    <p:spTree>
+      <p:nvGrpSpPr>
+        <p:cNvPr id="1" name=""/>
+        <p:cNvGrpSpPr/>
+        <p:nvPr/>
+      </p:nvGrpSpPr>
+      <p:grpSpPr/>
+      <p:sp>
+        <p:nvSpPr>
+          <p:cNvPr id="2" name="Title 1"/>
+          <p:cNvSpPr>
+            <a:spLocks noGrp="1"/>
+          </p:cNvSpPr>
+          <p:nvPr>
+            <p:ph type="title"/>
+          </p:nvPr>
+        </p:nvSpPr>
+        <p:spPr/>
+        <p:txBody>
+          <a:bodyPr/>
+          <a:lstStyle/>
+          <a:p>
+            <a:pPr rtl="1" algn="ctr"/>
+            <a:r>
+              <a:t>אכיפת Blanking: שוליים (Porches)</a:t>
+            </a:r>
+          </a:p>
+        </p:txBody>
+      </p:sp>
+      <p:sp>
+        <p:nvSpPr>
+          <p:cNvPr id="3" name="TextBox 2"/>
+          <p:cNvSpPr txBox="1"/>
+          <p:nvPr/>
+        </p:nvSpPr>
+        <p:spPr>
+          <a:xfrm>
+            <a:off x="182880" y="1097280"/>
+            <a:ext cx="8686800" cy="1371600"/>
+          </a:xfrm>
+          <a:prstGeom prst="rect">
+            <a:avLst/>
+          </a:prstGeom>
+          <a:noFill/>
+        </p:spPr>
+        <p:txBody>
+          <a:bodyPr wrap="none">
+            <a:spAutoFit/>
+          </a:bodyPr>
+          <a:lstStyle/>
+          <a:p/>
+          <a:p>
+            <a:pPr algn="r" rtl="1">
+              <a:defRPr sz="1600"/>
+            </a:pPr>
+            <a:r>
+              <a:t>• משמעות ה'זמנים המתים': ה-Front Porch (16 שעונים) וה-Back Porch (48 שעונים) נועדו לייצוב תנועת הקרן.</a:t>
+            </a:r>
+          </a:p>
+          <a:p>
+            <a:pPr algn="r" rtl="1">
+              <a:defRPr sz="1600"/>
+            </a:pPr>
+            <a:r>
+              <a:t>• אכיפה לוגית: בסימולציה ניתן לראות כי ברגע שהקרן חורגת מהאזור הפעיל (display_x מסתיים), המערכת מאלצת את כל ערוצי ה-RGB ל-'0000'.</a:t>
+            </a:r>
+          </a:p>
+          <a:p>
+            <a:pPr algn="r" rtl="1">
+              <a:defRPr sz="1600"/>
+            </a:pPr>
+            <a:r>
+              <a:t>• התוצאה: שחור מוחלט על המסך באזורי המעבר, מה שמונע 'מריחות' צבע ומאפשר למסך להסתנכרן בצורה חלקה.</a:t>
+            </a:r>
+          </a:p>
+        </p:txBody>
+      </p:sp>
+      <p:sp>
+        <p:nvSpPr>
+          <p:cNvPr id="4" name="TextBox 3"/>
+          <p:cNvSpPr txBox="1"/>
+          <p:nvPr/>
+        </p:nvSpPr>
+        <p:spPr>
+          <a:xfrm>
+            <a:off x="2286000" y="4114800"/>
+            <a:ext cx="4572000" cy="914400"/>
+          </a:xfrm>
+          <a:prstGeom prst="rect">
+            <a:avLst/>
+          </a:prstGeom>
+          <a:noFill/>
+        </p:spPr>
+        <p:txBody>
+          <a:bodyPr wrap="none">
+            <a:spAutoFit/>
+          </a:bodyPr>
+          <a:lstStyle/>
+          <a:p>
+            <a:pPr algn="ctr">
+              <a:defRPr sz="1400">
+                <a:solidFill>
+                  <a:srgbClr val="0070C0"/>
+                </a:solidFill>
+              </a:defRPr>
+            </a:pPr>
+            <a:r>
+              <a:t>[שומר מקום: modelsim_porches_blanking.png]</a:t>
+            </a:r>
+          </a:p>
+        </p:txBody>
+      </p:sp>
+    </p:spTree>
+  </p:cSld>
+  <p:clrMapOvr>
+    <a:masterClrMapping/>
+  </p:clrMapOvr>
+</p:sld>
+</file>
+
+<file path=ppt/slides/slide21.xml><?xml version="1.0" encoding="utf-8"?>
+<p:sld xmlns:a="http://schemas.openxmlformats.org/drawingml/2006/main" xmlns:p="http://schemas.openxmlformats.org/presentationml/2006/main" xmlns:r="http://schemas.openxmlformats.org/officeDocument/2006/relationships">
+  <p:cSld>
+    <p:spTree>
+      <p:nvGrpSpPr>
+        <p:cNvPr id="1" name=""/>
+        <p:cNvGrpSpPr/>
+        <p:nvPr/>
+      </p:nvGrpSpPr>
+      <p:grpSpPr/>
+      <p:sp>
+        <p:nvSpPr>
+          <p:cNvPr id="2" name="Title 1"/>
+          <p:cNvSpPr>
+            <a:spLocks noGrp="1"/>
+          </p:cNvSpPr>
+          <p:nvPr>
+            <p:ph type="title"/>
+          </p:nvPr>
+        </p:nvSpPr>
+        <p:spPr/>
+        <p:txBody>
+          <a:bodyPr/>
+          <a:lstStyle/>
+          <a:p>
+            <a:pPr rtl="1" algn="ctr"/>
+            <a:r>
+              <a:t>דופק הסנכרון (Tpw) ווריפיקציה אוטומטית</a:t>
+            </a:r>
+          </a:p>
+        </p:txBody>
+      </p:sp>
+      <p:sp>
+        <p:nvSpPr>
+          <p:cNvPr id="3" name="TextBox 2"/>
+          <p:cNvSpPr txBox="1"/>
+          <p:nvPr/>
+        </p:nvSpPr>
+        <p:spPr>
+          <a:xfrm>
+            <a:off x="182880" y="1097280"/>
+            <a:ext cx="8686800" cy="1371600"/>
+          </a:xfrm>
+          <a:prstGeom prst="rect">
+            <a:avLst/>
+          </a:prstGeom>
+          <a:noFill/>
+        </p:spPr>
+        <p:txBody>
+          <a:bodyPr wrap="none">
+            <a:spAutoFit/>
+          </a:bodyPr>
+          <a:lstStyle/>
+          <a:p/>
+          <a:p>
+            <a:pPr algn="r" rtl="1">
+              <a:defRPr sz="1600"/>
+            </a:pPr>
+            <a:r>
+              <a:t>• אות ה-HSYNC: זהו הטריגר הפיזי המורה למסך לבצע Retrace לתחילת השורה הבאה.</a:t>
+            </a:r>
+          </a:p>
+          <a:p>
+            <a:pPr algn="r" rtl="1">
+              <a:defRPr sz="1600"/>
+            </a:pPr>
+            <a:r>
+              <a:t>• דיוק של מחזור בודד: הצבת סמנים על הדילוג של האות הפיזי מוכיחה רוחב דופק מדויק של 3.84us, השקול ל-96 מחזורי שעון.</a:t>
+            </a:r>
+          </a:p>
+          <a:p>
+            <a:pPr algn="r" rtl="1">
+              <a:defRPr sz="1600"/>
+            </a:pPr>
+            <a:r>
+              <a:t>• Self-Checking Testbench: מעבר לבדיקה הוויזואלית, סביבת הבדיקה (TB) כוללת מנגנון אוטומטי (Assert) שבודק את רוחב הדופק בזמן ריצה ומתריע על כל חריגה מהתקן.</a:t>
+            </a:r>
+          </a:p>
+        </p:txBody>
+      </p:sp>
+      <p:sp>
+        <p:nvSpPr>
+          <p:cNvPr id="4" name="TextBox 3"/>
+          <p:cNvSpPr txBox="1"/>
+          <p:nvPr/>
+        </p:nvSpPr>
+        <p:spPr>
+          <a:xfrm>
+            <a:off x="2286000" y="4114800"/>
+            <a:ext cx="4572000" cy="914400"/>
+          </a:xfrm>
+          <a:prstGeom prst="rect">
+            <a:avLst/>
+          </a:prstGeom>
+          <a:noFill/>
+        </p:spPr>
+        <p:txBody>
+          <a:bodyPr wrap="none">
+            <a:spAutoFit/>
+          </a:bodyPr>
+          <a:lstStyle/>
+          <a:p>
+            <a:pPr algn="ctr">
+              <a:defRPr sz="1400">
+                <a:solidFill>
+                  <a:srgbClr val="0070C0"/>
+                </a:solidFill>
+              </a:defRPr>
+            </a:pPr>
+            <a:r>
+              <a:t>[שומר מקום: modelsim_sync_pulse_assertion.png]</a:t>
             </a:r>
           </a:p>
         </p:txBody>

--- a/docs/presentation/output/VGA_Presentation_Yossi.pptx
+++ b/docs/presentation/output/VGA_Presentation_Yossi.pptx
@@ -4438,41 +4438,30 @@
           </a:p>
         </p:txBody>
       </p:sp>
-      <p:sp>
-        <p:nvSpPr>
-          <p:cNvPr id="4" name="TextBox 3"/>
-          <p:cNvSpPr txBox="1"/>
+      <p:pic>
+        <p:nvPicPr>
+          <p:cNvPr id="4" name="Picture 3" descr="modelsim_active_display_tdisp.png"/>
+          <p:cNvPicPr>
+            <a:picLocks noChangeAspect="1"/>
+          </p:cNvPicPr>
           <p:nvPr/>
-        </p:nvSpPr>
-        <p:spPr>
-          <a:xfrm>
-            <a:off x="2286000" y="4114800"/>
-            <a:ext cx="4572000" cy="914400"/>
+        </p:nvPicPr>
+        <p:blipFill>
+          <a:blip r:embed="rId2"/>
+          <a:stretch>
+            <a:fillRect/>
+          </a:stretch>
+        </p:blipFill>
+        <p:spPr>
+          <a:xfrm>
+            <a:off x="914400" y="3291840"/>
+            <a:ext cx="7315200" cy="3843338"/>
           </a:xfrm>
           <a:prstGeom prst="rect">
             <a:avLst/>
           </a:prstGeom>
-          <a:noFill/>
-        </p:spPr>
-        <p:txBody>
-          <a:bodyPr wrap="none">
-            <a:spAutoFit/>
-          </a:bodyPr>
-          <a:lstStyle/>
-          <a:p>
-            <a:pPr algn="ctr">
-              <a:defRPr sz="1400">
-                <a:solidFill>
-                  <a:srgbClr val="0070C0"/>
-                </a:solidFill>
-              </a:defRPr>
-            </a:pPr>
-            <a:r>
-              <a:t>[שומר מקום: modelsim_active_display_tdisp.png]</a:t>
-            </a:r>
-          </a:p>
-        </p:txBody>
-      </p:sp>
+        </p:spPr>
+      </p:pic>
     </p:spTree>
   </p:cSld>
   <p:clrMapOvr>
@@ -5157,41 +5146,30 @@
           </a:p>
         </p:txBody>
       </p:sp>
-      <p:sp>
-        <p:nvSpPr>
-          <p:cNvPr id="4" name="TextBox 3"/>
-          <p:cNvSpPr txBox="1"/>
+      <p:pic>
+        <p:nvPicPr>
+          <p:cNvPr id="4" name="Picture 3" descr="modelsim_porches_blanking.png"/>
+          <p:cNvPicPr>
+            <a:picLocks noChangeAspect="1"/>
+          </p:cNvPicPr>
           <p:nvPr/>
-        </p:nvSpPr>
-        <p:spPr>
-          <a:xfrm>
-            <a:off x="2286000" y="4114800"/>
-            <a:ext cx="4572000" cy="914400"/>
+        </p:nvPicPr>
+        <p:blipFill>
+          <a:blip r:embed="rId2"/>
+          <a:stretch>
+            <a:fillRect/>
+          </a:stretch>
+        </p:blipFill>
+        <p:spPr>
+          <a:xfrm>
+            <a:off x="914400" y="3291840"/>
+            <a:ext cx="7315200" cy="3675477"/>
           </a:xfrm>
           <a:prstGeom prst="rect">
             <a:avLst/>
           </a:prstGeom>
-          <a:noFill/>
-        </p:spPr>
-        <p:txBody>
-          <a:bodyPr wrap="none">
-            <a:spAutoFit/>
-          </a:bodyPr>
-          <a:lstStyle/>
-          <a:p>
-            <a:pPr algn="ctr">
-              <a:defRPr sz="1400">
-                <a:solidFill>
-                  <a:srgbClr val="0070C0"/>
-                </a:solidFill>
-              </a:defRPr>
-            </a:pPr>
-            <a:r>
-              <a:t>[שומר מקום: modelsim_porches_blanking.png]</a:t>
-            </a:r>
-          </a:p>
-        </p:txBody>
-      </p:sp>
+        </p:spPr>
+      </p:pic>
     </p:spTree>
   </p:cSld>
   <p:clrMapOvr>
@@ -5280,41 +5258,30 @@
           </a:p>
         </p:txBody>
       </p:sp>
-      <p:sp>
-        <p:nvSpPr>
-          <p:cNvPr id="4" name="TextBox 3"/>
-          <p:cNvSpPr txBox="1"/>
+      <p:pic>
+        <p:nvPicPr>
+          <p:cNvPr id="4" name="Picture 3" descr="modelsim_sync_pulse_assertion.png"/>
+          <p:cNvPicPr>
+            <a:picLocks noChangeAspect="1"/>
+          </p:cNvPicPr>
           <p:nvPr/>
-        </p:nvSpPr>
-        <p:spPr>
-          <a:xfrm>
-            <a:off x="2286000" y="4114800"/>
-            <a:ext cx="4572000" cy="914400"/>
+        </p:nvPicPr>
+        <p:blipFill>
+          <a:blip r:embed="rId2"/>
+          <a:stretch>
+            <a:fillRect/>
+          </a:stretch>
+        </p:blipFill>
+        <p:spPr>
+          <a:xfrm>
+            <a:off x="914400" y="3200400"/>
+            <a:ext cx="7315200" cy="3811341"/>
           </a:xfrm>
           <a:prstGeom prst="rect">
             <a:avLst/>
           </a:prstGeom>
-          <a:noFill/>
-        </p:spPr>
-        <p:txBody>
-          <a:bodyPr wrap="none">
-            <a:spAutoFit/>
-          </a:bodyPr>
-          <a:lstStyle/>
-          <a:p>
-            <a:pPr algn="ctr">
-              <a:defRPr sz="1400">
-                <a:solidFill>
-                  <a:srgbClr val="0070C0"/>
-                </a:solidFill>
-              </a:defRPr>
-            </a:pPr>
-            <a:r>
-              <a:t>[שומר מקום: modelsim_sync_pulse_assertion.png]</a:t>
-            </a:r>
-          </a:p>
-        </p:txBody>
-      </p:sp>
+        </p:spPr>
+      </p:pic>
     </p:spTree>
   </p:cSld>
   <p:clrMapOvr>

--- a/docs/presentation/output/VGA_Presentation_Yossi.pptx
+++ b/docs/presentation/output/VGA_Presentation_Yossi.pptx
@@ -26,6 +26,7 @@
     <p:sldId id="274" r:id="rId25"/>
     <p:sldId id="275" r:id="rId26"/>
     <p:sldId id="276" r:id="rId27"/>
+    <p:sldId id="277" r:id="rId28"/>
   </p:sldIdLst>
   <p:sldSz cx="9144000" cy="6858000" type="screen4x3"/>
   <p:notesSz cx="6858000" cy="9144000"/>
@@ -5179,6 +5180,118 @@
 </file>
 
 <file path=ppt/slides/slide21.xml><?xml version="1.0" encoding="utf-8"?>
+<p:sld xmlns:a="http://schemas.openxmlformats.org/drawingml/2006/main" xmlns:p="http://schemas.openxmlformats.org/presentationml/2006/main" xmlns:r="http://schemas.openxmlformats.org/officeDocument/2006/relationships">
+  <p:cSld>
+    <p:spTree>
+      <p:nvGrpSpPr>
+        <p:cNvPr id="1" name=""/>
+        <p:cNvGrpSpPr/>
+        <p:nvPr/>
+      </p:nvGrpSpPr>
+      <p:grpSpPr/>
+      <p:sp>
+        <p:nvSpPr>
+          <p:cNvPr id="2" name="Title 1"/>
+          <p:cNvSpPr>
+            <a:spLocks noGrp="1"/>
+          </p:cNvSpPr>
+          <p:nvPr>
+            <p:ph type="title"/>
+          </p:nvPr>
+        </p:nvSpPr>
+        <p:spPr/>
+        <p:txBody>
+          <a:bodyPr/>
+          <a:lstStyle/>
+          <a:p>
+            <a:pPr rtl="1" algn="ctr"/>
+            <a:r>
+              <a:t>אכיפת Blanking: המרפסת האחורית (Back Porch)</a:t>
+            </a:r>
+          </a:p>
+        </p:txBody>
+      </p:sp>
+      <p:sp>
+        <p:nvSpPr>
+          <p:cNvPr id="3" name="TextBox 2"/>
+          <p:cNvSpPr txBox="1"/>
+          <p:nvPr/>
+        </p:nvSpPr>
+        <p:spPr>
+          <a:xfrm>
+            <a:off x="182880" y="1097280"/>
+            <a:ext cx="8686800" cy="1371600"/>
+          </a:xfrm>
+          <a:prstGeom prst="rect">
+            <a:avLst/>
+          </a:prstGeom>
+          <a:noFill/>
+        </p:spPr>
+        <p:txBody>
+          <a:bodyPr wrap="none">
+            <a:spAutoFit/>
+          </a:bodyPr>
+          <a:lstStyle/>
+          <a:p/>
+          <a:p>
+            <a:pPr algn="r" rtl="1">
+              <a:defRPr sz="1600"/>
+            </a:pPr>
+            <a:r>
+              <a:t>• זמן המתנה (Back Porch): לאחר סיום דופק הסנכרון, המערכת ממתינה 48 מחזורי שעון (1.92us) לייצוב הקרן בתחילת השורה.</a:t>
+            </a:r>
+          </a:p>
+          <a:p>
+            <a:pPr algn="r" rtl="1">
+              <a:defRPr sz="1600"/>
+            </a:pPr>
+            <a:r>
+              <a:t>• המשך החשכה: בדומה למרפסת הקדמית, ה-RGB מוחזק במכוון על '0000' כדי למנוע זליגות צבע.</a:t>
+            </a:r>
+          </a:p>
+          <a:p>
+            <a:pPr algn="r" rtl="1">
+              <a:defRPr sz="1600"/>
+            </a:pPr>
+            <a:r>
+              <a:t>• חזרת הצבעים: ברגע שהאות in_display_area עולה ל-'1', רואים בבירור את נתוני ה-RGB האמיתיים מהזיכרון פורצים החוצה ומציירים את הפיקסל הראשון.</a:t>
+            </a:r>
+          </a:p>
+        </p:txBody>
+      </p:sp>
+      <p:pic>
+        <p:nvPicPr>
+          <p:cNvPr id="4" name="Picture 3" descr="modelsim_back_porch.png"/>
+          <p:cNvPicPr>
+            <a:picLocks noChangeAspect="1"/>
+          </p:cNvPicPr>
+          <p:nvPr/>
+        </p:nvPicPr>
+        <p:blipFill>
+          <a:blip r:embed="rId2"/>
+          <a:stretch>
+            <a:fillRect/>
+          </a:stretch>
+        </p:blipFill>
+        <p:spPr>
+          <a:xfrm>
+            <a:off x="914400" y="3291840"/>
+            <a:ext cx="7315200" cy="3621881"/>
+          </a:xfrm>
+          <a:prstGeom prst="rect">
+            <a:avLst/>
+          </a:prstGeom>
+        </p:spPr>
+      </p:pic>
+    </p:spTree>
+  </p:cSld>
+  <p:clrMapOvr>
+    <a:masterClrMapping/>
+  </p:clrMapOvr>
+</p:sld>
+</file>
+
+<file path=ppt/slides/slide22.xml><?xml version="1.0" encoding="utf-8"?>
 <p:sld xmlns:a="http://schemas.openxmlformats.org/drawingml/2006/main" xmlns:p="http://schemas.openxmlformats.org/presentationml/2006/main" xmlns:r="http://schemas.openxmlformats.org/officeDocument/2006/relationships">
   <p:cSld>
     <p:spTree>

--- a/docs/presentation/output/VGA_Presentation_Yossi.pptx
+++ b/docs/presentation/output/VGA_Presentation_Yossi.pptx
@@ -27,6 +27,8 @@
     <p:sldId id="275" r:id="rId26"/>
     <p:sldId id="276" r:id="rId27"/>
     <p:sldId id="277" r:id="rId28"/>
+    <p:sldId id="278" r:id="rId29"/>
+    <p:sldId id="279" r:id="rId30"/>
   </p:sldIdLst>
   <p:sldSz cx="9144000" cy="6858000" type="screen4x3"/>
   <p:notesSz cx="6858000" cy="9144000"/>
@@ -5395,6 +5397,558 @@
           </a:prstGeom>
         </p:spPr>
       </p:pic>
+    </p:spTree>
+  </p:cSld>
+  <p:clrMapOvr>
+    <a:masterClrMapping/>
+  </p:clrMapOvr>
+</p:sld>
+</file>
+
+<file path=ppt/slides/slide23.xml><?xml version="1.0" encoding="utf-8"?>
+<p:sld xmlns:a="http://schemas.openxmlformats.org/drawingml/2006/main" xmlns:p="http://schemas.openxmlformats.org/presentationml/2006/main" xmlns:r="http://schemas.openxmlformats.org/officeDocument/2006/relationships">
+  <p:cSld>
+    <p:spTree>
+      <p:nvGrpSpPr>
+        <p:cNvPr id="1" name=""/>
+        <p:cNvGrpSpPr/>
+        <p:nvPr/>
+      </p:nvGrpSpPr>
+      <p:grpSpPr/>
+      <p:sp>
+        <p:nvSpPr>
+          <p:cNvPr id="2" name="Title 1"/>
+          <p:cNvSpPr>
+            <a:spLocks noGrp="1"/>
+          </p:cNvSpPr>
+          <p:nvPr>
+            <p:ph type="title"/>
+          </p:nvPr>
+        </p:nvSpPr>
+        <p:spPr/>
+        <p:txBody>
+          <a:bodyPr/>
+          <a:lstStyle/>
+          <a:p>
+            <a:pPr rtl="1" algn="ctr"/>
+            <a:r>
+              <a:t>המעבר לחומרה: מסימולציה ל'קופסה שחורה'</a:t>
+            </a:r>
+          </a:p>
+        </p:txBody>
+      </p:sp>
+      <p:sp>
+        <p:nvSpPr>
+          <p:cNvPr id="3" name="TextBox 2"/>
+          <p:cNvSpPr txBox="1"/>
+          <p:nvPr/>
+        </p:nvSpPr>
+        <p:spPr>
+          <a:xfrm>
+            <a:off x="457200" y="1097280"/>
+            <a:ext cx="8229600" cy="1371600"/>
+          </a:xfrm>
+          <a:prstGeom prst="rect">
+            <a:avLst/>
+          </a:prstGeom>
+          <a:noFill/>
+        </p:spPr>
+        <p:txBody>
+          <a:bodyPr wrap="none">
+            <a:spAutoFit/>
+          </a:bodyPr>
+          <a:lstStyle/>
+          <a:p/>
+          <a:p>
+            <a:pPr algn="r" rtl="1">
+              <a:defRPr sz="1600"/>
+            </a:pPr>
+            <a:r>
+              <a:t>• העולם האידיאלי (ModelSim): עד כה בדקנו את הלוגיקה בסביבה וירטואלית. ראינו כל אות ומונה, אך ללא עיכובים פיזיים (Zero Latency).</a:t>
+            </a:r>
+          </a:p>
+          <a:p>
+            <a:pPr algn="r" rtl="1">
+              <a:defRPr sz="1600"/>
+            </a:pPr>
+            <a:r>
+              <a:t>• המציאות הפיזית (FPGA): לאחר סינתזה וצריבה, הלוגיקה הופכת ל'קופסה שחורה' אטומה. ישנם זמני התפשטות (Propagation delays) של האותות בתוך הסיליקון.</a:t>
+            </a:r>
+          </a:p>
+          <a:p>
+            <a:pPr algn="r" rtl="1">
+              <a:defRPr sz="1600"/>
+            </a:pPr>
+            <a:r>
+              <a:t>• מגבלת הדיבוג החיצוני: מבחוץ (למשל עם אוסצילוסקופ), ניתן למדוד רק את הפינים הפיזיים (VGA_R/G/B, Sync). אין לנו שום דרך לראות מתי המונה מתאפס או איזו כתובת נשלחת לזיכרון.</a:t>
+            </a:r>
+          </a:p>
+        </p:txBody>
+      </p:sp>
+      <p:sp>
+        <p:nvSpPr>
+          <p:cNvPr id="4" name="Rounded Rectangle 3"/>
+          <p:cNvSpPr/>
+          <p:nvPr/>
+        </p:nvSpPr>
+        <p:spPr>
+          <a:xfrm>
+            <a:off x="2743200" y="3657600"/>
+            <a:ext cx="3657600" cy="1371600"/>
+          </a:xfrm>
+          <a:prstGeom prst="roundRect">
+            <a:avLst/>
+          </a:prstGeom>
+          <a:solidFill>
+            <a:srgbClr val="282828"/>
+          </a:solidFill>
+        </p:spPr>
+        <p:style>
+          <a:lnRef idx="1">
+            <a:schemeClr val="accent1"/>
+          </a:lnRef>
+          <a:fillRef idx="3">
+            <a:schemeClr val="accent1"/>
+          </a:fillRef>
+          <a:effectRef idx="2">
+            <a:schemeClr val="accent1"/>
+          </a:effectRef>
+          <a:fontRef idx="minor">
+            <a:schemeClr val="lt1"/>
+          </a:fontRef>
+        </p:style>
+        <p:txBody>
+          <a:bodyPr rtlCol="0" anchor="ctr"/>
+          <a:lstStyle/>
+          <a:p>
+            <a:pPr algn="ctr" rtl="1">
+              <a:defRPr b="1">
+                <a:solidFill>
+                  <a:srgbClr val="FFFFFF"/>
+                </a:solidFill>
+              </a:defRPr>
+            </a:pPr>
+            <a:r>
+              <a:t>Artix-7 FPGA (קופסה שחורה)</a:t>
+            </a:r>
+          </a:p>
+          <a:p>
+            <a:r>
+              <a:t>אין גישה לאותות פנימיים</a:t>
+            </a:r>
+          </a:p>
+        </p:txBody>
+      </p:sp>
+      <p:sp>
+        <p:nvSpPr>
+          <p:cNvPr id="5" name="Right Arrow 4"/>
+          <p:cNvSpPr/>
+          <p:nvPr/>
+        </p:nvSpPr>
+        <p:spPr>
+          <a:xfrm>
+            <a:off x="6400800" y="3931920"/>
+            <a:ext cx="731520" cy="274320"/>
+          </a:xfrm>
+          <a:prstGeom prst="rightArrow">
+            <a:avLst/>
+          </a:prstGeom>
+        </p:spPr>
+        <p:style>
+          <a:lnRef idx="1">
+            <a:schemeClr val="accent1"/>
+          </a:lnRef>
+          <a:fillRef idx="3">
+            <a:schemeClr val="accent1"/>
+          </a:fillRef>
+          <a:effectRef idx="2">
+            <a:schemeClr val="accent1"/>
+          </a:effectRef>
+          <a:fontRef idx="minor">
+            <a:schemeClr val="lt1"/>
+          </a:fontRef>
+        </p:style>
+        <p:txBody>
+          <a:bodyPr rtlCol="0" anchor="ctr"/>
+          <a:lstStyle/>
+          <a:p>
+            <a:pPr algn="ctr"/>
+          </a:p>
+        </p:txBody>
+      </p:sp>
+      <p:sp>
+        <p:nvSpPr>
+          <p:cNvPr id="6" name="Right Arrow 5"/>
+          <p:cNvSpPr/>
+          <p:nvPr/>
+        </p:nvSpPr>
+        <p:spPr>
+          <a:xfrm>
+            <a:off x="6400800" y="4480560"/>
+            <a:ext cx="731520" cy="274320"/>
+          </a:xfrm>
+          <a:prstGeom prst="rightArrow">
+            <a:avLst/>
+          </a:prstGeom>
+        </p:spPr>
+        <p:style>
+          <a:lnRef idx="1">
+            <a:schemeClr val="accent1"/>
+          </a:lnRef>
+          <a:fillRef idx="3">
+            <a:schemeClr val="accent1"/>
+          </a:fillRef>
+          <a:effectRef idx="2">
+            <a:schemeClr val="accent1"/>
+          </a:effectRef>
+          <a:fontRef idx="minor">
+            <a:schemeClr val="lt1"/>
+          </a:fontRef>
+        </p:style>
+        <p:txBody>
+          <a:bodyPr rtlCol="0" anchor="ctr"/>
+          <a:lstStyle/>
+          <a:p>
+            <a:pPr algn="ctr"/>
+          </a:p>
+        </p:txBody>
+      </p:sp>
+      <p:sp>
+        <p:nvSpPr>
+          <p:cNvPr id="7" name="TextBox 6"/>
+          <p:cNvSpPr txBox="1"/>
+          <p:nvPr/>
+        </p:nvSpPr>
+        <p:spPr>
+          <a:xfrm>
+            <a:off x="7132320" y="3840480"/>
+            <a:ext cx="1371600" cy="914400"/>
+          </a:xfrm>
+          <a:prstGeom prst="rect">
+            <a:avLst/>
+          </a:prstGeom>
+          <a:noFill/>
+        </p:spPr>
+        <p:txBody>
+          <a:bodyPr wrap="none">
+            <a:spAutoFit/>
+          </a:bodyPr>
+          <a:lstStyle/>
+          <a:p>
+            <a:r>
+              <a:t>פינים בלבד</a:t>
+            </a:r>
+          </a:p>
+          <a:p>
+            <a:r>
+              <a:t>(RGB, Sync)</a:t>
+            </a:r>
+          </a:p>
+        </p:txBody>
+      </p:sp>
+    </p:spTree>
+  </p:cSld>
+  <p:clrMapOvr>
+    <a:masterClrMapping/>
+  </p:clrMapOvr>
+</p:sld>
+</file>
+
+<file path=ppt/slides/slide24.xml><?xml version="1.0" encoding="utf-8"?>
+<p:sld xmlns:a="http://schemas.openxmlformats.org/drawingml/2006/main" xmlns:p="http://schemas.openxmlformats.org/presentationml/2006/main" xmlns:r="http://schemas.openxmlformats.org/officeDocument/2006/relationships">
+  <p:cSld>
+    <p:spTree>
+      <p:nvGrpSpPr>
+        <p:cNvPr id="1" name=""/>
+        <p:cNvGrpSpPr/>
+        <p:nvPr/>
+      </p:nvGrpSpPr>
+      <p:grpSpPr/>
+      <p:sp>
+        <p:nvSpPr>
+          <p:cNvPr id="2" name="Title 1"/>
+          <p:cNvSpPr>
+            <a:spLocks noGrp="1"/>
+          </p:cNvSpPr>
+          <p:nvPr>
+            <p:ph type="title"/>
+          </p:nvPr>
+        </p:nvSpPr>
+        <p:spPr/>
+        <p:txBody>
+          <a:bodyPr/>
+          <a:lstStyle/>
+          <a:p>
+            <a:pPr rtl="1" algn="ctr"/>
+            <a:r>
+              <a:t>דיבוג בתוך הסיליקון: Vivado ILA (קופסה לבנה)</a:t>
+            </a:r>
+          </a:p>
+        </p:txBody>
+      </p:sp>
+      <p:sp>
+        <p:nvSpPr>
+          <p:cNvPr id="3" name="TextBox 2"/>
+          <p:cNvSpPr txBox="1"/>
+          <p:nvPr/>
+        </p:nvSpPr>
+        <p:spPr>
+          <a:xfrm>
+            <a:off x="182880" y="1097280"/>
+            <a:ext cx="8686800" cy="1371600"/>
+          </a:xfrm>
+          <a:prstGeom prst="rect">
+            <a:avLst/>
+          </a:prstGeom>
+          <a:noFill/>
+        </p:spPr>
+        <p:txBody>
+          <a:bodyPr wrap="none">
+            <a:spAutoFit/>
+          </a:bodyPr>
+          <a:lstStyle/>
+          <a:p/>
+          <a:p>
+            <a:pPr algn="r" rtl="1">
+              <a:defRPr sz="1600"/>
+            </a:pPr>
+            <a:r>
+              <a:t>• הפתרון ההנדסי: הוספת Integrated Logic Analyzer (ILA) – רכיב חומרה פנימי שדוגם את האותות ומשדר אותם למחשב (בדיקת קופסה לבנה).</a:t>
+            </a:r>
+          </a:p>
+          <a:p>
+            <a:pPr algn="r" rtl="1">
+              <a:defRPr sz="1600"/>
+            </a:pPr>
+            <a:r>
+              <a:t>• היתרון (מציאות מול תיאוריה): מאפשר לראות את זמני ההשהיה האמיתיים (Latency) שבין שליחת בקשה לזיכרון (addrb) לקבלת הנתון (doutb).</a:t>
+            </a:r>
+          </a:p>
+          <a:p>
+            <a:pPr algn="r" rtl="1">
+              <a:defRPr sz="1600"/>
+            </a:pPr>
+            <a:r>
+              <a:t>• החיסרון (Trade-off): ה-ILA אינו חינמי. הוא 'גוזל' משאבי חומרה יקרים מהכרטיס (LUTs ו-BRAM) לצורך לוגיקת הדגימה ואגירת הנתונים.</a:t>
+            </a:r>
+          </a:p>
+        </p:txBody>
+      </p:sp>
+      <p:graphicFrame>
+        <p:nvGraphicFramePr>
+          <p:cNvPr id="4" name="Table 3"/>
+          <p:cNvGraphicFramePr>
+            <a:graphicFrameLocks noGrp="1"/>
+          </p:cNvGraphicFramePr>
+          <p:nvPr/>
+        </p:nvGraphicFramePr>
+        <p:xfrm>
+          <a:off x="457200" y="3474720"/>
+          <a:ext cx="8229600" cy="2286000"/>
+        </p:xfrm>
+        <a:graphic>
+          <a:graphicData uri="http://schemas.openxmlformats.org/drawingml/2006/table">
+            <a:tbl>
+              <a:tblPr firstRow="1" bandRow="1">
+                <a:tableStyleId>{5C22544A-7EE6-4342-B048-85BDC9FD1C3A}</a:tableStyleId>
+              </a:tblPr>
+              <a:tblGrid>
+                <a:gridCol w="1828800"/>
+                <a:gridCol w="3200400"/>
+                <a:gridCol w="3200400"/>
+              </a:tblGrid>
+              <a:tr h="571500">
+                <a:tc>
+                  <a:txBody>
+                    <a:bodyPr/>
+                    <a:lstStyle/>
+                    <a:p>
+                      <a:pPr algn="ctr" rtl="1">
+                        <a:defRPr b="1" sz="1500"/>
+                      </a:pPr>
+                      <a:r>
+                        <a:t>יעד הבדיקה</a:t>
+                      </a:r>
+                    </a:p>
+                  </a:txBody>
+                  <a:tcPr/>
+                </a:tc>
+                <a:tc>
+                  <a:txBody>
+                    <a:bodyPr/>
+                    <a:lstStyle/>
+                    <a:p>
+                      <a:pPr algn="ctr" rtl="1">
+                        <a:defRPr b="1" sz="1500"/>
+                      </a:pPr>
+                      <a:r>
+                        <a:t>מגבלת ה'קופסה השחורה'</a:t>
+                      </a:r>
+                    </a:p>
+                  </a:txBody>
+                  <a:tcPr/>
+                </a:tc>
+                <a:tc>
+                  <a:txBody>
+                    <a:bodyPr/>
+                    <a:lstStyle/>
+                    <a:p>
+                      <a:pPr algn="ctr" rtl="1">
+                        <a:defRPr b="1" sz="1500"/>
+                      </a:pPr>
+                      <a:r>
+                        <a:t>האות שנדגום ב-ILA</a:t>
+                      </a:r>
+                    </a:p>
+                  </a:txBody>
+                  <a:tcPr/>
+                </a:tc>
+              </a:tr>
+              <a:tr h="571500">
+                <a:tc>
+                  <a:txBody>
+                    <a:bodyPr/>
+                    <a:lstStyle/>
+                    <a:p>
+                      <a:pPr algn="ctr" rtl="1">
+                        <a:defRPr sz="1400" b="1"/>
+                      </a:pPr>
+                      <a:r>
+                        <a:t>זרימת נתונים ו-Latency</a:t>
+                      </a:r>
+                    </a:p>
+                  </a:txBody>
+                  <a:tcPr/>
+                </a:tc>
+                <a:tc>
+                  <a:txBody>
+                    <a:bodyPr/>
+                    <a:lstStyle/>
+                    <a:p>
+                      <a:pPr algn="r" rtl="1">
+                        <a:defRPr sz="1400"/>
+                      </a:pPr>
+                      <a:r>
+                        <a:t>רואים רק את הפיקסל הסופי מתחלף ביציאה.</a:t>
+                      </a:r>
+                    </a:p>
+                  </a:txBody>
+                  <a:tcPr/>
+                </a:tc>
+                <a:tc>
+                  <a:txBody>
+                    <a:bodyPr/>
+                    <a:lstStyle/>
+                    <a:p>
+                      <a:pPr algn="r" rtl="1">
+                        <a:defRPr sz="1400"/>
+                      </a:pPr>
+                      <a:r>
+                        <a:t>addrb, doutb, pxl_data_reg (בדיקת צנרת)</a:t>
+                      </a:r>
+                    </a:p>
+                  </a:txBody>
+                  <a:tcPr/>
+                </a:tc>
+              </a:tr>
+              <a:tr h="571500">
+                <a:tc>
+                  <a:txBody>
+                    <a:bodyPr/>
+                    <a:lstStyle/>
+                    <a:p>
+                      <a:pPr algn="ctr" rtl="1">
+                        <a:defRPr sz="1400" b="1"/>
+                      </a:pPr>
+                      <a:r>
+                        <a:t>מיקום אופקי</a:t>
+                      </a:r>
+                    </a:p>
+                  </a:txBody>
+                  <a:tcPr/>
+                </a:tc>
+                <a:tc>
+                  <a:txBody>
+                    <a:bodyPr/>
+                    <a:lstStyle/>
+                    <a:p>
+                      <a:pPr algn="r" rtl="1">
+                        <a:defRPr sz="1400"/>
+                      </a:pPr>
+                      <a:r>
+                        <a:t>לא ניתן לדעת איזה פיקסל משורטט כרגע.</a:t>
+                      </a:r>
+                    </a:p>
+                  </a:txBody>
+                  <a:tcPr/>
+                </a:tc>
+                <a:tc>
+                  <a:txBody>
+                    <a:bodyPr/>
+                    <a:lstStyle/>
+                    <a:p>
+                      <a:pPr algn="r" rtl="1">
+                        <a:defRPr sz="1400"/>
+                      </a:pPr>
+                      <a:r>
+                        <a:t>display_x (מונה הפיקסלים)</a:t>
+                      </a:r>
+                    </a:p>
+                  </a:txBody>
+                  <a:tcPr/>
+                </a:tc>
+              </a:tr>
+              <a:tr h="571500">
+                <a:tc>
+                  <a:txBody>
+                    <a:bodyPr/>
+                    <a:lstStyle/>
+                    <a:p>
+                      <a:pPr algn="ctr" rtl="1">
+                        <a:defRPr sz="1400" b="1"/>
+                      </a:pPr>
+                      <a:r>
+                        <a:t>אכיפת שחור (Blanking)</a:t>
+                      </a:r>
+                    </a:p>
+                  </a:txBody>
+                  <a:tcPr/>
+                </a:tc>
+                <a:tc>
+                  <a:txBody>
+                    <a:bodyPr/>
+                    <a:lstStyle/>
+                    <a:p>
+                      <a:pPr algn="r" rtl="1">
+                        <a:defRPr sz="1400"/>
+                      </a:pPr>
+                      <a:r>
+                        <a:t>רואים מסך חשוך, ללא הקשר תזמוני.</a:t>
+                      </a:r>
+                    </a:p>
+                  </a:txBody>
+                  <a:tcPr/>
+                </a:tc>
+                <a:tc>
+                  <a:txBody>
+                    <a:bodyPr/>
+                    <a:lstStyle/>
+                    <a:p>
+                      <a:pPr algn="r" rtl="1">
+                        <a:defRPr sz="1400"/>
+                      </a:pPr>
+                      <a:r>
+                        <a:t>in_display_area_delayed</a:t>
+                      </a:r>
+                    </a:p>
+                  </a:txBody>
+                  <a:tcPr/>
+                </a:tc>
+              </a:tr>
+            </a:tbl>
+          </a:graphicData>
+        </a:graphic>
+      </p:graphicFrame>
     </p:spTree>
   </p:cSld>
   <p:clrMapOvr>

--- a/docs/presentation/output/VGA_Presentation_Yossi.pptx
+++ b/docs/presentation/output/VGA_Presentation_Yossi.pptx
@@ -29,6 +29,7 @@
     <p:sldId id="277" r:id="rId28"/>
     <p:sldId id="278" r:id="rId29"/>
     <p:sldId id="279" r:id="rId30"/>
+    <p:sldId id="280" r:id="rId31"/>
   </p:sldIdLst>
   <p:sldSz cx="9144000" cy="6858000" type="screen4x3"/>
   <p:notesSz cx="6858000" cy="9144000"/>
@@ -5949,6 +5950,394 @@
           </a:graphicData>
         </a:graphic>
       </p:graphicFrame>
+    </p:spTree>
+  </p:cSld>
+  <p:clrMapOvr>
+    <a:masterClrMapping/>
+  </p:clrMapOvr>
+</p:sld>
+</file>
+
+<file path=ppt/slides/slide25.xml><?xml version="1.0" encoding="utf-8"?>
+<p:sld xmlns:a="http://schemas.openxmlformats.org/drawingml/2006/main" xmlns:p="http://schemas.openxmlformats.org/presentationml/2006/main" xmlns:r="http://schemas.openxmlformats.org/officeDocument/2006/relationships">
+  <p:cSld>
+    <p:spTree>
+      <p:nvGrpSpPr>
+        <p:cNvPr id="1" name=""/>
+        <p:cNvGrpSpPr/>
+        <p:nvPr/>
+      </p:nvGrpSpPr>
+      <p:grpSpPr/>
+      <p:sp>
+        <p:nvSpPr>
+          <p:cNvPr id="2" name="Title 1"/>
+          <p:cNvSpPr>
+            <a:spLocks noGrp="1"/>
+          </p:cNvSpPr>
+          <p:nvPr>
+            <p:ph type="title"/>
+          </p:nvPr>
+        </p:nvSpPr>
+        <p:spPr/>
+        <p:txBody>
+          <a:bodyPr/>
+          <a:lstStyle/>
+          <a:p>
+            <a:pPr rtl="1" algn="ctr"/>
+            <a:r>
+              <a:t>עלות הדיבוג: ניתוח משאבי חומרה (Trade-offs)</a:t>
+            </a:r>
+          </a:p>
+        </p:txBody>
+      </p:sp>
+      <p:sp>
+        <p:nvSpPr>
+          <p:cNvPr id="3" name="TextBox 2"/>
+          <p:cNvSpPr txBox="1"/>
+          <p:nvPr/>
+        </p:nvSpPr>
+        <p:spPr>
+          <a:xfrm>
+            <a:off x="182880" y="1097280"/>
+            <a:ext cx="8686800" cy="1371600"/>
+          </a:xfrm>
+          <a:prstGeom prst="rect">
+            <a:avLst/>
+          </a:prstGeom>
+          <a:noFill/>
+        </p:spPr>
+        <p:txBody>
+          <a:bodyPr wrap="none">
+            <a:spAutoFit/>
+          </a:bodyPr>
+          <a:lstStyle/>
+          <a:p/>
+          <a:p>
+            <a:pPr algn="r" rtl="1">
+              <a:defRPr sz="1600"/>
+            </a:pPr>
+            <a:r>
+              <a:t>• ה-ILA איננו תוכנה: זוהי חומרה פיזית (IP) המסונתזת ונצרבת על הסיליקון לצד לוגיקת התצוגה.</a:t>
+            </a:r>
+          </a:p>
+          <a:p>
+            <a:pPr algn="r" rtl="1">
+              <a:defRPr sz="1600"/>
+            </a:pPr>
+            <a:r>
+              <a:t>• פרדוקס הגודל: בקר ה-VGA שלנו יעיל מאוד וצורך משאבים אפסיים, בעוד שמערכת הדיבוג (ILA + Debug Hub) דורשת אלפי רכיבים לוגיים.</a:t>
+            </a:r>
+          </a:p>
+          <a:p>
+            <a:pPr algn="r" rtl="1">
+              <a:defRPr sz="1600"/>
+            </a:pPr>
+            <a:r>
+              <a:t>• מסקנה הנדסית: ה-ILA הוא כלי קריטי לשלבי הפיתוח (R&amp;D), אך יוסר בגרסת הייצור הסופית (Release) כדי לחסוך בשטח סיליקון ובהספק.</a:t>
+            </a:r>
+          </a:p>
+        </p:txBody>
+      </p:sp>
+      <p:graphicFrame>
+        <p:nvGraphicFramePr>
+          <p:cNvPr id="4" name="Table 3"/>
+          <p:cNvGraphicFramePr>
+            <a:graphicFrameLocks noGrp="1"/>
+          </p:cNvGraphicFramePr>
+          <p:nvPr/>
+        </p:nvGraphicFramePr>
+        <p:xfrm>
+          <a:off x="4572000" y="3291840"/>
+          <a:ext cx="4114800" cy="2286000"/>
+        </p:xfrm>
+        <a:graphic>
+          <a:graphicData uri="http://schemas.openxmlformats.org/drawingml/2006/table">
+            <a:tbl>
+              <a:tblPr firstRow="1" bandRow="1">
+                <a:tableStyleId>{5C22544A-7EE6-4342-B048-85BDC9FD1C3A}</a:tableStyleId>
+              </a:tblPr>
+              <a:tblGrid>
+                <a:gridCol w="1371600"/>
+                <a:gridCol w="914400"/>
+                <a:gridCol w="914400"/>
+                <a:gridCol w="914400"/>
+              </a:tblGrid>
+              <a:tr h="571500">
+                <a:tc>
+                  <a:txBody>
+                    <a:bodyPr/>
+                    <a:lstStyle/>
+                    <a:p>
+                      <a:pPr algn="ctr" rtl="1">
+                        <a:defRPr b="1" sz="1300"/>
+                      </a:pPr>
+                      <a:r>
+                        <a:t>מודול (Module)</a:t>
+                      </a:r>
+                    </a:p>
+                  </a:txBody>
+                  <a:tcPr/>
+                </a:tc>
+                <a:tc>
+                  <a:txBody>
+                    <a:bodyPr/>
+                    <a:lstStyle/>
+                    <a:p>
+                      <a:pPr algn="ctr" rtl="1">
+                        <a:defRPr b="1" sz="1300"/>
+                      </a:pPr>
+                      <a:r>
+                        <a:t>LUTs</a:t>
+                      </a:r>
+                    </a:p>
+                  </a:txBody>
+                  <a:tcPr/>
+                </a:tc>
+                <a:tc>
+                  <a:txBody>
+                    <a:bodyPr/>
+                    <a:lstStyle/>
+                    <a:p>
+                      <a:pPr algn="ctr" rtl="1">
+                        <a:defRPr b="1" sz="1300"/>
+                      </a:pPr>
+                      <a:r>
+                        <a:t>Registers</a:t>
+                      </a:r>
+                    </a:p>
+                  </a:txBody>
+                  <a:tcPr/>
+                </a:tc>
+                <a:tc>
+                  <a:txBody>
+                    <a:bodyPr/>
+                    <a:lstStyle/>
+                    <a:p>
+                      <a:pPr algn="ctr" rtl="1">
+                        <a:defRPr b="1" sz="1300"/>
+                      </a:pPr>
+                      <a:r>
+                        <a:t>BRAM</a:t>
+                      </a:r>
+                    </a:p>
+                  </a:txBody>
+                  <a:tcPr/>
+                </a:tc>
+              </a:tr>
+              <a:tr h="571500">
+                <a:tc>
+                  <a:txBody>
+                    <a:bodyPr/>
+                    <a:lstStyle/>
+                    <a:p>
+                      <a:pPr algn="ctr" rtl="1">
+                        <a:defRPr sz="1200" b="1"/>
+                      </a:pPr>
+                      <a:r>
+                        <a:t>VGA Controller</a:t>
+                      </a:r>
+                    </a:p>
+                  </a:txBody>
+                  <a:tcPr/>
+                </a:tc>
+                <a:tc>
+                  <a:txBody>
+                    <a:bodyPr/>
+                    <a:lstStyle/>
+                    <a:p>
+                      <a:pPr algn="ctr" rtl="1">
+                        <a:defRPr sz="1200"/>
+                      </a:pPr>
+                      <a:r>
+                        <a:t>47</a:t>
+                      </a:r>
+                    </a:p>
+                  </a:txBody>
+                  <a:tcPr/>
+                </a:tc>
+                <a:tc>
+                  <a:txBody>
+                    <a:bodyPr/>
+                    <a:lstStyle/>
+                    <a:p>
+                      <a:pPr algn="ctr" rtl="1">
+                        <a:defRPr sz="1200"/>
+                      </a:pPr>
+                      <a:r>
+                        <a:t>52</a:t>
+                      </a:r>
+                    </a:p>
+                  </a:txBody>
+                  <a:tcPr/>
+                </a:tc>
+                <a:tc>
+                  <a:txBody>
+                    <a:bodyPr/>
+                    <a:lstStyle/>
+                    <a:p>
+                      <a:pPr algn="ctr" rtl="1">
+                        <a:defRPr sz="1200"/>
+                      </a:pPr>
+                      <a:r>
+                        <a:t>0</a:t>
+                      </a:r>
+                    </a:p>
+                  </a:txBody>
+                  <a:tcPr/>
+                </a:tc>
+              </a:tr>
+              <a:tr h="571500">
+                <a:tc>
+                  <a:txBody>
+                    <a:bodyPr/>
+                    <a:lstStyle/>
+                    <a:p>
+                      <a:pPr algn="ctr" rtl="1">
+                        <a:defRPr sz="1200" b="1"/>
+                      </a:pPr>
+                      <a:r>
+                        <a:t>ILA + Debug Hub</a:t>
+                      </a:r>
+                    </a:p>
+                  </a:txBody>
+                  <a:tcPr/>
+                </a:tc>
+                <a:tc>
+                  <a:txBody>
+                    <a:bodyPr/>
+                    <a:lstStyle/>
+                    <a:p>
+                      <a:pPr algn="ctr" rtl="1">
+                        <a:defRPr sz="1200"/>
+                      </a:pPr>
+                      <a:r>
+                        <a:t>1,732</a:t>
+                      </a:r>
+                    </a:p>
+                  </a:txBody>
+                  <a:tcPr/>
+                </a:tc>
+                <a:tc>
+                  <a:txBody>
+                    <a:bodyPr/>
+                    <a:lstStyle/>
+                    <a:p>
+                      <a:pPr algn="ctr" rtl="1">
+                        <a:defRPr sz="1200"/>
+                      </a:pPr>
+                      <a:r>
+                        <a:t>2,642</a:t>
+                      </a:r>
+                    </a:p>
+                  </a:txBody>
+                  <a:tcPr/>
+                </a:tc>
+                <a:tc>
+                  <a:txBody>
+                    <a:bodyPr/>
+                    <a:lstStyle/>
+                    <a:p>
+                      <a:pPr algn="ctr" rtl="1">
+                        <a:defRPr sz="1200"/>
+                      </a:pPr>
+                      <a:r>
+                        <a:t>1.5</a:t>
+                      </a:r>
+                    </a:p>
+                  </a:txBody>
+                  <a:tcPr/>
+                </a:tc>
+              </a:tr>
+              <a:tr h="571500">
+                <a:tc>
+                  <a:txBody>
+                    <a:bodyPr/>
+                    <a:lstStyle/>
+                    <a:p>
+                      <a:pPr algn="ctr" rtl="1">
+                        <a:defRPr sz="1200" b="1"/>
+                      </a:pPr>
+                      <a:r>
+                        <a:t>Total Design</a:t>
+                      </a:r>
+                    </a:p>
+                  </a:txBody>
+                  <a:tcPr/>
+                </a:tc>
+                <a:tc>
+                  <a:txBody>
+                    <a:bodyPr/>
+                    <a:lstStyle/>
+                    <a:p>
+                      <a:pPr algn="ctr" rtl="1">
+                        <a:defRPr sz="1200"/>
+                      </a:pPr>
+                      <a:r>
+                        <a:t>2,756</a:t>
+                      </a:r>
+                    </a:p>
+                  </a:txBody>
+                  <a:tcPr/>
+                </a:tc>
+                <a:tc>
+                  <a:txBody>
+                    <a:bodyPr/>
+                    <a:lstStyle/>
+                    <a:p>
+                      <a:pPr algn="ctr" rtl="1">
+                        <a:defRPr sz="1200"/>
+                      </a:pPr>
+                      <a:r>
+                        <a:t>2,890</a:t>
+                      </a:r>
+                    </a:p>
+                  </a:txBody>
+                  <a:tcPr/>
+                </a:tc>
+                <a:tc>
+                  <a:txBody>
+                    <a:bodyPr/>
+                    <a:lstStyle/>
+                    <a:p>
+                      <a:pPr algn="ctr" rtl="1">
+                        <a:defRPr sz="1200"/>
+                      </a:pPr>
+                      <a:r>
+                        <a:t>105</a:t>
+                      </a:r>
+                    </a:p>
+                  </a:txBody>
+                  <a:tcPr/>
+                </a:tc>
+              </a:tr>
+            </a:tbl>
+          </a:graphicData>
+        </a:graphic>
+      </p:graphicFrame>
+      <p:pic>
+        <p:nvPicPr>
+          <p:cNvPr id="5" name="Picture 4" descr="device_view_with_ila.png"/>
+          <p:cNvPicPr>
+            <a:picLocks noChangeAspect="1"/>
+          </p:cNvPicPr>
+          <p:nvPr/>
+        </p:nvPicPr>
+        <p:blipFill>
+          <a:blip r:embed="rId2"/>
+          <a:stretch>
+            <a:fillRect/>
+          </a:stretch>
+        </p:blipFill>
+        <p:spPr>
+          <a:xfrm>
+            <a:off x="457200" y="2926080"/>
+            <a:ext cx="3840480" cy="1900189"/>
+          </a:xfrm>
+          <a:prstGeom prst="rect">
+            <a:avLst/>
+          </a:prstGeom>
+        </p:spPr>
+      </p:pic>
     </p:spTree>
   </p:cSld>
   <p:clrMapOvr>

--- a/docs/presentation/output/VGA_Presentation_Yossi.pptx
+++ b/docs/presentation/output/VGA_Presentation_Yossi.pptx
@@ -5696,7 +5696,7 @@
         <p:spPr>
           <a:xfrm>
             <a:off x="182880" y="1097280"/>
-            <a:ext cx="8686800" cy="1371600"/>
+            <a:ext cx="8686800" cy="2011680"/>
           </a:xfrm>
           <a:prstGeom prst="rect">
             <a:avLst/>
@@ -5731,6 +5731,14 @@
             </a:pPr>
             <a:r>
               <a:t>• החיסרון (Trade-off): ה-ILA אינו חינמי. הוא 'גוזל' משאבי חומרה יקרים מהכרטיס (LUTs ו-BRAM) לצורך לוגיקת הדגימה ואגירת הנתונים.</a:t>
+            </a:r>
+          </a:p>
+          <a:p>
+            <a:pPr algn="r" rtl="1">
+              <a:defRPr sz="1600"/>
+            </a:pPr>
+            <a:r>
+              <a:t>• הערת תכן (ModelSim לעומת ILA): בסימולציה התמקדנו ב-display_x (מונה הפיקסלים הפעיל). בחומרה אנו דוגמים את המונה הראשי (hsync_debug המייצג את hsync_reg) הכולל אותו בתוכו, כדי לצפות גם ב-Porches ובדופק הסנכרון בזמן אמת.</a:t>
             </a:r>
           </a:p>
         </p:txBody>

--- a/docs/presentation/output/VGA_Presentation_Yossi.pptx
+++ b/docs/presentation/output/VGA_Presentation_Yossi.pptx
@@ -5900,7 +5900,7 @@
                         <a:defRPr sz="1400"/>
                       </a:pPr>
                       <a:r>
-                        <a:t>display_x (מונה הפיקסלים)</a:t>
+                        <a:t>hsync_debug (מייצג את hsync_reg)</a:t>
                       </a:r>
                     </a:p>
                   </a:txBody>

--- a/docs/presentation/output/VGA_Presentation_Yossi.pptx
+++ b/docs/presentation/output/VGA_Presentation_Yossi.pptx
@@ -30,6 +30,8 @@
     <p:sldId id="278" r:id="rId29"/>
     <p:sldId id="279" r:id="rId30"/>
     <p:sldId id="280" r:id="rId31"/>
+    <p:sldId id="281" r:id="rId32"/>
+    <p:sldId id="282" r:id="rId33"/>
   </p:sldIdLst>
   <p:sldSz cx="9144000" cy="6858000" type="screen4x3"/>
   <p:notesSz cx="6858000" cy="9144000"/>
@@ -6346,6 +6348,593 @@
           </a:prstGeom>
         </p:spPr>
       </p:pic>
+    </p:spTree>
+  </p:cSld>
+  <p:clrMapOvr>
+    <a:masterClrMapping/>
+  </p:clrMapOvr>
+</p:sld>
+</file>
+
+<file path=ppt/slides/slide26.xml><?xml version="1.0" encoding="utf-8"?>
+<p:sld xmlns:a="http://schemas.openxmlformats.org/drawingml/2006/main" xmlns:p="http://schemas.openxmlformats.org/presentationml/2006/main" xmlns:r="http://schemas.openxmlformats.org/officeDocument/2006/relationships">
+  <p:cSld>
+    <p:spTree>
+      <p:nvGrpSpPr>
+        <p:cNvPr id="1" name=""/>
+        <p:cNvGrpSpPr/>
+        <p:nvPr/>
+      </p:nvGrpSpPr>
+      <p:grpSpPr/>
+      <p:sp>
+        <p:nvSpPr>
+          <p:cNvPr id="2" name="Title 1"/>
+          <p:cNvSpPr>
+            <a:spLocks noGrp="1"/>
+          </p:cNvSpPr>
+          <p:nvPr>
+            <p:ph type="title"/>
+          </p:nvPr>
+        </p:nvSpPr>
+        <p:spPr/>
+        <p:txBody>
+          <a:bodyPr/>
+          <a:lstStyle/>
+          <a:p>
+            <a:pPr rtl="1" algn="ctr"/>
+            <a:r>
+              <a:t>חשיפת הסיליקון: ModelSim הווירטואלי מול Vivado ILA הפיזי</a:t>
+            </a:r>
+          </a:p>
+        </p:txBody>
+      </p:sp>
+      <p:sp>
+        <p:nvSpPr>
+          <p:cNvPr id="3" name="TextBox 2"/>
+          <p:cNvSpPr txBox="1"/>
+          <p:nvPr/>
+        </p:nvSpPr>
+        <p:spPr>
+          <a:xfrm>
+            <a:off x="182880" y="1097280"/>
+            <a:ext cx="8686800" cy="1371600"/>
+          </a:xfrm>
+          <a:prstGeom prst="rect">
+            <a:avLst/>
+          </a:prstGeom>
+          <a:noFill/>
+        </p:spPr>
+        <p:txBody>
+          <a:bodyPr wrap="none">
+            <a:spAutoFit/>
+          </a:bodyPr>
+          <a:lstStyle/>
+          <a:p/>
+          <a:p>
+            <a:pPr algn="r" rtl="1">
+              <a:defRPr sz="1600"/>
+            </a:pPr>
+            <a:r>
+              <a:t>• רגע האמת (The Trigger): תפסנו בחומרה את הרגע המדויק שבו in_display_area_delayed עולה ל-'1' והמסך מתחיל לשדר צבע.</a:t>
+            </a:r>
+          </a:p>
+          <a:p>
+            <a:pPr algn="r" rtl="1">
+              <a:defRPr sz="1600"/>
+            </a:pPr>
+            <a:r>
+              <a:t>• ההקבלה: משמאל - התיאוריה המדויקת שפיתחנו. מימין - ההתנהגות הפיזית האמיתית שנמדדה מתוך ה-Artix-7.</a:t>
+            </a:r>
+          </a:p>
+          <a:p>
+            <a:pPr algn="r" rtl="1">
+              <a:defRPr sz="1600"/>
+            </a:pPr>
+            <a:r>
+              <a:t>• התוצאה: זרימת הנתונים והאכיפה הלוגית (Gatekeeper) פועלות בחומרה בדיוק כפי שחזינו, גם תחת השהיות הסיליקון (Latency).</a:t>
+            </a:r>
+          </a:p>
+        </p:txBody>
+      </p:sp>
+      <p:sp>
+        <p:nvSpPr>
+          <p:cNvPr id="4" name="TextBox 3"/>
+          <p:cNvSpPr txBox="1"/>
+          <p:nvPr/>
+        </p:nvSpPr>
+        <p:spPr>
+          <a:xfrm>
+            <a:off x="457200" y="2926080"/>
+            <a:ext cx="3840480" cy="3200400"/>
+          </a:xfrm>
+          <a:prstGeom prst="rect">
+            <a:avLst/>
+          </a:prstGeom>
+          <a:noFill/>
+        </p:spPr>
+        <p:txBody>
+          <a:bodyPr wrap="none">
+            <a:spAutoFit/>
+          </a:bodyPr>
+          <a:lstStyle/>
+          <a:p>
+            <a:pPr algn="ctr">
+              <a:defRPr sz="1600">
+                <a:solidFill>
+                  <a:srgbClr val="808080"/>
+                </a:solidFill>
+              </a:defRPr>
+            </a:pPr>
+            <a:r>
+              <a:t>[שומר מקום: צילום מסך מודלסים]</a:t>
+            </a:r>
+            <a:br/>
+            <a:r>
+              <a:t>העולם האידיאלי (Zero Delay)</a:t>
+            </a:r>
+            <a:br/>
+            <a:r>
+              <a:t>(כאן נשים את הגלים מה-DO file)</a:t>
+            </a:r>
+          </a:p>
+        </p:txBody>
+      </p:sp>
+      <p:sp>
+        <p:nvSpPr>
+          <p:cNvPr id="5" name="TextBox 4"/>
+          <p:cNvSpPr txBox="1"/>
+          <p:nvPr/>
+        </p:nvSpPr>
+        <p:spPr>
+          <a:xfrm>
+            <a:off x="4846320" y="2926080"/>
+            <a:ext cx="3840480" cy="3200400"/>
+          </a:xfrm>
+          <a:prstGeom prst="rect">
+            <a:avLst/>
+          </a:prstGeom>
+          <a:noFill/>
+        </p:spPr>
+        <p:txBody>
+          <a:bodyPr wrap="none">
+            <a:spAutoFit/>
+          </a:bodyPr>
+          <a:lstStyle/>
+          <a:p>
+            <a:pPr algn="ctr">
+              <a:defRPr sz="1600">
+                <a:solidFill>
+                  <a:srgbClr val="0070C0"/>
+                </a:solidFill>
+              </a:defRPr>
+            </a:pPr>
+            <a:r>
+              <a:t>[שומר מקום: צילום מסך ILA]</a:t>
+            </a:r>
+            <a:br/>
+            <a:r>
+              <a:t>העולם הפיזי (Post-Silicon)</a:t>
+            </a:r>
+            <a:br/>
+            <a:r>
+              <a:t>(כאן נשים את הגלים מהחומרה החיה)</a:t>
+            </a:r>
+          </a:p>
+        </p:txBody>
+      </p:sp>
+    </p:spTree>
+  </p:cSld>
+  <p:clrMapOvr>
+    <a:masterClrMapping/>
+  </p:clrMapOvr>
+</p:sld>
+</file>
+
+<file path=ppt/slides/slide27.xml><?xml version="1.0" encoding="utf-8"?>
+<p:sld xmlns:a="http://schemas.openxmlformats.org/drawingml/2006/main" xmlns:p="http://schemas.openxmlformats.org/presentationml/2006/main" xmlns:r="http://schemas.openxmlformats.org/officeDocument/2006/relationships">
+  <p:cSld>
+    <p:spTree>
+      <p:nvGrpSpPr>
+        <p:cNvPr id="1" name=""/>
+        <p:cNvGrpSpPr/>
+        <p:nvPr/>
+      </p:nvGrpSpPr>
+      <p:grpSpPr/>
+      <p:sp>
+        <p:nvSpPr>
+          <p:cNvPr id="2" name="Title 1"/>
+          <p:cNvSpPr>
+            <a:spLocks noGrp="1"/>
+          </p:cNvSpPr>
+          <p:nvPr>
+            <p:ph type="title"/>
+          </p:nvPr>
+        </p:nvSpPr>
+        <p:spPr/>
+        <p:txBody>
+          <a:bodyPr/>
+          <a:lstStyle/>
+          <a:p>
+            <a:pPr rtl="1" algn="ctr"/>
+            <a:r>
+              <a:t>Post-Silicon Validation: מה הסיליקון חושף?</a:t>
+            </a:r>
+          </a:p>
+        </p:txBody>
+      </p:sp>
+      <p:sp>
+        <p:nvSpPr>
+          <p:cNvPr id="3" name="TextBox 2"/>
+          <p:cNvSpPr txBox="1"/>
+          <p:nvPr/>
+        </p:nvSpPr>
+        <p:spPr>
+          <a:xfrm>
+            <a:off x="182880" y="1005840"/>
+            <a:ext cx="8686800" cy="914400"/>
+          </a:xfrm>
+          <a:prstGeom prst="rect">
+            <a:avLst/>
+          </a:prstGeom>
+          <a:noFill/>
+        </p:spPr>
+        <p:txBody>
+          <a:bodyPr wrap="none">
+            <a:spAutoFit/>
+          </a:bodyPr>
+          <a:lstStyle/>
+          <a:p/>
+          <a:p>
+            <a:pPr algn="r" rtl="1">
+              <a:defRPr sz="1600"/>
+            </a:pPr>
+            <a:r>
+              <a:t>• המעבר מקופסה שחורה ללבנה: הוספנו mark_debug ל-VHDL כדי לאלץ את הסינתזה לשמר חוטים פנימיים למדידה[cite: 6].</a:t>
+            </a:r>
+          </a:p>
+          <a:p>
+            <a:pPr algn="r" rtl="1">
+              <a:defRPr sz="1600"/>
+            </a:pPr>
+            <a:r>
+              <a:t>• הוכחת הפיזיקה: הטבלה מתארת כיצד כל אות וירטואלי מהסימולציה נמדד עתה כתופעה חשמלית/פיזית בתוך רשת השערים (Netlist).</a:t>
+            </a:r>
+          </a:p>
+        </p:txBody>
+      </p:sp>
+      <p:graphicFrame>
+        <p:nvGraphicFramePr>
+          <p:cNvPr id="4" name="Table 3"/>
+          <p:cNvGraphicFramePr>
+            <a:graphicFrameLocks noGrp="1"/>
+          </p:cNvGraphicFramePr>
+          <p:nvPr/>
+        </p:nvGraphicFramePr>
+        <p:xfrm>
+          <a:off x="182880" y="2103120"/>
+          <a:ext cx="8778240" cy="4114800"/>
+        </p:xfrm>
+        <a:graphic>
+          <a:graphicData uri="http://schemas.openxmlformats.org/drawingml/2006/table">
+            <a:tbl>
+              <a:tblPr firstRow="1" bandRow="1">
+                <a:tableStyleId>{5C22544A-7EE6-4342-B048-85BDC9FD1C3A}</a:tableStyleId>
+              </a:tblPr>
+              <a:tblGrid>
+                <a:gridCol w="2011680"/>
+                <a:gridCol w="3383280"/>
+                <a:gridCol w="3383280"/>
+              </a:tblGrid>
+              <a:tr h="685800">
+                <a:tc>
+                  <a:txBody>
+                    <a:bodyPr/>
+                    <a:lstStyle/>
+                    <a:p>
+                      <a:pPr algn="ctr" rtl="1">
+                        <a:defRPr b="1" sz="1400">
+                          <a:solidFill>
+                            <a:srgbClr val="FFFFFF"/>
+                          </a:solidFill>
+                        </a:defRPr>
+                      </a:pPr>
+                      <a:r>
+                        <a:t>האות (Signal)</a:t>
+                      </a:r>
+                    </a:p>
+                  </a:txBody>
+                  <a:tcPr>
+                    <a:solidFill>
+                      <a:srgbClr val="282828"/>
+                    </a:solidFill>
+                  </a:tcPr>
+                </a:tc>
+                <a:tc>
+                  <a:txBody>
+                    <a:bodyPr/>
+                    <a:lstStyle/>
+                    <a:p>
+                      <a:pPr algn="ctr" rtl="1">
+                        <a:defRPr b="1" sz="1400">
+                          <a:solidFill>
+                            <a:srgbClr val="FFFFFF"/>
+                          </a:solidFill>
+                        </a:defRPr>
+                      </a:pPr>
+                      <a:r>
+                        <a:t>ModelSim (העולם הווירטואלי)</a:t>
+                      </a:r>
+                    </a:p>
+                  </a:txBody>
+                  <a:tcPr>
+                    <a:solidFill>
+                      <a:srgbClr val="4F81BD"/>
+                    </a:solidFill>
+                  </a:tcPr>
+                </a:tc>
+                <a:tc>
+                  <a:txBody>
+                    <a:bodyPr/>
+                    <a:lstStyle/>
+                    <a:p>
+                      <a:pPr algn="ctr" rtl="1">
+                        <a:defRPr b="1" sz="1400">
+                          <a:solidFill>
+                            <a:srgbClr val="FFFFFF"/>
+                          </a:solidFill>
+                        </a:defRPr>
+                      </a:pPr>
+                      <a:r>
+                        <a:t>Vivado ILA (הסיליקון הפיזי)</a:t>
+                      </a:r>
+                    </a:p>
+                  </a:txBody>
+                  <a:tcPr>
+                    <a:solidFill>
+                      <a:srgbClr val="4F81BD"/>
+                    </a:solidFill>
+                  </a:tcPr>
+                </a:tc>
+              </a:tr>
+              <a:tr h="685800">
+                <a:tc>
+                  <a:txBody>
+                    <a:bodyPr/>
+                    <a:lstStyle/>
+                    <a:p>
+                      <a:pPr algn="l">
+                        <a:defRPr sz="1300" b="1"/>
+                      </a:pPr>
+                      <a:r>
+                        <a:t>bram_address_reg</a:t>
+                      </a:r>
+                    </a:p>
+                  </a:txBody>
+                  <a:tcPr/>
+                </a:tc>
+                <a:tc>
+                  <a:txBody>
+                    <a:bodyPr/>
+                    <a:lstStyle/>
+                    <a:p>
+                      <a:pPr algn="r" rtl="1">
+                        <a:defRPr sz="1300"/>
+                      </a:pPr>
+                      <a:r>
+                        <a:t>עדכון מתמטי באפס זמן (0ns).</a:t>
+                      </a:r>
+                    </a:p>
+                  </a:txBody>
+                  <a:tcPr/>
+                </a:tc>
+                <a:tc>
+                  <a:txBody>
+                    <a:bodyPr/>
+                    <a:lstStyle/>
+                    <a:p>
+                      <a:pPr algn="r" rtl="1">
+                        <a:defRPr sz="1300"/>
+                      </a:pPr>
+                      <a:r>
+                        <a:t>ניתוב פיזי: 19 חוטים שמפעילים את פורט הקריאה בזיכרון.</a:t>
+                      </a:r>
+                    </a:p>
+                  </a:txBody>
+                  <a:tcPr/>
+                </a:tc>
+              </a:tr>
+              <a:tr h="685800">
+                <a:tc>
+                  <a:txBody>
+                    <a:bodyPr/>
+                    <a:lstStyle/>
+                    <a:p>
+                      <a:pPr algn="l">
+                        <a:defRPr sz="1300" b="1"/>
+                      </a:pPr>
+                      <a:r>
+                        <a:t>doutb (תגובת BRAM)</a:t>
+                      </a:r>
+                    </a:p>
+                  </a:txBody>
+                  <a:tcPr/>
+                </a:tc>
+                <a:tc>
+                  <a:txBody>
+                    <a:bodyPr/>
+                    <a:lstStyle/>
+                    <a:p>
+                      <a:pPr algn="r" rtl="1">
+                        <a:defRPr sz="1300"/>
+                      </a:pPr>
+                      <a:r>
+                        <a:t>המידע מופיע מיידית ובקסם.</a:t>
+                      </a:r>
+                    </a:p>
+                  </a:txBody>
+                  <a:tcPr/>
+                </a:tc>
+                <a:tc>
+                  <a:txBody>
+                    <a:bodyPr/>
+                    <a:lstStyle/>
+                    <a:p>
+                      <a:pPr algn="r" rtl="1">
+                        <a:defRPr sz="1300"/>
+                      </a:pPr>
+                      <a:r>
+                        <a:t>השהיית חומרה (Latency): זמן התגובה האמיתי של ה-IP.</a:t>
+                      </a:r>
+                    </a:p>
+                  </a:txBody>
+                  <a:tcPr/>
+                </a:tc>
+              </a:tr>
+              <a:tr h="685800">
+                <a:tc>
+                  <a:txBody>
+                    <a:bodyPr/>
+                    <a:lstStyle/>
+                    <a:p>
+                      <a:pPr algn="l">
+                        <a:defRPr sz="1300" b="1"/>
+                      </a:pPr>
+                      <a:r>
+                        <a:t>pxl_data_reg</a:t>
+                      </a:r>
+                    </a:p>
+                  </a:txBody>
+                  <a:tcPr/>
+                </a:tc>
+                <a:tc>
+                  <a:txBody>
+                    <a:bodyPr/>
+                    <a:lstStyle/>
+                    <a:p>
+                      <a:pPr algn="r" rtl="1">
+                        <a:defRPr sz="1300"/>
+                      </a:pPr>
+                      <a:r>
+                        <a:t>השמת משתנה פשוטה.</a:t>
+                      </a:r>
+                    </a:p>
+                  </a:txBody>
+                  <a:tcPr/>
+                </a:tc>
+                <a:tc>
+                  <a:txBody>
+                    <a:bodyPr/>
+                    <a:lstStyle/>
+                    <a:p>
+                      <a:pPr algn="r" rtl="1">
+                        <a:defRPr sz="1300"/>
+                      </a:pPr>
+                      <a:r>
+                        <a:t>הוכחת יציבות: הפליפ-פלופים דוגמים את doutb כראוי בעליית השעון.</a:t>
+                      </a:r>
+                    </a:p>
+                  </a:txBody>
+                  <a:tcPr/>
+                </a:tc>
+              </a:tr>
+              <a:tr h="685800">
+                <a:tc>
+                  <a:txBody>
+                    <a:bodyPr/>
+                    <a:lstStyle/>
+                    <a:p>
+                      <a:pPr algn="l">
+                        <a:defRPr sz="1300" b="1"/>
+                      </a:pPr>
+                      <a:r>
+                        <a:t>in_display_area_dly</a:t>
+                      </a:r>
+                    </a:p>
+                  </a:txBody>
+                  <a:tcPr/>
+                </a:tc>
+                <a:tc>
+                  <a:txBody>
+                    <a:bodyPr/>
+                    <a:lstStyle/>
+                    <a:p>
+                      <a:pPr algn="r" rtl="1">
+                        <a:defRPr sz="1300"/>
+                      </a:pPr>
+                      <a:r>
+                        <a:t>דגל בוליאני (True/False).</a:t>
+                      </a:r>
+                    </a:p>
+                  </a:txBody>
+                  <a:tcPr/>
+                </a:tc>
+                <a:tc>
+                  <a:txBody>
+                    <a:bodyPr/>
+                    <a:lstStyle/>
+                    <a:p>
+                      <a:pPr algn="r" rtl="1">
+                        <a:defRPr sz="1300"/>
+                      </a:pPr>
+                      <a:r>
+                        <a:t>פיקוד פיזי (Select Line) שכופה ניתוב על המרבבים (MUX) בחומרה.</a:t>
+                      </a:r>
+                    </a:p>
+                  </a:txBody>
+                  <a:tcPr/>
+                </a:tc>
+              </a:tr>
+              <a:tr h="685800">
+                <a:tc>
+                  <a:txBody>
+                    <a:bodyPr/>
+                    <a:lstStyle/>
+                    <a:p>
+                      <a:pPr algn="l">
+                        <a:defRPr sz="1300" b="1"/>
+                      </a:pPr>
+                      <a:r>
+                        <a:t>vga_r/g/b_int</a:t>
+                      </a:r>
+                    </a:p>
+                  </a:txBody>
+                  <a:tcPr/>
+                </a:tc>
+                <a:tc>
+                  <a:txBody>
+                    <a:bodyPr/>
+                    <a:lstStyle/>
+                    <a:p>
+                      <a:pPr algn="r" rtl="1">
+                        <a:defRPr sz="1300"/>
+                      </a:pPr>
+                      <a:r>
+                        <a:t>מחרוזות תווים (למשל '0000').</a:t>
+                      </a:r>
+                    </a:p>
+                  </a:txBody>
+                  <a:tcPr/>
+                </a:tc>
+                <a:tc>
+                  <a:txBody>
+                    <a:bodyPr/>
+                    <a:lstStyle/>
+                    <a:p>
+                      <a:pPr algn="r" rtl="1">
+                        <a:defRPr sz="1300"/>
+                      </a:pPr>
+                      <a:r>
+                        <a:t>אכיפה חשמלית: חיווט הפינים לאדמה (GND) למניעת זליגות צבע.</a:t>
+                      </a:r>
+                    </a:p>
+                  </a:txBody>
+                  <a:tcPr/>
+                </a:tc>
+              </a:tr>
+            </a:tbl>
+          </a:graphicData>
+        </a:graphic>
+      </p:graphicFrame>
     </p:spTree>
   </p:cSld>
   <p:clrMapOvr>

--- a/docs/presentation/output/VGA_Presentation_Yossi.pptx
+++ b/docs/presentation/output/VGA_Presentation_Yossi.pptx
@@ -6383,7 +6383,7 @@
           <a:p>
             <a:pPr rtl="1" algn="ctr"/>
             <a:r>
-              <a:t>חשיפת הסיליקון: ModelSim הווירטואלי מול Vivado ILA הפיזי</a:t>
+              <a:t>Post-Silicon Validation: מסלול הנתונים בסיליקון</a:t>
             </a:r>
           </a:p>
         </p:txBody>
@@ -6415,7 +6415,7 @@
               <a:defRPr sz="1600"/>
             </a:pPr>
             <a:r>
-              <a:t>• רגע האמת (The Trigger): תפסנו בחומרה את הרגע המדויק שבו in_display_area_delayed עולה ל-'1' והמסך מתחיל לשדר צבע.</a:t>
+              <a:t>• בניגוד לסימולציה האידיאלית (בשקף 16), כאן אנו דוגמים את החומרה הפיזית פועלת בזמן אמת באמצעות ה-ILA.</a:t>
             </a:r>
           </a:p>
           <a:p>
@@ -6423,7 +6423,7 @@
               <a:defRPr sz="1600"/>
             </a:pPr>
             <a:r>
-              <a:t>• ההקבלה: משמאל - התיאוריה המדויקת שפיתחנו. מימין - ההתנהגות הפיזית האמיתית שנמדדה מתוך ה-Artix-7.</a:t>
+              <a:t>• השהיית זיכרון (Latency): שימו לב לפער הפיזי - הכתובת 266880 נשלחת (bram_address_reg), אך הנתון 4ea מופיע רק לאחר מכן.</a:t>
             </a:r>
           </a:p>
           <a:p>
@@ -6431,7 +6431,7 @@
               <a:defRPr sz="1600"/>
             </a:pPr>
             <a:r>
-              <a:t>• התוצאה: זרימת הנתונים והאכיפה הלוגית (Gatekeeper) פועלות בחומרה בדיוק כפי שחזינו, גם תחת השהיות הסיליקון (Latency).</a:t>
+              <a:t>• אכיפת שומר הסף: למרות שהאוגר התמלא, רק בקו הצהוב, כש-in_display_area_delayed עולה ל-'1', נתוני ה-RGB נפרצים החוצה (0 -&gt; 4,e,a).</a:t>
             </a:r>
           </a:p>
         </p:txBody>
@@ -6445,50 +6445,7 @@
         <p:spPr>
           <a:xfrm>
             <a:off x="457200" y="2926080"/>
-            <a:ext cx="3840480" cy="3200400"/>
-          </a:xfrm>
-          <a:prstGeom prst="rect">
-            <a:avLst/>
-          </a:prstGeom>
-          <a:noFill/>
-        </p:spPr>
-        <p:txBody>
-          <a:bodyPr wrap="none">
-            <a:spAutoFit/>
-          </a:bodyPr>
-          <a:lstStyle/>
-          <a:p>
-            <a:pPr algn="ctr">
-              <a:defRPr sz="1600">
-                <a:solidFill>
-                  <a:srgbClr val="808080"/>
-                </a:solidFill>
-              </a:defRPr>
-            </a:pPr>
-            <a:r>
-              <a:t>[שומר מקום: צילום מסך מודלסים]</a:t>
-            </a:r>
-            <a:br/>
-            <a:r>
-              <a:t>העולם האידיאלי (Zero Delay)</a:t>
-            </a:r>
-            <a:br/>
-            <a:r>
-              <a:t>(כאן נשים את הגלים מה-DO file)</a:t>
-            </a:r>
-          </a:p>
-        </p:txBody>
-      </p:sp>
-      <p:sp>
-        <p:nvSpPr>
-          <p:cNvPr id="5" name="TextBox 4"/>
-          <p:cNvSpPr txBox="1"/>
-          <p:nvPr/>
-        </p:nvSpPr>
-        <p:spPr>
-          <a:xfrm>
-            <a:off x="4846320" y="2926080"/>
-            <a:ext cx="3840480" cy="3200400"/>
+            <a:ext cx="8229600" cy="3657600"/>
           </a:xfrm>
           <a:prstGeom prst="rect">
             <a:avLst/>
@@ -6509,15 +6466,7 @@
               </a:defRPr>
             </a:pPr>
             <a:r>
-              <a:t>[שומר מקום: צילום מסך ILA]</a:t>
-            </a:r>
-            <a:br/>
-            <a:r>
-              <a:t>העולם הפיזי (Post-Silicon)</a:t>
-            </a:r>
-            <a:br/>
-            <a:r>
-              <a:t>(כאן נשים את הגלים מהחומרה החיה)</a:t>
+              <a:t>[שומר מקום: צילום מסך ILA - ila_hardware_data_path_transition.png]</a:t>
             </a:r>
           </a:p>
         </p:txBody>
@@ -6557,7 +6506,7 @@
           <a:p>
             <a:pPr rtl="1" algn="ctr"/>
             <a:r>
-              <a:t>Post-Silicon Validation: מה הסיליקון חושף?</a:t>
+              <a:t>סיכום וריפיקציה: סימולציה (ModelSim) מול סיליקון (ILA)</a:t>
             </a:r>
           </a:p>
         </p:txBody>
@@ -6589,7 +6538,7 @@
               <a:defRPr sz="1600"/>
             </a:pPr>
             <a:r>
-              <a:t>• המעבר מקופסה שחורה ללבנה: הוספנו mark_debug ל-VHDL כדי לאלץ את הסינתזה לשמר חוטים פנימיים למדידה[cite: 6].</a:t>
+              <a:t>• המעבר מקופסה שחורה ללבנה: נאלצנו להוסיף אטריביוט mark_debug ל-VHDL כדי להורות לסינתזה לשמר חוטים פנימיים למדידה (White-Box).</a:t>
             </a:r>
           </a:p>
           <a:p>
@@ -6597,7 +6546,7 @@
               <a:defRPr sz="1600"/>
             </a:pPr>
             <a:r>
-              <a:t>• הוכחת הפיזיקה: הטבלה מתארת כיצד כל אות וירטואלי מהסימולציה נמדד עתה כתופעה חשמלית/פיזית בתוך רשת השערים (Netlist).</a:t>
+              <a:t>• הוכחת הפיזיקה: הטבלה מתארת כיצד התיאוריה מהסימולציה תורגמה לתופעות חשמליות/פיזיות בתוך רשת השערים (Netlist) של ה-FPGA.</a:t>
             </a:r>
           </a:p>
         </p:txBody>
@@ -6639,7 +6588,7 @@
                         </a:defRPr>
                       </a:pPr>
                       <a:r>
-                        <a:t>האות (Signal)</a:t>
+                        <a:t>האות ב-Data Path</a:t>
                       </a:r>
                     </a:p>
                   </a:txBody>
@@ -6662,7 +6611,7 @@
                         </a:defRPr>
                       </a:pPr>
                       <a:r>
-                        <a:t>ModelSim (העולם הווירטואלי)</a:t>
+                        <a:t>ModelSim (סביבה וירטואלית)</a:t>
                       </a:r>
                     </a:p>
                   </a:txBody>
@@ -6736,7 +6685,7 @@
                         <a:defRPr sz="1300"/>
                       </a:pPr>
                       <a:r>
-                        <a:t>ניתוב פיזי: 19 חוטים שמפעילים את פורט הקריאה בזיכרון.</a:t>
+                        <a:t>ניתוב פיזי: 19 חוטים שמפעילים את פורט הקריאה בזיכרון ה-BRAM.</a:t>
                       </a:r>
                     </a:p>
                   </a:txBody>
@@ -6783,7 +6732,7 @@
                         <a:defRPr sz="1300"/>
                       </a:pPr>
                       <a:r>
-                        <a:t>השהיית חומרה (Latency): זמן התגובה האמיתי של ה-IP.</a:t>
+                        <a:t>הוכחת Latency: חשיפת זמן התגובה האמיתי של בלוק החומרה.</a:t>
                       </a:r>
                     </a:p>
                   </a:txBody>
@@ -6815,7 +6764,7 @@
                         <a:defRPr sz="1300"/>
                       </a:pPr>
                       <a:r>
-                        <a:t>השמת משתנה פשוטה.</a:t>
+                        <a:t>השמת משתנה תוכנתית פשוטה.</a:t>
                       </a:r>
                     </a:p>
                   </a:txBody>
@@ -6830,7 +6779,7 @@
                         <a:defRPr sz="1300"/>
                       </a:pPr>
                       <a:r>
-                        <a:t>הוכחת יציבות: הפליפ-פלופים דוגמים את doutb כראוי בעליית השעון.</a:t>
+                        <a:t>יציבות חומרה: הפליפ-פלופים דוגמים את doutb כראוי למרות ההשהיה.</a:t>
                       </a:r>
                     </a:p>
                   </a:txBody>
@@ -6877,7 +6826,7 @@
                         <a:defRPr sz="1300"/>
                       </a:pPr>
                       <a:r>
-                        <a:t>פיקוד פיזי (Select Line) שכופה ניתוב על המרבבים (MUX) בחומרה.</a:t>
+                        <a:t>פיקוד פיזי (Select Line) שכופה ניתוב על המרבבים (MUX) בסיליקון.</a:t>
                       </a:r>
                     </a:p>
                   </a:txBody>
@@ -6909,7 +6858,7 @@
                         <a:defRPr sz="1300"/>
                       </a:pPr>
                       <a:r>
-                        <a:t>מחרוזות תווים (למשל '0000').</a:t>
+                        <a:t>מחרוזות תווים וירטואליות.</a:t>
                       </a:r>
                     </a:p>
                   </a:txBody>
@@ -6924,7 +6873,7 @@
                         <a:defRPr sz="1300"/>
                       </a:pPr>
                       <a:r>
-                        <a:t>אכיפה חשמלית: חיווט הפינים לאדמה (GND) למניעת זליגות צבע.</a:t>
+                        <a:t>אכיפה חשמלית: חיווט הפינים לאדמה (GND) למניעת זליגות צבע אנלוגיות.</a:t>
                       </a:r>
                     </a:p>
                   </a:txBody>

--- a/docs/presentation/output/VGA_Presentation_Yossi.pptx
+++ b/docs/presentation/output/VGA_Presentation_Yossi.pptx
@@ -6436,41 +6436,30 @@
           </a:p>
         </p:txBody>
       </p:sp>
-      <p:sp>
-        <p:nvSpPr>
-          <p:cNvPr id="4" name="TextBox 3"/>
-          <p:cNvSpPr txBox="1"/>
+      <p:pic>
+        <p:nvPicPr>
+          <p:cNvPr id="4" name="Picture 3" descr="ila_hardware_data_path_transition.png"/>
+          <p:cNvPicPr>
+            <a:picLocks noChangeAspect="1"/>
+          </p:cNvPicPr>
           <p:nvPr/>
-        </p:nvSpPr>
+        </p:nvPicPr>
+        <p:blipFill>
+          <a:blip r:embed="rId2"/>
+          <a:stretch>
+            <a:fillRect/>
+          </a:stretch>
+        </p:blipFill>
         <p:spPr>
           <a:xfrm>
             <a:off x="457200" y="2926080"/>
-            <a:ext cx="8229600" cy="3657600"/>
+            <a:ext cx="8229600" cy="4184797"/>
           </a:xfrm>
           <a:prstGeom prst="rect">
             <a:avLst/>
           </a:prstGeom>
-          <a:noFill/>
-        </p:spPr>
-        <p:txBody>
-          <a:bodyPr wrap="none">
-            <a:spAutoFit/>
-          </a:bodyPr>
-          <a:lstStyle/>
-          <a:p>
-            <a:pPr algn="ctr">
-              <a:defRPr sz="1600">
-                <a:solidFill>
-                  <a:srgbClr val="0070C0"/>
-                </a:solidFill>
-              </a:defRPr>
-            </a:pPr>
-            <a:r>
-              <a:t>[שומר מקום: צילום מסך ILA - ila_hardware_data_path_transition.png]</a:t>
-            </a:r>
-          </a:p>
-        </p:txBody>
-      </p:sp>
+        </p:spPr>
+      </p:pic>
     </p:spTree>
   </p:cSld>
   <p:clrMapOvr>

--- a/docs/presentation/output/VGA_Presentation_Yossi.pptx
+++ b/docs/presentation/output/VGA_Presentation_Yossi.pptx
@@ -32,6 +32,8 @@
     <p:sldId id="280" r:id="rId31"/>
     <p:sldId id="281" r:id="rId32"/>
     <p:sldId id="282" r:id="rId33"/>
+    <p:sldId id="283" r:id="rId34"/>
+    <p:sldId id="284" r:id="rId35"/>
   </p:sldIdLst>
   <p:sldSz cx="9144000" cy="6858000" type="screen4x3"/>
   <p:notesSz cx="6858000" cy="9144000"/>
@@ -6873,6 +6875,268 @@
           </a:graphicData>
         </a:graphic>
       </p:graphicFrame>
+    </p:spTree>
+  </p:cSld>
+  <p:clrMapOvr>
+    <a:masterClrMapping/>
+  </p:clrMapOvr>
+</p:sld>
+</file>
+
+<file path=ppt/slides/slide28.xml><?xml version="1.0" encoding="utf-8"?>
+<p:sld xmlns:a="http://schemas.openxmlformats.org/drawingml/2006/main" xmlns:p="http://schemas.openxmlformats.org/presentationml/2006/main" xmlns:r="http://schemas.openxmlformats.org/officeDocument/2006/relationships">
+  <p:cSld>
+    <p:spTree>
+      <p:nvGrpSpPr>
+        <p:cNvPr id="1" name=""/>
+        <p:cNvGrpSpPr/>
+        <p:nvPr/>
+      </p:nvGrpSpPr>
+      <p:grpSpPr/>
+      <p:sp>
+        <p:nvSpPr>
+          <p:cNvPr id="2" name="Title 1"/>
+          <p:cNvSpPr>
+            <a:spLocks noGrp="1"/>
+          </p:cNvSpPr>
+          <p:nvPr>
+            <p:ph type="title"/>
+          </p:nvPr>
+        </p:nvSpPr>
+        <p:spPr/>
+        <p:txBody>
+          <a:bodyPr/>
+          <a:lstStyle/>
+          <a:p>
+            <a:pPr rtl="1" algn="ctr"/>
+            <a:r>
+              <a:t>פיתוח עתידי: מעבר מזיהוי תנועה גולמי ל-Edge AI</a:t>
+            </a:r>
+          </a:p>
+        </p:txBody>
+      </p:sp>
+      <p:sp>
+        <p:nvSpPr>
+          <p:cNvPr id="3" name="TextBox 2"/>
+          <p:cNvSpPr txBox="1"/>
+          <p:nvPr/>
+        </p:nvSpPr>
+        <p:spPr>
+          <a:xfrm>
+            <a:off x="182880" y="1005840"/>
+            <a:ext cx="8686800" cy="1371600"/>
+          </a:xfrm>
+          <a:prstGeom prst="rect">
+            <a:avLst/>
+          </a:prstGeom>
+          <a:noFill/>
+        </p:spPr>
+        <p:txBody>
+          <a:bodyPr wrap="none">
+            <a:spAutoFit/>
+          </a:bodyPr>
+          <a:lstStyle/>
+          <a:p/>
+          <a:p>
+            <a:pPr algn="r" rtl="1">
+              <a:defRPr sz="1600"/>
+            </a:pPr>
+            <a:r>
+              <a:t>• האתגר במערכת הנוכחית: אלגוריתמי השוואת פריימים מזהים שינוי פיקסליירי, אך אינם יודעים להבדיל בין נפילת אדם לנפילת חפץ דומם.</a:t>
+            </a:r>
+          </a:p>
+          <a:p>
+            <a:pPr algn="r" rtl="1">
+              <a:defRPr sz="1600"/>
+            </a:pPr>
+            <a:r>
+              <a:t>• פתרון PoC ברסברי פאי: הרצת מודל AI קליל (Lightweight Deep Learning) לזיהוי מדויק של בני אדם מקומית (Edge) בזמן אמת.</a:t>
+            </a:r>
+          </a:p>
+          <a:p>
+            <a:pPr algn="r" rtl="1">
+              <a:defRPr sz="1600"/>
+            </a:pPr>
+            <a:r>
+              <a:t>• המטרה: לשלב בעתיד מודлли זיהוי דומים ישירות בתוך ארכיטקטורת החומרה של ה-FPGA.</a:t>
+            </a:r>
+          </a:p>
+        </p:txBody>
+      </p:sp>
+      <p:sp>
+        <p:nvSpPr>
+          <p:cNvPr id="4" name="TextBox 3"/>
+          <p:cNvSpPr txBox="1"/>
+          <p:nvPr/>
+        </p:nvSpPr>
+        <p:spPr>
+          <a:xfrm>
+            <a:off x="914400" y="2560320"/>
+            <a:ext cx="3840480" cy="3657600"/>
+          </a:xfrm>
+          <a:prstGeom prst="rect">
+            <a:avLst/>
+          </a:prstGeom>
+          <a:noFill/>
+        </p:spPr>
+        <p:txBody>
+          <a:bodyPr wrap="none">
+            <a:spAutoFit/>
+          </a:bodyPr>
+          <a:lstStyle/>
+          <a:p>
+            <a:pPr algn="ctr">
+              <a:defRPr sz="1400">
+                <a:solidFill>
+                  <a:srgbClr val="0070C0"/>
+                </a:solidFill>
+              </a:defRPr>
+            </a:pPr>
+            <a:r>
+              <a:t>[שומר מקום: תמונת זיהוי AI - רסברי פאי]</a:t>
+            </a:r>
+          </a:p>
+        </p:txBody>
+      </p:sp>
+      <p:sp>
+        <p:nvSpPr>
+          <p:cNvPr id="5" name="TextBox 4"/>
+          <p:cNvSpPr txBox="1"/>
+          <p:nvPr/>
+        </p:nvSpPr>
+        <p:spPr>
+          <a:xfrm>
+            <a:off x="5029200" y="2560320"/>
+            <a:ext cx="3840480" cy="3657600"/>
+          </a:xfrm>
+          <a:prstGeom prst="rect">
+            <a:avLst/>
+          </a:prstGeom>
+          <a:noFill/>
+        </p:spPr>
+        <p:txBody>
+          <a:bodyPr wrap="none">
+            <a:spAutoFit/>
+          </a:bodyPr>
+          <a:lstStyle/>
+          <a:p>
+            <a:pPr algn="ctr">
+              <a:defRPr sz="1400">
+                <a:solidFill>
+                  <a:srgbClr val="0070C0"/>
+                </a:solidFill>
+              </a:defRPr>
+            </a:pPr>
+            <a:r>
+              <a:t>[שומר מקום: תמונה שנייה - זיהוי אובייקטים]</a:t>
+            </a:r>
+          </a:p>
+        </p:txBody>
+      </p:sp>
+    </p:spTree>
+  </p:cSld>
+  <p:clrMapOvr>
+    <a:masterClrMapping/>
+  </p:clrMapOvr>
+</p:sld>
+</file>
+
+<file path=ppt/slides/slide29.xml><?xml version="1.0" encoding="utf-8"?>
+<p:sld xmlns:a="http://schemas.openxmlformats.org/drawingml/2006/main" xmlns:p="http://schemas.openxmlformats.org/presentationml/2006/main" xmlns:r="http://schemas.openxmlformats.org/officeDocument/2006/relationships">
+  <p:cSld>
+    <p:spTree>
+      <p:nvGrpSpPr>
+        <p:cNvPr id="1" name=""/>
+        <p:cNvGrpSpPr/>
+        <p:nvPr/>
+      </p:nvGrpSpPr>
+      <p:grpSpPr/>
+      <p:sp>
+        <p:nvSpPr>
+          <p:cNvPr id="2" name="Title 1"/>
+          <p:cNvSpPr>
+            <a:spLocks noGrp="1"/>
+          </p:cNvSpPr>
+          <p:nvPr>
+            <p:ph type="title"/>
+          </p:nvPr>
+        </p:nvSpPr>
+        <p:spPr/>
+        <p:txBody>
+          <a:bodyPr/>
+          <a:lstStyle/>
+          <a:p>
+            <a:pPr rtl="1" algn="ctr"/>
+            <a:r>
+              <a:t>ארכיטקטורה עתידית: חלוקת עבודה Hardware/Software</a:t>
+            </a:r>
+          </a:p>
+        </p:txBody>
+      </p:sp>
+      <p:sp>
+        <p:nvSpPr>
+          <p:cNvPr id="3" name="TextBox 2"/>
+          <p:cNvSpPr txBox="1"/>
+          <p:nvPr/>
+        </p:nvSpPr>
+        <p:spPr>
+          <a:xfrm>
+            <a:off x="457200" y="1188720"/>
+            <a:ext cx="8229600" cy="4572000"/>
+          </a:xfrm>
+          <a:prstGeom prst="rect">
+            <a:avLst/>
+          </a:prstGeom>
+          <a:noFill/>
+        </p:spPr>
+        <p:txBody>
+          <a:bodyPr wrap="none">
+            <a:spAutoFit/>
+          </a:bodyPr>
+          <a:lstStyle/>
+          <a:p/>
+          <a:p>
+            <a:pPr algn="r" rtl="1">
+              <a:defRPr sz="1600"/>
+            </a:pPr>
+            <a:r>
+              <a:t>• שילוב מעבד רך (Soft-Core Processor): הטמעת מעבד **MicroBlaze** בתוך ה-Artix-7 FPGA.</a:t>
+            </a:r>
+          </a:p>
+          <a:p>
+            <a:pPr algn="r" rtl="1">
+              <a:defRPr sz="1600"/>
+            </a:pPr>
+            <a:r>
+              <a:t>• חלוקת תפקידים חכמה:</a:t>
+            </a:r>
+          </a:p>
+          <a:p>
+            <a:pPr algn="r" rtl="1">
+              <a:defRPr sz="1600"/>
+            </a:pPr>
+            <a:r>
+              <a:t>   - **חומרה (Fabric):** ניהול קליטת המצלמה (OV7670), זיכרון ה-BRAM, ובקר ה-VGA בזמן אמת ובמקביליות מלאה.</a:t>
+            </a:r>
+          </a:p>
+          <a:p>
+            <a:pPr algn="r" rtl="1">
+              <a:defRPr sz="1600"/>
+            </a:pPr>
+            <a:r>
+              <a:t>   - **תוכנה (MicroBlaze):** הרצת מודל הסקת ה-AI על הפריימים שנדגמו וקבלת ההחלטה הקריטית.</a:t>
+            </a:r>
+          </a:p>
+          <a:p>
+            <a:pPr algn="r" rtl="1">
+              <a:defRPr sz="1600"/>
+            </a:pPr>
+            <a:r>
+              <a:t>• יתרון מרכזי: שמירה על ביצועי חומרה קשיחים (Real-Time) לצד גמישות אלגוריתמית גבוהה.</a:t>
+            </a:r>
+          </a:p>
+        </p:txBody>
+      </p:sp>
     </p:spTree>
   </p:cSld>
   <p:clrMapOvr>

--- a/docs/presentation/output/VGA_Presentation_Yossi.pptx
+++ b/docs/presentation/output/VGA_Presentation_Yossi.pptx
@@ -6958,81 +6958,35 @@
               <a:defRPr sz="1600"/>
             </a:pPr>
             <a:r>
-              <a:t>• המטרה: לשלב בעתיד מודлли זיהוי דומים ישירות בתוך ארכיטקטורת החומרה של ה-FPGA.</a:t>
-            </a:r>
-          </a:p>
-        </p:txBody>
-      </p:sp>
-      <p:sp>
-        <p:nvSpPr>
-          <p:cNvPr id="4" name="TextBox 3"/>
-          <p:cNvSpPr txBox="1"/>
+              <a:t>• המטרה: לשלב בעתיד מודלי זיהוי דומים ישירות בתוך ארכיטקטורת החומרה של ה-FPGA.</a:t>
+            </a:r>
+          </a:p>
+        </p:txBody>
+      </p:sp>
+      <p:pic>
+        <p:nvPicPr>
+          <p:cNvPr id="4" name="Picture 3" descr="rp_fall.png"/>
+          <p:cNvPicPr>
+            <a:picLocks noChangeAspect="1"/>
+          </p:cNvPicPr>
           <p:nvPr/>
-        </p:nvSpPr>
-        <p:spPr>
-          <a:xfrm>
-            <a:off x="914400" y="2560320"/>
-            <a:ext cx="3840480" cy="3657600"/>
+        </p:nvPicPr>
+        <p:blipFill>
+          <a:blip r:embed="rId2"/>
+          <a:stretch>
+            <a:fillRect/>
+          </a:stretch>
+        </p:blipFill>
+        <p:spPr>
+          <a:xfrm>
+            <a:off x="2926080" y="2560320"/>
+            <a:ext cx="3474720" cy="3814848"/>
           </a:xfrm>
           <a:prstGeom prst="rect">
             <a:avLst/>
           </a:prstGeom>
-          <a:noFill/>
-        </p:spPr>
-        <p:txBody>
-          <a:bodyPr wrap="none">
-            <a:spAutoFit/>
-          </a:bodyPr>
-          <a:lstStyle/>
-          <a:p>
-            <a:pPr algn="ctr">
-              <a:defRPr sz="1400">
-                <a:solidFill>
-                  <a:srgbClr val="0070C0"/>
-                </a:solidFill>
-              </a:defRPr>
-            </a:pPr>
-            <a:r>
-              <a:t>[שומר מקום: תמונת זיהוי AI - רסברי פאי]</a:t>
-            </a:r>
-          </a:p>
-        </p:txBody>
-      </p:sp>
-      <p:sp>
-        <p:nvSpPr>
-          <p:cNvPr id="5" name="TextBox 4"/>
-          <p:cNvSpPr txBox="1"/>
-          <p:nvPr/>
-        </p:nvSpPr>
-        <p:spPr>
-          <a:xfrm>
-            <a:off x="5029200" y="2560320"/>
-            <a:ext cx="3840480" cy="3657600"/>
-          </a:xfrm>
-          <a:prstGeom prst="rect">
-            <a:avLst/>
-          </a:prstGeom>
-          <a:noFill/>
-        </p:spPr>
-        <p:txBody>
-          <a:bodyPr wrap="none">
-            <a:spAutoFit/>
-          </a:bodyPr>
-          <a:lstStyle/>
-          <a:p>
-            <a:pPr algn="ctr">
-              <a:defRPr sz="1400">
-                <a:solidFill>
-                  <a:srgbClr val="0070C0"/>
-                </a:solidFill>
-              </a:defRPr>
-            </a:pPr>
-            <a:r>
-              <a:t>[שומר מקום: תמונה שנייה - זיהוי אובייקטים]</a:t>
-            </a:r>
-          </a:p>
-        </p:txBody>
-      </p:sp>
+        </p:spPr>
+      </p:pic>
     </p:spTree>
   </p:cSld>
   <p:clrMapOvr>
